--- a/docs/distributed/demo-overview-short.pptx
+++ b/docs/distributed/demo-overview-short.pptx
@@ -3761,7 +3761,7 @@
                 <a:ea typeface="Malgun Gothic" pitchFamily="34" charset="-122"/>
                 <a:cs typeface="Malgun Gothic" pitchFamily="34" charset="-120"/>
               </a:rPr>
-              <a:t>원래 Alpamayo open-loop 테스트 환경과의 비교</a:t>
+              <a:t>공식 Alpamayo open-loop 테스트 환경과의 비교</a:t>
             </a:r>
             <a:endParaRPr lang="en-US" sz="2800" dirty="0"/>
           </a:p>
@@ -3800,7 +3800,7 @@
                 <a:ea typeface="Malgun Gothic" pitchFamily="34" charset="-122"/>
                 <a:cs typeface="Malgun Gothic" pitchFamily="34" charset="-120"/>
               </a:rPr>
-              <a:t>같은 모델(Alpamayo 1.5)을 '녹화 재생·평가'에서 '실시간 주행·물리 분리'로 옮겼다</a:t>
+              <a:t>같은 모델(Alpamayo 1.5)을 '공식 노트북의 녹화 클립 재생·평가'에서 '실시간 주행·물리 분리'로 옮겼다</a:t>
             </a:r>
             <a:endParaRPr lang="en-US" sz="1400" dirty="0"/>
           </a:p>
@@ -3997,7 +3997,7 @@
                           <a:ea typeface="Malgun Gothic" pitchFamily="34" charset="-122"/>
                           <a:cs typeface="Malgun Gothic" pitchFamily="34" charset="-120"/>
                         </a:rPr>
-                        <a:t>원래 Alpamayo open-loop 테스트</a:t>
+                        <a:t>공식 Alpamayo open-loop 테스트 (NVIDIA 노트북)</a:t>
                       </a:r>
                       <a:endParaRPr lang="en-US" sz="1150" dirty="0">
                         <a:latin typeface="Malgun Gothic" charset="0"/>
@@ -4203,7 +4203,7 @@
                           <a:ea typeface="Malgun Gothic" pitchFamily="34" charset="-122"/>
                           <a:cs typeface="Malgun Gothic" pitchFamily="34" charset="-120"/>
                         </a:rPr>
-                        <a:t>녹화된 주행 클립(공식 노트북 데이터, CARLA 녹화 데이터) 재생</a:t>
+                        <a:t>PhysicalAI-AV 실차 데이터셋 클립 1개 (Hugging Face 스트리밍) 재생</a:t>
                       </a:r>
                       <a:endParaRPr lang="en-US" sz="1150" dirty="0">
                         <a:latin typeface="Malgun Gothic" charset="0"/>
@@ -4409,7 +4409,7 @@
                           <a:ea typeface="Malgun Gothic" pitchFamily="34" charset="-122"/>
                           <a:cs typeface="Malgun Gothic" pitchFamily="34" charset="-120"/>
                         </a:rPr>
-                        <a:t>없음. 모델 예측은 그림·지표로만 확인</a:t>
+                        <a:t>없음. 예측 궤적을 그림·지표로만 확인</a:t>
                       </a:r>
                       <a:endParaRPr lang="en-US" sz="1150" dirty="0">
                         <a:latin typeface="Malgun Gothic" charset="0"/>
@@ -4615,7 +4615,7 @@
                           <a:ea typeface="Malgun Gothic" pitchFamily="34" charset="-122"/>
                           <a:cs typeface="Malgun Gothic" pitchFamily="34" charset="-120"/>
                         </a:rPr>
-                        <a:t>예측 궤적 vs 실제 궤적 오차(ADE/FDE), 영상 오버레이</a:t>
+                        <a:t>예측 vs 실제 궤적 minADE, CoC 문장, 궤적 그림</a:t>
                       </a:r>
                       <a:endParaRPr lang="en-US" sz="1150" dirty="0">
                         <a:latin typeface="Malgun Gothic" charset="0"/>
@@ -4821,7 +4821,7 @@
                           <a:ea typeface="Malgun Gothic" pitchFamily="34" charset="-122"/>
                           <a:cs typeface="Malgun Gothic" pitchFamily="34" charset="-120"/>
                         </a:rPr>
-                        <a:t>GPU 1대에 모델 (노트북 실행)</a:t>
+                        <a:t>GPU 1대에서 노트북 실행 (bf16 약 24 GB)</a:t>
                       </a:r>
                       <a:endParaRPr lang="en-US" sz="1150" dirty="0">
                         <a:latin typeface="Malgun Gothic" charset="0"/>

--- a/docs/distributed/demo-overview-short.pptx
+++ b/docs/distributed/demo-overview-short.pptx
@@ -11,9 +11,10 @@
     <p:sldId id="259" r:id="rId5"/>
     <p:sldId id="260" r:id="rId6"/>
     <p:sldId id="261" r:id="rId7"/>
+    <p:sldId id="262" r:id="rId8"/>
   </p:sldIdLst>
   <p:notesMasterIdLst>
-    <p:notesMasterId r:id="rId8"/>
+    <p:notesMasterId r:id="rId9"/>
   </p:notesMasterIdLst>
   <p:sldSz cx="12192000" cy="6858000"/>
   <p:notesSz cx="6858000" cy="12192000"/>
@@ -971,6 +972,94 @@
             <a:fld id="{F7021451-1387-4CA6-816F-3879F97B5CBC}" type="slidenum">
               <a:rPr lang="en-US"/>
               <a:t>6</a:t>
+            </a:fld>
+            <a:endParaRPr lang="en-US"/>
+          </a:p>
+        </p:txBody>
+      </p:sp>
+    </p:spTree>
+    <p:extLst>
+      <p:ext uri="{BB962C8B-B14F-4D97-AF65-F5344CB8AC3E}">
+        <p14:creationId xmlns:p14="http://schemas.microsoft.com/office/powerpoint/2010/main" val="1024086991"/>
+      </p:ext>
+    </p:extLst>
+  </p:cSld>
+  <p:clrMapOvr>
+    <a:masterClrMapping/>
+  </p:clrMapOvr>
+</p:notes>
+</file>
+
+<file path=ppt/notesSlides/notesSlide7.xml><?xml version="1.0" encoding="utf-8"?>
+<p:notes xmlns:a="http://schemas.openxmlformats.org/drawingml/2006/main" xmlns:r="http://schemas.openxmlformats.org/officeDocument/2006/relationships" xmlns:p="http://schemas.openxmlformats.org/presentationml/2006/main">
+  <p:cSld>
+    <p:spTree>
+      <p:nvGrpSpPr>
+        <p:cNvPr id="1" name=""/>
+        <p:cNvGrpSpPr/>
+        <p:nvPr/>
+      </p:nvGrpSpPr>
+      <p:grpSpPr>
+        <a:xfrm>
+          <a:off x="0" y="0"/>
+          <a:ext cx="0" cy="0"/>
+          <a:chOff x="0" y="0"/>
+          <a:chExt cx="0" cy="0"/>
+        </a:xfrm>
+      </p:grpSpPr>
+      <p:sp>
+        <p:nvSpPr>
+          <p:cNvPr id="2" name="Slide Image Placeholder 1"/>
+          <p:cNvSpPr>
+            <a:spLocks noGrp="1" noRot="1" noChangeAspect="1"/>
+          </p:cNvSpPr>
+          <p:nvPr>
+            <p:ph type="sldImg"/>
+          </p:nvPr>
+        </p:nvSpPr>
+        <p:spPr/>
+      </p:sp>
+      <p:sp>
+        <p:nvSpPr>
+          <p:cNvPr id="3" name="Notes Placeholder 2"/>
+          <p:cNvSpPr>
+            <a:spLocks noGrp="1"/>
+          </p:cNvSpPr>
+          <p:nvPr>
+            <p:ph type="body" idx="1"/>
+          </p:nvPr>
+        </p:nvSpPr>
+        <p:spPr/>
+        <p:txBody>
+          <a:bodyPr/>
+          <a:lstStyle/>
+          <a:p>
+            <a:r>
+              <a:rPr lang="en-US" dirty="0"/>
+              <a:t/>
+            </a:r>
+            <a:endParaRPr lang="en-US" dirty="0"/>
+          </a:p>
+        </p:txBody>
+      </p:sp>
+      <p:sp>
+        <p:nvSpPr>
+          <p:cNvPr id="4" name="Slide Number Placeholder 3"/>
+          <p:cNvSpPr>
+            <a:spLocks noGrp="1"/>
+          </p:cNvSpPr>
+          <p:nvPr>
+            <p:ph type="sldNum" sz="quarter" idx="10"/>
+          </p:nvPr>
+        </p:nvSpPr>
+        <p:spPr/>
+        <p:txBody>
+          <a:bodyPr/>
+          <a:lstStyle/>
+          <a:p>
+            <a:fld id="{F7021451-1387-4CA6-816F-3879F97B5CBC}" type="slidenum">
+              <a:rPr lang="en-US"/>
+              <a:t>7</a:t>
             </a:fld>
             <a:endParaRPr lang="en-US"/>
           </a:p>
@@ -1698,7 +1787,7 @@
                 <a:ea typeface="Malgun Gothic" pitchFamily="34" charset="-122"/>
                 <a:cs typeface="Malgun Gothic" pitchFamily="34" charset="-120"/>
               </a:rPr>
-              <a:t>데모 시스템 구성: 두 인스턴스로 나눈 closed-loop</a:t>
+              <a:t>데모 시스템 구성: 두 인스턴스의 스택</a:t>
             </a:r>
             <a:endParaRPr lang="en-US" sz="2800" dirty="0"/>
           </a:p>
@@ -1737,7 +1826,7 @@
                 <a:ea typeface="Malgun Gothic" pitchFamily="34" charset="-122"/>
                 <a:cs typeface="Malgun Gothic" pitchFamily="34" charset="-120"/>
               </a:rPr>
-              <a:t>CARLA(x86 전용)와 Alpamayo 추론(대용량 VRAM GPU)을 서로 다른 AWS 인스턴스에 두고 TCP(gRPC)로 연결</a:t>
+              <a:t>아래부터 AWS 인스턴스 → OS·드라이버 → 런타임 → 모델 → 실행 프로세스. 두 호스트는 맨 위 프로세스끼리만 TCP(gRPC)로 연결된다</a:t>
             </a:r>
             <a:endParaRPr lang="en-US" sz="1400" dirty="0"/>
           </a:p>
@@ -1823,129 +1912,771 @@
       </p:sp>
       <p:sp>
         <p:nvSpPr>
-          <p:cNvPr id="6" name="Shape 4"/>
+          <p:cNvPr id="6" name="Text 4"/>
+          <p:cNvSpPr txBox="1"/>
+          <p:nvPr/>
+        </p:nvSpPr>
+        <p:spPr>
+          <a:xfrm>
+            <a:off x="1691640" y="1399032"/>
+            <a:ext cx="4449928" cy="329184"/>
+          </a:xfrm>
+          <a:prstGeom prst="rect">
+            <a:avLst/>
+          </a:prstGeom>
+          <a:noFill/>
+          <a:ln/>
+        </p:spPr>
+        <p:txBody>
+          <a:bodyPr wrap="square" lIns="0" tIns="0" rIns="0" bIns="0" rtlCol="0" anchor="ctr"/>
+          <a:lstStyle/>
+          <a:p>
+            <a:pPr algn="ctr" indent="0" marL="0">
+              <a:buNone/>
+            </a:pPr>
+            <a:r>
+              <a:rPr lang="en-US" sz="1400" b="1" dirty="0">
+                <a:solidFill>
+                  <a:srgbClr val="2A6FDB"/>
+                </a:solidFill>
+                <a:latin typeface="Malgun Gothic" pitchFamily="34" charset="0"/>
+                <a:ea typeface="Malgun Gothic" pitchFamily="34" charset="-122"/>
+                <a:cs typeface="Malgun Gothic" pitchFamily="34" charset="-120"/>
+              </a:rPr>
+              <a:t>A. 시뮬레이터 호스트 (x86 필수)</a:t>
+            </a:r>
+            <a:endParaRPr lang="en-US" sz="1400" dirty="0"/>
+          </a:p>
+        </p:txBody>
+      </p:sp>
+      <p:sp>
+        <p:nvSpPr>
+          <p:cNvPr id="7" name="Text 5"/>
+          <p:cNvSpPr txBox="1"/>
+          <p:nvPr/>
+        </p:nvSpPr>
+        <p:spPr>
+          <a:xfrm>
+            <a:off x="7193128" y="1399032"/>
+            <a:ext cx="4449928" cy="329184"/>
+          </a:xfrm>
+          <a:prstGeom prst="rect">
+            <a:avLst/>
+          </a:prstGeom>
+          <a:noFill/>
+          <a:ln/>
+        </p:spPr>
+        <p:txBody>
+          <a:bodyPr wrap="square" lIns="0" tIns="0" rIns="0" bIns="0" rtlCol="0" anchor="ctr"/>
+          <a:lstStyle/>
+          <a:p>
+            <a:pPr algn="ctr" indent="0" marL="0">
+              <a:buNone/>
+            </a:pPr>
+            <a:r>
+              <a:rPr lang="en-US" sz="1400" b="1" dirty="0">
+                <a:solidFill>
+                  <a:srgbClr val="E0762B"/>
+                </a:solidFill>
+                <a:latin typeface="Malgun Gothic" pitchFamily="34" charset="0"/>
+                <a:ea typeface="Malgun Gothic" pitchFamily="34" charset="-122"/>
+                <a:cs typeface="Malgun Gothic" pitchFamily="34" charset="-120"/>
+              </a:rPr>
+              <a:t>B. 추론 호스트 (GPU: x86 또는 ARM)</a:t>
+            </a:r>
+            <a:endParaRPr lang="en-US" sz="1400" dirty="0"/>
+          </a:p>
+        </p:txBody>
+      </p:sp>
+      <p:sp>
+        <p:nvSpPr>
+          <p:cNvPr id="8" name="Text 6"/>
+          <p:cNvSpPr txBox="1"/>
+          <p:nvPr/>
+        </p:nvSpPr>
+        <p:spPr>
+          <a:xfrm>
+            <a:off x="548640" y="1783080"/>
+            <a:ext cx="1005840" cy="1097280"/>
+          </a:xfrm>
+          <a:prstGeom prst="rect">
+            <a:avLst/>
+          </a:prstGeom>
+          <a:noFill/>
+          <a:ln/>
+        </p:spPr>
+        <p:txBody>
+          <a:bodyPr wrap="square" lIns="0" tIns="0" rIns="0" bIns="0" rtlCol="0" anchor="ctr"/>
+          <a:lstStyle/>
+          <a:p>
+            <a:pPr algn="r" indent="0" marL="0">
+              <a:buNone/>
+            </a:pPr>
+            <a:r>
+              <a:rPr lang="en-US" sz="1050" b="1" dirty="0">
+                <a:solidFill>
+                  <a:srgbClr val="6B7A8C"/>
+                </a:solidFill>
+                <a:latin typeface="Malgun Gothic" pitchFamily="34" charset="0"/>
+                <a:ea typeface="Malgun Gothic" pitchFamily="34" charset="-122"/>
+                <a:cs typeface="Malgun Gothic" pitchFamily="34" charset="-120"/>
+              </a:rPr>
+              <a:t>실행</a:t>
+            </a:r>
+            <a:endParaRPr lang="en-US" sz="1050" dirty="0"/>
+          </a:p>
+          <a:p>
+            <a:pPr algn="r" indent="0" marL="0">
+              <a:buNone/>
+            </a:pPr>
+            <a:r>
+              <a:rPr lang="en-US" sz="1050" b="1" dirty="0">
+                <a:solidFill>
+                  <a:srgbClr val="6B7A8C"/>
+                </a:solidFill>
+                <a:latin typeface="Malgun Gothic" pitchFamily="34" charset="0"/>
+                <a:ea typeface="Malgun Gothic" pitchFamily="34" charset="-122"/>
+                <a:cs typeface="Malgun Gothic" pitchFamily="34" charset="-120"/>
+              </a:rPr>
+              <a:t>(프로세스)</a:t>
+            </a:r>
+            <a:endParaRPr lang="en-US" sz="1050" dirty="0"/>
+          </a:p>
+        </p:txBody>
+      </p:sp>
+      <p:sp>
+        <p:nvSpPr>
+          <p:cNvPr id="9" name="Text 7"/>
+          <p:cNvSpPr txBox="1"/>
+          <p:nvPr/>
+        </p:nvSpPr>
+        <p:spPr>
+          <a:xfrm>
+            <a:off x="548640" y="2953512"/>
+            <a:ext cx="1005840" cy="566928"/>
+          </a:xfrm>
+          <a:prstGeom prst="rect">
+            <a:avLst/>
+          </a:prstGeom>
+          <a:noFill/>
+          <a:ln/>
+        </p:spPr>
+        <p:txBody>
+          <a:bodyPr wrap="square" lIns="0" tIns="0" rIns="0" bIns="0" rtlCol="0" anchor="ctr"/>
+          <a:lstStyle/>
+          <a:p>
+            <a:pPr algn="r" indent="0" marL="0">
+              <a:buNone/>
+            </a:pPr>
+            <a:r>
+              <a:rPr lang="en-US" sz="1050" b="1" dirty="0">
+                <a:solidFill>
+                  <a:srgbClr val="6B7A8C"/>
+                </a:solidFill>
+                <a:latin typeface="Malgun Gothic" pitchFamily="34" charset="0"/>
+                <a:ea typeface="Malgun Gothic" pitchFamily="34" charset="-122"/>
+                <a:cs typeface="Malgun Gothic" pitchFamily="34" charset="-120"/>
+              </a:rPr>
+              <a:t>모델</a:t>
+            </a:r>
+            <a:endParaRPr lang="en-US" sz="1050" dirty="0"/>
+          </a:p>
+        </p:txBody>
+      </p:sp>
+      <p:sp>
+        <p:nvSpPr>
+          <p:cNvPr id="10" name="Text 8"/>
+          <p:cNvSpPr txBox="1"/>
+          <p:nvPr/>
+        </p:nvSpPr>
+        <p:spPr>
+          <a:xfrm>
+            <a:off x="548640" y="3593592"/>
+            <a:ext cx="1005840" cy="868680"/>
+          </a:xfrm>
+          <a:prstGeom prst="rect">
+            <a:avLst/>
+          </a:prstGeom>
+          <a:noFill/>
+          <a:ln/>
+        </p:spPr>
+        <p:txBody>
+          <a:bodyPr wrap="square" lIns="0" tIns="0" rIns="0" bIns="0" rtlCol="0" anchor="ctr"/>
+          <a:lstStyle/>
+          <a:p>
+            <a:pPr algn="r" indent="0" marL="0">
+              <a:buNone/>
+            </a:pPr>
+            <a:r>
+              <a:rPr lang="en-US" sz="1050" b="1" dirty="0">
+                <a:solidFill>
+                  <a:srgbClr val="6B7A8C"/>
+                </a:solidFill>
+                <a:latin typeface="Malgun Gothic" pitchFamily="34" charset="0"/>
+                <a:ea typeface="Malgun Gothic" pitchFamily="34" charset="-122"/>
+                <a:cs typeface="Malgun Gothic" pitchFamily="34" charset="-120"/>
+              </a:rPr>
+              <a:t>런타임 ·</a:t>
+            </a:r>
+            <a:endParaRPr lang="en-US" sz="1050" dirty="0"/>
+          </a:p>
+          <a:p>
+            <a:pPr algn="r" indent="0" marL="0">
+              <a:buNone/>
+            </a:pPr>
+            <a:r>
+              <a:rPr lang="en-US" sz="1050" b="1" dirty="0">
+                <a:solidFill>
+                  <a:srgbClr val="6B7A8C"/>
+                </a:solidFill>
+                <a:latin typeface="Malgun Gothic" pitchFamily="34" charset="0"/>
+                <a:ea typeface="Malgun Gothic" pitchFamily="34" charset="-122"/>
+                <a:cs typeface="Malgun Gothic" pitchFamily="34" charset="-120"/>
+              </a:rPr>
+              <a:t>라이브러리</a:t>
+            </a:r>
+            <a:endParaRPr lang="en-US" sz="1050" dirty="0"/>
+          </a:p>
+        </p:txBody>
+      </p:sp>
+      <p:sp>
+        <p:nvSpPr>
+          <p:cNvPr id="11" name="Text 9"/>
+          <p:cNvSpPr txBox="1"/>
+          <p:nvPr/>
+        </p:nvSpPr>
+        <p:spPr>
+          <a:xfrm>
+            <a:off x="548640" y="4535424"/>
+            <a:ext cx="1005840" cy="548640"/>
+          </a:xfrm>
+          <a:prstGeom prst="rect">
+            <a:avLst/>
+          </a:prstGeom>
+          <a:noFill/>
+          <a:ln/>
+        </p:spPr>
+        <p:txBody>
+          <a:bodyPr wrap="square" lIns="0" tIns="0" rIns="0" bIns="0" rtlCol="0" anchor="ctr"/>
+          <a:lstStyle/>
+          <a:p>
+            <a:pPr algn="r" indent="0" marL="0">
+              <a:buNone/>
+            </a:pPr>
+            <a:r>
+              <a:rPr lang="en-US" sz="1050" b="1" dirty="0">
+                <a:solidFill>
+                  <a:srgbClr val="6B7A8C"/>
+                </a:solidFill>
+                <a:latin typeface="Malgun Gothic" pitchFamily="34" charset="0"/>
+                <a:ea typeface="Malgun Gothic" pitchFamily="34" charset="-122"/>
+                <a:cs typeface="Malgun Gothic" pitchFamily="34" charset="-120"/>
+              </a:rPr>
+              <a:t>OS · 드라이버</a:t>
+            </a:r>
+            <a:endParaRPr lang="en-US" sz="1050" dirty="0"/>
+          </a:p>
+        </p:txBody>
+      </p:sp>
+      <p:sp>
+        <p:nvSpPr>
+          <p:cNvPr id="12" name="Text 10"/>
+          <p:cNvSpPr txBox="1"/>
+          <p:nvPr/>
+        </p:nvSpPr>
+        <p:spPr>
+          <a:xfrm>
+            <a:off x="548640" y="5157216"/>
+            <a:ext cx="1005840" cy="658368"/>
+          </a:xfrm>
+          <a:prstGeom prst="rect">
+            <a:avLst/>
+          </a:prstGeom>
+          <a:noFill/>
+          <a:ln/>
+        </p:spPr>
+        <p:txBody>
+          <a:bodyPr wrap="square" lIns="0" tIns="0" rIns="0" bIns="0" rtlCol="0" anchor="ctr"/>
+          <a:lstStyle/>
+          <a:p>
+            <a:pPr algn="r" indent="0" marL="0">
+              <a:buNone/>
+            </a:pPr>
+            <a:r>
+              <a:rPr lang="en-US" sz="1050" b="1" dirty="0">
+                <a:solidFill>
+                  <a:srgbClr val="6B7A8C"/>
+                </a:solidFill>
+                <a:latin typeface="Malgun Gothic" pitchFamily="34" charset="0"/>
+                <a:ea typeface="Malgun Gothic" pitchFamily="34" charset="-122"/>
+                <a:cs typeface="Malgun Gothic" pitchFamily="34" charset="-120"/>
+              </a:rPr>
+              <a:t>AWS 인스턴스</a:t>
+            </a:r>
+            <a:endParaRPr lang="en-US" sz="1050" dirty="0"/>
+          </a:p>
+        </p:txBody>
+      </p:sp>
+      <p:sp>
+        <p:nvSpPr>
+          <p:cNvPr id="13" name="Shape 11"/>
           <p:cNvSpPr/>
           <p:nvPr/>
         </p:nvSpPr>
         <p:spPr>
           <a:xfrm>
-            <a:off x="548640" y="1371600"/>
-            <a:ext cx="4069080" cy="3017520"/>
-          </a:xfrm>
-          <a:prstGeom prst="roundRect">
-            <a:avLst>
-              <a:gd name="adj" fmla="val 3030"/>
-            </a:avLst>
+            <a:off x="1691640" y="5157216"/>
+            <a:ext cx="4449928" cy="658368"/>
+          </a:xfrm>
+          <a:prstGeom prst="rect">
+            <a:avLst/>
           </a:prstGeom>
           <a:solidFill>
             <a:srgbClr val="E8F0FC"/>
           </a:solidFill>
+          <a:ln w="12700">
+            <a:solidFill>
+              <a:srgbClr val="2A6FDB"/>
+            </a:solidFill>
+            <a:prstDash val="solid"/>
+          </a:ln>
+        </p:spPr>
+      </p:sp>
+      <p:sp>
+        <p:nvSpPr>
+          <p:cNvPr id="14" name="Text 12"/>
+          <p:cNvSpPr txBox="1"/>
+          <p:nvPr/>
+        </p:nvSpPr>
+        <p:spPr>
+          <a:xfrm>
+            <a:off x="1828800" y="5157216"/>
+            <a:ext cx="4175608" cy="658368"/>
+          </a:xfrm>
+          <a:prstGeom prst="rect">
+            <a:avLst/>
+          </a:prstGeom>
+          <a:noFill/>
+          <a:ln/>
+        </p:spPr>
+        <p:txBody>
+          <a:bodyPr wrap="square" lIns="0" tIns="0" rIns="0" bIns="0" rtlCol="0" anchor="ctr"/>
+          <a:lstStyle/>
+          <a:p>
+            <a:pPr algn="ctr" indent="0" marL="0">
+              <a:buNone/>
+            </a:pPr>
+            <a:r>
+              <a:rPr lang="en-US" sz="1000" dirty="0">
+                <a:solidFill>
+                  <a:srgbClr val="24313F"/>
+                </a:solidFill>
+                <a:latin typeface="Malgun Gothic" pitchFamily="34" charset="0"/>
+                <a:ea typeface="Malgun Gothic" pitchFamily="34" charset="-122"/>
+                <a:cs typeface="Malgun Gothic" pitchFamily="34" charset="-120"/>
+              </a:rPr>
+              <a:t>g5.2xlarge  ·  x86_64, 8 vCPU, 32 GB RAM  ·  NVIDIA A10G 24 GB</a:t>
+            </a:r>
+            <a:endParaRPr lang="en-US" sz="1000" dirty="0"/>
+          </a:p>
+          <a:p>
+            <a:pPr algn="ctr" indent="0" marL="0">
+              <a:buNone/>
+            </a:pPr>
+            <a:r>
+              <a:rPr lang="en-US" sz="1000" dirty="0">
+                <a:solidFill>
+                  <a:srgbClr val="24313F"/>
+                </a:solidFill>
+                <a:latin typeface="Malgun Gothic" pitchFamily="34" charset="0"/>
+                <a:ea typeface="Malgun Gothic" pitchFamily="34" charset="-122"/>
+                <a:cs typeface="Malgun Gothic" pitchFamily="34" charset="-120"/>
+              </a:rPr>
+              <a:t>172.31.38.219  ·  보안그룹: VPC 내부 허용</a:t>
+            </a:r>
+            <a:endParaRPr lang="en-US" sz="1000" dirty="0"/>
+          </a:p>
+        </p:txBody>
+      </p:sp>
+      <p:sp>
+        <p:nvSpPr>
+          <p:cNvPr id="15" name="Shape 13"/>
+          <p:cNvSpPr/>
+          <p:nvPr/>
+        </p:nvSpPr>
+        <p:spPr>
+          <a:xfrm>
+            <a:off x="1691640" y="4535424"/>
+            <a:ext cx="4449928" cy="548640"/>
+          </a:xfrm>
+          <a:prstGeom prst="rect">
+            <a:avLst/>
+          </a:prstGeom>
+          <a:solidFill>
+            <a:srgbClr val="E8F0FC"/>
+          </a:solidFill>
+          <a:ln w="12700">
+            <a:solidFill>
+              <a:srgbClr val="2A6FDB"/>
+            </a:solidFill>
+            <a:prstDash val="solid"/>
+          </a:ln>
+        </p:spPr>
+      </p:sp>
+      <p:sp>
+        <p:nvSpPr>
+          <p:cNvPr id="16" name="Text 14"/>
+          <p:cNvSpPr txBox="1"/>
+          <p:nvPr/>
+        </p:nvSpPr>
+        <p:spPr>
+          <a:xfrm>
+            <a:off x="1828800" y="4535424"/>
+            <a:ext cx="4175608" cy="548640"/>
+          </a:xfrm>
+          <a:prstGeom prst="rect">
+            <a:avLst/>
+          </a:prstGeom>
+          <a:noFill/>
+          <a:ln/>
+        </p:spPr>
+        <p:txBody>
+          <a:bodyPr wrap="square" lIns="0" tIns="0" rIns="0" bIns="0" rtlCol="0" anchor="ctr"/>
+          <a:lstStyle/>
+          <a:p>
+            <a:pPr algn="ctr" indent="0" marL="0">
+              <a:buNone/>
+            </a:pPr>
+            <a:r>
+              <a:rPr lang="en-US" sz="1000" dirty="0">
+                <a:solidFill>
+                  <a:srgbClr val="24313F"/>
+                </a:solidFill>
+                <a:latin typeface="Malgun Gothic" pitchFamily="34" charset="0"/>
+                <a:ea typeface="Malgun Gothic" pitchFamily="34" charset="-122"/>
+                <a:cs typeface="Malgun Gothic" pitchFamily="34" charset="-120"/>
+              </a:rPr>
+              <a:t>Ubuntu 22.04  ·  NVIDIA 드라이버 + Vulkan (CARLA 렌더링)  ·  NICE DCV 서버 :8443</a:t>
+            </a:r>
+            <a:endParaRPr lang="en-US" sz="1000" dirty="0"/>
+          </a:p>
+        </p:txBody>
+      </p:sp>
+      <p:sp>
+        <p:nvSpPr>
+          <p:cNvPr id="17" name="Shape 15"/>
+          <p:cNvSpPr/>
+          <p:nvPr/>
+        </p:nvSpPr>
+        <p:spPr>
+          <a:xfrm>
+            <a:off x="1691640" y="3593592"/>
+            <a:ext cx="4449928" cy="868680"/>
+          </a:xfrm>
+          <a:prstGeom prst="rect">
+            <a:avLst/>
+          </a:prstGeom>
+          <a:solidFill>
+            <a:srgbClr val="E8F0FC"/>
+          </a:solidFill>
+          <a:ln w="12700">
+            <a:solidFill>
+              <a:srgbClr val="2A6FDB"/>
+            </a:solidFill>
+            <a:prstDash val="solid"/>
+          </a:ln>
+        </p:spPr>
+      </p:sp>
+      <p:sp>
+        <p:nvSpPr>
+          <p:cNvPr id="18" name="Text 16"/>
+          <p:cNvSpPr txBox="1"/>
+          <p:nvPr/>
+        </p:nvSpPr>
+        <p:spPr>
+          <a:xfrm>
+            <a:off x="1828800" y="3593592"/>
+            <a:ext cx="4175608" cy="868680"/>
+          </a:xfrm>
+          <a:prstGeom prst="rect">
+            <a:avLst/>
+          </a:prstGeom>
+          <a:noFill/>
+          <a:ln/>
+        </p:spPr>
+        <p:txBody>
+          <a:bodyPr wrap="square" lIns="0" tIns="0" rIns="0" bIns="0" rtlCol="0" anchor="ctr"/>
+          <a:lstStyle/>
+          <a:p>
+            <a:pPr algn="ctr" indent="0" marL="0">
+              <a:buNone/>
+            </a:pPr>
+            <a:r>
+              <a:rPr lang="en-US" sz="950" dirty="0">
+                <a:solidFill>
+                  <a:srgbClr val="24313F"/>
+                </a:solidFill>
+                <a:latin typeface="Malgun Gothic" pitchFamily="34" charset="0"/>
+                <a:ea typeface="Malgun Gothic" pitchFamily="34" charset="-122"/>
+                <a:cs typeface="Malgun Gothic" pitchFamily="34" charset="-120"/>
+              </a:rPr>
+              <a:t>Unreal Engine 4 (CARLA 0.9.16 바이너리, GPU 약 6 GB)</a:t>
+            </a:r>
+            <a:endParaRPr lang="en-US" sz="950" dirty="0"/>
+          </a:p>
+          <a:p>
+            <a:pPr algn="ctr" indent="0" marL="0">
+              <a:buNone/>
+            </a:pPr>
+            <a:r>
+              <a:rPr lang="en-US" sz="950" dirty="0">
+                <a:solidFill>
+                  <a:srgbClr val="24313F"/>
+                </a:solidFill>
+                <a:latin typeface="Malgun Gothic" pitchFamily="34" charset="0"/>
+                <a:ea typeface="Malgun Gothic" pitchFamily="34" charset="-122"/>
+                <a:cs typeface="Malgun Gothic" pitchFamily="34" charset="-120"/>
+              </a:rPr>
+              <a:t>Python 3.10 venv-sim: carla PythonAPI, grpcio, opencv, pygame, numpy/scipy, psutil, pynvml  —  torch 없음</a:t>
+            </a:r>
+            <a:endParaRPr lang="en-US" sz="950" dirty="0"/>
+          </a:p>
+        </p:txBody>
+      </p:sp>
+      <p:sp>
+        <p:nvSpPr>
+          <p:cNvPr id="19" name="Shape 17"/>
+          <p:cNvSpPr/>
+          <p:nvPr/>
+        </p:nvSpPr>
+        <p:spPr>
+          <a:xfrm>
+            <a:off x="1691640" y="2953512"/>
+            <a:ext cx="4449928" cy="566928"/>
+          </a:xfrm>
+          <a:prstGeom prst="rect">
+            <a:avLst/>
+          </a:prstGeom>
+          <a:solidFill>
+            <a:srgbClr val="F7F9FB"/>
+          </a:solidFill>
+          <a:ln w="12700">
+            <a:solidFill>
+              <a:srgbClr val="2A6FDB"/>
+            </a:solidFill>
+            <a:prstDash val="solid"/>
+          </a:ln>
+        </p:spPr>
+      </p:sp>
+      <p:sp>
+        <p:nvSpPr>
+          <p:cNvPr id="20" name="Text 18"/>
+          <p:cNvSpPr txBox="1"/>
+          <p:nvPr/>
+        </p:nvSpPr>
+        <p:spPr>
+          <a:xfrm>
+            <a:off x="1828800" y="2953512"/>
+            <a:ext cx="4175608" cy="566928"/>
+          </a:xfrm>
+          <a:prstGeom prst="rect">
+            <a:avLst/>
+          </a:prstGeom>
+          <a:noFill/>
+          <a:ln/>
+        </p:spPr>
+        <p:txBody>
+          <a:bodyPr wrap="square" lIns="0" tIns="0" rIns="0" bIns="0" rtlCol="0" anchor="ctr"/>
+          <a:lstStyle/>
+          <a:p>
+            <a:pPr algn="ctr" indent="0" marL="0">
+              <a:buNone/>
+            </a:pPr>
+            <a:r>
+              <a:rPr lang="en-US" sz="1000" dirty="0">
+                <a:solidFill>
+                  <a:srgbClr val="24313F"/>
+                </a:solidFill>
+                <a:latin typeface="Malgun Gothic" pitchFamily="34" charset="0"/>
+                <a:ea typeface="Malgun Gothic" pitchFamily="34" charset="-122"/>
+                <a:cs typeface="Malgun Gothic" pitchFamily="34" charset="-120"/>
+              </a:rPr>
+              <a:t>(모델 없음)  궤적·답변은 B에서 gRPC로 받음</a:t>
+            </a:r>
+            <a:endParaRPr lang="en-US" sz="1000" dirty="0"/>
+          </a:p>
+        </p:txBody>
+      </p:sp>
+      <p:sp>
+        <p:nvSpPr>
+          <p:cNvPr id="21" name="Shape 19"/>
+          <p:cNvSpPr/>
+          <p:nvPr/>
+        </p:nvSpPr>
+        <p:spPr>
+          <a:xfrm>
+            <a:off x="1691640" y="1783080"/>
+            <a:ext cx="4449928" cy="1097280"/>
+          </a:xfrm>
+          <a:prstGeom prst="rect">
+            <a:avLst/>
+          </a:prstGeom>
+          <a:solidFill>
+            <a:srgbClr val="E8F0FC"/>
+          </a:solidFill>
+          <a:ln w="12700">
+            <a:solidFill>
+              <a:srgbClr val="2A6FDB"/>
+            </a:solidFill>
+            <a:prstDash val="solid"/>
+          </a:ln>
+        </p:spPr>
+      </p:sp>
+      <p:sp>
+        <p:nvSpPr>
+          <p:cNvPr id="22" name="Shape 20"/>
+          <p:cNvSpPr/>
+          <p:nvPr/>
+        </p:nvSpPr>
+        <p:spPr>
+          <a:xfrm>
+            <a:off x="1828800" y="1892808"/>
+            <a:ext cx="1882064" cy="877824"/>
+          </a:xfrm>
+          <a:prstGeom prst="roundRect">
+            <a:avLst>
+              <a:gd name="adj" fmla="val 5208"/>
+            </a:avLst>
+          </a:prstGeom>
+          <a:solidFill>
+            <a:srgbClr val="FFFFFF"/>
+          </a:solidFill>
+          <a:ln w="12700">
+            <a:solidFill>
+              <a:srgbClr val="2A6FDB"/>
+            </a:solidFill>
+            <a:prstDash val="solid"/>
+          </a:ln>
+        </p:spPr>
+      </p:sp>
+      <p:sp>
+        <p:nvSpPr>
+          <p:cNvPr id="23" name="Text 21"/>
+          <p:cNvSpPr txBox="1"/>
+          <p:nvPr/>
+        </p:nvSpPr>
+        <p:spPr>
+          <a:xfrm>
+            <a:off x="1901952" y="1892808"/>
+            <a:ext cx="1735760" cy="877824"/>
+          </a:xfrm>
+          <a:prstGeom prst="rect">
+            <a:avLst/>
+          </a:prstGeom>
+          <a:noFill/>
+          <a:ln/>
+        </p:spPr>
+        <p:txBody>
+          <a:bodyPr wrap="square" lIns="0" tIns="0" rIns="0" bIns="0" rtlCol="0" anchor="ctr"/>
+          <a:lstStyle/>
+          <a:p>
+            <a:pPr algn="ctr" indent="0" marL="0">
+              <a:buNone/>
+            </a:pPr>
+            <a:r>
+              <a:rPr lang="en-US" sz="900" dirty="0">
+                <a:solidFill>
+                  <a:srgbClr val="24313F"/>
+                </a:solidFill>
+                <a:latin typeface="Malgun Gothic" pitchFamily="34" charset="0"/>
+                <a:ea typeface="Malgun Gothic" pitchFamily="34" charset="-122"/>
+                <a:cs typeface="Malgun Gothic" pitchFamily="34" charset="-120"/>
+              </a:rPr>
+              <a:t>CarlaUE4.sh -RenderOffScreen</a:t>
+            </a:r>
+            <a:endParaRPr lang="en-US" sz="900" dirty="0"/>
+          </a:p>
+          <a:p>
+            <a:pPr algn="ctr" indent="0" marL="0">
+              <a:buNone/>
+            </a:pPr>
+            <a:r>
+              <a:rPr lang="en-US" sz="900" dirty="0">
+                <a:solidFill>
+                  <a:srgbClr val="24313F"/>
+                </a:solidFill>
+                <a:latin typeface="Malgun Gothic" pitchFamily="34" charset="0"/>
+                <a:ea typeface="Malgun Gothic" pitchFamily="34" charset="-122"/>
+                <a:cs typeface="Malgun Gothic" pitchFamily="34" charset="-120"/>
+              </a:rPr>
+              <a:t>CARLA 서버 :2000 (localhost 전용)</a:t>
+            </a:r>
+            <a:endParaRPr lang="en-US" sz="900" dirty="0"/>
+          </a:p>
+          <a:p>
+            <a:pPr algn="ctr" indent="0" marL="0">
+              <a:buNone/>
+            </a:pPr>
+            <a:r>
+              <a:rPr lang="en-US" sz="900" dirty="0">
+                <a:solidFill>
+                  <a:srgbClr val="24313F"/>
+                </a:solidFill>
+                <a:latin typeface="Malgun Gothic" pitchFamily="34" charset="0"/>
+                <a:ea typeface="Malgun Gothic" pitchFamily="34" charset="-122"/>
+                <a:cs typeface="Malgun Gothic" pitchFamily="34" charset="-120"/>
+              </a:rPr>
+              <a:t>카메라 4대 1080p, 10 Hz tick</a:t>
+            </a:r>
+            <a:endParaRPr lang="en-US" sz="900" dirty="0"/>
+          </a:p>
+        </p:txBody>
+      </p:sp>
+      <p:sp>
+        <p:nvSpPr>
+          <p:cNvPr id="24" name="Shape 22"/>
+          <p:cNvSpPr/>
+          <p:nvPr/>
+        </p:nvSpPr>
+        <p:spPr>
+          <a:xfrm>
+            <a:off x="3756584" y="2331720"/>
+            <a:ext cx="320040" cy="0"/>
+          </a:xfrm>
+          <a:prstGeom prst="line">
+            <a:avLst/>
+          </a:prstGeom>
+          <a:noFill/>
           <a:ln w="19050">
             <a:solidFill>
               <a:srgbClr val="2A6FDB"/>
             </a:solidFill>
             <a:prstDash val="solid"/>
+            <a:headEnd type="triangle"/>
+            <a:tailEnd type="triangle"/>
           </a:ln>
         </p:spPr>
       </p:sp>
       <p:sp>
         <p:nvSpPr>
-          <p:cNvPr id="7" name="Text 5"/>
-          <p:cNvSpPr txBox="1"/>
-          <p:nvPr/>
-        </p:nvSpPr>
-        <p:spPr>
-          <a:xfrm>
-            <a:off x="731520" y="1481328"/>
-            <a:ext cx="3703320" cy="320040"/>
-          </a:xfrm>
-          <a:prstGeom prst="rect">
-            <a:avLst/>
-          </a:prstGeom>
-          <a:noFill/>
-          <a:ln/>
-        </p:spPr>
-        <p:txBody>
-          <a:bodyPr wrap="square" lIns="0" tIns="0" rIns="0" bIns="0" rtlCol="0" anchor="t"/>
-          <a:lstStyle/>
-          <a:p>
-            <a:pPr indent="0" marL="0">
-              <a:buNone/>
-            </a:pPr>
-            <a:r>
-              <a:rPr lang="en-US" sz="1400" b="1" dirty="0">
-                <a:solidFill>
-                  <a:srgbClr val="2A6FDB"/>
-                </a:solidFill>
-                <a:latin typeface="Malgun Gothic" pitchFamily="34" charset="0"/>
-                <a:ea typeface="Malgun Gothic" pitchFamily="34" charset="-122"/>
-                <a:cs typeface="Malgun Gothic" pitchFamily="34" charset="-120"/>
-              </a:rPr>
-              <a:t>A. 시뮬레이터 호스트 (x86 필수)</a:t>
-            </a:r>
-            <a:endParaRPr lang="en-US" sz="1400" dirty="0"/>
-          </a:p>
-        </p:txBody>
-      </p:sp>
-      <p:sp>
-        <p:nvSpPr>
-          <p:cNvPr id="8" name="Text 6"/>
-          <p:cNvSpPr txBox="1"/>
-          <p:nvPr/>
-        </p:nvSpPr>
-        <p:spPr>
-          <a:xfrm>
-            <a:off x="731520" y="1801368"/>
-            <a:ext cx="3703320" cy="274320"/>
-          </a:xfrm>
-          <a:prstGeom prst="rect">
-            <a:avLst/>
-          </a:prstGeom>
-          <a:noFill/>
-          <a:ln/>
-        </p:spPr>
-        <p:txBody>
-          <a:bodyPr wrap="square" lIns="0" tIns="0" rIns="0" bIns="0" rtlCol="0" anchor="t"/>
-          <a:lstStyle/>
-          <a:p>
-            <a:pPr indent="0" marL="0">
-              <a:buNone/>
-            </a:pPr>
-            <a:r>
-              <a:rPr lang="en-US" sz="1000" dirty="0">
-                <a:solidFill>
-                  <a:srgbClr val="6B7A8C"/>
-                </a:solidFill>
-                <a:latin typeface="Malgun Gothic" pitchFamily="34" charset="0"/>
-                <a:ea typeface="Malgun Gothic" pitchFamily="34" charset="-122"/>
-                <a:cs typeface="Malgun Gothic" pitchFamily="34" charset="-120"/>
-              </a:rPr>
-              <a:t>g5.2xlarge · NVIDIA A10G 24 GB · 172.31.38.219</a:t>
-            </a:r>
-            <a:endParaRPr lang="en-US" sz="1000" dirty="0"/>
-          </a:p>
-        </p:txBody>
-      </p:sp>
-      <p:sp>
-        <p:nvSpPr>
-          <p:cNvPr id="9" name="Shape 7"/>
+          <p:cNvPr id="25" name="Shape 23"/>
           <p:cNvSpPr/>
           <p:nvPr/>
         </p:nvSpPr>
         <p:spPr>
           <a:xfrm>
-            <a:off x="731520" y="2148840"/>
-            <a:ext cx="3703320" cy="502920"/>
+            <a:off x="4122344" y="1892808"/>
+            <a:ext cx="1882064" cy="877824"/>
           </a:xfrm>
           <a:prstGeom prst="roundRect">
             <a:avLst>
-              <a:gd name="adj" fmla="val 10909"/>
+              <a:gd name="adj" fmla="val 5208"/>
             </a:avLst>
           </a:prstGeom>
           <a:solidFill>
             <a:srgbClr val="FFFFFF"/>
           </a:solidFill>
-          <a:ln w="9525">
+          <a:ln w="12700">
             <a:solidFill>
               <a:srgbClr val="2A6FDB"/>
             </a:solidFill>
@@ -1955,14 +2686,14 @@
       </p:sp>
       <p:sp>
         <p:nvSpPr>
-          <p:cNvPr id="10" name="Text 8"/>
-          <p:cNvSpPr txBox="1"/>
-          <p:nvPr/>
-        </p:nvSpPr>
-        <p:spPr>
-          <a:xfrm>
-            <a:off x="841248" y="2148840"/>
-            <a:ext cx="3483864" cy="502920"/>
+          <p:cNvPr id="26" name="Text 24"/>
+          <p:cNvSpPr txBox="1"/>
+          <p:nvPr/>
+        </p:nvSpPr>
+        <p:spPr>
+          <a:xfrm>
+            <a:off x="4195496" y="1892808"/>
+            <a:ext cx="1735760" cy="877824"/>
           </a:xfrm>
           <a:prstGeom prst="rect">
             <a:avLst/>
@@ -1974,11 +2705,11 @@
           <a:bodyPr wrap="square" lIns="0" tIns="0" rIns="0" bIns="0" rtlCol="0" anchor="ctr"/>
           <a:lstStyle/>
           <a:p>
-            <a:pPr indent="0" marL="0">
-              <a:buNone/>
-            </a:pPr>
-            <a:r>
-              <a:rPr lang="en-US" sz="1100" dirty="0">
+            <a:pPr algn="ctr" indent="0" marL="0">
+              <a:buNone/>
+            </a:pPr>
+            <a:r>
+              <a:rPr lang="en-US" sz="900" b="1" dirty="0">
                 <a:solidFill>
                   <a:srgbClr val="24313F"/>
                 </a:solidFill>
@@ -1986,220 +2717,64 @@
                 <a:ea typeface="Malgun Gothic" pitchFamily="34" charset="-122"/>
                 <a:cs typeface="Malgun Gothic" pitchFamily="34" charset="-120"/>
               </a:rPr>
-              <a:t>CARLA 0.9.16 서버 (UE4)  ·  Town03, NPC 100대, 카메라 4대 1080p, 10 Hz tick</a:t>
-            </a:r>
-            <a:endParaRPr lang="en-US" sz="1100" dirty="0"/>
-          </a:p>
-        </p:txBody>
-      </p:sp>
-      <p:sp>
-        <p:nvSpPr>
-          <p:cNvPr id="11" name="Text 9"/>
-          <p:cNvSpPr txBox="1"/>
-          <p:nvPr/>
-        </p:nvSpPr>
-        <p:spPr>
-          <a:xfrm>
-            <a:off x="731520" y="2670048"/>
-            <a:ext cx="3703320" cy="274320"/>
-          </a:xfrm>
-          <a:prstGeom prst="rect">
-            <a:avLst/>
-          </a:prstGeom>
-          <a:noFill/>
-          <a:ln/>
-        </p:spPr>
-        <p:txBody>
-          <a:bodyPr wrap="square" lIns="0" tIns="0" rIns="0" bIns="0" rtlCol="0" anchor="ctr"/>
-          <a:lstStyle/>
+              <a:t>carlamayo.py --loop closed --async</a:t>
+            </a:r>
+            <a:endParaRPr lang="en-US" sz="900" dirty="0"/>
+          </a:p>
           <a:p>
             <a:pPr algn="ctr" indent="0" marL="0">
               <a:buNone/>
             </a:pPr>
             <a:r>
-              <a:rPr lang="en-US" sz="900" dirty="0">
-                <a:solidFill>
-                  <a:srgbClr val="6B7A8C"/>
-                </a:solidFill>
-                <a:latin typeface="Malgun Gothic" pitchFamily="34" charset="0"/>
-                <a:ea typeface="Malgun Gothic" pitchFamily="34" charset="-122"/>
-                <a:cs typeface="Malgun Gothic" pitchFamily="34" charset="-120"/>
-              </a:rPr>
-              <a:t>loopback 300~600 MB/s (센서 영상)  ⇅  제어 명령</a:t>
+              <a:rPr lang="en-US" sz="900" b="1" dirty="0">
+                <a:solidFill>
+                  <a:srgbClr val="24313F"/>
+                </a:solidFill>
+                <a:latin typeface="Malgun Gothic" pitchFamily="34" charset="0"/>
+                <a:ea typeface="Malgun Gothic" pitchFamily="34" charset="-122"/>
+                <a:cs typeface="Malgun Gothic" pitchFamily="34" charset="-120"/>
+              </a:rPr>
+              <a:t>--inference-server 172.31.20.213:50051</a:t>
             </a:r>
             <a:endParaRPr lang="en-US" sz="900" dirty="0"/>
           </a:p>
-        </p:txBody>
-      </p:sp>
-      <p:sp>
-        <p:nvSpPr>
-          <p:cNvPr id="12" name="Shape 10"/>
+          <a:p>
+            <a:pPr algn="ctr" indent="0" marL="0">
+              <a:buNone/>
+            </a:pPr>
+            <a:r>
+              <a:rPr lang="en-US" sz="900" b="1" dirty="0">
+                <a:solidFill>
+                  <a:srgbClr val="24313F"/>
+                </a:solidFill>
+                <a:latin typeface="Malgun Gothic" pitchFamily="34" charset="0"/>
+                <a:ea typeface="Malgun Gothic" pitchFamily="34" charset="-122"/>
+                <a:cs typeface="Malgun Gothic" pitchFamily="34" charset="-120"/>
+              </a:rPr>
+              <a:t>루프 · PID · 리스폰 · 영상 기록 · pygame UI(DCV)</a:t>
+            </a:r>
+            <a:endParaRPr lang="en-US" sz="900" dirty="0"/>
+          </a:p>
+        </p:txBody>
+      </p:sp>
+      <p:sp>
+        <p:nvSpPr>
+          <p:cNvPr id="27" name="Shape 25"/>
           <p:cNvSpPr/>
           <p:nvPr/>
         </p:nvSpPr>
         <p:spPr>
           <a:xfrm>
-            <a:off x="731520" y="2962656"/>
-            <a:ext cx="3703320" cy="640080"/>
-          </a:xfrm>
-          <a:prstGeom prst="roundRect">
-            <a:avLst>
-              <a:gd name="adj" fmla="val 8571"/>
-            </a:avLst>
-          </a:prstGeom>
-          <a:solidFill>
-            <a:srgbClr val="FFFFFF"/>
-          </a:solidFill>
-          <a:ln w="9525">
-            <a:solidFill>
-              <a:srgbClr val="2A6FDB"/>
-            </a:solidFill>
-            <a:prstDash val="solid"/>
-          </a:ln>
-        </p:spPr>
-      </p:sp>
-      <p:sp>
-        <p:nvSpPr>
-          <p:cNvPr id="13" name="Text 11"/>
-          <p:cNvSpPr txBox="1"/>
-          <p:nvPr/>
-        </p:nvSpPr>
-        <p:spPr>
-          <a:xfrm>
-            <a:off x="841248" y="2962656"/>
-            <a:ext cx="3483864" cy="640080"/>
-          </a:xfrm>
-          <a:prstGeom prst="rect">
-            <a:avLst/>
-          </a:prstGeom>
-          <a:noFill/>
-          <a:ln/>
-        </p:spPr>
-        <p:txBody>
-          <a:bodyPr wrap="square" lIns="0" tIns="0" rIns="0" bIns="0" rtlCol="0" anchor="ctr"/>
-          <a:lstStyle/>
-          <a:p>
-            <a:pPr indent="0" marL="0">
-              <a:buNone/>
-            </a:pPr>
-            <a:r>
-              <a:rPr lang="en-US" sz="1000" dirty="0">
-                <a:solidFill>
-                  <a:srgbClr val="24313F"/>
-                </a:solidFill>
-                <a:latin typeface="Malgun Gothic" pitchFamily="34" charset="0"/>
-                <a:ea typeface="Malgun Gothic" pitchFamily="34" charset="-122"/>
-                <a:cs typeface="Malgun Gothic" pitchFamily="34" charset="-120"/>
-              </a:rPr>
-              <a:t>carlamayo.py 루프 클라이언트  ·  카메라 수집 → 추론 요청 → 궤적 수신 → PID 제어</a:t>
-            </a:r>
-            <a:endParaRPr lang="en-US" sz="1000" dirty="0"/>
-          </a:p>
-          <a:p>
-            <a:pPr indent="0" marL="0">
-              <a:buNone/>
-            </a:pPr>
-            <a:r>
-              <a:rPr lang="en-US" sz="1000" dirty="0">
-                <a:solidFill>
-                  <a:srgbClr val="24313F"/>
-                </a:solidFill>
-                <a:latin typeface="Malgun Gothic" pitchFamily="34" charset="0"/>
-                <a:ea typeface="Malgun Gothic" pitchFamily="34" charset="-122"/>
-                <a:cs typeface="Malgun Gothic" pitchFamily="34" charset="-120"/>
-              </a:rPr>
-              <a:t>리스폰, 영상 기록, 프로파일링  (torch 없음)</a:t>
-            </a:r>
-            <a:endParaRPr lang="en-US" sz="1000" dirty="0"/>
-          </a:p>
-        </p:txBody>
-      </p:sp>
-      <p:sp>
-        <p:nvSpPr>
-          <p:cNvPr id="14" name="Shape 12"/>
-          <p:cNvSpPr/>
-          <p:nvPr/>
-        </p:nvSpPr>
-        <p:spPr>
-          <a:xfrm>
-            <a:off x="731520" y="3739896"/>
-            <a:ext cx="3703320" cy="457200"/>
-          </a:xfrm>
-          <a:prstGeom prst="roundRect">
-            <a:avLst>
-              <a:gd name="adj" fmla="val 12000"/>
-            </a:avLst>
-          </a:prstGeom>
-          <a:solidFill>
-            <a:srgbClr val="FFFFFF"/>
-          </a:solidFill>
-          <a:ln w="9525">
-            <a:solidFill>
-              <a:srgbClr val="2A6FDB"/>
-            </a:solidFill>
-            <a:prstDash val="solid"/>
-          </a:ln>
-        </p:spPr>
-      </p:sp>
-      <p:sp>
-        <p:nvSpPr>
-          <p:cNvPr id="15" name="Text 13"/>
-          <p:cNvSpPr txBox="1"/>
-          <p:nvPr/>
-        </p:nvSpPr>
-        <p:spPr>
-          <a:xfrm>
-            <a:off x="841248" y="3739896"/>
-            <a:ext cx="3483864" cy="457200"/>
-          </a:xfrm>
-          <a:prstGeom prst="rect">
-            <a:avLst/>
-          </a:prstGeom>
-          <a:noFill/>
-          <a:ln/>
-        </p:spPr>
-        <p:txBody>
-          <a:bodyPr wrap="square" lIns="0" tIns="0" rIns="0" bIns="0" rtlCol="0" anchor="ctr"/>
-          <a:lstStyle/>
-          <a:p>
-            <a:pPr indent="0" marL="0">
-              <a:buNone/>
-            </a:pPr>
-            <a:r>
-              <a:rPr lang="en-US" sz="1000" dirty="0">
-                <a:solidFill>
-                  <a:srgbClr val="24313F"/>
-                </a:solidFill>
-                <a:latin typeface="Malgun Gothic" pitchFamily="34" charset="0"/>
-                <a:ea typeface="Malgun Gothic" pitchFamily="34" charset="-122"/>
-                <a:cs typeface="Malgun Gothic" pitchFamily="34" charset="-120"/>
-              </a:rPr>
-              <a:t>pygame UI (NICE DCV 세션으로 표시)  ·  카메라·궤적·CoT·프롬프트 입력</a:t>
-            </a:r>
-            <a:endParaRPr lang="en-US" sz="1000" dirty="0"/>
-          </a:p>
-        </p:txBody>
-      </p:sp>
-      <p:sp>
-        <p:nvSpPr>
-          <p:cNvPr id="16" name="Shape 14"/>
-          <p:cNvSpPr/>
-          <p:nvPr/>
-        </p:nvSpPr>
-        <p:spPr>
-          <a:xfrm>
-            <a:off x="7573975" y="1371600"/>
-            <a:ext cx="4069080" cy="3017520"/>
-          </a:xfrm>
-          <a:prstGeom prst="roundRect">
-            <a:avLst>
-              <a:gd name="adj" fmla="val 3030"/>
-            </a:avLst>
+            <a:off x="7193128" y="5157216"/>
+            <a:ext cx="4449928" cy="658368"/>
+          </a:xfrm>
+          <a:prstGeom prst="rect">
+            <a:avLst/>
           </a:prstGeom>
           <a:solidFill>
             <a:srgbClr val="FCEFE4"/>
           </a:solidFill>
-          <a:ln w="19050">
+          <a:ln w="12700">
             <a:solidFill>
               <a:srgbClr val="E0762B"/>
             </a:solidFill>
@@ -2209,102 +2784,78 @@
       </p:sp>
       <p:sp>
         <p:nvSpPr>
-          <p:cNvPr id="17" name="Text 15"/>
-          <p:cNvSpPr txBox="1"/>
-          <p:nvPr/>
-        </p:nvSpPr>
-        <p:spPr>
-          <a:xfrm>
-            <a:off x="7756855" y="1481328"/>
-            <a:ext cx="3703320" cy="320040"/>
-          </a:xfrm>
-          <a:prstGeom prst="rect">
-            <a:avLst/>
-          </a:prstGeom>
-          <a:noFill/>
-          <a:ln/>
-        </p:spPr>
-        <p:txBody>
-          <a:bodyPr wrap="square" lIns="0" tIns="0" rIns="0" bIns="0" rtlCol="0" anchor="t"/>
-          <a:lstStyle/>
-          <a:p>
-            <a:pPr indent="0" marL="0">
-              <a:buNone/>
-            </a:pPr>
-            <a:r>
-              <a:rPr lang="en-US" sz="1400" b="1" dirty="0">
-                <a:solidFill>
-                  <a:srgbClr val="E0762B"/>
-                </a:solidFill>
-                <a:latin typeface="Malgun Gothic" pitchFamily="34" charset="0"/>
-                <a:ea typeface="Malgun Gothic" pitchFamily="34" charset="-122"/>
-                <a:cs typeface="Malgun Gothic" pitchFamily="34" charset="-120"/>
-              </a:rPr>
-              <a:t>B. 추론 호스트 (GPU: x86 또는 ARM)</a:t>
-            </a:r>
-            <a:endParaRPr lang="en-US" sz="1400" dirty="0"/>
-          </a:p>
-        </p:txBody>
-      </p:sp>
-      <p:sp>
-        <p:nvSpPr>
-          <p:cNvPr id="18" name="Text 16"/>
-          <p:cNvSpPr txBox="1"/>
-          <p:nvPr/>
-        </p:nvSpPr>
-        <p:spPr>
-          <a:xfrm>
-            <a:off x="7756855" y="1801368"/>
-            <a:ext cx="3703320" cy="274320"/>
-          </a:xfrm>
-          <a:prstGeom prst="rect">
-            <a:avLst/>
-          </a:prstGeom>
-          <a:noFill/>
-          <a:ln/>
-        </p:spPr>
-        <p:txBody>
-          <a:bodyPr wrap="square" lIns="0" tIns="0" rIns="0" bIns="0" rtlCol="0" anchor="t"/>
-          <a:lstStyle/>
-          <a:p>
-            <a:pPr indent="0" marL="0">
+          <p:cNvPr id="28" name="Text 26"/>
+          <p:cNvSpPr txBox="1"/>
+          <p:nvPr/>
+        </p:nvSpPr>
+        <p:spPr>
+          <a:xfrm>
+            <a:off x="7330288" y="5157216"/>
+            <a:ext cx="4175608" cy="658368"/>
+          </a:xfrm>
+          <a:prstGeom prst="rect">
+            <a:avLst/>
+          </a:prstGeom>
+          <a:noFill/>
+          <a:ln/>
+        </p:spPr>
+        <p:txBody>
+          <a:bodyPr wrap="square" lIns="0" tIns="0" rIns="0" bIns="0" rtlCol="0" anchor="ctr"/>
+          <a:lstStyle/>
+          <a:p>
+            <a:pPr algn="ctr" indent="0" marL="0">
               <a:buNone/>
             </a:pPr>
             <a:r>
               <a:rPr lang="en-US" sz="1000" dirty="0">
                 <a:solidFill>
-                  <a:srgbClr val="6B7A8C"/>
-                </a:solidFill>
-                <a:latin typeface="Malgun Gothic" pitchFamily="34" charset="0"/>
-                <a:ea typeface="Malgun Gothic" pitchFamily="34" charset="-122"/>
-                <a:cs typeface="Malgun Gothic" pitchFamily="34" charset="-120"/>
-              </a:rPr>
-              <a:t>데모 실물: g6e.xlarge(x86) · L40S 48 GB · 172.31.20.213</a:t>
+                  <a:srgbClr val="24313F"/>
+                </a:solidFill>
+                <a:latin typeface="Malgun Gothic" pitchFamily="34" charset="0"/>
+                <a:ea typeface="Malgun Gothic" pitchFamily="34" charset="-122"/>
+                <a:cs typeface="Malgun Gothic" pitchFamily="34" charset="-120"/>
+              </a:rPr>
+              <a:t>g6e.xlarge  ·  x86_64, 4 vCPU, 32 GB RAM  ·  NVIDIA L40S 48 GB</a:t>
             </a:r>
             <a:endParaRPr lang="en-US" sz="1000" dirty="0"/>
           </a:p>
-        </p:txBody>
-      </p:sp>
-      <p:sp>
-        <p:nvSpPr>
-          <p:cNvPr id="19" name="Shape 17"/>
+          <a:p>
+            <a:pPr algn="ctr" indent="0" marL="0">
+              <a:buNone/>
+            </a:pPr>
+            <a:r>
+              <a:rPr lang="en-US" sz="1000" dirty="0">
+                <a:solidFill>
+                  <a:srgbClr val="24313F"/>
+                </a:solidFill>
+                <a:latin typeface="Malgun Gothic" pitchFamily="34" charset="0"/>
+                <a:ea typeface="Malgun Gothic" pitchFamily="34" charset="-122"/>
+                <a:cs typeface="Malgun Gothic" pitchFamily="34" charset="-120"/>
+              </a:rPr>
+              <a:t>172.31.20.213  ·  VRAM만 맞으면 ARM GPU 인스턴스로 교체 가능</a:t>
+            </a:r>
+            <a:endParaRPr lang="en-US" sz="1000" dirty="0"/>
+          </a:p>
+        </p:txBody>
+      </p:sp>
+      <p:sp>
+        <p:nvSpPr>
+          <p:cNvPr id="29" name="Shape 27"/>
           <p:cNvSpPr/>
           <p:nvPr/>
         </p:nvSpPr>
         <p:spPr>
           <a:xfrm>
-            <a:off x="7756855" y="2148840"/>
-            <a:ext cx="3703320" cy="502920"/>
-          </a:xfrm>
-          <a:prstGeom prst="roundRect">
-            <a:avLst>
-              <a:gd name="adj" fmla="val 10909"/>
-            </a:avLst>
+            <a:off x="7193128" y="4535424"/>
+            <a:ext cx="4449928" cy="548640"/>
+          </a:xfrm>
+          <a:prstGeom prst="rect">
+            <a:avLst/>
           </a:prstGeom>
           <a:solidFill>
-            <a:srgbClr val="FFFFFF"/>
+            <a:srgbClr val="FCEFE4"/>
           </a:solidFill>
-          <a:ln w="9525">
+          <a:ln w="12700">
             <a:solidFill>
               <a:srgbClr val="E0762B"/>
             </a:solidFill>
@@ -2314,14 +2865,14 @@
       </p:sp>
       <p:sp>
         <p:nvSpPr>
-          <p:cNvPr id="20" name="Text 18"/>
-          <p:cNvSpPr txBox="1"/>
-          <p:nvPr/>
-        </p:nvSpPr>
-        <p:spPr>
-          <a:xfrm>
-            <a:off x="7866583" y="2148840"/>
-            <a:ext cx="3483864" cy="502920"/>
+          <p:cNvPr id="30" name="Text 28"/>
+          <p:cNvSpPr txBox="1"/>
+          <p:nvPr/>
+        </p:nvSpPr>
+        <p:spPr>
+          <a:xfrm>
+            <a:off x="7330288" y="4535424"/>
+            <a:ext cx="4175608" cy="548640"/>
           </a:xfrm>
           <a:prstGeom prst="rect">
             <a:avLst/>
@@ -2333,11 +2884,11 @@
           <a:bodyPr wrap="square" lIns="0" tIns="0" rIns="0" bIns="0" rtlCol="0" anchor="ctr"/>
           <a:lstStyle/>
           <a:p>
-            <a:pPr indent="0" marL="0">
-              <a:buNone/>
-            </a:pPr>
-            <a:r>
-              <a:rPr lang="en-US" sz="1100" dirty="0">
+            <a:pPr algn="ctr" indent="0" marL="0">
+              <a:buNone/>
+            </a:pPr>
+            <a:r>
+              <a:rPr lang="en-US" sz="1000" dirty="0">
                 <a:solidFill>
                   <a:srgbClr val="24313F"/>
                 </a:solidFill>
@@ -2345,32 +2896,30 @@
                 <a:ea typeface="Malgun Gothic" pitchFamily="34" charset="-122"/>
                 <a:cs typeface="Malgun Gothic" pitchFamily="34" charset="-120"/>
               </a:rPr>
-              <a:t>alpamayo_server.py  ·  gRPC :50051, health check, 요청 직렬화</a:t>
-            </a:r>
-            <a:endParaRPr lang="en-US" sz="1100" dirty="0"/>
-          </a:p>
-        </p:txBody>
-      </p:sp>
-      <p:sp>
-        <p:nvSpPr>
-          <p:cNvPr id="21" name="Shape 19"/>
+              <a:t>Ubuntu 22.04  ·  NVIDIA 드라이버 (CUDA는 torch 휠에 포함)</a:t>
+            </a:r>
+            <a:endParaRPr lang="en-US" sz="1000" dirty="0"/>
+          </a:p>
+        </p:txBody>
+      </p:sp>
+      <p:sp>
+        <p:nvSpPr>
+          <p:cNvPr id="31" name="Shape 29"/>
           <p:cNvSpPr/>
           <p:nvPr/>
         </p:nvSpPr>
         <p:spPr>
           <a:xfrm>
-            <a:off x="7756855" y="2962656"/>
-            <a:ext cx="3703320" cy="640080"/>
-          </a:xfrm>
-          <a:prstGeom prst="roundRect">
-            <a:avLst>
-              <a:gd name="adj" fmla="val 8571"/>
-            </a:avLst>
+            <a:off x="7193128" y="3593592"/>
+            <a:ext cx="4449928" cy="868680"/>
+          </a:xfrm>
+          <a:prstGeom prst="rect">
+            <a:avLst/>
           </a:prstGeom>
           <a:solidFill>
-            <a:srgbClr val="FFFFFF"/>
+            <a:srgbClr val="FCEFE4"/>
           </a:solidFill>
-          <a:ln w="9525">
+          <a:ln w="12700">
             <a:solidFill>
               <a:srgbClr val="E0762B"/>
             </a:solidFill>
@@ -2380,14 +2929,14 @@
       </p:sp>
       <p:sp>
         <p:nvSpPr>
-          <p:cNvPr id="22" name="Text 20"/>
-          <p:cNvSpPr txBox="1"/>
-          <p:nvPr/>
-        </p:nvSpPr>
-        <p:spPr>
-          <a:xfrm>
-            <a:off x="7866583" y="2962656"/>
-            <a:ext cx="3483864" cy="640080"/>
+          <p:cNvPr id="32" name="Text 30"/>
+          <p:cNvSpPr txBox="1"/>
+          <p:nvPr/>
+        </p:nvSpPr>
+        <p:spPr>
+          <a:xfrm>
+            <a:off x="7330288" y="3593592"/>
+            <a:ext cx="4175608" cy="868680"/>
           </a:xfrm>
           <a:prstGeom prst="rect">
             <a:avLst/>
@@ -2399,11 +2948,11 @@
           <a:bodyPr wrap="square" lIns="0" tIns="0" rIns="0" bIns="0" rtlCol="0" anchor="ctr"/>
           <a:lstStyle/>
           <a:p>
-            <a:pPr indent="0" marL="0">
-              <a:buNone/>
-            </a:pPr>
-            <a:r>
-              <a:rPr lang="en-US" sz="1000" dirty="0">
+            <a:pPr algn="ctr" indent="0" marL="0">
+              <a:buNone/>
+            </a:pPr>
+            <a:r>
+              <a:rPr lang="en-US" sz="950" dirty="0">
                 <a:solidFill>
                   <a:srgbClr val="24313F"/>
                 </a:solidFill>
@@ -2411,16 +2960,16 @@
                 <a:ea typeface="Malgun Gothic" pitchFamily="34" charset="-122"/>
                 <a:cs typeface="Malgun Gothic" pitchFamily="34" charset="-120"/>
               </a:rPr>
-              <a:t>Alpamayo 1.5 상주 (bf16, 약 24 GB VRAM)</a:t>
-            </a:r>
-            <a:endParaRPr lang="en-US" sz="1000" dirty="0"/>
-          </a:p>
-          <a:p>
-            <a:pPr indent="0" marL="0">
-              <a:buNone/>
-            </a:pPr>
-            <a:r>
-              <a:rPr lang="en-US" sz="1000" dirty="0">
+              <a:t>Python 3.12 uv a_venv: torch 2.8 (CUDA 12.x 번들), transformers 4.57,</a:t>
+            </a:r>
+            <a:endParaRPr lang="en-US" sz="950" dirty="0"/>
+          </a:p>
+          <a:p>
+            <a:pPr algn="ctr" indent="0" marL="0">
+              <a:buNone/>
+            </a:pPr>
+            <a:r>
+              <a:rPr lang="en-US" sz="950" dirty="0">
                 <a:solidFill>
                   <a:srgbClr val="24313F"/>
                 </a:solidFill>
@@ -2428,32 +2977,30 @@
                 <a:ea typeface="Malgun Gothic" pitchFamily="34" charset="-122"/>
                 <a:cs typeface="Malgun Gothic" pitchFamily="34" charset="-120"/>
               </a:rPr>
-              <a:t>한 번 로드 후 유지, 워밍업 완료 후 서비스 시작</a:t>
-            </a:r>
-            <a:endParaRPr lang="en-US" sz="1000" dirty="0"/>
-          </a:p>
-        </p:txBody>
-      </p:sp>
-      <p:sp>
-        <p:nvSpPr>
-          <p:cNvPr id="23" name="Shape 21"/>
+              <a:t>flash-attn 2.8, bitsandbytes, grpcio + health, opencv, pynvml</a:t>
+            </a:r>
+            <a:endParaRPr lang="en-US" sz="950" dirty="0"/>
+          </a:p>
+        </p:txBody>
+      </p:sp>
+      <p:sp>
+        <p:nvSpPr>
+          <p:cNvPr id="33" name="Shape 31"/>
           <p:cNvSpPr/>
           <p:nvPr/>
         </p:nvSpPr>
         <p:spPr>
           <a:xfrm>
-            <a:off x="7756855" y="3739896"/>
-            <a:ext cx="3703320" cy="457200"/>
-          </a:xfrm>
-          <a:prstGeom prst="roundRect">
-            <a:avLst>
-              <a:gd name="adj" fmla="val 12000"/>
-            </a:avLst>
+            <a:off x="7193128" y="2953512"/>
+            <a:ext cx="4449928" cy="566928"/>
+          </a:xfrm>
+          <a:prstGeom prst="rect">
+            <a:avLst/>
           </a:prstGeom>
           <a:solidFill>
-            <a:srgbClr val="FFFFFF"/>
+            <a:srgbClr val="FCEFE4"/>
           </a:solidFill>
-          <a:ln w="9525">
+          <a:ln w="12700">
             <a:solidFill>
               <a:srgbClr val="E0762B"/>
             </a:solidFill>
@@ -2463,14 +3010,14 @@
       </p:sp>
       <p:sp>
         <p:nvSpPr>
-          <p:cNvPr id="24" name="Text 22"/>
-          <p:cNvSpPr txBox="1"/>
-          <p:nvPr/>
-        </p:nvSpPr>
-        <p:spPr>
-          <a:xfrm>
-            <a:off x="7866583" y="3739896"/>
-            <a:ext cx="3483864" cy="457200"/>
+          <p:cNvPr id="34" name="Text 32"/>
+          <p:cNvSpPr txBox="1"/>
+          <p:nvPr/>
+        </p:nvSpPr>
+        <p:spPr>
+          <a:xfrm>
+            <a:off x="7330288" y="2953512"/>
+            <a:ext cx="4175608" cy="566928"/>
           </a:xfrm>
           <a:prstGeom prst="rect">
             <a:avLst/>
@@ -2482,7 +3029,7 @@
           <a:bodyPr wrap="square" lIns="0" tIns="0" rIns="0" bIns="0" rtlCol="0" anchor="ctr"/>
           <a:lstStyle/>
           <a:p>
-            <a:pPr indent="0" marL="0">
+            <a:pPr algn="ctr" indent="0" marL="0">
               <a:buNone/>
             </a:pPr>
             <a:r>
@@ -2494,7 +3041,7 @@
                 <a:ea typeface="Malgun Gothic" pitchFamily="34" charset="-122"/>
                 <a:cs typeface="Malgun Gothic" pitchFamily="34" charset="-120"/>
               </a:rPr>
-              <a:t>Hugging Face 캐시 · 토큰 (B에만 존재)</a:t>
+              <a:t>Alpamayo 1.5 가중치 (Hugging Face 캐시, bf16 약 24 GB VRAM)  ·  alpamayo1_5 패키지  ·  HF 토큰</a:t>
             </a:r>
             <a:endParaRPr lang="en-US" sz="1000" dirty="0"/>
           </a:p>
@@ -2502,53 +3049,222 @@
       </p:sp>
       <p:sp>
         <p:nvSpPr>
-          <p:cNvPr id="25" name="Text 23"/>
-          <p:cNvSpPr txBox="1"/>
-          <p:nvPr/>
-        </p:nvSpPr>
-        <p:spPr>
-          <a:xfrm>
-            <a:off x="4709160" y="1920240"/>
-            <a:ext cx="2773375" cy="274320"/>
-          </a:xfrm>
-          <a:prstGeom prst="rect">
-            <a:avLst/>
-          </a:prstGeom>
-          <a:noFill/>
-          <a:ln/>
-        </p:spPr>
-        <p:txBody>
-          <a:bodyPr wrap="square" lIns="0" tIns="0" rIns="0" bIns="0" rtlCol="0" anchor="t"/>
+          <p:cNvPr id="35" name="Shape 33"/>
+          <p:cNvSpPr/>
+          <p:nvPr/>
+        </p:nvSpPr>
+        <p:spPr>
+          <a:xfrm>
+            <a:off x="7193128" y="1783080"/>
+            <a:ext cx="4449928" cy="1097280"/>
+          </a:xfrm>
+          <a:prstGeom prst="rect">
+            <a:avLst/>
+          </a:prstGeom>
+          <a:solidFill>
+            <a:srgbClr val="FCEFE4"/>
+          </a:solidFill>
+          <a:ln w="12700">
+            <a:solidFill>
+              <a:srgbClr val="E0762B"/>
+            </a:solidFill>
+            <a:prstDash val="solid"/>
+          </a:ln>
+        </p:spPr>
+      </p:sp>
+      <p:sp>
+        <p:nvSpPr>
+          <p:cNvPr id="36" name="Shape 34"/>
+          <p:cNvSpPr/>
+          <p:nvPr/>
+        </p:nvSpPr>
+        <p:spPr>
+          <a:xfrm>
+            <a:off x="7330288" y="1892808"/>
+            <a:ext cx="2839413" cy="877824"/>
+          </a:xfrm>
+          <a:prstGeom prst="roundRect">
+            <a:avLst>
+              <a:gd name="adj" fmla="val 5208"/>
+            </a:avLst>
+          </a:prstGeom>
+          <a:solidFill>
+            <a:srgbClr val="FFFFFF"/>
+          </a:solidFill>
+          <a:ln w="12700">
+            <a:solidFill>
+              <a:srgbClr val="E0762B"/>
+            </a:solidFill>
+            <a:prstDash val="solid"/>
+          </a:ln>
+        </p:spPr>
+      </p:sp>
+      <p:sp>
+        <p:nvSpPr>
+          <p:cNvPr id="37" name="Text 35"/>
+          <p:cNvSpPr txBox="1"/>
+          <p:nvPr/>
+        </p:nvSpPr>
+        <p:spPr>
+          <a:xfrm>
+            <a:off x="7403440" y="1892808"/>
+            <a:ext cx="2693109" cy="877824"/>
+          </a:xfrm>
+          <a:prstGeom prst="rect">
+            <a:avLst/>
+          </a:prstGeom>
+          <a:noFill/>
+          <a:ln/>
+        </p:spPr>
+        <p:txBody>
+          <a:bodyPr wrap="square" lIns="0" tIns="0" rIns="0" bIns="0" rtlCol="0" anchor="ctr"/>
           <a:lstStyle/>
           <a:p>
             <a:pPr algn="ctr" indent="0" marL="0">
               <a:buNone/>
             </a:pPr>
             <a:r>
-              <a:rPr lang="en-US" sz="1000" b="1" dirty="0">
-                <a:solidFill>
-                  <a:srgbClr val="1B2A41"/>
-                </a:solidFill>
-                <a:latin typeface="Malgun Gothic" pitchFamily="34" charset="0"/>
-                <a:ea typeface="Malgun Gothic" pitchFamily="34" charset="-122"/>
-                <a:cs typeface="Malgun Gothic" pitchFamily="34" charset="-120"/>
-              </a:rPr>
-              <a:t>TCP / gRPC  (VPC 내부, 보안그룹으로 제한)</a:t>
-            </a:r>
-            <a:endParaRPr lang="en-US" sz="1000" dirty="0"/>
-          </a:p>
-        </p:txBody>
-      </p:sp>
-      <p:sp>
-        <p:nvSpPr>
-          <p:cNvPr id="26" name="Shape 24"/>
+              <a:rPr lang="en-US" sz="900" b="1" dirty="0">
+                <a:solidFill>
+                  <a:srgbClr val="24313F"/>
+                </a:solidFill>
+                <a:latin typeface="Malgun Gothic" pitchFamily="34" charset="0"/>
+                <a:ea typeface="Malgun Gothic" pitchFamily="34" charset="-122"/>
+                <a:cs typeface="Malgun Gothic" pitchFamily="34" charset="-120"/>
+              </a:rPr>
+              <a:t>alpamayo_server.py --version 1.5 --host 172.31.20.213 --port 50051</a:t>
+            </a:r>
+            <a:endParaRPr lang="en-US" sz="900" dirty="0"/>
+          </a:p>
+          <a:p>
+            <a:pPr algn="ctr" indent="0" marL="0">
+              <a:buNone/>
+            </a:pPr>
+            <a:r>
+              <a:rPr lang="en-US" sz="900" b="1" dirty="0">
+                <a:solidFill>
+                  <a:srgbClr val="24313F"/>
+                </a:solidFill>
+                <a:latin typeface="Malgun Gothic" pitchFamily="34" charset="0"/>
+                <a:ea typeface="Malgun Gothic" pitchFamily="34" charset="-122"/>
+                <a:cs typeface="Malgun Gothic" pitchFamily="34" charset="-120"/>
+              </a:rPr>
+              <a:t>gRPC: GetModelInfo / Predict / AnswerQuestion</a:t>
+            </a:r>
+            <a:endParaRPr lang="en-US" sz="900" dirty="0"/>
+          </a:p>
+          <a:p>
+            <a:pPr algn="ctr" indent="0" marL="0">
+              <a:buNone/>
+            </a:pPr>
+            <a:r>
+              <a:rPr lang="en-US" sz="900" b="1" dirty="0">
+                <a:solidFill>
+                  <a:srgbClr val="24313F"/>
+                </a:solidFill>
+                <a:latin typeface="Malgun Gothic" pitchFamily="34" charset="0"/>
+                <a:ea typeface="Malgun Gothic" pitchFamily="34" charset="-122"/>
+                <a:cs typeface="Malgun Gothic" pitchFamily="34" charset="-120"/>
+              </a:rPr>
+              <a:t>모델 1회 로드 · 워밍업 · 요청 직렬화 · 프로파일러</a:t>
+            </a:r>
+            <a:endParaRPr lang="en-US" sz="900" dirty="0"/>
+          </a:p>
+        </p:txBody>
+      </p:sp>
+      <p:sp>
+        <p:nvSpPr>
+          <p:cNvPr id="38" name="Shape 36"/>
           <p:cNvSpPr/>
           <p:nvPr/>
         </p:nvSpPr>
         <p:spPr>
           <a:xfrm>
-            <a:off x="4709160" y="2468880"/>
-            <a:ext cx="2773375" cy="0"/>
+            <a:off x="10261141" y="1892808"/>
+            <a:ext cx="1244754" cy="877824"/>
+          </a:xfrm>
+          <a:prstGeom prst="roundRect">
+            <a:avLst>
+              <a:gd name="adj" fmla="val 5208"/>
+            </a:avLst>
+          </a:prstGeom>
+          <a:solidFill>
+            <a:srgbClr val="FFFFFF"/>
+          </a:solidFill>
+          <a:ln w="12700">
+            <a:solidFill>
+              <a:srgbClr val="E0762B"/>
+            </a:solidFill>
+            <a:prstDash val="solid"/>
+          </a:ln>
+        </p:spPr>
+      </p:sp>
+      <p:sp>
+        <p:nvSpPr>
+          <p:cNvPr id="39" name="Text 37"/>
+          <p:cNvSpPr txBox="1"/>
+          <p:nvPr/>
+        </p:nvSpPr>
+        <p:spPr>
+          <a:xfrm>
+            <a:off x="10334293" y="1892808"/>
+            <a:ext cx="1098450" cy="877824"/>
+          </a:xfrm>
+          <a:prstGeom prst="rect">
+            <a:avLst/>
+          </a:prstGeom>
+          <a:noFill/>
+          <a:ln/>
+        </p:spPr>
+        <p:txBody>
+          <a:bodyPr wrap="square" lIns="0" tIns="0" rIns="0" bIns="0" rtlCol="0" anchor="ctr"/>
+          <a:lstStyle/>
+          <a:p>
+            <a:pPr algn="ctr" indent="0" marL="0">
+              <a:buNone/>
+            </a:pPr>
+            <a:r>
+              <a:rPr lang="en-US" sz="900" dirty="0">
+                <a:solidFill>
+                  <a:srgbClr val="24313F"/>
+                </a:solidFill>
+                <a:latin typeface="Malgun Gothic" pitchFamily="34" charset="0"/>
+                <a:ea typeface="Malgun Gothic" pitchFamily="34" charset="-122"/>
+                <a:cs typeface="Malgun Gothic" pitchFamily="34" charset="-120"/>
+              </a:rPr>
+              <a:t>(선택) Jupyter</a:t>
+            </a:r>
+            <a:endParaRPr lang="en-US" sz="900" dirty="0"/>
+          </a:p>
+          <a:p>
+            <a:pPr algn="ctr" indent="0" marL="0">
+              <a:buNone/>
+            </a:pPr>
+            <a:r>
+              <a:rPr lang="en-US" sz="900" dirty="0">
+                <a:solidFill>
+                  <a:srgbClr val="24313F"/>
+                </a:solidFill>
+                <a:latin typeface="Malgun Gothic" pitchFamily="34" charset="0"/>
+                <a:ea typeface="Malgun Gothic" pitchFamily="34" charset="-122"/>
+                <a:cs typeface="Malgun Gothic" pitchFamily="34" charset="-120"/>
+              </a:rPr>
+              <a:t>공식 노트북</a:t>
+            </a:r>
+            <a:endParaRPr lang="en-US" sz="900" dirty="0"/>
+          </a:p>
+        </p:txBody>
+      </p:sp>
+      <p:sp>
+        <p:nvSpPr>
+          <p:cNvPr id="40" name="Shape 38"/>
+          <p:cNvSpPr/>
+          <p:nvPr/>
+        </p:nvSpPr>
+        <p:spPr>
+          <a:xfrm>
+            <a:off x="6214720" y="2221992"/>
+            <a:ext cx="905256" cy="0"/>
           </a:xfrm>
           <a:prstGeom prst="line">
             <a:avLst/>
@@ -2565,87 +3281,14 @@
       </p:sp>
       <p:sp>
         <p:nvSpPr>
-          <p:cNvPr id="27" name="Text 25"/>
-          <p:cNvSpPr txBox="1"/>
-          <p:nvPr/>
-        </p:nvSpPr>
-        <p:spPr>
-          <a:xfrm>
-            <a:off x="4709160" y="2496312"/>
-            <a:ext cx="2773375" cy="640080"/>
-          </a:xfrm>
-          <a:prstGeom prst="rect">
-            <a:avLst/>
-          </a:prstGeom>
-          <a:noFill/>
-          <a:ln/>
-        </p:spPr>
-        <p:txBody>
-          <a:bodyPr wrap="square" lIns="0" tIns="0" rIns="0" bIns="0" rtlCol="0" anchor="t"/>
-          <a:lstStyle/>
-          <a:p>
-            <a:pPr algn="ctr" indent="0" marL="0">
-              <a:buNone/>
-            </a:pPr>
-            <a:r>
-              <a:rPr lang="en-US" sz="900" dirty="0">
-                <a:solidFill>
-                  <a:srgbClr val="2A6FDB"/>
-                </a:solidFill>
-                <a:latin typeface="Malgun Gothic" pitchFamily="34" charset="0"/>
-                <a:ea typeface="Malgun Gothic" pitchFamily="34" charset="-122"/>
-                <a:cs typeface="Malgun Gothic" pitchFamily="34" charset="-120"/>
-              </a:rPr>
-              <a:t>요청: 카메라 4대×4프레임(JPEG) + 자차 이력</a:t>
-            </a:r>
-            <a:endParaRPr lang="en-US" sz="900" dirty="0"/>
-          </a:p>
-          <a:p>
-            <a:pPr algn="ctr" indent="0" marL="0">
-              <a:buNone/>
-            </a:pPr>
-            <a:r>
-              <a:rPr lang="en-US" sz="900" dirty="0">
-                <a:solidFill>
-                  <a:srgbClr val="2A6FDB"/>
-                </a:solidFill>
-                <a:latin typeface="Malgun Gothic" pitchFamily="34" charset="0"/>
-                <a:ea typeface="Malgun Gothic" pitchFamily="34" charset="-122"/>
-                <a:cs typeface="Malgun Gothic" pitchFamily="34" charset="-120"/>
-              </a:rPr>
-              <a:t>+ navigation 텍스트·CFG 가중치 / 질문</a:t>
-            </a:r>
-            <a:endParaRPr lang="en-US" sz="900" dirty="0"/>
-          </a:p>
-          <a:p>
-            <a:pPr algn="ctr" indent="0" marL="0">
-              <a:buNone/>
-            </a:pPr>
-            <a:r>
-              <a:rPr lang="en-US" sz="900" dirty="0">
-                <a:solidFill>
-                  <a:srgbClr val="2A6FDB"/>
-                </a:solidFill>
-                <a:latin typeface="Malgun Gothic" pitchFamily="34" charset="0"/>
-                <a:ea typeface="Malgun Gothic" pitchFamily="34" charset="-122"/>
-                <a:cs typeface="Malgun Gothic" pitchFamily="34" charset="-120"/>
-              </a:rPr>
-              <a:t>5~8 MB, 약 1 Hz</a:t>
-            </a:r>
-            <a:endParaRPr lang="en-US" sz="900" dirty="0"/>
-          </a:p>
-        </p:txBody>
-      </p:sp>
-      <p:sp>
-        <p:nvSpPr>
-          <p:cNvPr id="28" name="Shape 26"/>
+          <p:cNvPr id="41" name="Shape 39"/>
           <p:cNvSpPr/>
           <p:nvPr/>
         </p:nvSpPr>
         <p:spPr>
           <a:xfrm flipH="1">
-            <a:off x="4709160" y="3520440"/>
-            <a:ext cx="2773375" cy="0"/>
+            <a:off x="6214720" y="2441448"/>
+            <a:ext cx="905256" cy="0"/>
           </a:xfrm>
           <a:prstGeom prst="line">
             <a:avLst/>
@@ -2662,14 +3305,14 @@
       </p:sp>
       <p:sp>
         <p:nvSpPr>
-          <p:cNvPr id="29" name="Text 27"/>
-          <p:cNvSpPr txBox="1"/>
-          <p:nvPr/>
-        </p:nvSpPr>
-        <p:spPr>
-          <a:xfrm>
-            <a:off x="4709160" y="3566160"/>
-            <a:ext cx="2773375" cy="457200"/>
+          <p:cNvPr id="42" name="Text 40"/>
+          <p:cNvSpPr txBox="1"/>
+          <p:nvPr/>
+        </p:nvSpPr>
+        <p:spPr>
+          <a:xfrm>
+            <a:off x="6123280" y="1764792"/>
+            <a:ext cx="1234440" cy="274320"/>
           </a:xfrm>
           <a:prstGeom prst="rect">
             <a:avLst/>
@@ -2685,7 +3328,85 @@
               <a:buNone/>
             </a:pPr>
             <a:r>
-              <a:rPr lang="en-US" sz="900" dirty="0">
+              <a:rPr lang="en-US" sz="900" b="1" dirty="0">
+                <a:solidFill>
+                  <a:srgbClr val="1B2A41"/>
+                </a:solidFill>
+                <a:latin typeface="Malgun Gothic" pitchFamily="34" charset="0"/>
+                <a:ea typeface="Malgun Gothic" pitchFamily="34" charset="-122"/>
+                <a:cs typeface="Malgun Gothic" pitchFamily="34" charset="-120"/>
+              </a:rPr>
+              <a:t>TCP / gRPC :50051</a:t>
+            </a:r>
+            <a:endParaRPr lang="en-US" sz="900" dirty="0"/>
+          </a:p>
+        </p:txBody>
+      </p:sp>
+      <p:sp>
+        <p:nvSpPr>
+          <p:cNvPr id="43" name="Text 41"/>
+          <p:cNvSpPr txBox="1"/>
+          <p:nvPr/>
+        </p:nvSpPr>
+        <p:spPr>
+          <a:xfrm>
+            <a:off x="5940400" y="1947672"/>
+            <a:ext cx="1600200" cy="274320"/>
+          </a:xfrm>
+          <a:prstGeom prst="rect">
+            <a:avLst/>
+          </a:prstGeom>
+          <a:noFill/>
+          <a:ln/>
+        </p:spPr>
+        <p:txBody>
+          <a:bodyPr wrap="square" lIns="0" tIns="0" rIns="0" bIns="0" rtlCol="0" anchor="t"/>
+          <a:lstStyle/>
+          <a:p>
+            <a:pPr algn="ctr" indent="0" marL="0">
+              <a:buNone/>
+            </a:pPr>
+            <a:r>
+              <a:rPr lang="en-US" sz="850" dirty="0">
+                <a:solidFill>
+                  <a:srgbClr val="2A6FDB"/>
+                </a:solidFill>
+                <a:latin typeface="Malgun Gothic" pitchFamily="34" charset="0"/>
+                <a:ea typeface="Malgun Gothic" pitchFamily="34" charset="-122"/>
+                <a:cs typeface="Malgun Gothic" pitchFamily="34" charset="-120"/>
+              </a:rPr>
+              <a:t>요청 5~8 MB, ~1 Hz</a:t>
+            </a:r>
+            <a:endParaRPr lang="en-US" sz="850" dirty="0"/>
+          </a:p>
+        </p:txBody>
+      </p:sp>
+      <p:sp>
+        <p:nvSpPr>
+          <p:cNvPr id="44" name="Text 42"/>
+          <p:cNvSpPr txBox="1"/>
+          <p:nvPr/>
+        </p:nvSpPr>
+        <p:spPr>
+          <a:xfrm>
+            <a:off x="5940400" y="2459736"/>
+            <a:ext cx="1600200" cy="274320"/>
+          </a:xfrm>
+          <a:prstGeom prst="rect">
+            <a:avLst/>
+          </a:prstGeom>
+          <a:noFill/>
+          <a:ln/>
+        </p:spPr>
+        <p:txBody>
+          <a:bodyPr wrap="square" lIns="0" tIns="0" rIns="0" bIns="0" rtlCol="0" anchor="t"/>
+          <a:lstStyle/>
+          <a:p>
+            <a:pPr algn="ctr" indent="0" marL="0">
+              <a:buNone/>
+            </a:pPr>
+            <a:r>
+              <a:rPr lang="en-US" sz="850" dirty="0">
                 <a:solidFill>
                   <a:srgbClr val="E0762B"/>
                 </a:solidFill>
@@ -2693,1006 +3414,112 @@
                 <a:ea typeface="Malgun Gothic" pitchFamily="34" charset="-122"/>
                 <a:cs typeface="Malgun Gothic" pitchFamily="34" charset="-120"/>
               </a:rPr>
-              <a:t>응답: 궤적(64점×3D) + CoT / 답변</a:t>
-            </a:r>
-            <a:endParaRPr lang="en-US" sz="900" dirty="0"/>
-          </a:p>
-          <a:p>
-            <a:pPr algn="ctr" indent="0" marL="0">
-              <a:buNone/>
-            </a:pPr>
-            <a:r>
-              <a:rPr lang="en-US" sz="900" dirty="0">
-                <a:solidFill>
-                  <a:srgbClr val="E0762B"/>
-                </a:solidFill>
-                <a:latin typeface="Malgun Gothic" pitchFamily="34" charset="0"/>
-                <a:ea typeface="Malgun Gothic" pitchFamily="34" charset="-122"/>
-                <a:cs typeface="Malgun Gothic" pitchFamily="34" charset="-120"/>
-              </a:rPr>
-              <a:t>&lt; 10 KB</a:t>
-            </a:r>
-            <a:endParaRPr lang="en-US" sz="900" dirty="0"/>
-          </a:p>
-        </p:txBody>
-      </p:sp>
-      <p:sp>
-        <p:nvSpPr>
-          <p:cNvPr id="30" name="Text 28"/>
-          <p:cNvSpPr txBox="1"/>
-          <p:nvPr/>
-        </p:nvSpPr>
-        <p:spPr>
-          <a:xfrm>
-            <a:off x="548640" y="4572000"/>
-            <a:ext cx="11094415" cy="274320"/>
-          </a:xfrm>
-          <a:prstGeom prst="rect">
-            <a:avLst/>
-          </a:prstGeom>
-          <a:noFill/>
-          <a:ln/>
-        </p:spPr>
-        <p:txBody>
-          <a:bodyPr wrap="square" lIns="0" tIns="0" rIns="0" bIns="0" rtlCol="0" anchor="t"/>
-          <a:lstStyle/>
-          <a:p>
-            <a:pPr indent="0" marL="0">
-              <a:buNone/>
-            </a:pPr>
-            <a:r>
-              <a:rPr lang="en-US" sz="1100" b="1" dirty="0">
-                <a:solidFill>
-                  <a:srgbClr val="1B2A41"/>
-                </a:solidFill>
-                <a:latin typeface="Malgun Gothic" pitchFamily="34" charset="0"/>
-                <a:ea typeface="Malgun Gothic" pitchFamily="34" charset="-122"/>
-                <a:cs typeface="Malgun Gothic" pitchFamily="34" charset="-120"/>
-              </a:rPr>
-              <a:t>closed-loop 한 사이클 (약 1초마다 반복, 그 사이 시뮬레이터는 10 Hz로 계속 진행)</a:t>
-            </a:r>
-            <a:endParaRPr lang="en-US" sz="1100" dirty="0"/>
-          </a:p>
-        </p:txBody>
-      </p:sp>
-      <p:sp>
-        <p:nvSpPr>
-          <p:cNvPr id="31" name="Shape 29"/>
+              <a:t>응답 &lt; 10 KB</a:t>
+            </a:r>
+            <a:endParaRPr lang="en-US" sz="850" dirty="0"/>
+          </a:p>
+        </p:txBody>
+      </p:sp>
+      <p:sp>
+        <p:nvSpPr>
+          <p:cNvPr id="45" name="Shape 43"/>
           <p:cNvSpPr/>
           <p:nvPr/>
         </p:nvSpPr>
         <p:spPr>
           <a:xfrm>
-            <a:off x="548640" y="4892040"/>
-            <a:ext cx="2036003" cy="1143000"/>
-          </a:xfrm>
-          <a:prstGeom prst="roundRect">
-            <a:avLst>
-              <a:gd name="adj" fmla="val 6400"/>
-            </a:avLst>
-          </a:prstGeom>
-          <a:solidFill>
-            <a:srgbClr val="F3F5F8"/>
-          </a:solidFill>
-          <a:ln w="9525">
-            <a:solidFill>
-              <a:srgbClr val="2A6FDB"/>
-            </a:solidFill>
-            <a:prstDash val="solid"/>
-          </a:ln>
-        </p:spPr>
-      </p:sp>
-      <p:sp>
-        <p:nvSpPr>
-          <p:cNvPr id="32" name="Shape 30"/>
-          <p:cNvSpPr/>
-          <p:nvPr/>
-        </p:nvSpPr>
-        <p:spPr>
-          <a:xfrm>
-            <a:off x="658368" y="5001768"/>
-            <a:ext cx="310896" cy="310896"/>
-          </a:xfrm>
-          <a:prstGeom prst="ellipse">
-            <a:avLst/>
-          </a:prstGeom>
-          <a:solidFill>
-            <a:srgbClr val="2A6FDB"/>
-          </a:solidFill>
+            <a:off x="6214720" y="4809744"/>
+            <a:ext cx="905256" cy="0"/>
+          </a:xfrm>
+          <a:prstGeom prst="line">
+            <a:avLst/>
+          </a:prstGeom>
+          <a:noFill/>
           <a:ln w="12700">
-            <a:solidFill>
-              <a:srgbClr val="2A6FDB"/>
-            </a:solidFill>
-            <a:prstDash val="solid"/>
-          </a:ln>
-        </p:spPr>
-      </p:sp>
-      <p:sp>
-        <p:nvSpPr>
-          <p:cNvPr id="33" name="Text 31"/>
-          <p:cNvSpPr txBox="1"/>
-          <p:nvPr/>
-        </p:nvSpPr>
-        <p:spPr>
-          <a:xfrm>
-            <a:off x="658368" y="5001768"/>
-            <a:ext cx="310896" cy="310896"/>
-          </a:xfrm>
-          <a:prstGeom prst="rect">
-            <a:avLst/>
-          </a:prstGeom>
-          <a:noFill/>
-          <a:ln/>
-        </p:spPr>
-        <p:txBody>
-          <a:bodyPr wrap="square" lIns="0" tIns="0" rIns="0" bIns="0" rtlCol="0" anchor="ctr"/>
-          <a:lstStyle/>
-          <a:p>
-            <a:pPr algn="ctr" indent="0" marL="0">
-              <a:buNone/>
-            </a:pPr>
-            <a:r>
-              <a:rPr lang="en-US" sz="1100" b="1" dirty="0">
-                <a:solidFill>
-                  <a:srgbClr val="FFFFFF"/>
-                </a:solidFill>
-                <a:latin typeface="Malgun Gothic" pitchFamily="34" charset="0"/>
-                <a:ea typeface="Malgun Gothic" pitchFamily="34" charset="-122"/>
-                <a:cs typeface="Malgun Gothic" pitchFamily="34" charset="-120"/>
-              </a:rPr>
-              <a:t>1</a:t>
-            </a:r>
-            <a:endParaRPr lang="en-US" sz="1100" dirty="0"/>
-          </a:p>
-        </p:txBody>
-      </p:sp>
-      <p:sp>
-        <p:nvSpPr>
-          <p:cNvPr id="34" name="Text 32"/>
-          <p:cNvSpPr txBox="1"/>
-          <p:nvPr/>
-        </p:nvSpPr>
-        <p:spPr>
-          <a:xfrm>
-            <a:off x="1024128" y="4983480"/>
-            <a:ext cx="1469075" cy="347472"/>
-          </a:xfrm>
-          <a:prstGeom prst="rect">
-            <a:avLst/>
-          </a:prstGeom>
-          <a:noFill/>
-          <a:ln/>
-        </p:spPr>
-        <p:txBody>
-          <a:bodyPr wrap="square" lIns="0" tIns="0" rIns="0" bIns="0" rtlCol="0" anchor="ctr"/>
-          <a:lstStyle/>
-          <a:p>
-            <a:pPr indent="0" marL="0">
-              <a:buNone/>
-            </a:pPr>
-            <a:r>
-              <a:rPr lang="en-US" sz="1150" b="1" dirty="0">
-                <a:solidFill>
-                  <a:srgbClr val="2A6FDB"/>
-                </a:solidFill>
-                <a:latin typeface="Malgun Gothic" pitchFamily="34" charset="0"/>
-                <a:ea typeface="Malgun Gothic" pitchFamily="34" charset="-122"/>
-                <a:cs typeface="Malgun Gothic" pitchFamily="34" charset="-120"/>
-              </a:rPr>
-              <a:t>카메라 캡처</a:t>
-            </a:r>
-            <a:endParaRPr lang="en-US" sz="1150" dirty="0"/>
-          </a:p>
-        </p:txBody>
-      </p:sp>
-      <p:sp>
-        <p:nvSpPr>
-          <p:cNvPr id="35" name="Text 33"/>
-          <p:cNvSpPr txBox="1"/>
-          <p:nvPr/>
-        </p:nvSpPr>
-        <p:spPr>
-          <a:xfrm>
-            <a:off x="658368" y="5349240"/>
-            <a:ext cx="1816547" cy="612648"/>
-          </a:xfrm>
-          <a:prstGeom prst="rect">
-            <a:avLst/>
-          </a:prstGeom>
-          <a:noFill/>
-          <a:ln/>
-        </p:spPr>
-        <p:txBody>
-          <a:bodyPr wrap="square" lIns="0" tIns="0" rIns="0" bIns="0" rtlCol="0" anchor="t"/>
-          <a:lstStyle/>
-          <a:p>
-            <a:pPr indent="0" marL="0">
-              <a:buNone/>
-            </a:pPr>
-            <a:r>
-              <a:rPr lang="en-US" sz="950" dirty="0">
-                <a:solidFill>
-                  <a:srgbClr val="24313F"/>
-                </a:solidFill>
-                <a:latin typeface="Malgun Gothic" pitchFamily="34" charset="0"/>
-                <a:ea typeface="Malgun Gothic" pitchFamily="34" charset="-122"/>
-                <a:cs typeface="Malgun Gothic" pitchFamily="34" charset="-120"/>
-              </a:rPr>
-              <a:t>A: CARLA가 4대 카메라 최근 4프레임을 클라이언트에 전달</a:t>
-            </a:r>
-            <a:endParaRPr lang="en-US" sz="950" dirty="0"/>
-          </a:p>
-        </p:txBody>
-      </p:sp>
-      <p:sp>
-        <p:nvSpPr>
-          <p:cNvPr id="36" name="Shape 34"/>
-          <p:cNvSpPr/>
-          <p:nvPr/>
-        </p:nvSpPr>
-        <p:spPr>
-          <a:xfrm>
-            <a:off x="2612075" y="5463540"/>
-            <a:ext cx="173736" cy="0"/>
-          </a:xfrm>
-          <a:prstGeom prst="line">
-            <a:avLst/>
-          </a:prstGeom>
-          <a:noFill/>
-          <a:ln w="15875">
             <a:solidFill>
               <a:srgbClr val="6B7A8C"/>
             </a:solidFill>
-            <a:prstDash val="solid"/>
+            <a:prstDash val="dash"/>
+            <a:headEnd type="triangle"/>
             <a:tailEnd type="triangle"/>
           </a:ln>
         </p:spPr>
       </p:sp>
       <p:sp>
         <p:nvSpPr>
-          <p:cNvPr id="37" name="Shape 35"/>
-          <p:cNvSpPr/>
-          <p:nvPr/>
-        </p:nvSpPr>
-        <p:spPr>
-          <a:xfrm>
-            <a:off x="2813243" y="4892040"/>
-            <a:ext cx="2036003" cy="1143000"/>
-          </a:xfrm>
-          <a:prstGeom prst="roundRect">
-            <a:avLst>
-              <a:gd name="adj" fmla="val 6400"/>
-            </a:avLst>
-          </a:prstGeom>
-          <a:solidFill>
-            <a:srgbClr val="F3F5F8"/>
-          </a:solidFill>
-          <a:ln w="9525">
-            <a:solidFill>
-              <a:srgbClr val="2A6FDB"/>
-            </a:solidFill>
-            <a:prstDash val="solid"/>
-          </a:ln>
-        </p:spPr>
-      </p:sp>
-      <p:sp>
-        <p:nvSpPr>
-          <p:cNvPr id="38" name="Shape 36"/>
-          <p:cNvSpPr/>
-          <p:nvPr/>
-        </p:nvSpPr>
-        <p:spPr>
-          <a:xfrm>
-            <a:off x="2922971" y="5001768"/>
-            <a:ext cx="310896" cy="310896"/>
-          </a:xfrm>
-          <a:prstGeom prst="ellipse">
-            <a:avLst/>
-          </a:prstGeom>
-          <a:solidFill>
-            <a:srgbClr val="2A6FDB"/>
-          </a:solidFill>
-          <a:ln w="12700">
-            <a:solidFill>
-              <a:srgbClr val="2A6FDB"/>
-            </a:solidFill>
-            <a:prstDash val="solid"/>
-          </a:ln>
-        </p:spPr>
-      </p:sp>
-      <p:sp>
-        <p:nvSpPr>
-          <p:cNvPr id="39" name="Text 37"/>
-          <p:cNvSpPr txBox="1"/>
-          <p:nvPr/>
-        </p:nvSpPr>
-        <p:spPr>
-          <a:xfrm>
-            <a:off x="2922971" y="5001768"/>
-            <a:ext cx="310896" cy="310896"/>
-          </a:xfrm>
-          <a:prstGeom prst="rect">
-            <a:avLst/>
-          </a:prstGeom>
-          <a:noFill/>
-          <a:ln/>
-        </p:spPr>
-        <p:txBody>
-          <a:bodyPr wrap="square" lIns="0" tIns="0" rIns="0" bIns="0" rtlCol="0" anchor="ctr"/>
+          <p:cNvPr id="46" name="Text 44"/>
+          <p:cNvSpPr txBox="1"/>
+          <p:nvPr/>
+        </p:nvSpPr>
+        <p:spPr>
+          <a:xfrm>
+            <a:off x="5940400" y="4517136"/>
+            <a:ext cx="1600200" cy="274320"/>
+          </a:xfrm>
+          <a:prstGeom prst="rect">
+            <a:avLst/>
+          </a:prstGeom>
+          <a:noFill/>
+          <a:ln/>
+        </p:spPr>
+        <p:txBody>
+          <a:bodyPr wrap="square" lIns="0" tIns="0" rIns="0" bIns="0" rtlCol="0" anchor="t"/>
           <a:lstStyle/>
           <a:p>
             <a:pPr algn="ctr" indent="0" marL="0">
               <a:buNone/>
             </a:pPr>
             <a:r>
-              <a:rPr lang="en-US" sz="1100" b="1" dirty="0">
-                <a:solidFill>
-                  <a:srgbClr val="FFFFFF"/>
-                </a:solidFill>
-                <a:latin typeface="Malgun Gothic" pitchFamily="34" charset="0"/>
-                <a:ea typeface="Malgun Gothic" pitchFamily="34" charset="-122"/>
-                <a:cs typeface="Malgun Gothic" pitchFamily="34" charset="-120"/>
-              </a:rPr>
-              <a:t>2</a:t>
-            </a:r>
-            <a:endParaRPr lang="en-US" sz="1100" dirty="0"/>
-          </a:p>
-        </p:txBody>
-      </p:sp>
-      <p:sp>
-        <p:nvSpPr>
-          <p:cNvPr id="40" name="Text 38"/>
-          <p:cNvSpPr txBox="1"/>
-          <p:nvPr/>
-        </p:nvSpPr>
-        <p:spPr>
-          <a:xfrm>
-            <a:off x="3288731" y="4983480"/>
-            <a:ext cx="1469075" cy="347472"/>
-          </a:xfrm>
-          <a:prstGeom prst="rect">
-            <a:avLst/>
-          </a:prstGeom>
-          <a:noFill/>
-          <a:ln/>
-        </p:spPr>
-        <p:txBody>
-          <a:bodyPr wrap="square" lIns="0" tIns="0" rIns="0" bIns="0" rtlCol="0" anchor="ctr"/>
+              <a:rPr lang="en-US" sz="850" dirty="0">
+                <a:solidFill>
+                  <a:srgbClr val="6B7A8C"/>
+                </a:solidFill>
+                <a:latin typeface="Malgun Gothic" pitchFamily="34" charset="0"/>
+                <a:ea typeface="Malgun Gothic" pitchFamily="34" charset="-122"/>
+                <a:cs typeface="Malgun Gothic" pitchFamily="34" charset="-120"/>
+              </a:rPr>
+              <a:t>SSH · rsync/scp</a:t>
+            </a:r>
+            <a:endParaRPr lang="en-US" sz="850" dirty="0"/>
+          </a:p>
+        </p:txBody>
+      </p:sp>
+      <p:sp>
+        <p:nvSpPr>
+          <p:cNvPr id="47" name="Text 45"/>
+          <p:cNvSpPr txBox="1"/>
+          <p:nvPr/>
+        </p:nvSpPr>
+        <p:spPr>
+          <a:xfrm>
+            <a:off x="548640" y="5952744"/>
+            <a:ext cx="11094415" cy="365760"/>
+          </a:xfrm>
+          <a:prstGeom prst="rect">
+            <a:avLst/>
+          </a:prstGeom>
+          <a:noFill/>
+          <a:ln/>
+        </p:spPr>
+        <p:txBody>
+          <a:bodyPr wrap="square" lIns="0" tIns="0" rIns="0" bIns="0" rtlCol="0" anchor="t"/>
           <a:lstStyle/>
           <a:p>
             <a:pPr indent="0" marL="0">
               <a:buNone/>
             </a:pPr>
             <a:r>
-              <a:rPr lang="en-US" sz="1150" b="1" dirty="0">
-                <a:solidFill>
-                  <a:srgbClr val="2A6FDB"/>
-                </a:solidFill>
-                <a:latin typeface="Malgun Gothic" pitchFamily="34" charset="0"/>
-                <a:ea typeface="Malgun Gothic" pitchFamily="34" charset="-122"/>
-                <a:cs typeface="Malgun Gothic" pitchFamily="34" charset="-120"/>
-              </a:rPr>
-              <a:t>인코딩·전송</a:t>
-            </a:r>
-            <a:endParaRPr lang="en-US" sz="1150" dirty="0"/>
-          </a:p>
-        </p:txBody>
-      </p:sp>
-      <p:sp>
-        <p:nvSpPr>
-          <p:cNvPr id="41" name="Text 39"/>
-          <p:cNvSpPr txBox="1"/>
-          <p:nvPr/>
-        </p:nvSpPr>
-        <p:spPr>
-          <a:xfrm>
-            <a:off x="2922971" y="5349240"/>
-            <a:ext cx="1816547" cy="612648"/>
-          </a:xfrm>
-          <a:prstGeom prst="rect">
-            <a:avLst/>
-          </a:prstGeom>
-          <a:noFill/>
-          <a:ln/>
-        </p:spPr>
-        <p:txBody>
-          <a:bodyPr wrap="square" lIns="0" tIns="0" rIns="0" bIns="0" rtlCol="0" anchor="t"/>
-          <a:lstStyle/>
-          <a:p>
-            <a:pPr indent="0" marL="0">
-              <a:buNone/>
-            </a:pPr>
-            <a:r>
-              <a:rPr lang="en-US" sz="950" dirty="0">
-                <a:solidFill>
-                  <a:srgbClr val="24313F"/>
-                </a:solidFill>
-                <a:latin typeface="Malgun Gothic" pitchFamily="34" charset="0"/>
-                <a:ea typeface="Malgun Gothic" pitchFamily="34" charset="-122"/>
-                <a:cs typeface="Malgun Gothic" pitchFamily="34" charset="-120"/>
-              </a:rPr>
-              <a:t>A: JPEG로 압축해 자차 이력·프롬프트와 함께 gRPC 요청</a:t>
-            </a:r>
-            <a:endParaRPr lang="en-US" sz="950" dirty="0"/>
-          </a:p>
-        </p:txBody>
-      </p:sp>
-      <p:sp>
-        <p:nvSpPr>
-          <p:cNvPr id="42" name="Shape 40"/>
-          <p:cNvSpPr/>
-          <p:nvPr/>
-        </p:nvSpPr>
-        <p:spPr>
-          <a:xfrm>
-            <a:off x="4876678" y="5463540"/>
-            <a:ext cx="173736" cy="0"/>
-          </a:xfrm>
-          <a:prstGeom prst="line">
-            <a:avLst/>
-          </a:prstGeom>
-          <a:noFill/>
-          <a:ln w="15875">
-            <a:solidFill>
-              <a:srgbClr val="6B7A8C"/>
-            </a:solidFill>
-            <a:prstDash val="solid"/>
-            <a:tailEnd type="triangle"/>
-          </a:ln>
-        </p:spPr>
-      </p:sp>
-      <p:sp>
-        <p:nvSpPr>
-          <p:cNvPr id="43" name="Shape 41"/>
-          <p:cNvSpPr/>
-          <p:nvPr/>
-        </p:nvSpPr>
-        <p:spPr>
-          <a:xfrm>
-            <a:off x="5077846" y="4892040"/>
-            <a:ext cx="2036003" cy="1143000"/>
-          </a:xfrm>
-          <a:prstGeom prst="roundRect">
-            <a:avLst>
-              <a:gd name="adj" fmla="val 6400"/>
-            </a:avLst>
-          </a:prstGeom>
-          <a:solidFill>
-            <a:srgbClr val="F3F5F8"/>
-          </a:solidFill>
-          <a:ln w="9525">
-            <a:solidFill>
-              <a:srgbClr val="E0762B"/>
-            </a:solidFill>
-            <a:prstDash val="solid"/>
-          </a:ln>
-        </p:spPr>
-      </p:sp>
-      <p:sp>
-        <p:nvSpPr>
-          <p:cNvPr id="44" name="Shape 42"/>
-          <p:cNvSpPr/>
-          <p:nvPr/>
-        </p:nvSpPr>
-        <p:spPr>
-          <a:xfrm>
-            <a:off x="5187574" y="5001768"/>
-            <a:ext cx="310896" cy="310896"/>
-          </a:xfrm>
-          <a:prstGeom prst="ellipse">
-            <a:avLst/>
-          </a:prstGeom>
-          <a:solidFill>
-            <a:srgbClr val="E0762B"/>
-          </a:solidFill>
-          <a:ln w="12700">
-            <a:solidFill>
-              <a:srgbClr val="E0762B"/>
-            </a:solidFill>
-            <a:prstDash val="solid"/>
-          </a:ln>
-        </p:spPr>
-      </p:sp>
-      <p:sp>
-        <p:nvSpPr>
-          <p:cNvPr id="45" name="Text 43"/>
-          <p:cNvSpPr txBox="1"/>
-          <p:nvPr/>
-        </p:nvSpPr>
-        <p:spPr>
-          <a:xfrm>
-            <a:off x="5187574" y="5001768"/>
-            <a:ext cx="310896" cy="310896"/>
-          </a:xfrm>
-          <a:prstGeom prst="rect">
-            <a:avLst/>
-          </a:prstGeom>
-          <a:noFill/>
-          <a:ln/>
-        </p:spPr>
-        <p:txBody>
-          <a:bodyPr wrap="square" lIns="0" tIns="0" rIns="0" bIns="0" rtlCol="0" anchor="ctr"/>
-          <a:lstStyle/>
-          <a:p>
-            <a:pPr algn="ctr" indent="0" marL="0">
-              <a:buNone/>
-            </a:pPr>
-            <a:r>
-              <a:rPr lang="en-US" sz="1100" b="1" dirty="0">
-                <a:solidFill>
-                  <a:srgbClr val="FFFFFF"/>
-                </a:solidFill>
-                <a:latin typeface="Malgun Gothic" pitchFamily="34" charset="0"/>
-                <a:ea typeface="Malgun Gothic" pitchFamily="34" charset="-122"/>
-                <a:cs typeface="Malgun Gothic" pitchFamily="34" charset="-120"/>
-              </a:rPr>
-              <a:t>3</a:t>
-            </a:r>
-            <a:endParaRPr lang="en-US" sz="1100" dirty="0"/>
-          </a:p>
-        </p:txBody>
-      </p:sp>
-      <p:sp>
-        <p:nvSpPr>
-          <p:cNvPr id="46" name="Text 44"/>
-          <p:cNvSpPr txBox="1"/>
-          <p:nvPr/>
-        </p:nvSpPr>
-        <p:spPr>
-          <a:xfrm>
-            <a:off x="5553334" y="4983480"/>
-            <a:ext cx="1469075" cy="347472"/>
-          </a:xfrm>
-          <a:prstGeom prst="rect">
-            <a:avLst/>
-          </a:prstGeom>
-          <a:noFill/>
-          <a:ln/>
-        </p:spPr>
-        <p:txBody>
-          <a:bodyPr wrap="square" lIns="0" tIns="0" rIns="0" bIns="0" rtlCol="0" anchor="ctr"/>
-          <a:lstStyle/>
-          <a:p>
-            <a:pPr indent="0" marL="0">
-              <a:buNone/>
-            </a:pPr>
-            <a:r>
-              <a:rPr lang="en-US" sz="1150" b="1" dirty="0">
-                <a:solidFill>
-                  <a:srgbClr val="E0762B"/>
-                </a:solidFill>
-                <a:latin typeface="Malgun Gothic" pitchFamily="34" charset="0"/>
-                <a:ea typeface="Malgun Gothic" pitchFamily="34" charset="-122"/>
-                <a:cs typeface="Malgun Gothic" pitchFamily="34" charset="-120"/>
-              </a:rPr>
-              <a:t>추론</a:t>
-            </a:r>
-            <a:endParaRPr lang="en-US" sz="1150" dirty="0"/>
-          </a:p>
-        </p:txBody>
-      </p:sp>
-      <p:sp>
-        <p:nvSpPr>
-          <p:cNvPr id="47" name="Text 45"/>
-          <p:cNvSpPr txBox="1"/>
-          <p:nvPr/>
-        </p:nvSpPr>
-        <p:spPr>
-          <a:xfrm>
-            <a:off x="5187574" y="5349240"/>
-            <a:ext cx="1816547" cy="612648"/>
-          </a:xfrm>
-          <a:prstGeom prst="rect">
-            <a:avLst/>
-          </a:prstGeom>
-          <a:noFill/>
-          <a:ln/>
-        </p:spPr>
-        <p:txBody>
-          <a:bodyPr wrap="square" lIns="0" tIns="0" rIns="0" bIns="0" rtlCol="0" anchor="t"/>
-          <a:lstStyle/>
-          <a:p>
-            <a:pPr indent="0" marL="0">
-              <a:buNone/>
-            </a:pPr>
-            <a:r>
-              <a:rPr lang="en-US" sz="950" dirty="0">
-                <a:solidFill>
-                  <a:srgbClr val="24313F"/>
-                </a:solidFill>
-                <a:latin typeface="Malgun Gothic" pitchFamily="34" charset="0"/>
-                <a:ea typeface="Malgun Gothic" pitchFamily="34" charset="-122"/>
-                <a:cs typeface="Malgun Gothic" pitchFamily="34" charset="-120"/>
-              </a:rPr>
-              <a:t>B: 이미지 디코딩 → Alpamayo 1.5 → 궤적 64점 + CoT</a:t>
-            </a:r>
-            <a:endParaRPr lang="en-US" sz="950" dirty="0"/>
-          </a:p>
-        </p:txBody>
-      </p:sp>
-      <p:sp>
-        <p:nvSpPr>
-          <p:cNvPr id="48" name="Shape 46"/>
-          <p:cNvSpPr/>
-          <p:nvPr/>
-        </p:nvSpPr>
-        <p:spPr>
-          <a:xfrm>
-            <a:off x="7141281" y="5463540"/>
-            <a:ext cx="173736" cy="0"/>
-          </a:xfrm>
-          <a:prstGeom prst="line">
-            <a:avLst/>
-          </a:prstGeom>
-          <a:noFill/>
-          <a:ln w="15875">
-            <a:solidFill>
-              <a:srgbClr val="6B7A8C"/>
-            </a:solidFill>
-            <a:prstDash val="solid"/>
-            <a:tailEnd type="triangle"/>
-          </a:ln>
-        </p:spPr>
-      </p:sp>
-      <p:sp>
-        <p:nvSpPr>
-          <p:cNvPr id="49" name="Shape 47"/>
-          <p:cNvSpPr/>
-          <p:nvPr/>
-        </p:nvSpPr>
-        <p:spPr>
-          <a:xfrm>
-            <a:off x="7342449" y="4892040"/>
-            <a:ext cx="2036003" cy="1143000"/>
-          </a:xfrm>
-          <a:prstGeom prst="roundRect">
-            <a:avLst>
-              <a:gd name="adj" fmla="val 6400"/>
-            </a:avLst>
-          </a:prstGeom>
-          <a:solidFill>
-            <a:srgbClr val="F3F5F8"/>
-          </a:solidFill>
-          <a:ln w="9525">
-            <a:solidFill>
-              <a:srgbClr val="E0762B"/>
-            </a:solidFill>
-            <a:prstDash val="solid"/>
-          </a:ln>
-        </p:spPr>
-      </p:sp>
-      <p:sp>
-        <p:nvSpPr>
-          <p:cNvPr id="50" name="Shape 48"/>
-          <p:cNvSpPr/>
-          <p:nvPr/>
-        </p:nvSpPr>
-        <p:spPr>
-          <a:xfrm>
-            <a:off x="7452177" y="5001768"/>
-            <a:ext cx="310896" cy="310896"/>
-          </a:xfrm>
-          <a:prstGeom prst="ellipse">
-            <a:avLst/>
-          </a:prstGeom>
-          <a:solidFill>
-            <a:srgbClr val="E0762B"/>
-          </a:solidFill>
-          <a:ln w="12700">
-            <a:solidFill>
-              <a:srgbClr val="E0762B"/>
-            </a:solidFill>
-            <a:prstDash val="solid"/>
-          </a:ln>
-        </p:spPr>
-      </p:sp>
-      <p:sp>
-        <p:nvSpPr>
-          <p:cNvPr id="51" name="Text 49"/>
-          <p:cNvSpPr txBox="1"/>
-          <p:nvPr/>
-        </p:nvSpPr>
-        <p:spPr>
-          <a:xfrm>
-            <a:off x="7452177" y="5001768"/>
-            <a:ext cx="310896" cy="310896"/>
-          </a:xfrm>
-          <a:prstGeom prst="rect">
-            <a:avLst/>
-          </a:prstGeom>
-          <a:noFill/>
-          <a:ln/>
-        </p:spPr>
-        <p:txBody>
-          <a:bodyPr wrap="square" lIns="0" tIns="0" rIns="0" bIns="0" rtlCol="0" anchor="ctr"/>
-          <a:lstStyle/>
-          <a:p>
-            <a:pPr algn="ctr" indent="0" marL="0">
-              <a:buNone/>
-            </a:pPr>
-            <a:r>
-              <a:rPr lang="en-US" sz="1100" b="1" dirty="0">
-                <a:solidFill>
-                  <a:srgbClr val="FFFFFF"/>
-                </a:solidFill>
-                <a:latin typeface="Malgun Gothic" pitchFamily="34" charset="0"/>
-                <a:ea typeface="Malgun Gothic" pitchFamily="34" charset="-122"/>
-                <a:cs typeface="Malgun Gothic" pitchFamily="34" charset="-120"/>
-              </a:rPr>
-              <a:t>4</a:t>
-            </a:r>
-            <a:endParaRPr lang="en-US" sz="1100" dirty="0"/>
-          </a:p>
-        </p:txBody>
-      </p:sp>
-      <p:sp>
-        <p:nvSpPr>
-          <p:cNvPr id="52" name="Text 50"/>
-          <p:cNvSpPr txBox="1"/>
-          <p:nvPr/>
-        </p:nvSpPr>
-        <p:spPr>
-          <a:xfrm>
-            <a:off x="7817937" y="4983480"/>
-            <a:ext cx="1469075" cy="347472"/>
-          </a:xfrm>
-          <a:prstGeom prst="rect">
-            <a:avLst/>
-          </a:prstGeom>
-          <a:noFill/>
-          <a:ln/>
-        </p:spPr>
-        <p:txBody>
-          <a:bodyPr wrap="square" lIns="0" tIns="0" rIns="0" bIns="0" rtlCol="0" anchor="ctr"/>
-          <a:lstStyle/>
-          <a:p>
-            <a:pPr indent="0" marL="0">
-              <a:buNone/>
-            </a:pPr>
-            <a:r>
-              <a:rPr lang="en-US" sz="1150" b="1" dirty="0">
-                <a:solidFill>
-                  <a:srgbClr val="E0762B"/>
-                </a:solidFill>
-                <a:latin typeface="Malgun Gothic" pitchFamily="34" charset="0"/>
-                <a:ea typeface="Malgun Gothic" pitchFamily="34" charset="-122"/>
-                <a:cs typeface="Malgun Gothic" pitchFamily="34" charset="-120"/>
-              </a:rPr>
-              <a:t>궤적 회신</a:t>
-            </a:r>
-            <a:endParaRPr lang="en-US" sz="1150" dirty="0"/>
-          </a:p>
-        </p:txBody>
-      </p:sp>
-      <p:sp>
-        <p:nvSpPr>
-          <p:cNvPr id="53" name="Text 51"/>
-          <p:cNvSpPr txBox="1"/>
-          <p:nvPr/>
-        </p:nvSpPr>
-        <p:spPr>
-          <a:xfrm>
-            <a:off x="7452177" y="5349240"/>
-            <a:ext cx="1816547" cy="612648"/>
-          </a:xfrm>
-          <a:prstGeom prst="rect">
-            <a:avLst/>
-          </a:prstGeom>
-          <a:noFill/>
-          <a:ln/>
-        </p:spPr>
-        <p:txBody>
-          <a:bodyPr wrap="square" lIns="0" tIns="0" rIns="0" bIns="0" rtlCol="0" anchor="t"/>
-          <a:lstStyle/>
-          <a:p>
-            <a:pPr indent="0" marL="0">
-              <a:buNone/>
-            </a:pPr>
-            <a:r>
-              <a:rPr lang="en-US" sz="950" dirty="0">
-                <a:solidFill>
-                  <a:srgbClr val="24313F"/>
-                </a:solidFill>
-                <a:latin typeface="Malgun Gothic" pitchFamily="34" charset="0"/>
-                <a:ea typeface="Malgun Gothic" pitchFamily="34" charset="-122"/>
-                <a:cs typeface="Malgun Gothic" pitchFamily="34" charset="-120"/>
-              </a:rPr>
-              <a:t>B → A: 수 KB 응답. 너무 오래된 궤적은 폐기(안전장치)</a:t>
-            </a:r>
-            <a:endParaRPr lang="en-US" sz="950" dirty="0"/>
-          </a:p>
-        </p:txBody>
-      </p:sp>
-      <p:sp>
-        <p:nvSpPr>
-          <p:cNvPr id="54" name="Shape 52"/>
-          <p:cNvSpPr/>
-          <p:nvPr/>
-        </p:nvSpPr>
-        <p:spPr>
-          <a:xfrm>
-            <a:off x="9405884" y="5463540"/>
-            <a:ext cx="173736" cy="0"/>
-          </a:xfrm>
-          <a:prstGeom prst="line">
-            <a:avLst/>
-          </a:prstGeom>
-          <a:noFill/>
-          <a:ln w="15875">
-            <a:solidFill>
-              <a:srgbClr val="6B7A8C"/>
-            </a:solidFill>
-            <a:prstDash val="solid"/>
-            <a:tailEnd type="triangle"/>
-          </a:ln>
-        </p:spPr>
-      </p:sp>
-      <p:sp>
-        <p:nvSpPr>
-          <p:cNvPr id="55" name="Shape 53"/>
-          <p:cNvSpPr/>
-          <p:nvPr/>
-        </p:nvSpPr>
-        <p:spPr>
-          <a:xfrm>
-            <a:off x="9607052" y="4892040"/>
-            <a:ext cx="2036003" cy="1143000"/>
-          </a:xfrm>
-          <a:prstGeom prst="roundRect">
-            <a:avLst>
-              <a:gd name="adj" fmla="val 6400"/>
-            </a:avLst>
-          </a:prstGeom>
-          <a:solidFill>
-            <a:srgbClr val="F3F5F8"/>
-          </a:solidFill>
-          <a:ln w="9525">
-            <a:solidFill>
-              <a:srgbClr val="2A6FDB"/>
-            </a:solidFill>
-            <a:prstDash val="solid"/>
-          </a:ln>
-        </p:spPr>
-      </p:sp>
-      <p:sp>
-        <p:nvSpPr>
-          <p:cNvPr id="56" name="Shape 54"/>
-          <p:cNvSpPr/>
-          <p:nvPr/>
-        </p:nvSpPr>
-        <p:spPr>
-          <a:xfrm>
-            <a:off x="9716780" y="5001768"/>
-            <a:ext cx="310896" cy="310896"/>
-          </a:xfrm>
-          <a:prstGeom prst="ellipse">
-            <a:avLst/>
-          </a:prstGeom>
-          <a:solidFill>
-            <a:srgbClr val="2A6FDB"/>
-          </a:solidFill>
-          <a:ln w="12700">
-            <a:solidFill>
-              <a:srgbClr val="2A6FDB"/>
-            </a:solidFill>
-            <a:prstDash val="solid"/>
-          </a:ln>
-        </p:spPr>
-      </p:sp>
-      <p:sp>
-        <p:nvSpPr>
-          <p:cNvPr id="57" name="Text 55"/>
-          <p:cNvSpPr txBox="1"/>
-          <p:nvPr/>
-        </p:nvSpPr>
-        <p:spPr>
-          <a:xfrm>
-            <a:off x="9716780" y="5001768"/>
-            <a:ext cx="310896" cy="310896"/>
-          </a:xfrm>
-          <a:prstGeom prst="rect">
-            <a:avLst/>
-          </a:prstGeom>
-          <a:noFill/>
-          <a:ln/>
-        </p:spPr>
-        <p:txBody>
-          <a:bodyPr wrap="square" lIns="0" tIns="0" rIns="0" bIns="0" rtlCol="0" anchor="ctr"/>
-          <a:lstStyle/>
-          <a:p>
-            <a:pPr algn="ctr" indent="0" marL="0">
-              <a:buNone/>
-            </a:pPr>
-            <a:r>
-              <a:rPr lang="en-US" sz="1100" b="1" dirty="0">
-                <a:solidFill>
-                  <a:srgbClr val="FFFFFF"/>
-                </a:solidFill>
-                <a:latin typeface="Malgun Gothic" pitchFamily="34" charset="0"/>
-                <a:ea typeface="Malgun Gothic" pitchFamily="34" charset="-122"/>
-                <a:cs typeface="Malgun Gothic" pitchFamily="34" charset="-120"/>
-              </a:rPr>
-              <a:t>5</a:t>
-            </a:r>
-            <a:endParaRPr lang="en-US" sz="1100" dirty="0"/>
-          </a:p>
-        </p:txBody>
-      </p:sp>
-      <p:sp>
-        <p:nvSpPr>
-          <p:cNvPr id="58" name="Text 56"/>
-          <p:cNvSpPr txBox="1"/>
-          <p:nvPr/>
-        </p:nvSpPr>
-        <p:spPr>
-          <a:xfrm>
-            <a:off x="10082540" y="4983480"/>
-            <a:ext cx="1469075" cy="347472"/>
-          </a:xfrm>
-          <a:prstGeom prst="rect">
-            <a:avLst/>
-          </a:prstGeom>
-          <a:noFill/>
-          <a:ln/>
-        </p:spPr>
-        <p:txBody>
-          <a:bodyPr wrap="square" lIns="0" tIns="0" rIns="0" bIns="0" rtlCol="0" anchor="ctr"/>
-          <a:lstStyle/>
-          <a:p>
-            <a:pPr indent="0" marL="0">
-              <a:buNone/>
-            </a:pPr>
-            <a:r>
-              <a:rPr lang="en-US" sz="1150" b="1" dirty="0">
-                <a:solidFill>
-                  <a:srgbClr val="2A6FDB"/>
-                </a:solidFill>
-                <a:latin typeface="Malgun Gothic" pitchFamily="34" charset="0"/>
-                <a:ea typeface="Malgun Gothic" pitchFamily="34" charset="-122"/>
-                <a:cs typeface="Malgun Gothic" pitchFamily="34" charset="-120"/>
-              </a:rPr>
-              <a:t>PID 제어</a:t>
-            </a:r>
-            <a:endParaRPr lang="en-US" sz="1150" dirty="0"/>
-          </a:p>
-        </p:txBody>
-      </p:sp>
-      <p:sp>
-        <p:nvSpPr>
-          <p:cNvPr id="59" name="Text 57"/>
-          <p:cNvSpPr txBox="1"/>
-          <p:nvPr/>
-        </p:nvSpPr>
-        <p:spPr>
-          <a:xfrm>
-            <a:off x="9716780" y="5349240"/>
-            <a:ext cx="1816547" cy="612648"/>
-          </a:xfrm>
-          <a:prstGeom prst="rect">
-            <a:avLst/>
-          </a:prstGeom>
-          <a:noFill/>
-          <a:ln/>
-        </p:spPr>
-        <p:txBody>
-          <a:bodyPr wrap="square" lIns="0" tIns="0" rIns="0" bIns="0" rtlCol="0" anchor="t"/>
-          <a:lstStyle/>
-          <a:p>
-            <a:pPr indent="0" marL="0">
-              <a:buNone/>
-            </a:pPr>
-            <a:r>
-              <a:rPr lang="en-US" sz="950" dirty="0">
-                <a:solidFill>
-                  <a:srgbClr val="24313F"/>
-                </a:solidFill>
-                <a:latin typeface="Malgun Gothic" pitchFamily="34" charset="0"/>
-                <a:ea typeface="Malgun Gothic" pitchFamily="34" charset="-122"/>
-                <a:cs typeface="Malgun Gothic" pitchFamily="34" charset="-120"/>
-              </a:rPr>
-              <a:t>A: 궤적을 따라 조향·가감속 → CARLA tick → 다음 장면</a:t>
-            </a:r>
-            <a:endParaRPr lang="en-US" sz="950" dirty="0"/>
+              <a:rPr lang="en-US" sz="1050" dirty="0">
+                <a:solidFill>
+                  <a:srgbClr val="6B7A8C"/>
+                </a:solidFill>
+                <a:latin typeface="Malgun Gothic" pitchFamily="34" charset="0"/>
+                <a:ea typeface="Malgun Gothic" pitchFamily="34" charset="-122"/>
+                <a:cs typeface="Malgun Gothic" pitchFamily="34" charset="-120"/>
+              </a:rPr>
+              <a:t>A에는 모델도 torch도 없고, B에는 CARLA도 pygame도 없다. 두 호스트가 공유하는 것은 gRPC 계약(.proto)과 실행 결과 폴더 이름(run_id)뿐이다.</a:t>
+            </a:r>
+            <a:endParaRPr lang="en-US" sz="1050" dirty="0"/>
           </a:p>
         </p:txBody>
       </p:sp>
@@ -3761,7 +3588,7 @@
                 <a:ea typeface="Malgun Gothic" pitchFamily="34" charset="-122"/>
                 <a:cs typeface="Malgun Gothic" pitchFamily="34" charset="-120"/>
               </a:rPr>
-              <a:t>공식 Alpamayo open-loop 테스트 환경과의 비교</a:t>
+              <a:t>배포 다이어그램과 closed-loop 한 사이클</a:t>
             </a:r>
             <a:endParaRPr lang="en-US" sz="2800" dirty="0"/>
           </a:p>
@@ -3800,7 +3627,7 @@
                 <a:ea typeface="Malgun Gothic" pitchFamily="34" charset="-122"/>
                 <a:cs typeface="Malgun Gothic" pitchFamily="34" charset="-120"/>
               </a:rPr>
-              <a:t>같은 모델(Alpamayo 1.5)을 '공식 노트북의 녹화 클립 재생·평가'에서 '실시간 주행·물리 분리'로 옮겼다</a:t>
+              <a:t>①~④가 약 1초마다 반복된다. 그 사이 시뮬레이터는 10 Hz로 계속 진행하고, 응답(③)은 요청(②)과 같은 gRPC 연결로 돌아온다</a:t>
             </a:r>
             <a:endParaRPr lang="en-US" sz="1400" dirty="0"/>
           </a:p>
@@ -3884,9 +3711,1008 @@
           </a:p>
         </p:txBody>
       </p:sp>
+      <p:pic>
+        <p:nvPicPr>
+          <p:cNvPr id="6" name="Image 0" descr="split-deployment.png">    </p:cNvPr>
+          <p:cNvPicPr>
+            <a:picLocks noChangeAspect="1"/>
+          </p:cNvPicPr>
+          <p:nvPr/>
+        </p:nvPicPr>
+        <p:blipFill>
+          <a:blip r:embed="rId1"/>
+          <a:stretch>
+            <a:fillRect/>
+          </a:stretch>
+        </p:blipFill>
+        <p:spPr>
+          <a:xfrm>
+            <a:off x="548640" y="1371600"/>
+            <a:ext cx="11094415" cy="1952843"/>
+          </a:xfrm>
+          <a:prstGeom prst="rect">
+            <a:avLst/>
+          </a:prstGeom>
+        </p:spPr>
+      </p:pic>
+      <p:sp>
+        <p:nvSpPr>
+          <p:cNvPr id="7" name="Shape 4"/>
+          <p:cNvSpPr/>
+          <p:nvPr/>
+        </p:nvSpPr>
+        <p:spPr>
+          <a:xfrm>
+            <a:off x="548640" y="3644483"/>
+            <a:ext cx="2602154" cy="1188720"/>
+          </a:xfrm>
+          <a:prstGeom prst="roundRect">
+            <a:avLst>
+              <a:gd name="adj" fmla="val 6154"/>
+            </a:avLst>
+          </a:prstGeom>
+          <a:solidFill>
+            <a:srgbClr val="F3F5F8"/>
+          </a:solidFill>
+          <a:ln w="9525">
+            <a:solidFill>
+              <a:srgbClr val="2A6FDB"/>
+            </a:solidFill>
+            <a:prstDash val="solid"/>
+          </a:ln>
+        </p:spPr>
+      </p:sp>
+      <p:sp>
+        <p:nvSpPr>
+          <p:cNvPr id="8" name="Shape 5"/>
+          <p:cNvSpPr/>
+          <p:nvPr/>
+        </p:nvSpPr>
+        <p:spPr>
+          <a:xfrm>
+            <a:off x="658368" y="3754211"/>
+            <a:ext cx="310896" cy="310896"/>
+          </a:xfrm>
+          <a:prstGeom prst="ellipse">
+            <a:avLst/>
+          </a:prstGeom>
+          <a:solidFill>
+            <a:srgbClr val="2A6FDB"/>
+          </a:solidFill>
+          <a:ln w="12700">
+            <a:solidFill>
+              <a:srgbClr val="2A6FDB"/>
+            </a:solidFill>
+            <a:prstDash val="solid"/>
+          </a:ln>
+        </p:spPr>
+      </p:sp>
+      <p:sp>
+        <p:nvSpPr>
+          <p:cNvPr id="9" name="Text 6"/>
+          <p:cNvSpPr txBox="1"/>
+          <p:nvPr/>
+        </p:nvSpPr>
+        <p:spPr>
+          <a:xfrm>
+            <a:off x="658368" y="3754211"/>
+            <a:ext cx="310896" cy="310896"/>
+          </a:xfrm>
+          <a:prstGeom prst="rect">
+            <a:avLst/>
+          </a:prstGeom>
+          <a:noFill/>
+          <a:ln/>
+        </p:spPr>
+        <p:txBody>
+          <a:bodyPr wrap="square" lIns="0" tIns="0" rIns="0" bIns="0" rtlCol="0" anchor="ctr"/>
+          <a:lstStyle/>
+          <a:p>
+            <a:pPr algn="ctr" indent="0" marL="0">
+              <a:buNone/>
+            </a:pPr>
+            <a:r>
+              <a:rPr lang="en-US" sz="1100" b="1" dirty="0">
+                <a:solidFill>
+                  <a:srgbClr val="FFFFFF"/>
+                </a:solidFill>
+                <a:latin typeface="Malgun Gothic" pitchFamily="34" charset="0"/>
+                <a:ea typeface="Malgun Gothic" pitchFamily="34" charset="-122"/>
+                <a:cs typeface="Malgun Gothic" pitchFamily="34" charset="-120"/>
+              </a:rPr>
+              <a:t>1</a:t>
+            </a:r>
+            <a:endParaRPr lang="en-US" sz="1100" dirty="0"/>
+          </a:p>
+        </p:txBody>
+      </p:sp>
+      <p:sp>
+        <p:nvSpPr>
+          <p:cNvPr id="10" name="Text 7"/>
+          <p:cNvSpPr txBox="1"/>
+          <p:nvPr/>
+        </p:nvSpPr>
+        <p:spPr>
+          <a:xfrm>
+            <a:off x="1024128" y="3735923"/>
+            <a:ext cx="2035226" cy="347472"/>
+          </a:xfrm>
+          <a:prstGeom prst="rect">
+            <a:avLst/>
+          </a:prstGeom>
+          <a:noFill/>
+          <a:ln/>
+        </p:spPr>
+        <p:txBody>
+          <a:bodyPr wrap="square" lIns="0" tIns="0" rIns="0" bIns="0" rtlCol="0" anchor="ctr"/>
+          <a:lstStyle/>
+          <a:p>
+            <a:pPr indent="0" marL="0">
+              <a:buNone/>
+            </a:pPr>
+            <a:r>
+              <a:rPr lang="en-US" sz="1150" b="1" dirty="0">
+                <a:solidFill>
+                  <a:srgbClr val="2A6FDB"/>
+                </a:solidFill>
+                <a:latin typeface="Malgun Gothic" pitchFamily="34" charset="0"/>
+                <a:ea typeface="Malgun Gothic" pitchFamily="34" charset="-122"/>
+                <a:cs typeface="Malgun Gothic" pitchFamily="34" charset="-120"/>
+              </a:rPr>
+              <a:t>카메라 캡처</a:t>
+            </a:r>
+            <a:endParaRPr lang="en-US" sz="1150" dirty="0"/>
+          </a:p>
+        </p:txBody>
+      </p:sp>
+      <p:sp>
+        <p:nvSpPr>
+          <p:cNvPr id="11" name="Text 8"/>
+          <p:cNvSpPr txBox="1"/>
+          <p:nvPr/>
+        </p:nvSpPr>
+        <p:spPr>
+          <a:xfrm>
+            <a:off x="658368" y="4101683"/>
+            <a:ext cx="2382698" cy="658368"/>
+          </a:xfrm>
+          <a:prstGeom prst="rect">
+            <a:avLst/>
+          </a:prstGeom>
+          <a:noFill/>
+          <a:ln/>
+        </p:spPr>
+        <p:txBody>
+          <a:bodyPr wrap="square" lIns="0" tIns="0" rIns="0" bIns="0" rtlCol="0" anchor="t"/>
+          <a:lstStyle/>
+          <a:p>
+            <a:pPr indent="0" marL="0">
+              <a:buNone/>
+            </a:pPr>
+            <a:r>
+              <a:rPr lang="en-US" sz="950" dirty="0">
+                <a:solidFill>
+                  <a:srgbClr val="24313F"/>
+                </a:solidFill>
+                <a:latin typeface="Malgun Gothic" pitchFamily="34" charset="0"/>
+                <a:ea typeface="Malgun Gothic" pitchFamily="34" charset="-122"/>
+                <a:cs typeface="Malgun Gothic" pitchFamily="34" charset="-120"/>
+              </a:rPr>
+              <a:t>A: CARLA가 4대 카메라 최근 4프레임을 클라이언트에 전달 (loopback)</a:t>
+            </a:r>
+            <a:endParaRPr lang="en-US" sz="950" dirty="0"/>
+          </a:p>
+        </p:txBody>
+      </p:sp>
+      <p:sp>
+        <p:nvSpPr>
+          <p:cNvPr id="12" name="Shape 9"/>
+          <p:cNvSpPr/>
+          <p:nvPr/>
+        </p:nvSpPr>
+        <p:spPr>
+          <a:xfrm>
+            <a:off x="3178226" y="4238843"/>
+            <a:ext cx="173736" cy="0"/>
+          </a:xfrm>
+          <a:prstGeom prst="line">
+            <a:avLst/>
+          </a:prstGeom>
+          <a:noFill/>
+          <a:ln w="15875">
+            <a:solidFill>
+              <a:srgbClr val="6B7A8C"/>
+            </a:solidFill>
+            <a:prstDash val="solid"/>
+            <a:tailEnd type="triangle"/>
+          </a:ln>
+        </p:spPr>
+      </p:sp>
+      <p:sp>
+        <p:nvSpPr>
+          <p:cNvPr id="13" name="Shape 10"/>
+          <p:cNvSpPr/>
+          <p:nvPr/>
+        </p:nvSpPr>
+        <p:spPr>
+          <a:xfrm>
+            <a:off x="3379394" y="3644483"/>
+            <a:ext cx="2602154" cy="1188720"/>
+          </a:xfrm>
+          <a:prstGeom prst="roundRect">
+            <a:avLst>
+              <a:gd name="adj" fmla="val 6154"/>
+            </a:avLst>
+          </a:prstGeom>
+          <a:solidFill>
+            <a:srgbClr val="F3F5F8"/>
+          </a:solidFill>
+          <a:ln w="9525">
+            <a:solidFill>
+              <a:srgbClr val="2A6FDB"/>
+            </a:solidFill>
+            <a:prstDash val="solid"/>
+          </a:ln>
+        </p:spPr>
+      </p:sp>
+      <p:sp>
+        <p:nvSpPr>
+          <p:cNvPr id="14" name="Shape 11"/>
+          <p:cNvSpPr/>
+          <p:nvPr/>
+        </p:nvSpPr>
+        <p:spPr>
+          <a:xfrm>
+            <a:off x="3489122" y="3754211"/>
+            <a:ext cx="310896" cy="310896"/>
+          </a:xfrm>
+          <a:prstGeom prst="ellipse">
+            <a:avLst/>
+          </a:prstGeom>
+          <a:solidFill>
+            <a:srgbClr val="2A6FDB"/>
+          </a:solidFill>
+          <a:ln w="12700">
+            <a:solidFill>
+              <a:srgbClr val="2A6FDB"/>
+            </a:solidFill>
+            <a:prstDash val="solid"/>
+          </a:ln>
+        </p:spPr>
+      </p:sp>
+      <p:sp>
+        <p:nvSpPr>
+          <p:cNvPr id="15" name="Text 12"/>
+          <p:cNvSpPr txBox="1"/>
+          <p:nvPr/>
+        </p:nvSpPr>
+        <p:spPr>
+          <a:xfrm>
+            <a:off x="3489122" y="3754211"/>
+            <a:ext cx="310896" cy="310896"/>
+          </a:xfrm>
+          <a:prstGeom prst="rect">
+            <a:avLst/>
+          </a:prstGeom>
+          <a:noFill/>
+          <a:ln/>
+        </p:spPr>
+        <p:txBody>
+          <a:bodyPr wrap="square" lIns="0" tIns="0" rIns="0" bIns="0" rtlCol="0" anchor="ctr"/>
+          <a:lstStyle/>
+          <a:p>
+            <a:pPr algn="ctr" indent="0" marL="0">
+              <a:buNone/>
+            </a:pPr>
+            <a:r>
+              <a:rPr lang="en-US" sz="1100" b="1" dirty="0">
+                <a:solidFill>
+                  <a:srgbClr val="FFFFFF"/>
+                </a:solidFill>
+                <a:latin typeface="Malgun Gothic" pitchFamily="34" charset="0"/>
+                <a:ea typeface="Malgun Gothic" pitchFamily="34" charset="-122"/>
+                <a:cs typeface="Malgun Gothic" pitchFamily="34" charset="-120"/>
+              </a:rPr>
+              <a:t>2</a:t>
+            </a:r>
+            <a:endParaRPr lang="en-US" sz="1100" dirty="0"/>
+          </a:p>
+        </p:txBody>
+      </p:sp>
+      <p:sp>
+        <p:nvSpPr>
+          <p:cNvPr id="16" name="Text 13"/>
+          <p:cNvSpPr txBox="1"/>
+          <p:nvPr/>
+        </p:nvSpPr>
+        <p:spPr>
+          <a:xfrm>
+            <a:off x="3854882" y="3735923"/>
+            <a:ext cx="2035226" cy="347472"/>
+          </a:xfrm>
+          <a:prstGeom prst="rect">
+            <a:avLst/>
+          </a:prstGeom>
+          <a:noFill/>
+          <a:ln/>
+        </p:spPr>
+        <p:txBody>
+          <a:bodyPr wrap="square" lIns="0" tIns="0" rIns="0" bIns="0" rtlCol="0" anchor="ctr"/>
+          <a:lstStyle/>
+          <a:p>
+            <a:pPr indent="0" marL="0">
+              <a:buNone/>
+            </a:pPr>
+            <a:r>
+              <a:rPr lang="en-US" sz="1150" b="1" dirty="0">
+                <a:solidFill>
+                  <a:srgbClr val="2A6FDB"/>
+                </a:solidFill>
+                <a:latin typeface="Malgun Gothic" pitchFamily="34" charset="0"/>
+                <a:ea typeface="Malgun Gothic" pitchFamily="34" charset="-122"/>
+                <a:cs typeface="Malgun Gothic" pitchFamily="34" charset="-120"/>
+              </a:rPr>
+              <a:t>인코딩·전송</a:t>
+            </a:r>
+            <a:endParaRPr lang="en-US" sz="1150" dirty="0"/>
+          </a:p>
+        </p:txBody>
+      </p:sp>
+      <p:sp>
+        <p:nvSpPr>
+          <p:cNvPr id="17" name="Text 14"/>
+          <p:cNvSpPr txBox="1"/>
+          <p:nvPr/>
+        </p:nvSpPr>
+        <p:spPr>
+          <a:xfrm>
+            <a:off x="3489122" y="4101683"/>
+            <a:ext cx="2382698" cy="658368"/>
+          </a:xfrm>
+          <a:prstGeom prst="rect">
+            <a:avLst/>
+          </a:prstGeom>
+          <a:noFill/>
+          <a:ln/>
+        </p:spPr>
+        <p:txBody>
+          <a:bodyPr wrap="square" lIns="0" tIns="0" rIns="0" bIns="0" rtlCol="0" anchor="t"/>
+          <a:lstStyle/>
+          <a:p>
+            <a:pPr indent="0" marL="0">
+              <a:buNone/>
+            </a:pPr>
+            <a:r>
+              <a:rPr lang="en-US" sz="950" dirty="0">
+                <a:solidFill>
+                  <a:srgbClr val="24313F"/>
+                </a:solidFill>
+                <a:latin typeface="Malgun Gothic" pitchFamily="34" charset="0"/>
+                <a:ea typeface="Malgun Gothic" pitchFamily="34" charset="-122"/>
+                <a:cs typeface="Malgun Gothic" pitchFamily="34" charset="-120"/>
+              </a:rPr>
+              <a:t>A: JPEG로 압축해 자차 이력·프롬프트와 함께 gRPC 요청</a:t>
+            </a:r>
+            <a:endParaRPr lang="en-US" sz="950" dirty="0"/>
+          </a:p>
+        </p:txBody>
+      </p:sp>
+      <p:sp>
+        <p:nvSpPr>
+          <p:cNvPr id="18" name="Shape 15"/>
+          <p:cNvSpPr/>
+          <p:nvPr/>
+        </p:nvSpPr>
+        <p:spPr>
+          <a:xfrm>
+            <a:off x="6008980" y="4238843"/>
+            <a:ext cx="173736" cy="0"/>
+          </a:xfrm>
+          <a:prstGeom prst="line">
+            <a:avLst/>
+          </a:prstGeom>
+          <a:noFill/>
+          <a:ln w="15875">
+            <a:solidFill>
+              <a:srgbClr val="6B7A8C"/>
+            </a:solidFill>
+            <a:prstDash val="solid"/>
+            <a:tailEnd type="triangle"/>
+          </a:ln>
+        </p:spPr>
+      </p:sp>
+      <p:sp>
+        <p:nvSpPr>
+          <p:cNvPr id="19" name="Shape 16"/>
+          <p:cNvSpPr/>
+          <p:nvPr/>
+        </p:nvSpPr>
+        <p:spPr>
+          <a:xfrm>
+            <a:off x="6210148" y="3644483"/>
+            <a:ext cx="2602154" cy="1188720"/>
+          </a:xfrm>
+          <a:prstGeom prst="roundRect">
+            <a:avLst>
+              <a:gd name="adj" fmla="val 6154"/>
+            </a:avLst>
+          </a:prstGeom>
+          <a:solidFill>
+            <a:srgbClr val="F3F5F8"/>
+          </a:solidFill>
+          <a:ln w="9525">
+            <a:solidFill>
+              <a:srgbClr val="E0762B"/>
+            </a:solidFill>
+            <a:prstDash val="solid"/>
+          </a:ln>
+        </p:spPr>
+      </p:sp>
+      <p:sp>
+        <p:nvSpPr>
+          <p:cNvPr id="20" name="Shape 17"/>
+          <p:cNvSpPr/>
+          <p:nvPr/>
+        </p:nvSpPr>
+        <p:spPr>
+          <a:xfrm>
+            <a:off x="6319876" y="3754211"/>
+            <a:ext cx="310896" cy="310896"/>
+          </a:xfrm>
+          <a:prstGeom prst="ellipse">
+            <a:avLst/>
+          </a:prstGeom>
+          <a:solidFill>
+            <a:srgbClr val="E0762B"/>
+          </a:solidFill>
+          <a:ln w="12700">
+            <a:solidFill>
+              <a:srgbClr val="E0762B"/>
+            </a:solidFill>
+            <a:prstDash val="solid"/>
+          </a:ln>
+        </p:spPr>
+      </p:sp>
+      <p:sp>
+        <p:nvSpPr>
+          <p:cNvPr id="21" name="Text 18"/>
+          <p:cNvSpPr txBox="1"/>
+          <p:nvPr/>
+        </p:nvSpPr>
+        <p:spPr>
+          <a:xfrm>
+            <a:off x="6319876" y="3754211"/>
+            <a:ext cx="310896" cy="310896"/>
+          </a:xfrm>
+          <a:prstGeom prst="rect">
+            <a:avLst/>
+          </a:prstGeom>
+          <a:noFill/>
+          <a:ln/>
+        </p:spPr>
+        <p:txBody>
+          <a:bodyPr wrap="square" lIns="0" tIns="0" rIns="0" bIns="0" rtlCol="0" anchor="ctr"/>
+          <a:lstStyle/>
+          <a:p>
+            <a:pPr algn="ctr" indent="0" marL="0">
+              <a:buNone/>
+            </a:pPr>
+            <a:r>
+              <a:rPr lang="en-US" sz="1100" b="1" dirty="0">
+                <a:solidFill>
+                  <a:srgbClr val="FFFFFF"/>
+                </a:solidFill>
+                <a:latin typeface="Malgun Gothic" pitchFamily="34" charset="0"/>
+                <a:ea typeface="Malgun Gothic" pitchFamily="34" charset="-122"/>
+                <a:cs typeface="Malgun Gothic" pitchFamily="34" charset="-120"/>
+              </a:rPr>
+              <a:t>3</a:t>
+            </a:r>
+            <a:endParaRPr lang="en-US" sz="1100" dirty="0"/>
+          </a:p>
+        </p:txBody>
+      </p:sp>
+      <p:sp>
+        <p:nvSpPr>
+          <p:cNvPr id="22" name="Text 19"/>
+          <p:cNvSpPr txBox="1"/>
+          <p:nvPr/>
+        </p:nvSpPr>
+        <p:spPr>
+          <a:xfrm>
+            <a:off x="6685636" y="3735923"/>
+            <a:ext cx="2035226" cy="347472"/>
+          </a:xfrm>
+          <a:prstGeom prst="rect">
+            <a:avLst/>
+          </a:prstGeom>
+          <a:noFill/>
+          <a:ln/>
+        </p:spPr>
+        <p:txBody>
+          <a:bodyPr wrap="square" lIns="0" tIns="0" rIns="0" bIns="0" rtlCol="0" anchor="ctr"/>
+          <a:lstStyle/>
+          <a:p>
+            <a:pPr indent="0" marL="0">
+              <a:buNone/>
+            </a:pPr>
+            <a:r>
+              <a:rPr lang="en-US" sz="1150" b="1" dirty="0">
+                <a:solidFill>
+                  <a:srgbClr val="E0762B"/>
+                </a:solidFill>
+                <a:latin typeface="Malgun Gothic" pitchFamily="34" charset="0"/>
+                <a:ea typeface="Malgun Gothic" pitchFamily="34" charset="-122"/>
+                <a:cs typeface="Malgun Gothic" pitchFamily="34" charset="-120"/>
+              </a:rPr>
+              <a:t>추론·응답</a:t>
+            </a:r>
+            <a:endParaRPr lang="en-US" sz="1150" dirty="0"/>
+          </a:p>
+        </p:txBody>
+      </p:sp>
+      <p:sp>
+        <p:nvSpPr>
+          <p:cNvPr id="23" name="Text 20"/>
+          <p:cNvSpPr txBox="1"/>
+          <p:nvPr/>
+        </p:nvSpPr>
+        <p:spPr>
+          <a:xfrm>
+            <a:off x="6319876" y="4101683"/>
+            <a:ext cx="2382698" cy="658368"/>
+          </a:xfrm>
+          <a:prstGeom prst="rect">
+            <a:avLst/>
+          </a:prstGeom>
+          <a:noFill/>
+          <a:ln/>
+        </p:spPr>
+        <p:txBody>
+          <a:bodyPr wrap="square" lIns="0" tIns="0" rIns="0" bIns="0" rtlCol="0" anchor="t"/>
+          <a:lstStyle/>
+          <a:p>
+            <a:pPr indent="0" marL="0">
+              <a:buNone/>
+            </a:pPr>
+            <a:r>
+              <a:rPr lang="en-US" sz="950" dirty="0">
+                <a:solidFill>
+                  <a:srgbClr val="24313F"/>
+                </a:solidFill>
+                <a:latin typeface="Malgun Gothic" pitchFamily="34" charset="0"/>
+                <a:ea typeface="Malgun Gothic" pitchFamily="34" charset="-122"/>
+                <a:cs typeface="Malgun Gothic" pitchFamily="34" charset="-120"/>
+              </a:rPr>
+              <a:t>B: 디코딩 → Alpamayo 1.5 → 궤적 64점 + CoT를 같은 연결로 회신</a:t>
+            </a:r>
+            <a:endParaRPr lang="en-US" sz="950" dirty="0"/>
+          </a:p>
+        </p:txBody>
+      </p:sp>
+      <p:sp>
+        <p:nvSpPr>
+          <p:cNvPr id="24" name="Shape 21"/>
+          <p:cNvSpPr/>
+          <p:nvPr/>
+        </p:nvSpPr>
+        <p:spPr>
+          <a:xfrm>
+            <a:off x="8839733" y="4238843"/>
+            <a:ext cx="173736" cy="0"/>
+          </a:xfrm>
+          <a:prstGeom prst="line">
+            <a:avLst/>
+          </a:prstGeom>
+          <a:noFill/>
+          <a:ln w="15875">
+            <a:solidFill>
+              <a:srgbClr val="6B7A8C"/>
+            </a:solidFill>
+            <a:prstDash val="solid"/>
+            <a:tailEnd type="triangle"/>
+          </a:ln>
+        </p:spPr>
+      </p:sp>
+      <p:sp>
+        <p:nvSpPr>
+          <p:cNvPr id="25" name="Shape 22"/>
+          <p:cNvSpPr/>
+          <p:nvPr/>
+        </p:nvSpPr>
+        <p:spPr>
+          <a:xfrm>
+            <a:off x="9040901" y="3644483"/>
+            <a:ext cx="2602154" cy="1188720"/>
+          </a:xfrm>
+          <a:prstGeom prst="roundRect">
+            <a:avLst>
+              <a:gd name="adj" fmla="val 6154"/>
+            </a:avLst>
+          </a:prstGeom>
+          <a:solidFill>
+            <a:srgbClr val="F3F5F8"/>
+          </a:solidFill>
+          <a:ln w="9525">
+            <a:solidFill>
+              <a:srgbClr val="2A6FDB"/>
+            </a:solidFill>
+            <a:prstDash val="solid"/>
+          </a:ln>
+        </p:spPr>
+      </p:sp>
+      <p:sp>
+        <p:nvSpPr>
+          <p:cNvPr id="26" name="Shape 23"/>
+          <p:cNvSpPr/>
+          <p:nvPr/>
+        </p:nvSpPr>
+        <p:spPr>
+          <a:xfrm>
+            <a:off x="9150629" y="3754211"/>
+            <a:ext cx="310896" cy="310896"/>
+          </a:xfrm>
+          <a:prstGeom prst="ellipse">
+            <a:avLst/>
+          </a:prstGeom>
+          <a:solidFill>
+            <a:srgbClr val="2A6FDB"/>
+          </a:solidFill>
+          <a:ln w="12700">
+            <a:solidFill>
+              <a:srgbClr val="2A6FDB"/>
+            </a:solidFill>
+            <a:prstDash val="solid"/>
+          </a:ln>
+        </p:spPr>
+      </p:sp>
+      <p:sp>
+        <p:nvSpPr>
+          <p:cNvPr id="27" name="Text 24"/>
+          <p:cNvSpPr txBox="1"/>
+          <p:nvPr/>
+        </p:nvSpPr>
+        <p:spPr>
+          <a:xfrm>
+            <a:off x="9150629" y="3754211"/>
+            <a:ext cx="310896" cy="310896"/>
+          </a:xfrm>
+          <a:prstGeom prst="rect">
+            <a:avLst/>
+          </a:prstGeom>
+          <a:noFill/>
+          <a:ln/>
+        </p:spPr>
+        <p:txBody>
+          <a:bodyPr wrap="square" lIns="0" tIns="0" rIns="0" bIns="0" rtlCol="0" anchor="ctr"/>
+          <a:lstStyle/>
+          <a:p>
+            <a:pPr algn="ctr" indent="0" marL="0">
+              <a:buNone/>
+            </a:pPr>
+            <a:r>
+              <a:rPr lang="en-US" sz="1100" b="1" dirty="0">
+                <a:solidFill>
+                  <a:srgbClr val="FFFFFF"/>
+                </a:solidFill>
+                <a:latin typeface="Malgun Gothic" pitchFamily="34" charset="0"/>
+                <a:ea typeface="Malgun Gothic" pitchFamily="34" charset="-122"/>
+                <a:cs typeface="Malgun Gothic" pitchFamily="34" charset="-120"/>
+              </a:rPr>
+              <a:t>4</a:t>
+            </a:r>
+            <a:endParaRPr lang="en-US" sz="1100" dirty="0"/>
+          </a:p>
+        </p:txBody>
+      </p:sp>
+      <p:sp>
+        <p:nvSpPr>
+          <p:cNvPr id="28" name="Text 25"/>
+          <p:cNvSpPr txBox="1"/>
+          <p:nvPr/>
+        </p:nvSpPr>
+        <p:spPr>
+          <a:xfrm>
+            <a:off x="9516389" y="3735923"/>
+            <a:ext cx="2035226" cy="347472"/>
+          </a:xfrm>
+          <a:prstGeom prst="rect">
+            <a:avLst/>
+          </a:prstGeom>
+          <a:noFill/>
+          <a:ln/>
+        </p:spPr>
+        <p:txBody>
+          <a:bodyPr wrap="square" lIns="0" tIns="0" rIns="0" bIns="0" rtlCol="0" anchor="ctr"/>
+          <a:lstStyle/>
+          <a:p>
+            <a:pPr indent="0" marL="0">
+              <a:buNone/>
+            </a:pPr>
+            <a:r>
+              <a:rPr lang="en-US" sz="1150" b="1" dirty="0">
+                <a:solidFill>
+                  <a:srgbClr val="2A6FDB"/>
+                </a:solidFill>
+                <a:latin typeface="Malgun Gothic" pitchFamily="34" charset="0"/>
+                <a:ea typeface="Malgun Gothic" pitchFamily="34" charset="-122"/>
+                <a:cs typeface="Malgun Gothic" pitchFamily="34" charset="-120"/>
+              </a:rPr>
+              <a:t>PID 제어</a:t>
+            </a:r>
+            <a:endParaRPr lang="en-US" sz="1150" dirty="0"/>
+          </a:p>
+        </p:txBody>
+      </p:sp>
+      <p:sp>
+        <p:nvSpPr>
+          <p:cNvPr id="29" name="Text 26"/>
+          <p:cNvSpPr txBox="1"/>
+          <p:nvPr/>
+        </p:nvSpPr>
+        <p:spPr>
+          <a:xfrm>
+            <a:off x="9150629" y="4101683"/>
+            <a:ext cx="2382698" cy="658368"/>
+          </a:xfrm>
+          <a:prstGeom prst="rect">
+            <a:avLst/>
+          </a:prstGeom>
+          <a:noFill/>
+          <a:ln/>
+        </p:spPr>
+        <p:txBody>
+          <a:bodyPr wrap="square" lIns="0" tIns="0" rIns="0" bIns="0" rtlCol="0" anchor="t"/>
+          <a:lstStyle/>
+          <a:p>
+            <a:pPr indent="0" marL="0">
+              <a:buNone/>
+            </a:pPr>
+            <a:r>
+              <a:rPr lang="en-US" sz="950" dirty="0">
+                <a:solidFill>
+                  <a:srgbClr val="24313F"/>
+                </a:solidFill>
+                <a:latin typeface="Malgun Gothic" pitchFamily="34" charset="0"/>
+                <a:ea typeface="Malgun Gothic" pitchFamily="34" charset="-122"/>
+                <a:cs typeface="Malgun Gothic" pitchFamily="34" charset="-120"/>
+              </a:rPr>
+              <a:t>A: 궤적을 따라 조향·가감속 → CARLA tick → 다음 장면. 6초 넘게 오래된 궤적은 폐기</a:t>
+            </a:r>
+            <a:endParaRPr lang="en-US" sz="950" dirty="0"/>
+          </a:p>
+        </p:txBody>
+      </p:sp>
+      <p:sp>
+        <p:nvSpPr>
+          <p:cNvPr id="30" name="Text 27"/>
+          <p:cNvSpPr txBox="1"/>
+          <p:nvPr/>
+        </p:nvSpPr>
+        <p:spPr>
+          <a:xfrm>
+            <a:off x="548640" y="4970363"/>
+            <a:ext cx="11094415" cy="320040"/>
+          </a:xfrm>
+          <a:prstGeom prst="rect">
+            <a:avLst/>
+          </a:prstGeom>
+          <a:noFill/>
+          <a:ln/>
+        </p:spPr>
+        <p:txBody>
+          <a:bodyPr wrap="square" lIns="0" tIns="0" rIns="0" bIns="0" rtlCol="0" anchor="t"/>
+          <a:lstStyle/>
+          <a:p>
+            <a:pPr indent="0" marL="0">
+              <a:buNone/>
+            </a:pPr>
+            <a:r>
+              <a:rPr lang="en-US" sz="1000" dirty="0">
+                <a:solidFill>
+                  <a:srgbClr val="6B7A8C"/>
+                </a:solidFill>
+                <a:latin typeface="Malgun Gothic" pitchFamily="34" charset="0"/>
+                <a:ea typeface="Malgun Gothic" pitchFamily="34" charset="-122"/>
+                <a:cs typeface="Malgun Gothic" pitchFamily="34" charset="-120"/>
+              </a:rPr>
+              <a:t>점선 = 운영자 SSH/DCV 접속과 파일 복사(rsync/scp). 실시간 경로는 실선뿐이다.</a:t>
+            </a:r>
+            <a:endParaRPr lang="en-US" sz="1000" dirty="0"/>
+          </a:p>
+        </p:txBody>
+      </p:sp>
+    </p:spTree>
+  </p:cSld>
+  <p:clrMapOvr>
+    <a:masterClrMapping/>
+  </p:clrMapOvr>
+</p:sld>
+</file>
+
+<file path=ppt/slides/slide4.xml><?xml version="1.0" encoding="utf-8"?>
+<p:sld xmlns:a="http://schemas.openxmlformats.org/drawingml/2006/main" xmlns:r="http://schemas.openxmlformats.org/officeDocument/2006/relationships" xmlns:p="http://schemas.openxmlformats.org/presentationml/2006/main">
+  <p:cSld name="Slide 4">
+    <p:bg>
+      <p:bgPr>
+        <a:solidFill>
+          <a:srgbClr val="FFFFFF"/>
+        </a:solidFill>
+      </p:bgPr>
+    </p:bg>
+    <p:spTree>
+      <p:nvGrpSpPr>
+        <p:cNvPr id="1" name=""/>
+        <p:cNvGrpSpPr/>
+        <p:nvPr/>
+      </p:nvGrpSpPr>
+      <p:grpSpPr>
+        <a:xfrm>
+          <a:off x="0" y="0"/>
+          <a:ext cx="0" cy="0"/>
+          <a:chOff x="0" y="0"/>
+          <a:chExt cx="0" cy="0"/>
+        </a:xfrm>
+      </p:grpSpPr>
+      <p:sp>
+        <p:nvSpPr>
+          <p:cNvPr id="2" name="Text 0"/>
+          <p:cNvSpPr txBox="1"/>
+          <p:nvPr/>
+        </p:nvSpPr>
+        <p:spPr>
+          <a:xfrm>
+            <a:off x="548640" y="347472"/>
+            <a:ext cx="11094415" cy="640080"/>
+          </a:xfrm>
+          <a:prstGeom prst="rect">
+            <a:avLst/>
+          </a:prstGeom>
+          <a:noFill/>
+          <a:ln/>
+        </p:spPr>
+        <p:txBody>
+          <a:bodyPr wrap="square" lIns="0" tIns="0" rIns="0" bIns="0" rtlCol="0" anchor="t"/>
+          <a:lstStyle/>
+          <a:p>
+            <a:pPr indent="0" marL="0">
+              <a:buNone/>
+            </a:pPr>
+            <a:r>
+              <a:rPr lang="en-US" sz="2800" b="1" dirty="0">
+                <a:solidFill>
+                  <a:srgbClr val="1B2A41"/>
+                </a:solidFill>
+                <a:latin typeface="Malgun Gothic" pitchFamily="34" charset="0"/>
+                <a:ea typeface="Malgun Gothic" pitchFamily="34" charset="-122"/>
+                <a:cs typeface="Malgun Gothic" pitchFamily="34" charset="-120"/>
+              </a:rPr>
+              <a:t>공식 Alpamayo open-loop 테스트 환경과의 비교</a:t>
+            </a:r>
+            <a:endParaRPr lang="en-US" sz="2800" dirty="0"/>
+          </a:p>
+        </p:txBody>
+      </p:sp>
+      <p:sp>
+        <p:nvSpPr>
+          <p:cNvPr id="3" name="Text 1"/>
+          <p:cNvSpPr txBox="1"/>
+          <p:nvPr/>
+        </p:nvSpPr>
+        <p:spPr>
+          <a:xfrm>
+            <a:off x="548640" y="960120"/>
+            <a:ext cx="11094415" cy="365760"/>
+          </a:xfrm>
+          <a:prstGeom prst="rect">
+            <a:avLst/>
+          </a:prstGeom>
+          <a:noFill/>
+          <a:ln/>
+        </p:spPr>
+        <p:txBody>
+          <a:bodyPr wrap="square" lIns="0" tIns="0" rIns="0" bIns="0" rtlCol="0" anchor="t"/>
+          <a:lstStyle/>
+          <a:p>
+            <a:pPr indent="0" marL="0">
+              <a:buNone/>
+            </a:pPr>
+            <a:r>
+              <a:rPr lang="en-US" sz="1400" dirty="0">
+                <a:solidFill>
+                  <a:srgbClr val="6B7A8C"/>
+                </a:solidFill>
+                <a:latin typeface="Malgun Gothic" pitchFamily="34" charset="0"/>
+                <a:ea typeface="Malgun Gothic" pitchFamily="34" charset="-122"/>
+                <a:cs typeface="Malgun Gothic" pitchFamily="34" charset="-120"/>
+              </a:rPr>
+              <a:t>같은 모델(Alpamayo 1.5)을 '공식 노트북의 녹화 클립 재생·평가'에서 '실시간 주행·물리 분리'로 옮겼다</a:t>
+            </a:r>
+            <a:endParaRPr lang="en-US" sz="1400" dirty="0"/>
+          </a:p>
+        </p:txBody>
+      </p:sp>
+      <p:sp>
+        <p:nvSpPr>
+          <p:cNvPr id="4" name="Text 2"/>
+          <p:cNvSpPr txBox="1"/>
+          <p:nvPr/>
+        </p:nvSpPr>
+        <p:spPr>
+          <a:xfrm>
+            <a:off x="548640" y="6446520"/>
+            <a:ext cx="5486400" cy="274320"/>
+          </a:xfrm>
+          <a:prstGeom prst="rect">
+            <a:avLst/>
+          </a:prstGeom>
+          <a:noFill/>
+          <a:ln/>
+        </p:spPr>
+        <p:txBody>
+          <a:bodyPr wrap="square" lIns="0" tIns="0" rIns="0" bIns="0" rtlCol="0" anchor="ctr"/>
+          <a:lstStyle/>
+          <a:p>
+            <a:pPr indent="0" marL="0">
+              <a:buNone/>
+            </a:pPr>
+            <a:r>
+              <a:rPr lang="en-US" sz="900" dirty="0">
+                <a:solidFill>
+                  <a:srgbClr val="6B7A8C"/>
+                </a:solidFill>
+                <a:latin typeface="Malgun Gothic" pitchFamily="34" charset="0"/>
+                <a:ea typeface="Malgun Gothic" pitchFamily="34" charset="-122"/>
+                <a:cs typeface="Malgun Gothic" pitchFamily="34" charset="-120"/>
+              </a:rPr>
+              <a:t>Carlamayo 분산 데모</a:t>
+            </a:r>
+            <a:endParaRPr lang="en-US" sz="900" dirty="0"/>
+          </a:p>
+        </p:txBody>
+      </p:sp>
+      <p:sp>
+        <p:nvSpPr>
+          <p:cNvPr id="5" name="Text 3"/>
+          <p:cNvSpPr txBox="1"/>
+          <p:nvPr/>
+        </p:nvSpPr>
+        <p:spPr>
+          <a:xfrm>
+            <a:off x="10728655" y="6446520"/>
+            <a:ext cx="914400" cy="274320"/>
+          </a:xfrm>
+          <a:prstGeom prst="rect">
+            <a:avLst/>
+          </a:prstGeom>
+          <a:noFill/>
+          <a:ln/>
+        </p:spPr>
+        <p:txBody>
+          <a:bodyPr wrap="square" lIns="0" tIns="0" rIns="0" bIns="0" rtlCol="0" anchor="ctr"/>
+          <a:lstStyle/>
+          <a:p>
+            <a:pPr algn="r" indent="0" marL="0">
+              <a:buNone/>
+            </a:pPr>
+            <a:r>
+              <a:rPr lang="en-US" sz="900" dirty="0">
+                <a:solidFill>
+                  <a:srgbClr val="6B7A8C"/>
+                </a:solidFill>
+                <a:latin typeface="Malgun Gothic" pitchFamily="34" charset="0"/>
+                <a:ea typeface="Malgun Gothic" pitchFamily="34" charset="-122"/>
+                <a:cs typeface="Malgun Gothic" pitchFamily="34" charset="-120"/>
+              </a:rPr>
+              <a:t>4</a:t>
+            </a:r>
+            <a:endParaRPr lang="en-US" sz="900" dirty="0"/>
+          </a:p>
+        </p:txBody>
+      </p:sp>
       <p:graphicFrame>
         <p:nvGraphicFramePr>
-          <p:cNvPr id="4" name="Table 0"/>
+          <p:cNvPr id="5" name="Table 0"/>
           <p:cNvGraphicFramePr>
             <a:graphicFrameLocks noGrp="1"/>
           </p:cNvGraphicFramePr>
@@ -5571,1689 +6397,6 @@
 </p:sld>
 </file>
 
-<file path=ppt/slides/slide4.xml><?xml version="1.0" encoding="utf-8"?>
-<p:sld xmlns:a="http://schemas.openxmlformats.org/drawingml/2006/main" xmlns:r="http://schemas.openxmlformats.org/officeDocument/2006/relationships" xmlns:p="http://schemas.openxmlformats.org/presentationml/2006/main">
-  <p:cSld name="Slide 4">
-    <p:bg>
-      <p:bgPr>
-        <a:solidFill>
-          <a:srgbClr val="FFFFFF"/>
-        </a:solidFill>
-      </p:bgPr>
-    </p:bg>
-    <p:spTree>
-      <p:nvGrpSpPr>
-        <p:cNvPr id="1" name=""/>
-        <p:cNvGrpSpPr/>
-        <p:nvPr/>
-      </p:nvGrpSpPr>
-      <p:grpSpPr>
-        <a:xfrm>
-          <a:off x="0" y="0"/>
-          <a:ext cx="0" cy="0"/>
-          <a:chOff x="0" y="0"/>
-          <a:chExt cx="0" cy="0"/>
-        </a:xfrm>
-      </p:grpSpPr>
-      <p:sp>
-        <p:nvSpPr>
-          <p:cNvPr id="2" name="Text 0"/>
-          <p:cNvSpPr txBox="1"/>
-          <p:nvPr/>
-        </p:nvSpPr>
-        <p:spPr>
-          <a:xfrm>
-            <a:off x="548640" y="347472"/>
-            <a:ext cx="11094415" cy="640080"/>
-          </a:xfrm>
-          <a:prstGeom prst="rect">
-            <a:avLst/>
-          </a:prstGeom>
-          <a:noFill/>
-          <a:ln/>
-        </p:spPr>
-        <p:txBody>
-          <a:bodyPr wrap="square" lIns="0" tIns="0" rIns="0" bIns="0" rtlCol="0" anchor="t"/>
-          <a:lstStyle/>
-          <a:p>
-            <a:pPr indent="0" marL="0">
-              <a:buNone/>
-            </a:pPr>
-            <a:r>
-              <a:rPr lang="en-US" sz="2800" b="1" dirty="0">
-                <a:solidFill>
-                  <a:srgbClr val="1B2A41"/>
-                </a:solidFill>
-                <a:latin typeface="Malgun Gothic" pitchFamily="34" charset="0"/>
-                <a:ea typeface="Malgun Gothic" pitchFamily="34" charset="-122"/>
-                <a:cs typeface="Malgun Gothic" pitchFamily="34" charset="-120"/>
-              </a:rPr>
-              <a:t>이번 데모에서 보여줄 것</a:t>
-            </a:r>
-            <a:endParaRPr lang="en-US" sz="2800" dirty="0"/>
-          </a:p>
-        </p:txBody>
-      </p:sp>
-      <p:sp>
-        <p:nvSpPr>
-          <p:cNvPr id="3" name="Text 1"/>
-          <p:cNvSpPr txBox="1"/>
-          <p:nvPr/>
-        </p:nvSpPr>
-        <p:spPr>
-          <a:xfrm>
-            <a:off x="548640" y="960120"/>
-            <a:ext cx="11094415" cy="365760"/>
-          </a:xfrm>
-          <a:prstGeom prst="rect">
-            <a:avLst/>
-          </a:prstGeom>
-          <a:noFill/>
-          <a:ln/>
-        </p:spPr>
-        <p:txBody>
-          <a:bodyPr wrap="square" lIns="0" tIns="0" rIns="0" bIns="0" rtlCol="0" anchor="t"/>
-          <a:lstStyle/>
-          <a:p>
-            <a:pPr indent="0" marL="0">
-              <a:buNone/>
-            </a:pPr>
-            <a:r>
-              <a:rPr lang="en-US" sz="1400" dirty="0">
-                <a:solidFill>
-                  <a:srgbClr val="6B7A8C"/>
-                </a:solidFill>
-                <a:latin typeface="Malgun Gothic" pitchFamily="34" charset="0"/>
-                <a:ea typeface="Malgun Gothic" pitchFamily="34" charset="-122"/>
-                <a:cs typeface="Malgun Gothic" pitchFamily="34" charset="-120"/>
-              </a:rPr>
-              <a:t>물리적으로 떨어진 두 인스턴스에서 자율주행이 '되는지', 조작이 '실시간으로 먹는지', 어디가 '느린지'</a:t>
-            </a:r>
-            <a:endParaRPr lang="en-US" sz="1400" dirty="0"/>
-          </a:p>
-        </p:txBody>
-      </p:sp>
-      <p:sp>
-        <p:nvSpPr>
-          <p:cNvPr id="4" name="Text 2"/>
-          <p:cNvSpPr txBox="1"/>
-          <p:nvPr/>
-        </p:nvSpPr>
-        <p:spPr>
-          <a:xfrm>
-            <a:off x="548640" y="6446520"/>
-            <a:ext cx="5486400" cy="274320"/>
-          </a:xfrm>
-          <a:prstGeom prst="rect">
-            <a:avLst/>
-          </a:prstGeom>
-          <a:noFill/>
-          <a:ln/>
-        </p:spPr>
-        <p:txBody>
-          <a:bodyPr wrap="square" lIns="0" tIns="0" rIns="0" bIns="0" rtlCol="0" anchor="ctr"/>
-          <a:lstStyle/>
-          <a:p>
-            <a:pPr indent="0" marL="0">
-              <a:buNone/>
-            </a:pPr>
-            <a:r>
-              <a:rPr lang="en-US" sz="900" dirty="0">
-                <a:solidFill>
-                  <a:srgbClr val="6B7A8C"/>
-                </a:solidFill>
-                <a:latin typeface="Malgun Gothic" pitchFamily="34" charset="0"/>
-                <a:ea typeface="Malgun Gothic" pitchFamily="34" charset="-122"/>
-                <a:cs typeface="Malgun Gothic" pitchFamily="34" charset="-120"/>
-              </a:rPr>
-              <a:t>Carlamayo 분산 데모</a:t>
-            </a:r>
-            <a:endParaRPr lang="en-US" sz="900" dirty="0"/>
-          </a:p>
-        </p:txBody>
-      </p:sp>
-      <p:sp>
-        <p:nvSpPr>
-          <p:cNvPr id="5" name="Text 3"/>
-          <p:cNvSpPr txBox="1"/>
-          <p:nvPr/>
-        </p:nvSpPr>
-        <p:spPr>
-          <a:xfrm>
-            <a:off x="10728655" y="6446520"/>
-            <a:ext cx="914400" cy="274320"/>
-          </a:xfrm>
-          <a:prstGeom prst="rect">
-            <a:avLst/>
-          </a:prstGeom>
-          <a:noFill/>
-          <a:ln/>
-        </p:spPr>
-        <p:txBody>
-          <a:bodyPr wrap="square" lIns="0" tIns="0" rIns="0" bIns="0" rtlCol="0" anchor="ctr"/>
-          <a:lstStyle/>
-          <a:p>
-            <a:pPr algn="r" indent="0" marL="0">
-              <a:buNone/>
-            </a:pPr>
-            <a:r>
-              <a:rPr lang="en-US" sz="900" dirty="0">
-                <a:solidFill>
-                  <a:srgbClr val="6B7A8C"/>
-                </a:solidFill>
-                <a:latin typeface="Malgun Gothic" pitchFamily="34" charset="0"/>
-                <a:ea typeface="Malgun Gothic" pitchFamily="34" charset="-122"/>
-                <a:cs typeface="Malgun Gothic" pitchFamily="34" charset="-120"/>
-              </a:rPr>
-              <a:t>4</a:t>
-            </a:r>
-            <a:endParaRPr lang="en-US" sz="900" dirty="0"/>
-          </a:p>
-        </p:txBody>
-      </p:sp>
-      <p:sp>
-        <p:nvSpPr>
-          <p:cNvPr id="6" name="Shape 4"/>
-          <p:cNvSpPr/>
-          <p:nvPr/>
-        </p:nvSpPr>
-        <p:spPr>
-          <a:xfrm>
-            <a:off x="548640" y="1417320"/>
-            <a:ext cx="3545738" cy="3246120"/>
-          </a:xfrm>
-          <a:prstGeom prst="roundRect">
-            <a:avLst>
-              <a:gd name="adj" fmla="val 2254"/>
-            </a:avLst>
-          </a:prstGeom>
-          <a:solidFill>
-            <a:srgbClr val="F3F5F8"/>
-          </a:solidFill>
-          <a:ln w="9525">
-            <a:solidFill>
-              <a:srgbClr val="D5DBE3"/>
-            </a:solidFill>
-            <a:prstDash val="solid"/>
-          </a:ln>
-        </p:spPr>
-      </p:sp>
-      <p:sp>
-        <p:nvSpPr>
-          <p:cNvPr id="7" name="Shape 5"/>
-          <p:cNvSpPr/>
-          <p:nvPr/>
-        </p:nvSpPr>
-        <p:spPr>
-          <a:xfrm>
-            <a:off x="731520" y="1581912"/>
-            <a:ext cx="384048" cy="384048"/>
-          </a:xfrm>
-          <a:prstGeom prst="ellipse">
-            <a:avLst/>
-          </a:prstGeom>
-          <a:solidFill>
-            <a:srgbClr val="2A6FDB"/>
-          </a:solidFill>
-          <a:ln w="12700">
-            <a:solidFill>
-              <a:srgbClr val="2A6FDB"/>
-            </a:solidFill>
-            <a:prstDash val="solid"/>
-          </a:ln>
-        </p:spPr>
-      </p:sp>
-      <p:sp>
-        <p:nvSpPr>
-          <p:cNvPr id="8" name="Text 6"/>
-          <p:cNvSpPr txBox="1"/>
-          <p:nvPr/>
-        </p:nvSpPr>
-        <p:spPr>
-          <a:xfrm>
-            <a:off x="731520" y="1581912"/>
-            <a:ext cx="384048" cy="384048"/>
-          </a:xfrm>
-          <a:prstGeom prst="rect">
-            <a:avLst/>
-          </a:prstGeom>
-          <a:noFill/>
-          <a:ln/>
-        </p:spPr>
-        <p:txBody>
-          <a:bodyPr wrap="square" lIns="0" tIns="0" rIns="0" bIns="0" rtlCol="0" anchor="ctr"/>
-          <a:lstStyle/>
-          <a:p>
-            <a:pPr algn="ctr" indent="0" marL="0">
-              <a:buNone/>
-            </a:pPr>
-            <a:r>
-              <a:rPr lang="en-US" sz="1400" b="1" dirty="0">
-                <a:solidFill>
-                  <a:srgbClr val="FFFFFF"/>
-                </a:solidFill>
-                <a:latin typeface="Malgun Gothic" pitchFamily="34" charset="0"/>
-                <a:ea typeface="Malgun Gothic" pitchFamily="34" charset="-122"/>
-                <a:cs typeface="Malgun Gothic" pitchFamily="34" charset="-120"/>
-              </a:rPr>
-              <a:t>1</a:t>
-            </a:r>
-            <a:endParaRPr lang="en-US" sz="1400" dirty="0"/>
-          </a:p>
-        </p:txBody>
-      </p:sp>
-      <p:sp>
-        <p:nvSpPr>
-          <p:cNvPr id="9" name="Text 7"/>
-          <p:cNvSpPr txBox="1"/>
-          <p:nvPr/>
-        </p:nvSpPr>
-        <p:spPr>
-          <a:xfrm>
-            <a:off x="1234440" y="1581912"/>
-            <a:ext cx="2677058" cy="384048"/>
-          </a:xfrm>
-          <a:prstGeom prst="rect">
-            <a:avLst/>
-          </a:prstGeom>
-          <a:noFill/>
-          <a:ln/>
-        </p:spPr>
-        <p:txBody>
-          <a:bodyPr wrap="square" lIns="0" tIns="0" rIns="0" bIns="0" rtlCol="0" anchor="ctr"/>
-          <a:lstStyle/>
-          <a:p>
-            <a:pPr indent="0" marL="0">
-              <a:buNone/>
-            </a:pPr>
-            <a:r>
-              <a:rPr lang="en-US" sz="1500" b="1" dirty="0">
-                <a:solidFill>
-                  <a:srgbClr val="2A6FDB"/>
-                </a:solidFill>
-                <a:latin typeface="Malgun Gothic" pitchFamily="34" charset="0"/>
-                <a:ea typeface="Malgun Gothic" pitchFamily="34" charset="-122"/>
-                <a:cs typeface="Malgun Gothic" pitchFamily="34" charset="-120"/>
-              </a:rPr>
-              <a:t>물리 분리 closed-loop 자율주행</a:t>
-            </a:r>
-            <a:endParaRPr lang="en-US" sz="1500" dirty="0"/>
-          </a:p>
-        </p:txBody>
-      </p:sp>
-      <p:sp>
-        <p:nvSpPr>
-          <p:cNvPr id="10" name="Text 8"/>
-          <p:cNvSpPr txBox="1"/>
-          <p:nvPr/>
-        </p:nvSpPr>
-        <p:spPr>
-          <a:xfrm>
-            <a:off x="731520" y="2039112"/>
-            <a:ext cx="3179978" cy="2487168"/>
-          </a:xfrm>
-          <a:prstGeom prst="rect">
-            <a:avLst/>
-          </a:prstGeom>
-          <a:noFill/>
-          <a:ln/>
-        </p:spPr>
-        <p:txBody>
-          <a:bodyPr wrap="square" lIns="0" tIns="0" rIns="0" bIns="0" rtlCol="0" anchor="t"/>
-          <a:lstStyle/>
-          <a:p>
-            <a:pPr marL="152400" indent="-152400">
-              <a:spcAft>
-                <a:spcPts val="400"/>
-              </a:spcAft>
-              <a:buSzPct val="100000"/>
-              <a:buChar char="•"/>
-            </a:pPr>
-            <a:r>
-              <a:rPr lang="en-US" sz="1200" dirty="0">
-                <a:solidFill>
-                  <a:srgbClr val="24313F"/>
-                </a:solidFill>
-                <a:latin typeface="Malgun Gothic" pitchFamily="34" charset="0"/>
-                <a:ea typeface="Malgun Gothic" pitchFamily="34" charset="-122"/>
-                <a:cs typeface="Malgun Gothic" pitchFamily="34" charset="-120"/>
-              </a:rPr>
-              <a:t>CARLA는 A, 모델은 B. 화면에는 카메라 영상 위에 모델이 낸 궤적(빨간 선)과 추론 근거(CoT)가 함께 표시</a:t>
-            </a:r>
-            <a:endParaRPr lang="en-US" sz="1200" dirty="0"/>
-          </a:p>
-          <a:p>
-            <a:pPr marL="152400" indent="-152400">
-              <a:spcAft>
-                <a:spcPts val="400"/>
-              </a:spcAft>
-              <a:buSzPct val="100000"/>
-              <a:buChar char="•"/>
-            </a:pPr>
-            <a:r>
-              <a:rPr lang="en-US" sz="1200" dirty="0">
-                <a:solidFill>
-                  <a:srgbClr val="24313F"/>
-                </a:solidFill>
-                <a:latin typeface="Malgun Gothic" pitchFamily="34" charset="0"/>
-                <a:ea typeface="Malgun Gothic" pitchFamily="34" charset="-122"/>
-                <a:cs typeface="Malgun Gothic" pitchFamily="34" charset="-120"/>
-              </a:rPr>
-              <a:t>비동기 모드: 시뮬레이터는 10 Hz로 계속 돌고, 약 1초마다 새 궤적으로 교체</a:t>
-            </a:r>
-            <a:endParaRPr lang="en-US" sz="1200" dirty="0"/>
-          </a:p>
-          <a:p>
-            <a:pPr marL="152400" indent="-152400">
-              <a:spcAft>
-                <a:spcPts val="400"/>
-              </a:spcAft>
-              <a:buSzPct val="100000"/>
-              <a:buChar char="•"/>
-            </a:pPr>
-            <a:r>
-              <a:rPr lang="en-US" sz="1200" dirty="0">
-                <a:solidFill>
-                  <a:srgbClr val="24313F"/>
-                </a:solidFill>
-                <a:latin typeface="Malgun Gothic" pitchFamily="34" charset="0"/>
-                <a:ea typeface="Malgun Gothic" pitchFamily="34" charset="-122"/>
-                <a:cs typeface="Malgun Gothic" pitchFamily="34" charset="-120"/>
-              </a:rPr>
-              <a:t>차량이 차선을 따라가고 교차로에서 회전·정지하는지 관찰</a:t>
-            </a:r>
-            <a:endParaRPr lang="en-US" sz="1200" dirty="0"/>
-          </a:p>
-          <a:p>
-            <a:pPr marL="152400" indent="-152400">
-              <a:spcAft>
-                <a:spcPts val="400"/>
-              </a:spcAft>
-              <a:buSzPct val="100000"/>
-              <a:buChar char="•"/>
-            </a:pPr>
-            <a:r>
-              <a:rPr lang="en-US" sz="1200" dirty="0">
-                <a:solidFill>
-                  <a:srgbClr val="24313F"/>
-                </a:solidFill>
-                <a:latin typeface="Malgun Gothic" pitchFamily="34" charset="0"/>
-                <a:ea typeface="Malgun Gothic" pitchFamily="34" charset="-122"/>
-                <a:cs typeface="Malgun Gothic" pitchFamily="34" charset="-120"/>
-              </a:rPr>
-              <a:t>네트워크가 끊기면 오래된 궤적을 버리고 정지하는 안전장치 확인</a:t>
-            </a:r>
-            <a:endParaRPr lang="en-US" sz="1200" dirty="0"/>
-          </a:p>
-        </p:txBody>
-      </p:sp>
-      <p:sp>
-        <p:nvSpPr>
-          <p:cNvPr id="11" name="Shape 9"/>
-          <p:cNvSpPr/>
-          <p:nvPr/>
-        </p:nvSpPr>
-        <p:spPr>
-          <a:xfrm>
-            <a:off x="4322978" y="1417320"/>
-            <a:ext cx="3545738" cy="3246120"/>
-          </a:xfrm>
-          <a:prstGeom prst="roundRect">
-            <a:avLst>
-              <a:gd name="adj" fmla="val 2254"/>
-            </a:avLst>
-          </a:prstGeom>
-          <a:solidFill>
-            <a:srgbClr val="F3F5F8"/>
-          </a:solidFill>
-          <a:ln w="9525">
-            <a:solidFill>
-              <a:srgbClr val="D5DBE3"/>
-            </a:solidFill>
-            <a:prstDash val="solid"/>
-          </a:ln>
-        </p:spPr>
-      </p:sp>
-      <p:sp>
-        <p:nvSpPr>
-          <p:cNvPr id="12" name="Shape 10"/>
-          <p:cNvSpPr/>
-          <p:nvPr/>
-        </p:nvSpPr>
-        <p:spPr>
-          <a:xfrm>
-            <a:off x="4505858" y="1581912"/>
-            <a:ext cx="384048" cy="384048"/>
-          </a:xfrm>
-          <a:prstGeom prst="ellipse">
-            <a:avLst/>
-          </a:prstGeom>
-          <a:solidFill>
-            <a:srgbClr val="E0762B"/>
-          </a:solidFill>
-          <a:ln w="12700">
-            <a:solidFill>
-              <a:srgbClr val="E0762B"/>
-            </a:solidFill>
-            <a:prstDash val="solid"/>
-          </a:ln>
-        </p:spPr>
-      </p:sp>
-      <p:sp>
-        <p:nvSpPr>
-          <p:cNvPr id="13" name="Text 11"/>
-          <p:cNvSpPr txBox="1"/>
-          <p:nvPr/>
-        </p:nvSpPr>
-        <p:spPr>
-          <a:xfrm>
-            <a:off x="4505858" y="1581912"/>
-            <a:ext cx="384048" cy="384048"/>
-          </a:xfrm>
-          <a:prstGeom prst="rect">
-            <a:avLst/>
-          </a:prstGeom>
-          <a:noFill/>
-          <a:ln/>
-        </p:spPr>
-        <p:txBody>
-          <a:bodyPr wrap="square" lIns="0" tIns="0" rIns="0" bIns="0" rtlCol="0" anchor="ctr"/>
-          <a:lstStyle/>
-          <a:p>
-            <a:pPr algn="ctr" indent="0" marL="0">
-              <a:buNone/>
-            </a:pPr>
-            <a:r>
-              <a:rPr lang="en-US" sz="1400" b="1" dirty="0">
-                <a:solidFill>
-                  <a:srgbClr val="FFFFFF"/>
-                </a:solidFill>
-                <a:latin typeface="Malgun Gothic" pitchFamily="34" charset="0"/>
-                <a:ea typeface="Malgun Gothic" pitchFamily="34" charset="-122"/>
-                <a:cs typeface="Malgun Gothic" pitchFamily="34" charset="-120"/>
-              </a:rPr>
-              <a:t>2</a:t>
-            </a:r>
-            <a:endParaRPr lang="en-US" sz="1400" dirty="0"/>
-          </a:p>
-        </p:txBody>
-      </p:sp>
-      <p:sp>
-        <p:nvSpPr>
-          <p:cNvPr id="14" name="Text 12"/>
-          <p:cNvSpPr txBox="1"/>
-          <p:nvPr/>
-        </p:nvSpPr>
-        <p:spPr>
-          <a:xfrm>
-            <a:off x="5008778" y="1581912"/>
-            <a:ext cx="2677058" cy="384048"/>
-          </a:xfrm>
-          <a:prstGeom prst="rect">
-            <a:avLst/>
-          </a:prstGeom>
-          <a:noFill/>
-          <a:ln/>
-        </p:spPr>
-        <p:txBody>
-          <a:bodyPr wrap="square" lIns="0" tIns="0" rIns="0" bIns="0" rtlCol="0" anchor="ctr"/>
-          <a:lstStyle/>
-          <a:p>
-            <a:pPr indent="0" marL="0">
-              <a:buNone/>
-            </a:pPr>
-            <a:r>
-              <a:rPr lang="en-US" sz="1500" b="1" dirty="0">
-                <a:solidFill>
-                  <a:srgbClr val="E0762B"/>
-                </a:solidFill>
-                <a:latin typeface="Malgun Gothic" pitchFamily="34" charset="0"/>
-                <a:ea typeface="Malgun Gothic" pitchFamily="34" charset="-122"/>
-                <a:cs typeface="Malgun Gothic" pitchFamily="34" charset="-120"/>
-              </a:rPr>
-              <a:t>navigation(CFG)·VQA 실시간 반영</a:t>
-            </a:r>
-            <a:endParaRPr lang="en-US" sz="1500" dirty="0"/>
-          </a:p>
-        </p:txBody>
-      </p:sp>
-      <p:sp>
-        <p:nvSpPr>
-          <p:cNvPr id="15" name="Text 13"/>
-          <p:cNvSpPr txBox="1"/>
-          <p:nvPr/>
-        </p:nvSpPr>
-        <p:spPr>
-          <a:xfrm>
-            <a:off x="4505858" y="2039112"/>
-            <a:ext cx="3179978" cy="2487168"/>
-          </a:xfrm>
-          <a:prstGeom prst="rect">
-            <a:avLst/>
-          </a:prstGeom>
-          <a:noFill/>
-          <a:ln/>
-        </p:spPr>
-        <p:txBody>
-          <a:bodyPr wrap="square" lIns="0" tIns="0" rIns="0" bIns="0" rtlCol="0" anchor="t"/>
-          <a:lstStyle/>
-          <a:p>
-            <a:pPr marL="152400" indent="-152400">
-              <a:spcAft>
-                <a:spcPts val="400"/>
-              </a:spcAft>
-              <a:buSzPct val="100000"/>
-              <a:buChar char="•"/>
-            </a:pPr>
-            <a:r>
-              <a:rPr lang="en-US" sz="1200" dirty="0">
-                <a:solidFill>
-                  <a:srgbClr val="24313F"/>
-                </a:solidFill>
-                <a:latin typeface="Malgun Gothic" pitchFamily="34" charset="0"/>
-                <a:ea typeface="Malgun Gothic" pitchFamily="34" charset="-122"/>
-                <a:cs typeface="Malgun Gothic" pitchFamily="34" charset="-120"/>
-              </a:rPr>
-              <a:t>주행 중 pygame 창에 자연어 지시 입력 (예: "Turn right in 30m")과 CFG 가중치(예: 1.5) → 다음 추론부터 반영되어 궤적이 바뀜</a:t>
-            </a:r>
-            <a:endParaRPr lang="en-US" sz="1200" dirty="0"/>
-          </a:p>
-          <a:p>
-            <a:pPr marL="152400" indent="-152400">
-              <a:spcAft>
-                <a:spcPts val="400"/>
-              </a:spcAft>
-              <a:buSzPct val="100000"/>
-              <a:buChar char="•"/>
-            </a:pPr>
-            <a:r>
-              <a:rPr lang="en-US" sz="1200" dirty="0">
-                <a:solidFill>
-                  <a:srgbClr val="24313F"/>
-                </a:solidFill>
-                <a:latin typeface="Malgun Gothic" pitchFamily="34" charset="0"/>
-                <a:ea typeface="Malgun Gothic" pitchFamily="34" charset="-122"/>
-                <a:cs typeface="Malgun Gothic" pitchFamily="34" charset="-120"/>
-              </a:rPr>
-              <a:t>가중치를 올리면 지시를 더 강하게 따르는지 비교</a:t>
-            </a:r>
-            <a:endParaRPr lang="en-US" sz="1200" dirty="0"/>
-          </a:p>
-          <a:p>
-            <a:pPr marL="152400" indent="-152400">
-              <a:spcAft>
-                <a:spcPts val="400"/>
-              </a:spcAft>
-              <a:buSzPct val="100000"/>
-              <a:buChar char="•"/>
-            </a:pPr>
-            <a:r>
-              <a:rPr lang="en-US" sz="1200" dirty="0">
-                <a:solidFill>
-                  <a:srgbClr val="24313F"/>
-                </a:solidFill>
-                <a:latin typeface="Malgun Gothic" pitchFamily="34" charset="0"/>
-                <a:ea typeface="Malgun Gothic" pitchFamily="34" charset="-122"/>
-                <a:cs typeface="Malgun Gothic" pitchFamily="34" charset="-120"/>
-              </a:rPr>
-              <a:t>VQA: 차량을 세우고 "What is ahead?" 같은 질문 → 모델의 답을 패널에서 확인</a:t>
-            </a:r>
-            <a:endParaRPr lang="en-US" sz="1200" dirty="0"/>
-          </a:p>
-          <a:p>
-            <a:pPr marL="152400" indent="-152400">
-              <a:spcAft>
-                <a:spcPts val="400"/>
-              </a:spcAft>
-              <a:buSzPct val="100000"/>
-              <a:buChar char="•"/>
-            </a:pPr>
-            <a:r>
-              <a:rPr lang="en-US" sz="1200" dirty="0">
-                <a:solidFill>
-                  <a:srgbClr val="24313F"/>
-                </a:solidFill>
-                <a:latin typeface="Malgun Gothic" pitchFamily="34" charset="0"/>
-                <a:ea typeface="Malgun Gothic" pitchFamily="34" charset="-122"/>
-                <a:cs typeface="Malgun Gothic" pitchFamily="34" charset="-120"/>
-              </a:rPr>
-              <a:t>모든 조작은 A에서, B는 서버만 켜 둔 상태로 변화 없음</a:t>
-            </a:r>
-            <a:endParaRPr lang="en-US" sz="1200" dirty="0"/>
-          </a:p>
-        </p:txBody>
-      </p:sp>
-      <p:sp>
-        <p:nvSpPr>
-          <p:cNvPr id="16" name="Shape 14"/>
-          <p:cNvSpPr/>
-          <p:nvPr/>
-        </p:nvSpPr>
-        <p:spPr>
-          <a:xfrm>
-            <a:off x="8097317" y="1417320"/>
-            <a:ext cx="3545738" cy="3246120"/>
-          </a:xfrm>
-          <a:prstGeom prst="roundRect">
-            <a:avLst>
-              <a:gd name="adj" fmla="val 2254"/>
-            </a:avLst>
-          </a:prstGeom>
-          <a:solidFill>
-            <a:srgbClr val="F3F5F8"/>
-          </a:solidFill>
-          <a:ln w="9525">
-            <a:solidFill>
-              <a:srgbClr val="D5DBE3"/>
-            </a:solidFill>
-            <a:prstDash val="solid"/>
-          </a:ln>
-        </p:spPr>
-      </p:sp>
-      <p:sp>
-        <p:nvSpPr>
-          <p:cNvPr id="17" name="Shape 15"/>
-          <p:cNvSpPr/>
-          <p:nvPr/>
-        </p:nvSpPr>
-        <p:spPr>
-          <a:xfrm>
-            <a:off x="8280197" y="1581912"/>
-            <a:ext cx="384048" cy="384048"/>
-          </a:xfrm>
-          <a:prstGeom prst="ellipse">
-            <a:avLst/>
-          </a:prstGeom>
-          <a:solidFill>
-            <a:srgbClr val="1B2A41"/>
-          </a:solidFill>
-          <a:ln w="12700">
-            <a:solidFill>
-              <a:srgbClr val="1B2A41"/>
-            </a:solidFill>
-            <a:prstDash val="solid"/>
-          </a:ln>
-        </p:spPr>
-      </p:sp>
-      <p:sp>
-        <p:nvSpPr>
-          <p:cNvPr id="18" name="Text 16"/>
-          <p:cNvSpPr txBox="1"/>
-          <p:nvPr/>
-        </p:nvSpPr>
-        <p:spPr>
-          <a:xfrm>
-            <a:off x="8280197" y="1581912"/>
-            <a:ext cx="384048" cy="384048"/>
-          </a:xfrm>
-          <a:prstGeom prst="rect">
-            <a:avLst/>
-          </a:prstGeom>
-          <a:noFill/>
-          <a:ln/>
-        </p:spPr>
-        <p:txBody>
-          <a:bodyPr wrap="square" lIns="0" tIns="0" rIns="0" bIns="0" rtlCol="0" anchor="ctr"/>
-          <a:lstStyle/>
-          <a:p>
-            <a:pPr algn="ctr" indent="0" marL="0">
-              <a:buNone/>
-            </a:pPr>
-            <a:r>
-              <a:rPr lang="en-US" sz="1400" b="1" dirty="0">
-                <a:solidFill>
-                  <a:srgbClr val="FFFFFF"/>
-                </a:solidFill>
-                <a:latin typeface="Malgun Gothic" pitchFamily="34" charset="0"/>
-                <a:ea typeface="Malgun Gothic" pitchFamily="34" charset="-122"/>
-                <a:cs typeface="Malgun Gothic" pitchFamily="34" charset="-120"/>
-              </a:rPr>
-              <a:t>3</a:t>
-            </a:r>
-            <a:endParaRPr lang="en-US" sz="1400" dirty="0"/>
-          </a:p>
-        </p:txBody>
-      </p:sp>
-      <p:sp>
-        <p:nvSpPr>
-          <p:cNvPr id="19" name="Text 17"/>
-          <p:cNvSpPr txBox="1"/>
-          <p:nvPr/>
-        </p:nvSpPr>
-        <p:spPr>
-          <a:xfrm>
-            <a:off x="8783117" y="1581912"/>
-            <a:ext cx="2677058" cy="384048"/>
-          </a:xfrm>
-          <a:prstGeom prst="rect">
-            <a:avLst/>
-          </a:prstGeom>
-          <a:noFill/>
-          <a:ln/>
-        </p:spPr>
-        <p:txBody>
-          <a:bodyPr wrap="square" lIns="0" tIns="0" rIns="0" bIns="0" rtlCol="0" anchor="ctr"/>
-          <a:lstStyle/>
-          <a:p>
-            <a:pPr indent="0" marL="0">
-              <a:buNone/>
-            </a:pPr>
-            <a:r>
-              <a:rPr lang="en-US" sz="1500" b="1" dirty="0">
-                <a:solidFill>
-                  <a:srgbClr val="1B2A41"/>
-                </a:solidFill>
-                <a:latin typeface="Malgun Gothic" pitchFamily="34" charset="0"/>
-                <a:ea typeface="Malgun Gothic" pitchFamily="34" charset="-122"/>
-                <a:cs typeface="Malgun Gothic" pitchFamily="34" charset="-120"/>
-              </a:rPr>
-              <a:t>실측 자원 데이터로 병목 분석</a:t>
-            </a:r>
-            <a:endParaRPr lang="en-US" sz="1500" dirty="0"/>
-          </a:p>
-        </p:txBody>
-      </p:sp>
-      <p:sp>
-        <p:nvSpPr>
-          <p:cNvPr id="20" name="Text 18"/>
-          <p:cNvSpPr txBox="1"/>
-          <p:nvPr/>
-        </p:nvSpPr>
-        <p:spPr>
-          <a:xfrm>
-            <a:off x="8280197" y="2039112"/>
-            <a:ext cx="3179978" cy="2487168"/>
-          </a:xfrm>
-          <a:prstGeom prst="rect">
-            <a:avLst/>
-          </a:prstGeom>
-          <a:noFill/>
-          <a:ln/>
-        </p:spPr>
-        <p:txBody>
-          <a:bodyPr wrap="square" lIns="0" tIns="0" rIns="0" bIns="0" rtlCol="0" anchor="t"/>
-          <a:lstStyle/>
-          <a:p>
-            <a:pPr marL="152400" indent="-152400">
-              <a:spcAft>
-                <a:spcPts val="400"/>
-              </a:spcAft>
-              <a:buSzPct val="100000"/>
-              <a:buChar char="•"/>
-            </a:pPr>
-            <a:r>
-              <a:rPr lang="en-US" sz="1200" dirty="0">
-                <a:solidFill>
-                  <a:srgbClr val="24313F"/>
-                </a:solidFill>
-                <a:latin typeface="Malgun Gothic" pitchFamily="34" charset="0"/>
-                <a:ea typeface="Malgun Gothic" pitchFamily="34" charset="-122"/>
-                <a:cs typeface="Malgun Gothic" pitchFamily="34" charset="-120"/>
-              </a:rPr>
-              <a:t>실행마다 A·B 양쪽에서 자동 기록: 요청 왕복 시간, 서버 추론 시간, 요청 크기, 업로드 대역폭, 궤적 나이, GPU 메모리·사용률, CPU</a:t>
-            </a:r>
-            <a:endParaRPr lang="en-US" sz="1200" dirty="0"/>
-          </a:p>
-          <a:p>
-            <a:pPr marL="152400" indent="-152400">
-              <a:spcAft>
-                <a:spcPts val="400"/>
-              </a:spcAft>
-              <a:buSzPct val="100000"/>
-              <a:buChar char="•"/>
-            </a:pPr>
-            <a:r>
-              <a:rPr lang="en-US" sz="1200" dirty="0">
-                <a:solidFill>
-                  <a:srgbClr val="24313F"/>
-                </a:solidFill>
-                <a:latin typeface="Malgun Gothic" pitchFamily="34" charset="0"/>
-                <a:ea typeface="Malgun Gothic" pitchFamily="34" charset="-122"/>
-                <a:cs typeface="Malgun Gothic" pitchFamily="34" charset="-120"/>
-              </a:rPr>
-              <a:t>왕복 시간 − 서버 처리 시간 = 네트워크+인코딩 오버헤드</a:t>
-            </a:r>
-            <a:endParaRPr lang="en-US" sz="1200" dirty="0"/>
-          </a:p>
-          <a:p>
-            <a:pPr marL="152400" indent="-152400">
-              <a:spcAft>
-                <a:spcPts val="400"/>
-              </a:spcAft>
-              <a:buSzPct val="100000"/>
-              <a:buChar char="•"/>
-            </a:pPr>
-            <a:r>
-              <a:rPr lang="en-US" sz="1200" dirty="0">
-                <a:solidFill>
-                  <a:srgbClr val="24313F"/>
-                </a:solidFill>
-                <a:latin typeface="Malgun Gothic" pitchFamily="34" charset="0"/>
-                <a:ea typeface="Malgun Gothic" pitchFamily="34" charset="-122"/>
-                <a:cs typeface="Malgun Gothic" pitchFamily="34" charset="-120"/>
-              </a:rPr>
-              <a:t>예상: 모델 추론(수 초) ≫ 인코딩(0.1~0.3 s) ≫ 네트워크(&lt; 1 ms). 분리 비용은 작다</a:t>
-            </a:r>
-            <a:endParaRPr lang="en-US" sz="1200" dirty="0"/>
-          </a:p>
-          <a:p>
-            <a:pPr marL="152400" indent="-152400">
-              <a:spcAft>
-                <a:spcPts val="400"/>
-              </a:spcAft>
-              <a:buSzPct val="100000"/>
-              <a:buChar char="•"/>
-            </a:pPr>
-            <a:r>
-              <a:rPr lang="en-US" sz="1200" dirty="0">
-                <a:solidFill>
-                  <a:srgbClr val="24313F"/>
-                </a:solidFill>
-                <a:latin typeface="Malgun Gothic" pitchFamily="34" charset="0"/>
-                <a:ea typeface="Malgun Gothic" pitchFamily="34" charset="-122"/>
-                <a:cs typeface="Malgun Gothic" pitchFamily="34" charset="-120"/>
-              </a:rPr>
-              <a:t>표와 그래프로 정리한 요약 보고서 제시</a:t>
-            </a:r>
-            <a:endParaRPr lang="en-US" sz="1200" dirty="0"/>
-          </a:p>
-        </p:txBody>
-      </p:sp>
-      <p:sp>
-        <p:nvSpPr>
-          <p:cNvPr id="21" name="Text 19"/>
-          <p:cNvSpPr txBox="1"/>
-          <p:nvPr/>
-        </p:nvSpPr>
-        <p:spPr>
-          <a:xfrm>
-            <a:off x="548640" y="4846320"/>
-            <a:ext cx="11094415" cy="274320"/>
-          </a:xfrm>
-          <a:prstGeom prst="rect">
-            <a:avLst/>
-          </a:prstGeom>
-          <a:noFill/>
-          <a:ln/>
-        </p:spPr>
-        <p:txBody>
-          <a:bodyPr wrap="square" lIns="0" tIns="0" rIns="0" bIns="0" rtlCol="0" anchor="t"/>
-          <a:lstStyle/>
-          <a:p>
-            <a:pPr indent="0" marL="0">
-              <a:buNone/>
-            </a:pPr>
-            <a:r>
-              <a:rPr lang="en-US" sz="1100" b="1" dirty="0">
-                <a:solidFill>
-                  <a:srgbClr val="1B2A41"/>
-                </a:solidFill>
-                <a:latin typeface="Malgun Gothic" pitchFamily="34" charset="0"/>
-                <a:ea typeface="Malgun Gothic" pitchFamily="34" charset="-122"/>
-                <a:cs typeface="Malgun Gothic" pitchFamily="34" charset="-120"/>
-              </a:rPr>
-              <a:t>데모 진행 순서</a:t>
-            </a:r>
-            <a:endParaRPr lang="en-US" sz="1100" dirty="0"/>
-          </a:p>
-        </p:txBody>
-      </p:sp>
-      <p:sp>
-        <p:nvSpPr>
-          <p:cNvPr id="22" name="Shape 20"/>
-          <p:cNvSpPr/>
-          <p:nvPr/>
-        </p:nvSpPr>
-        <p:spPr>
-          <a:xfrm>
-            <a:off x="548640" y="5138928"/>
-            <a:ext cx="2602154" cy="1005840"/>
-          </a:xfrm>
-          <a:prstGeom prst="roundRect">
-            <a:avLst>
-              <a:gd name="adj" fmla="val 7273"/>
-            </a:avLst>
-          </a:prstGeom>
-          <a:solidFill>
-            <a:srgbClr val="F3F5F8"/>
-          </a:solidFill>
-          <a:ln w="9525">
-            <a:solidFill>
-              <a:srgbClr val="1B2A41"/>
-            </a:solidFill>
-            <a:prstDash val="solid"/>
-          </a:ln>
-        </p:spPr>
-      </p:sp>
-      <p:sp>
-        <p:nvSpPr>
-          <p:cNvPr id="23" name="Shape 21"/>
-          <p:cNvSpPr/>
-          <p:nvPr/>
-        </p:nvSpPr>
-        <p:spPr>
-          <a:xfrm>
-            <a:off x="658368" y="5248656"/>
-            <a:ext cx="310896" cy="310896"/>
-          </a:xfrm>
-          <a:prstGeom prst="ellipse">
-            <a:avLst/>
-          </a:prstGeom>
-          <a:solidFill>
-            <a:srgbClr val="1B2A41"/>
-          </a:solidFill>
-          <a:ln w="12700">
-            <a:solidFill>
-              <a:srgbClr val="1B2A41"/>
-            </a:solidFill>
-            <a:prstDash val="solid"/>
-          </a:ln>
-        </p:spPr>
-      </p:sp>
-      <p:sp>
-        <p:nvSpPr>
-          <p:cNvPr id="24" name="Text 22"/>
-          <p:cNvSpPr txBox="1"/>
-          <p:nvPr/>
-        </p:nvSpPr>
-        <p:spPr>
-          <a:xfrm>
-            <a:off x="658368" y="5248656"/>
-            <a:ext cx="310896" cy="310896"/>
-          </a:xfrm>
-          <a:prstGeom prst="rect">
-            <a:avLst/>
-          </a:prstGeom>
-          <a:noFill/>
-          <a:ln/>
-        </p:spPr>
-        <p:txBody>
-          <a:bodyPr wrap="square" lIns="0" tIns="0" rIns="0" bIns="0" rtlCol="0" anchor="ctr"/>
-          <a:lstStyle/>
-          <a:p>
-            <a:pPr algn="ctr" indent="0" marL="0">
-              <a:buNone/>
-            </a:pPr>
-            <a:r>
-              <a:rPr lang="en-US" sz="1100" b="1" dirty="0">
-                <a:solidFill>
-                  <a:srgbClr val="FFFFFF"/>
-                </a:solidFill>
-                <a:latin typeface="Malgun Gothic" pitchFamily="34" charset="0"/>
-                <a:ea typeface="Malgun Gothic" pitchFamily="34" charset="-122"/>
-                <a:cs typeface="Malgun Gothic" pitchFamily="34" charset="-120"/>
-              </a:rPr>
-              <a:t>1</a:t>
-            </a:r>
-            <a:endParaRPr lang="en-US" sz="1100" dirty="0"/>
-          </a:p>
-        </p:txBody>
-      </p:sp>
-      <p:sp>
-        <p:nvSpPr>
-          <p:cNvPr id="25" name="Text 23"/>
-          <p:cNvSpPr txBox="1"/>
-          <p:nvPr/>
-        </p:nvSpPr>
-        <p:spPr>
-          <a:xfrm>
-            <a:off x="1024128" y="5230368"/>
-            <a:ext cx="2035226" cy="347472"/>
-          </a:xfrm>
-          <a:prstGeom prst="rect">
-            <a:avLst/>
-          </a:prstGeom>
-          <a:noFill/>
-          <a:ln/>
-        </p:spPr>
-        <p:txBody>
-          <a:bodyPr wrap="square" lIns="0" tIns="0" rIns="0" bIns="0" rtlCol="0" anchor="ctr"/>
-          <a:lstStyle/>
-          <a:p>
-            <a:pPr indent="0" marL="0">
-              <a:buNone/>
-            </a:pPr>
-            <a:r>
-              <a:rPr lang="en-US" sz="1150" b="1" dirty="0">
-                <a:solidFill>
-                  <a:srgbClr val="1B2A41"/>
-                </a:solidFill>
-                <a:latin typeface="Malgun Gothic" pitchFamily="34" charset="0"/>
-                <a:ea typeface="Malgun Gothic" pitchFamily="34" charset="-122"/>
-                <a:cs typeface="Malgun Gothic" pitchFamily="34" charset="-120"/>
-              </a:rPr>
-              <a:t>open-loop</a:t>
-            </a:r>
-            <a:endParaRPr lang="en-US" sz="1150" dirty="0"/>
-          </a:p>
-        </p:txBody>
-      </p:sp>
-      <p:sp>
-        <p:nvSpPr>
-          <p:cNvPr id="26" name="Text 24"/>
-          <p:cNvSpPr txBox="1"/>
-          <p:nvPr/>
-        </p:nvSpPr>
-        <p:spPr>
-          <a:xfrm>
-            <a:off x="658368" y="5596128"/>
-            <a:ext cx="2382698" cy="475488"/>
-          </a:xfrm>
-          <a:prstGeom prst="rect">
-            <a:avLst/>
-          </a:prstGeom>
-          <a:noFill/>
-          <a:ln/>
-        </p:spPr>
-        <p:txBody>
-          <a:bodyPr wrap="square" lIns="0" tIns="0" rIns="0" bIns="0" rtlCol="0" anchor="t"/>
-          <a:lstStyle/>
-          <a:p>
-            <a:pPr indent="0" marL="0">
-              <a:buNone/>
-            </a:pPr>
-            <a:r>
-              <a:rPr lang="en-US" sz="950" dirty="0">
-                <a:solidFill>
-                  <a:srgbClr val="24313F"/>
-                </a:solidFill>
-                <a:latin typeface="Malgun Gothic" pitchFamily="34" charset="0"/>
-                <a:ea typeface="Malgun Gothic" pitchFamily="34" charset="-122"/>
-                <a:cs typeface="Malgun Gothic" pitchFamily="34" charset="-120"/>
-              </a:rPr>
-              <a:t>녹화 데이터 재생으로 원격 추론 경로 검증, B 로컬 결과와 일치 확인</a:t>
-            </a:r>
-            <a:endParaRPr lang="en-US" sz="950" dirty="0"/>
-          </a:p>
-        </p:txBody>
-      </p:sp>
-      <p:sp>
-        <p:nvSpPr>
-          <p:cNvPr id="27" name="Shape 25"/>
-          <p:cNvSpPr/>
-          <p:nvPr/>
-        </p:nvSpPr>
-        <p:spPr>
-          <a:xfrm>
-            <a:off x="3178226" y="5641848"/>
-            <a:ext cx="173736" cy="0"/>
-          </a:xfrm>
-          <a:prstGeom prst="line">
-            <a:avLst/>
-          </a:prstGeom>
-          <a:noFill/>
-          <a:ln w="15875">
-            <a:solidFill>
-              <a:srgbClr val="6B7A8C"/>
-            </a:solidFill>
-            <a:prstDash val="solid"/>
-            <a:tailEnd type="triangle"/>
-          </a:ln>
-        </p:spPr>
-      </p:sp>
-      <p:sp>
-        <p:nvSpPr>
-          <p:cNvPr id="28" name="Shape 26"/>
-          <p:cNvSpPr/>
-          <p:nvPr/>
-        </p:nvSpPr>
-        <p:spPr>
-          <a:xfrm>
-            <a:off x="3379394" y="5138928"/>
-            <a:ext cx="2602154" cy="1005840"/>
-          </a:xfrm>
-          <a:prstGeom prst="roundRect">
-            <a:avLst>
-              <a:gd name="adj" fmla="val 7273"/>
-            </a:avLst>
-          </a:prstGeom>
-          <a:solidFill>
-            <a:srgbClr val="F3F5F8"/>
-          </a:solidFill>
-          <a:ln w="9525">
-            <a:solidFill>
-              <a:srgbClr val="2A6FDB"/>
-            </a:solidFill>
-            <a:prstDash val="solid"/>
-          </a:ln>
-        </p:spPr>
-      </p:sp>
-      <p:sp>
-        <p:nvSpPr>
-          <p:cNvPr id="29" name="Shape 27"/>
-          <p:cNvSpPr/>
-          <p:nvPr/>
-        </p:nvSpPr>
-        <p:spPr>
-          <a:xfrm>
-            <a:off x="3489122" y="5248656"/>
-            <a:ext cx="310896" cy="310896"/>
-          </a:xfrm>
-          <a:prstGeom prst="ellipse">
-            <a:avLst/>
-          </a:prstGeom>
-          <a:solidFill>
-            <a:srgbClr val="2A6FDB"/>
-          </a:solidFill>
-          <a:ln w="12700">
-            <a:solidFill>
-              <a:srgbClr val="2A6FDB"/>
-            </a:solidFill>
-            <a:prstDash val="solid"/>
-          </a:ln>
-        </p:spPr>
-      </p:sp>
-      <p:sp>
-        <p:nvSpPr>
-          <p:cNvPr id="30" name="Text 28"/>
-          <p:cNvSpPr txBox="1"/>
-          <p:nvPr/>
-        </p:nvSpPr>
-        <p:spPr>
-          <a:xfrm>
-            <a:off x="3489122" y="5248656"/>
-            <a:ext cx="310896" cy="310896"/>
-          </a:xfrm>
-          <a:prstGeom prst="rect">
-            <a:avLst/>
-          </a:prstGeom>
-          <a:noFill/>
-          <a:ln/>
-        </p:spPr>
-        <p:txBody>
-          <a:bodyPr wrap="square" lIns="0" tIns="0" rIns="0" bIns="0" rtlCol="0" anchor="ctr"/>
-          <a:lstStyle/>
-          <a:p>
-            <a:pPr algn="ctr" indent="0" marL="0">
-              <a:buNone/>
-            </a:pPr>
-            <a:r>
-              <a:rPr lang="en-US" sz="1100" b="1" dirty="0">
-                <a:solidFill>
-                  <a:srgbClr val="FFFFFF"/>
-                </a:solidFill>
-                <a:latin typeface="Malgun Gothic" pitchFamily="34" charset="0"/>
-                <a:ea typeface="Malgun Gothic" pitchFamily="34" charset="-122"/>
-                <a:cs typeface="Malgun Gothic" pitchFamily="34" charset="-120"/>
-              </a:rPr>
-              <a:t>2</a:t>
-            </a:r>
-            <a:endParaRPr lang="en-US" sz="1100" dirty="0"/>
-          </a:p>
-        </p:txBody>
-      </p:sp>
-      <p:sp>
-        <p:nvSpPr>
-          <p:cNvPr id="31" name="Text 29"/>
-          <p:cNvSpPr txBox="1"/>
-          <p:nvPr/>
-        </p:nvSpPr>
-        <p:spPr>
-          <a:xfrm>
-            <a:off x="3854882" y="5230368"/>
-            <a:ext cx="2035226" cy="347472"/>
-          </a:xfrm>
-          <a:prstGeom prst="rect">
-            <a:avLst/>
-          </a:prstGeom>
-          <a:noFill/>
-          <a:ln/>
-        </p:spPr>
-        <p:txBody>
-          <a:bodyPr wrap="square" lIns="0" tIns="0" rIns="0" bIns="0" rtlCol="0" anchor="ctr"/>
-          <a:lstStyle/>
-          <a:p>
-            <a:pPr indent="0" marL="0">
-              <a:buNone/>
-            </a:pPr>
-            <a:r>
-              <a:rPr lang="en-US" sz="1150" b="1" dirty="0">
-                <a:solidFill>
-                  <a:srgbClr val="2A6FDB"/>
-                </a:solidFill>
-                <a:latin typeface="Malgun Gothic" pitchFamily="34" charset="0"/>
-                <a:ea typeface="Malgun Gothic" pitchFamily="34" charset="-122"/>
-                <a:cs typeface="Malgun Gothic" pitchFamily="34" charset="-120"/>
-              </a:rPr>
-              <a:t>closed-loop</a:t>
-            </a:r>
-            <a:endParaRPr lang="en-US" sz="1150" dirty="0"/>
-          </a:p>
-        </p:txBody>
-      </p:sp>
-      <p:sp>
-        <p:nvSpPr>
-          <p:cNvPr id="32" name="Text 30"/>
-          <p:cNvSpPr txBox="1"/>
-          <p:nvPr/>
-        </p:nvSpPr>
-        <p:spPr>
-          <a:xfrm>
-            <a:off x="3489122" y="5596128"/>
-            <a:ext cx="2382698" cy="475488"/>
-          </a:xfrm>
-          <a:prstGeom prst="rect">
-            <a:avLst/>
-          </a:prstGeom>
-          <a:noFill/>
-          <a:ln/>
-        </p:spPr>
-        <p:txBody>
-          <a:bodyPr wrap="square" lIns="0" tIns="0" rIns="0" bIns="0" rtlCol="0" anchor="t"/>
-          <a:lstStyle/>
-          <a:p>
-            <a:pPr indent="0" marL="0">
-              <a:buNone/>
-            </a:pPr>
-            <a:r>
-              <a:rPr lang="en-US" sz="950" dirty="0">
-                <a:solidFill>
-                  <a:srgbClr val="24313F"/>
-                </a:solidFill>
-                <a:latin typeface="Malgun Gothic" pitchFamily="34" charset="0"/>
-                <a:ea typeface="Malgun Gothic" pitchFamily="34" charset="-122"/>
-                <a:cs typeface="Malgun Gothic" pitchFamily="34" charset="-120"/>
-              </a:rPr>
-              <a:t>모델이 실제로 운전. 비동기 모드, pygame 화면</a:t>
-            </a:r>
-            <a:endParaRPr lang="en-US" sz="950" dirty="0"/>
-          </a:p>
-        </p:txBody>
-      </p:sp>
-      <p:sp>
-        <p:nvSpPr>
-          <p:cNvPr id="33" name="Shape 31"/>
-          <p:cNvSpPr/>
-          <p:nvPr/>
-        </p:nvSpPr>
-        <p:spPr>
-          <a:xfrm>
-            <a:off x="6008980" y="5641848"/>
-            <a:ext cx="173736" cy="0"/>
-          </a:xfrm>
-          <a:prstGeom prst="line">
-            <a:avLst/>
-          </a:prstGeom>
-          <a:noFill/>
-          <a:ln w="15875">
-            <a:solidFill>
-              <a:srgbClr val="6B7A8C"/>
-            </a:solidFill>
-            <a:prstDash val="solid"/>
-            <a:tailEnd type="triangle"/>
-          </a:ln>
-        </p:spPr>
-      </p:sp>
-      <p:sp>
-        <p:nvSpPr>
-          <p:cNvPr id="34" name="Shape 32"/>
-          <p:cNvSpPr/>
-          <p:nvPr/>
-        </p:nvSpPr>
-        <p:spPr>
-          <a:xfrm>
-            <a:off x="6210148" y="5138928"/>
-            <a:ext cx="2602154" cy="1005840"/>
-          </a:xfrm>
-          <a:prstGeom prst="roundRect">
-            <a:avLst>
-              <a:gd name="adj" fmla="val 7273"/>
-            </a:avLst>
-          </a:prstGeom>
-          <a:solidFill>
-            <a:srgbClr val="F3F5F8"/>
-          </a:solidFill>
-          <a:ln w="9525">
-            <a:solidFill>
-              <a:srgbClr val="E0762B"/>
-            </a:solidFill>
-            <a:prstDash val="solid"/>
-          </a:ln>
-        </p:spPr>
-      </p:sp>
-      <p:sp>
-        <p:nvSpPr>
-          <p:cNvPr id="35" name="Shape 33"/>
-          <p:cNvSpPr/>
-          <p:nvPr/>
-        </p:nvSpPr>
-        <p:spPr>
-          <a:xfrm>
-            <a:off x="6319876" y="5248656"/>
-            <a:ext cx="310896" cy="310896"/>
-          </a:xfrm>
-          <a:prstGeom prst="ellipse">
-            <a:avLst/>
-          </a:prstGeom>
-          <a:solidFill>
-            <a:srgbClr val="E0762B"/>
-          </a:solidFill>
-          <a:ln w="12700">
-            <a:solidFill>
-              <a:srgbClr val="E0762B"/>
-            </a:solidFill>
-            <a:prstDash val="solid"/>
-          </a:ln>
-        </p:spPr>
-      </p:sp>
-      <p:sp>
-        <p:nvSpPr>
-          <p:cNvPr id="36" name="Text 34"/>
-          <p:cNvSpPr txBox="1"/>
-          <p:nvPr/>
-        </p:nvSpPr>
-        <p:spPr>
-          <a:xfrm>
-            <a:off x="6319876" y="5248656"/>
-            <a:ext cx="310896" cy="310896"/>
-          </a:xfrm>
-          <a:prstGeom prst="rect">
-            <a:avLst/>
-          </a:prstGeom>
-          <a:noFill/>
-          <a:ln/>
-        </p:spPr>
-        <p:txBody>
-          <a:bodyPr wrap="square" lIns="0" tIns="0" rIns="0" bIns="0" rtlCol="0" anchor="ctr"/>
-          <a:lstStyle/>
-          <a:p>
-            <a:pPr algn="ctr" indent="0" marL="0">
-              <a:buNone/>
-            </a:pPr>
-            <a:r>
-              <a:rPr lang="en-US" sz="1100" b="1" dirty="0">
-                <a:solidFill>
-                  <a:srgbClr val="FFFFFF"/>
-                </a:solidFill>
-                <a:latin typeface="Malgun Gothic" pitchFamily="34" charset="0"/>
-                <a:ea typeface="Malgun Gothic" pitchFamily="34" charset="-122"/>
-                <a:cs typeface="Malgun Gothic" pitchFamily="34" charset="-120"/>
-              </a:rPr>
-              <a:t>3</a:t>
-            </a:r>
-            <a:endParaRPr lang="en-US" sz="1100" dirty="0"/>
-          </a:p>
-        </p:txBody>
-      </p:sp>
-      <p:sp>
-        <p:nvSpPr>
-          <p:cNvPr id="37" name="Text 35"/>
-          <p:cNvSpPr txBox="1"/>
-          <p:nvPr/>
-        </p:nvSpPr>
-        <p:spPr>
-          <a:xfrm>
-            <a:off x="6685636" y="5230368"/>
-            <a:ext cx="2035226" cy="347472"/>
-          </a:xfrm>
-          <a:prstGeom prst="rect">
-            <a:avLst/>
-          </a:prstGeom>
-          <a:noFill/>
-          <a:ln/>
-        </p:spPr>
-        <p:txBody>
-          <a:bodyPr wrap="square" lIns="0" tIns="0" rIns="0" bIns="0" rtlCol="0" anchor="ctr"/>
-          <a:lstStyle/>
-          <a:p>
-            <a:pPr indent="0" marL="0">
-              <a:buNone/>
-            </a:pPr>
-            <a:r>
-              <a:rPr lang="en-US" sz="1150" b="1" dirty="0">
-                <a:solidFill>
-                  <a:srgbClr val="E0762B"/>
-                </a:solidFill>
-                <a:latin typeface="Malgun Gothic" pitchFamily="34" charset="0"/>
-                <a:ea typeface="Malgun Gothic" pitchFamily="34" charset="-122"/>
-                <a:cs typeface="Malgun Gothic" pitchFamily="34" charset="-120"/>
-              </a:rPr>
-              <a:t>navigation + CFG</a:t>
-            </a:r>
-            <a:endParaRPr lang="en-US" sz="1150" dirty="0"/>
-          </a:p>
-        </p:txBody>
-      </p:sp>
-      <p:sp>
-        <p:nvSpPr>
-          <p:cNvPr id="38" name="Text 36"/>
-          <p:cNvSpPr txBox="1"/>
-          <p:nvPr/>
-        </p:nvSpPr>
-        <p:spPr>
-          <a:xfrm>
-            <a:off x="6319876" y="5596128"/>
-            <a:ext cx="2382698" cy="475488"/>
-          </a:xfrm>
-          <a:prstGeom prst="rect">
-            <a:avLst/>
-          </a:prstGeom>
-          <a:noFill/>
-          <a:ln/>
-        </p:spPr>
-        <p:txBody>
-          <a:bodyPr wrap="square" lIns="0" tIns="0" rIns="0" bIns="0" rtlCol="0" anchor="t"/>
-          <a:lstStyle/>
-          <a:p>
-            <a:pPr indent="0" marL="0">
-              <a:buNone/>
-            </a:pPr>
-            <a:r>
-              <a:rPr lang="en-US" sz="950" dirty="0">
-                <a:solidFill>
-                  <a:srgbClr val="24313F"/>
-                </a:solidFill>
-                <a:latin typeface="Malgun Gothic" pitchFamily="34" charset="0"/>
-                <a:ea typeface="Malgun Gothic" pitchFamily="34" charset="-122"/>
-                <a:cs typeface="Malgun Gothic" pitchFamily="34" charset="-120"/>
-              </a:rPr>
-              <a:t>주행 중 자연어 지시·가중치 입력, 궤적 변화 관찰</a:t>
-            </a:r>
-            <a:endParaRPr lang="en-US" sz="950" dirty="0"/>
-          </a:p>
-        </p:txBody>
-      </p:sp>
-      <p:sp>
-        <p:nvSpPr>
-          <p:cNvPr id="39" name="Shape 37"/>
-          <p:cNvSpPr/>
-          <p:nvPr/>
-        </p:nvSpPr>
-        <p:spPr>
-          <a:xfrm>
-            <a:off x="8839733" y="5641848"/>
-            <a:ext cx="173736" cy="0"/>
-          </a:xfrm>
-          <a:prstGeom prst="line">
-            <a:avLst/>
-          </a:prstGeom>
-          <a:noFill/>
-          <a:ln w="15875">
-            <a:solidFill>
-              <a:srgbClr val="6B7A8C"/>
-            </a:solidFill>
-            <a:prstDash val="solid"/>
-            <a:tailEnd type="triangle"/>
-          </a:ln>
-        </p:spPr>
-      </p:sp>
-      <p:sp>
-        <p:nvSpPr>
-          <p:cNvPr id="40" name="Shape 38"/>
-          <p:cNvSpPr/>
-          <p:nvPr/>
-        </p:nvSpPr>
-        <p:spPr>
-          <a:xfrm>
-            <a:off x="9040901" y="5138928"/>
-            <a:ext cx="2602154" cy="1005840"/>
-          </a:xfrm>
-          <a:prstGeom prst="roundRect">
-            <a:avLst>
-              <a:gd name="adj" fmla="val 7273"/>
-            </a:avLst>
-          </a:prstGeom>
-          <a:solidFill>
-            <a:srgbClr val="F3F5F8"/>
-          </a:solidFill>
-          <a:ln w="9525">
-            <a:solidFill>
-              <a:srgbClr val="E0762B"/>
-            </a:solidFill>
-            <a:prstDash val="solid"/>
-          </a:ln>
-        </p:spPr>
-      </p:sp>
-      <p:sp>
-        <p:nvSpPr>
-          <p:cNvPr id="41" name="Shape 39"/>
-          <p:cNvSpPr/>
-          <p:nvPr/>
-        </p:nvSpPr>
-        <p:spPr>
-          <a:xfrm>
-            <a:off x="9150629" y="5248656"/>
-            <a:ext cx="310896" cy="310896"/>
-          </a:xfrm>
-          <a:prstGeom prst="ellipse">
-            <a:avLst/>
-          </a:prstGeom>
-          <a:solidFill>
-            <a:srgbClr val="E0762B"/>
-          </a:solidFill>
-          <a:ln w="12700">
-            <a:solidFill>
-              <a:srgbClr val="E0762B"/>
-            </a:solidFill>
-            <a:prstDash val="solid"/>
-          </a:ln>
-        </p:spPr>
-      </p:sp>
-      <p:sp>
-        <p:nvSpPr>
-          <p:cNvPr id="42" name="Text 40"/>
-          <p:cNvSpPr txBox="1"/>
-          <p:nvPr/>
-        </p:nvSpPr>
-        <p:spPr>
-          <a:xfrm>
-            <a:off x="9150629" y="5248656"/>
-            <a:ext cx="310896" cy="310896"/>
-          </a:xfrm>
-          <a:prstGeom prst="rect">
-            <a:avLst/>
-          </a:prstGeom>
-          <a:noFill/>
-          <a:ln/>
-        </p:spPr>
-        <p:txBody>
-          <a:bodyPr wrap="square" lIns="0" tIns="0" rIns="0" bIns="0" rtlCol="0" anchor="ctr"/>
-          <a:lstStyle/>
-          <a:p>
-            <a:pPr algn="ctr" indent="0" marL="0">
-              <a:buNone/>
-            </a:pPr>
-            <a:r>
-              <a:rPr lang="en-US" sz="1100" b="1" dirty="0">
-                <a:solidFill>
-                  <a:srgbClr val="FFFFFF"/>
-                </a:solidFill>
-                <a:latin typeface="Malgun Gothic" pitchFamily="34" charset="0"/>
-                <a:ea typeface="Malgun Gothic" pitchFamily="34" charset="-122"/>
-                <a:cs typeface="Malgun Gothic" pitchFamily="34" charset="-120"/>
-              </a:rPr>
-              <a:t>4</a:t>
-            </a:r>
-            <a:endParaRPr lang="en-US" sz="1100" dirty="0"/>
-          </a:p>
-        </p:txBody>
-      </p:sp>
-      <p:sp>
-        <p:nvSpPr>
-          <p:cNvPr id="43" name="Text 41"/>
-          <p:cNvSpPr txBox="1"/>
-          <p:nvPr/>
-        </p:nvSpPr>
-        <p:spPr>
-          <a:xfrm>
-            <a:off x="9516389" y="5230368"/>
-            <a:ext cx="2035226" cy="347472"/>
-          </a:xfrm>
-          <a:prstGeom prst="rect">
-            <a:avLst/>
-          </a:prstGeom>
-          <a:noFill/>
-          <a:ln/>
-        </p:spPr>
-        <p:txBody>
-          <a:bodyPr wrap="square" lIns="0" tIns="0" rIns="0" bIns="0" rtlCol="0" anchor="ctr"/>
-          <a:lstStyle/>
-          <a:p>
-            <a:pPr indent="0" marL="0">
-              <a:buNone/>
-            </a:pPr>
-            <a:r>
-              <a:rPr lang="en-US" sz="1150" b="1" dirty="0">
-                <a:solidFill>
-                  <a:srgbClr val="E0762B"/>
-                </a:solidFill>
-                <a:latin typeface="Malgun Gothic" pitchFamily="34" charset="0"/>
-                <a:ea typeface="Malgun Gothic" pitchFamily="34" charset="-122"/>
-                <a:cs typeface="Malgun Gothic" pitchFamily="34" charset="-120"/>
-              </a:rPr>
-              <a:t>VQA</a:t>
-            </a:r>
-            <a:endParaRPr lang="en-US" sz="1150" dirty="0"/>
-          </a:p>
-        </p:txBody>
-      </p:sp>
-      <p:sp>
-        <p:nvSpPr>
-          <p:cNvPr id="44" name="Text 42"/>
-          <p:cNvSpPr txBox="1"/>
-          <p:nvPr/>
-        </p:nvSpPr>
-        <p:spPr>
-          <a:xfrm>
-            <a:off x="9150629" y="5596128"/>
-            <a:ext cx="2382698" cy="475488"/>
-          </a:xfrm>
-          <a:prstGeom prst="rect">
-            <a:avLst/>
-          </a:prstGeom>
-          <a:noFill/>
-          <a:ln/>
-        </p:spPr>
-        <p:txBody>
-          <a:bodyPr wrap="square" lIns="0" tIns="0" rIns="0" bIns="0" rtlCol="0" anchor="t"/>
-          <a:lstStyle/>
-          <a:p>
-            <a:pPr indent="0" marL="0">
-              <a:buNone/>
-            </a:pPr>
-            <a:r>
-              <a:rPr lang="en-US" sz="950" dirty="0">
-                <a:solidFill>
-                  <a:srgbClr val="24313F"/>
-                </a:solidFill>
-                <a:latin typeface="Malgun Gothic" pitchFamily="34" charset="0"/>
-                <a:ea typeface="Malgun Gothic" pitchFamily="34" charset="-122"/>
-                <a:cs typeface="Malgun Gothic" pitchFamily="34" charset="-120"/>
-              </a:rPr>
-              <a:t>정차 후 질문, 모델의 답 확인</a:t>
-            </a:r>
-            <a:endParaRPr lang="en-US" sz="950" dirty="0"/>
-          </a:p>
-        </p:txBody>
-      </p:sp>
-    </p:spTree>
-  </p:cSld>
-  <p:clrMapOvr>
-    <a:masterClrMapping/>
-  </p:clrMapOvr>
-</p:sld>
-</file>
-
 <file path=ppt/slides/slide5.xml><?xml version="1.0" encoding="utf-8"?>
 <p:sld xmlns:a="http://schemas.openxmlformats.org/drawingml/2006/main" xmlns:r="http://schemas.openxmlformats.org/officeDocument/2006/relationships" xmlns:p="http://schemas.openxmlformats.org/presentationml/2006/main">
   <p:cSld name="Slide 5">
@@ -7311,7 +6454,7 @@
                 <a:ea typeface="Malgun Gothic" pitchFamily="34" charset="-122"/>
                 <a:cs typeface="Malgun Gothic" pitchFamily="34" charset="-120"/>
               </a:rPr>
-              <a:t>시사점</a:t>
+              <a:t>이번 데모에서 보여줄 것</a:t>
             </a:r>
             <a:endParaRPr lang="en-US" sz="2800" dirty="0"/>
           </a:p>
@@ -7350,7 +6493,7 @@
                 <a:ea typeface="Malgun Gothic" pitchFamily="34" charset="-122"/>
                 <a:cs typeface="Malgun Gothic" pitchFamily="34" charset="-120"/>
               </a:rPr>
-              <a:t>CARLA의 'x86' 요구와 Alpamayo의 '대용량 VRAM' 요구를 서로 다른 인스턴스로 분리해도 closed-loop가 성립함을 입증</a:t>
+              <a:t>물리적으로 떨어진 두 인스턴스에서 자율주행이 '되는지', 조작이 '실시간으로 먹는지', 어디가 '느린지'</a:t>
             </a:r>
             <a:endParaRPr lang="en-US" sz="1400" dirty="0"/>
           </a:p>
@@ -7442,12 +6585,12 @@
         </p:nvSpPr>
         <p:spPr>
           <a:xfrm>
-            <a:off x="548640" y="1463040"/>
-            <a:ext cx="5432908" cy="2011680"/>
+            <a:off x="548640" y="1417320"/>
+            <a:ext cx="3545738" cy="3246120"/>
           </a:xfrm>
           <a:prstGeom prst="roundRect">
             <a:avLst>
-              <a:gd name="adj" fmla="val 3636"/>
+              <a:gd name="adj" fmla="val 2254"/>
             </a:avLst>
           </a:prstGeom>
           <a:solidFill>
@@ -7469,7 +6612,7 @@
         </p:nvSpPr>
         <p:spPr>
           <a:xfrm>
-            <a:off x="731520" y="1627632"/>
+            <a:off x="731520" y="1581912"/>
             <a:ext cx="384048" cy="384048"/>
           </a:xfrm>
           <a:prstGeom prst="ellipse">
@@ -7494,7 +6637,7 @@
         </p:nvSpPr>
         <p:spPr>
           <a:xfrm>
-            <a:off x="731520" y="1627632"/>
+            <a:off x="731520" y="1581912"/>
             <a:ext cx="384048" cy="384048"/>
           </a:xfrm>
           <a:prstGeom prst="rect">
@@ -7533,8 +6676,8 @@
         </p:nvSpPr>
         <p:spPr>
           <a:xfrm>
-            <a:off x="1234440" y="1627632"/>
-            <a:ext cx="4564228" cy="384048"/>
+            <a:off x="1234440" y="1581912"/>
+            <a:ext cx="2677058" cy="384048"/>
           </a:xfrm>
           <a:prstGeom prst="rect">
             <a:avLst/>
@@ -7558,7 +6701,7 @@
                 <a:ea typeface="Malgun Gothic" pitchFamily="34" charset="-122"/>
                 <a:cs typeface="Malgun Gothic" pitchFamily="34" charset="-120"/>
               </a:rPr>
-              <a:t>요구사항 분리 입증</a:t>
+              <a:t>물리 분리 closed-loop 자율주행</a:t>
             </a:r>
             <a:endParaRPr lang="en-US" sz="1500" dirty="0"/>
           </a:p>
@@ -7572,8 +6715,8 @@
         </p:nvSpPr>
         <p:spPr>
           <a:xfrm>
-            <a:off x="731520" y="2084832"/>
-            <a:ext cx="5067148" cy="1252728"/>
+            <a:off x="731520" y="2039112"/>
+            <a:ext cx="3179978" cy="2487168"/>
           </a:xfrm>
           <a:prstGeom prst="rect">
             <a:avLst/>
@@ -7593,7 +6736,7 @@
               <a:buChar char="•"/>
             </a:pPr>
             <a:r>
-              <a:rPr lang="en-US" sz="1300" dirty="0">
+              <a:rPr lang="en-US" sz="1200" dirty="0">
                 <a:solidFill>
                   <a:srgbClr val="24313F"/>
                 </a:solidFill>
@@ -7601,9 +6744,9 @@
                 <a:ea typeface="Malgun Gothic" pitchFamily="34" charset="-122"/>
                 <a:cs typeface="Malgun Gothic" pitchFamily="34" charset="-120"/>
               </a:rPr>
-              <a:t>CARLA(UE4)는 x86 CPU가 필수이지만 GPU는 6 GB면 충분</a:t>
-            </a:r>
-            <a:endParaRPr lang="en-US" sz="1300" dirty="0"/>
+              <a:t>CARLA는 A, 모델은 B. 화면에는 카메라 영상 위에 모델이 낸 궤적(빨간 선)과 추론 근거(CoT)가 함께 표시</a:t>
+            </a:r>
+            <a:endParaRPr lang="en-US" sz="1200" dirty="0"/>
           </a:p>
           <a:p>
             <a:pPr marL="152400" indent="-152400">
@@ -7614,7 +6757,7 @@
               <a:buChar char="•"/>
             </a:pPr>
             <a:r>
-              <a:rPr lang="en-US" sz="1300" dirty="0">
+              <a:rPr lang="en-US" sz="1200" dirty="0">
                 <a:solidFill>
                   <a:srgbClr val="24313F"/>
                 </a:solidFill>
@@ -7622,9 +6765,9 @@
                 <a:ea typeface="Malgun Gothic" pitchFamily="34" charset="-122"/>
                 <a:cs typeface="Malgun Gothic" pitchFamily="34" charset="-120"/>
               </a:rPr>
-              <a:t>Alpamayo는 VRAM 24 GB 이상이 필요하지만 CPU 아키텍처에는 무관</a:t>
-            </a:r>
-            <a:endParaRPr lang="en-US" sz="1300" dirty="0"/>
+              <a:t>비동기 모드: 시뮬레이터는 10 Hz로 계속 돌고, 약 1초마다 새 궤적으로 교체</a:t>
+            </a:r>
+            <a:endParaRPr lang="en-US" sz="1200" dirty="0"/>
           </a:p>
           <a:p>
             <a:pPr marL="152400" indent="-152400">
@@ -7635,7 +6778,7 @@
               <a:buChar char="•"/>
             </a:pPr>
             <a:r>
-              <a:rPr lang="en-US" sz="1300" dirty="0">
+              <a:rPr lang="en-US" sz="1200" dirty="0">
                 <a:solidFill>
                   <a:srgbClr val="24313F"/>
                 </a:solidFill>
@@ -7643,9 +6786,30 @@
                 <a:ea typeface="Malgun Gothic" pitchFamily="34" charset="-122"/>
                 <a:cs typeface="Malgun Gothic" pitchFamily="34" charset="-120"/>
               </a:rPr>
-              <a:t>둘을 같은 머신에 두던 제약(양자화·OOM-free 대책)이 사라짐</a:t>
-            </a:r>
-            <a:endParaRPr lang="en-US" sz="1300" dirty="0"/>
+              <a:t>차량이 차선을 따라가고 교차로에서 회전·정지하는지 관찰</a:t>
+            </a:r>
+            <a:endParaRPr lang="en-US" sz="1200" dirty="0"/>
+          </a:p>
+          <a:p>
+            <a:pPr marL="152400" indent="-152400">
+              <a:spcAft>
+                <a:spcPts val="400"/>
+              </a:spcAft>
+              <a:buSzPct val="100000"/>
+              <a:buChar char="•"/>
+            </a:pPr>
+            <a:r>
+              <a:rPr lang="en-US" sz="1200" dirty="0">
+                <a:solidFill>
+                  <a:srgbClr val="24313F"/>
+                </a:solidFill>
+                <a:latin typeface="Malgun Gothic" pitchFamily="34" charset="0"/>
+                <a:ea typeface="Malgun Gothic" pitchFamily="34" charset="-122"/>
+                <a:cs typeface="Malgun Gothic" pitchFamily="34" charset="-120"/>
+              </a:rPr>
+              <a:t>네트워크가 끊기면 오래된 궤적을 버리고 정지하는 안전장치 확인</a:t>
+            </a:r>
+            <a:endParaRPr lang="en-US" sz="1200" dirty="0"/>
           </a:p>
         </p:txBody>
       </p:sp>
@@ -7657,12 +6821,12 @@
         </p:nvSpPr>
         <p:spPr>
           <a:xfrm>
-            <a:off x="6210148" y="1463040"/>
-            <a:ext cx="5432908" cy="2011680"/>
+            <a:off x="4322978" y="1417320"/>
+            <a:ext cx="3545738" cy="3246120"/>
           </a:xfrm>
           <a:prstGeom prst="roundRect">
             <a:avLst>
-              <a:gd name="adj" fmla="val 3636"/>
+              <a:gd name="adj" fmla="val 2254"/>
             </a:avLst>
           </a:prstGeom>
           <a:solidFill>
@@ -7684,7 +6848,7 @@
         </p:nvSpPr>
         <p:spPr>
           <a:xfrm>
-            <a:off x="6393028" y="1627632"/>
+            <a:off x="4505858" y="1581912"/>
             <a:ext cx="384048" cy="384048"/>
           </a:xfrm>
           <a:prstGeom prst="ellipse">
@@ -7709,7 +6873,7 @@
         </p:nvSpPr>
         <p:spPr>
           <a:xfrm>
-            <a:off x="6393028" y="1627632"/>
+            <a:off x="4505858" y="1581912"/>
             <a:ext cx="384048" cy="384048"/>
           </a:xfrm>
           <a:prstGeom prst="rect">
@@ -7748,8 +6912,8 @@
         </p:nvSpPr>
         <p:spPr>
           <a:xfrm>
-            <a:off x="6895948" y="1627632"/>
-            <a:ext cx="4564228" cy="384048"/>
+            <a:off x="5008778" y="1581912"/>
+            <a:ext cx="2677058" cy="384048"/>
           </a:xfrm>
           <a:prstGeom prst="rect">
             <a:avLst/>
@@ -7773,7 +6937,7 @@
                 <a:ea typeface="Malgun Gothic" pitchFamily="34" charset="-122"/>
                 <a:cs typeface="Malgun Gothic" pitchFamily="34" charset="-120"/>
               </a:rPr>
-              <a:t>인스턴스 선택 유연성</a:t>
+              <a:t>navigation(CFG)·VQA 실시간 반영</a:t>
             </a:r>
             <a:endParaRPr lang="en-US" sz="1500" dirty="0"/>
           </a:p>
@@ -7787,8 +6951,8 @@
         </p:nvSpPr>
         <p:spPr>
           <a:xfrm>
-            <a:off x="6393028" y="2084832"/>
-            <a:ext cx="5067148" cy="1252728"/>
+            <a:off x="4505858" y="2039112"/>
+            <a:ext cx="3179978" cy="2487168"/>
           </a:xfrm>
           <a:prstGeom prst="rect">
             <a:avLst/>
@@ -7808,7 +6972,7 @@
               <a:buChar char="•"/>
             </a:pPr>
             <a:r>
-              <a:rPr lang="en-US" sz="1300" dirty="0">
+              <a:rPr lang="en-US" sz="1200" dirty="0">
                 <a:solidFill>
                   <a:srgbClr val="24313F"/>
                 </a:solidFill>
@@ -7816,9 +6980,9 @@
                 <a:ea typeface="Malgun Gothic" pitchFamily="34" charset="-122"/>
                 <a:cs typeface="Malgun Gothic" pitchFamily="34" charset="-120"/>
               </a:rPr>
-              <a:t>추론 호스트는 x86/ARM 가리지 않고 VRAM 기준으로만 선택 (ARM Graviton GPU 인스턴스 검토 가능)</a:t>
-            </a:r>
-            <a:endParaRPr lang="en-US" sz="1300" dirty="0"/>
+              <a:t>주행 중 pygame 창에 자연어 지시 입력 (예: "Turn right in 30m")과 CFG 가중치(예: 1.5) → 다음 추론부터 반영되어 궤적이 바뀜</a:t>
+            </a:r>
+            <a:endParaRPr lang="en-US" sz="1200" dirty="0"/>
           </a:p>
           <a:p>
             <a:pPr marL="152400" indent="-152400">
@@ -7829,7 +6993,7 @@
               <a:buChar char="•"/>
             </a:pPr>
             <a:r>
-              <a:rPr lang="en-US" sz="1300" dirty="0">
+              <a:rPr lang="en-US" sz="1200" dirty="0">
                 <a:solidFill>
                   <a:srgbClr val="24313F"/>
                 </a:solidFill>
@@ -7837,9 +7001,9 @@
                 <a:ea typeface="Malgun Gothic" pitchFamily="34" charset="-122"/>
                 <a:cs typeface="Malgun Gothic" pitchFamily="34" charset="-120"/>
               </a:rPr>
-              <a:t>모델을 키우거나(Alpamayo 2, 7카메라) 샘플 수·CFG를 늘릴 때 B만 교체</a:t>
-            </a:r>
-            <a:endParaRPr lang="en-US" sz="1300" dirty="0"/>
+              <a:t>가중치를 올리면 지시를 더 강하게 따르는지 비교</a:t>
+            </a:r>
+            <a:endParaRPr lang="en-US" sz="1200" dirty="0"/>
           </a:p>
           <a:p>
             <a:pPr marL="152400" indent="-152400">
@@ -7850,7 +7014,7 @@
               <a:buChar char="•"/>
             </a:pPr>
             <a:r>
-              <a:rPr lang="en-US" sz="1300" dirty="0">
+              <a:rPr lang="en-US" sz="1200" dirty="0">
                 <a:solidFill>
                   <a:srgbClr val="24313F"/>
                 </a:solidFill>
@@ -7858,9 +7022,30 @@
                 <a:ea typeface="Malgun Gothic" pitchFamily="34" charset="-122"/>
                 <a:cs typeface="Malgun Gothic" pitchFamily="34" charset="-120"/>
               </a:rPr>
-              <a:t>시뮬레이터 호스트는 그대로 유지</a:t>
-            </a:r>
-            <a:endParaRPr lang="en-US" sz="1300" dirty="0"/>
+              <a:t>VQA: 차량을 세우고 "What is ahead?" 같은 질문 → 모델의 답을 패널에서 확인</a:t>
+            </a:r>
+            <a:endParaRPr lang="en-US" sz="1200" dirty="0"/>
+          </a:p>
+          <a:p>
+            <a:pPr marL="152400" indent="-152400">
+              <a:spcAft>
+                <a:spcPts val="400"/>
+              </a:spcAft>
+              <a:buSzPct val="100000"/>
+              <a:buChar char="•"/>
+            </a:pPr>
+            <a:r>
+              <a:rPr lang="en-US" sz="1200" dirty="0">
+                <a:solidFill>
+                  <a:srgbClr val="24313F"/>
+                </a:solidFill>
+                <a:latin typeface="Malgun Gothic" pitchFamily="34" charset="0"/>
+                <a:ea typeface="Malgun Gothic" pitchFamily="34" charset="-122"/>
+                <a:cs typeface="Malgun Gothic" pitchFamily="34" charset="-120"/>
+              </a:rPr>
+              <a:t>모든 조작은 A에서, B는 서버만 켜 둔 상태로 변화 없음</a:t>
+            </a:r>
+            <a:endParaRPr lang="en-US" sz="1200" dirty="0"/>
           </a:p>
         </p:txBody>
       </p:sp>
@@ -7872,12 +7057,12 @@
         </p:nvSpPr>
         <p:spPr>
           <a:xfrm>
-            <a:off x="548640" y="3703320"/>
-            <a:ext cx="5432908" cy="2011680"/>
+            <a:off x="8097317" y="1417320"/>
+            <a:ext cx="3545738" cy="3246120"/>
           </a:xfrm>
           <a:prstGeom prst="roundRect">
             <a:avLst>
-              <a:gd name="adj" fmla="val 3636"/>
+              <a:gd name="adj" fmla="val 2254"/>
             </a:avLst>
           </a:prstGeom>
           <a:solidFill>
@@ -7899,222 +7084,7 @@
         </p:nvSpPr>
         <p:spPr>
           <a:xfrm>
-            <a:off x="731520" y="3867912"/>
-            <a:ext cx="384048" cy="384048"/>
-          </a:xfrm>
-          <a:prstGeom prst="ellipse">
-            <a:avLst/>
-          </a:prstGeom>
-          <a:solidFill>
-            <a:srgbClr val="2E8B57"/>
-          </a:solidFill>
-          <a:ln w="12700">
-            <a:solidFill>
-              <a:srgbClr val="2E8B57"/>
-            </a:solidFill>
-            <a:prstDash val="solid"/>
-          </a:ln>
-        </p:spPr>
-      </p:sp>
-      <p:sp>
-        <p:nvSpPr>
-          <p:cNvPr id="18" name="Text 16"/>
-          <p:cNvSpPr txBox="1"/>
-          <p:nvPr/>
-        </p:nvSpPr>
-        <p:spPr>
-          <a:xfrm>
-            <a:off x="731520" y="3867912"/>
-            <a:ext cx="384048" cy="384048"/>
-          </a:xfrm>
-          <a:prstGeom prst="rect">
-            <a:avLst/>
-          </a:prstGeom>
-          <a:noFill/>
-          <a:ln/>
-        </p:spPr>
-        <p:txBody>
-          <a:bodyPr wrap="square" lIns="0" tIns="0" rIns="0" bIns="0" rtlCol="0" anchor="ctr"/>
-          <a:lstStyle/>
-          <a:p>
-            <a:pPr algn="ctr" indent="0" marL="0">
-              <a:buNone/>
-            </a:pPr>
-            <a:r>
-              <a:rPr lang="en-US" sz="1400" b="1" dirty="0">
-                <a:solidFill>
-                  <a:srgbClr val="FFFFFF"/>
-                </a:solidFill>
-                <a:latin typeface="Malgun Gothic" pitchFamily="34" charset="0"/>
-                <a:ea typeface="Malgun Gothic" pitchFamily="34" charset="-122"/>
-                <a:cs typeface="Malgun Gothic" pitchFamily="34" charset="-120"/>
-              </a:rPr>
-              <a:t>3</a:t>
-            </a:r>
-            <a:endParaRPr lang="en-US" sz="1400" dirty="0"/>
-          </a:p>
-        </p:txBody>
-      </p:sp>
-      <p:sp>
-        <p:nvSpPr>
-          <p:cNvPr id="19" name="Text 17"/>
-          <p:cNvSpPr txBox="1"/>
-          <p:nvPr/>
-        </p:nvSpPr>
-        <p:spPr>
-          <a:xfrm>
-            <a:off x="1234440" y="3867912"/>
-            <a:ext cx="4564228" cy="384048"/>
-          </a:xfrm>
-          <a:prstGeom prst="rect">
-            <a:avLst/>
-          </a:prstGeom>
-          <a:noFill/>
-          <a:ln/>
-        </p:spPr>
-        <p:txBody>
-          <a:bodyPr wrap="square" lIns="0" tIns="0" rIns="0" bIns="0" rtlCol="0" anchor="ctr"/>
-          <a:lstStyle/>
-          <a:p>
-            <a:pPr indent="0" marL="0">
-              <a:buNone/>
-            </a:pPr>
-            <a:r>
-              <a:rPr lang="en-US" sz="1500" b="1" dirty="0">
-                <a:solidFill>
-                  <a:srgbClr val="2E8B57"/>
-                </a:solidFill>
-                <a:latin typeface="Malgun Gothic" pitchFamily="34" charset="0"/>
-                <a:ea typeface="Malgun Gothic" pitchFamily="34" charset="-122"/>
-                <a:cs typeface="Malgun Gothic" pitchFamily="34" charset="-120"/>
-              </a:rPr>
-              <a:t>비용 최적화</a:t>
-            </a:r>
-            <a:endParaRPr lang="en-US" sz="1500" dirty="0"/>
-          </a:p>
-        </p:txBody>
-      </p:sp>
-      <p:sp>
-        <p:nvSpPr>
-          <p:cNvPr id="20" name="Text 18"/>
-          <p:cNvSpPr txBox="1"/>
-          <p:nvPr/>
-        </p:nvSpPr>
-        <p:spPr>
-          <a:xfrm>
-            <a:off x="731520" y="4325112"/>
-            <a:ext cx="5067148" cy="1252728"/>
-          </a:xfrm>
-          <a:prstGeom prst="rect">
-            <a:avLst/>
-          </a:prstGeom>
-          <a:noFill/>
-          <a:ln/>
-        </p:spPr>
-        <p:txBody>
-          <a:bodyPr wrap="square" lIns="0" tIns="0" rIns="0" bIns="0" rtlCol="0" anchor="t"/>
-          <a:lstStyle/>
-          <a:p>
-            <a:pPr marL="152400" indent="-152400">
-              <a:spcAft>
-                <a:spcPts val="400"/>
-              </a:spcAft>
-              <a:buSzPct val="100000"/>
-              <a:buChar char="•"/>
-            </a:pPr>
-            <a:r>
-              <a:rPr lang="en-US" sz="1300" dirty="0">
-                <a:solidFill>
-                  <a:srgbClr val="24313F"/>
-                </a:solidFill>
-                <a:latin typeface="Malgun Gothic" pitchFamily="34" charset="0"/>
-                <a:ea typeface="Malgun Gothic" pitchFamily="34" charset="-122"/>
-                <a:cs typeface="Malgun Gothic" pitchFamily="34" charset="-120"/>
-              </a:rPr>
-              <a:t>CARLA와 모델을 함께 담을 초대형 단일 GPU 인스턴스가 필요 없음</a:t>
-            </a:r>
-            <a:endParaRPr lang="en-US" sz="1300" dirty="0"/>
-          </a:p>
-          <a:p>
-            <a:pPr marL="152400" indent="-152400">
-              <a:spcAft>
-                <a:spcPts val="400"/>
-              </a:spcAft>
-              <a:buSzPct val="100000"/>
-              <a:buChar char="•"/>
-            </a:pPr>
-            <a:r>
-              <a:rPr lang="en-US" sz="1300" dirty="0">
-                <a:solidFill>
-                  <a:srgbClr val="24313F"/>
-                </a:solidFill>
-                <a:latin typeface="Malgun Gothic" pitchFamily="34" charset="0"/>
-                <a:ea typeface="Malgun Gothic" pitchFamily="34" charset="-122"/>
-                <a:cs typeface="Malgun Gothic" pitchFamily="34" charset="-120"/>
-              </a:rPr>
-              <a:t>필요 없는 쪽만 정지: open-loop·노트북 실험 때는 A 정지, 데이터 수집 때는 B 정지</a:t>
-            </a:r>
-            <a:endParaRPr lang="en-US" sz="1300" dirty="0"/>
-          </a:p>
-          <a:p>
-            <a:pPr marL="152400" indent="-152400">
-              <a:spcAft>
-                <a:spcPts val="400"/>
-              </a:spcAft>
-              <a:buSzPct val="100000"/>
-              <a:buChar char="•"/>
-            </a:pPr>
-            <a:r>
-              <a:rPr lang="en-US" sz="1300" dirty="0">
-                <a:solidFill>
-                  <a:srgbClr val="24313F"/>
-                </a:solidFill>
-                <a:latin typeface="Malgun Gothic" pitchFamily="34" charset="0"/>
-                <a:ea typeface="Malgun Gothic" pitchFamily="34" charset="-122"/>
-                <a:cs typeface="Malgun Gothic" pitchFamily="34" charset="-120"/>
-              </a:rPr>
-              <a:t>모델을 한 번만 로드해 상주시키므로 반복 실험의 대기 시간 감소  [요금 비교: 요금표 확인 후 기입]</a:t>
-            </a:r>
-            <a:endParaRPr lang="en-US" sz="1300" dirty="0"/>
-          </a:p>
-        </p:txBody>
-      </p:sp>
-      <p:sp>
-        <p:nvSpPr>
-          <p:cNvPr id="21" name="Shape 19"/>
-          <p:cNvSpPr/>
-          <p:nvPr/>
-        </p:nvSpPr>
-        <p:spPr>
-          <a:xfrm>
-            <a:off x="6210148" y="3703320"/>
-            <a:ext cx="5432908" cy="2011680"/>
-          </a:xfrm>
-          <a:prstGeom prst="roundRect">
-            <a:avLst>
-              <a:gd name="adj" fmla="val 3636"/>
-            </a:avLst>
-          </a:prstGeom>
-          <a:solidFill>
-            <a:srgbClr val="F3F5F8"/>
-          </a:solidFill>
-          <a:ln w="9525">
-            <a:solidFill>
-              <a:srgbClr val="D5DBE3"/>
-            </a:solidFill>
-            <a:prstDash val="solid"/>
-          </a:ln>
-        </p:spPr>
-      </p:sp>
-      <p:sp>
-        <p:nvSpPr>
-          <p:cNvPr id="22" name="Shape 20"/>
-          <p:cNvSpPr/>
-          <p:nvPr/>
-        </p:nvSpPr>
-        <p:spPr>
-          <a:xfrm>
-            <a:off x="6393028" y="3867912"/>
+            <a:off x="8280197" y="1581912"/>
             <a:ext cx="384048" cy="384048"/>
           </a:xfrm>
           <a:prstGeom prst="ellipse">
@@ -8133,13 +7103,13 @@
       </p:sp>
       <p:sp>
         <p:nvSpPr>
-          <p:cNvPr id="23" name="Text 21"/>
-          <p:cNvSpPr txBox="1"/>
-          <p:nvPr/>
-        </p:nvSpPr>
-        <p:spPr>
-          <a:xfrm>
-            <a:off x="6393028" y="3867912"/>
+          <p:cNvPr id="18" name="Text 16"/>
+          <p:cNvSpPr txBox="1"/>
+          <p:nvPr/>
+        </p:nvSpPr>
+        <p:spPr>
+          <a:xfrm>
+            <a:off x="8280197" y="1581912"/>
             <a:ext cx="384048" cy="384048"/>
           </a:xfrm>
           <a:prstGeom prst="rect">
@@ -8164,7 +7134,7 @@
                 <a:ea typeface="Malgun Gothic" pitchFamily="34" charset="-122"/>
                 <a:cs typeface="Malgun Gothic" pitchFamily="34" charset="-120"/>
               </a:rPr>
-              <a:t>4</a:t>
+              <a:t>3</a:t>
             </a:r>
             <a:endParaRPr lang="en-US" sz="1400" dirty="0"/>
           </a:p>
@@ -8172,14 +7142,14 @@
       </p:sp>
       <p:sp>
         <p:nvSpPr>
-          <p:cNvPr id="24" name="Text 22"/>
-          <p:cNvSpPr txBox="1"/>
-          <p:nvPr/>
-        </p:nvSpPr>
-        <p:spPr>
-          <a:xfrm>
-            <a:off x="6895948" y="3867912"/>
-            <a:ext cx="4564228" cy="384048"/>
+          <p:cNvPr id="19" name="Text 17"/>
+          <p:cNvSpPr txBox="1"/>
+          <p:nvPr/>
+        </p:nvSpPr>
+        <p:spPr>
+          <a:xfrm>
+            <a:off x="8783117" y="1581912"/>
+            <a:ext cx="2677058" cy="384048"/>
           </a:xfrm>
           <a:prstGeom prst="rect">
             <a:avLst/>
@@ -8203,7 +7173,7 @@
                 <a:ea typeface="Malgun Gothic" pitchFamily="34" charset="-122"/>
                 <a:cs typeface="Malgun Gothic" pitchFamily="34" charset="-120"/>
               </a:rPr>
-              <a:t>운영·확장</a:t>
+              <a:t>실측 자원 데이터로 병목 분석</a:t>
             </a:r>
             <a:endParaRPr lang="en-US" sz="1500" dirty="0"/>
           </a:p>
@@ -8211,14 +7181,14 @@
       </p:sp>
       <p:sp>
         <p:nvSpPr>
-          <p:cNvPr id="25" name="Text 23"/>
-          <p:cNvSpPr txBox="1"/>
-          <p:nvPr/>
-        </p:nvSpPr>
-        <p:spPr>
-          <a:xfrm>
-            <a:off x="6393028" y="4325112"/>
-            <a:ext cx="5067148" cy="1252728"/>
+          <p:cNvPr id="20" name="Text 18"/>
+          <p:cNvSpPr txBox="1"/>
+          <p:nvPr/>
+        </p:nvSpPr>
+        <p:spPr>
+          <a:xfrm>
+            <a:off x="8280197" y="2039112"/>
+            <a:ext cx="3179978" cy="2487168"/>
           </a:xfrm>
           <a:prstGeom prst="rect">
             <a:avLst/>
@@ -8238,7 +7208,7 @@
               <a:buChar char="•"/>
             </a:pPr>
             <a:r>
-              <a:rPr lang="en-US" sz="1300" dirty="0">
+              <a:rPr lang="en-US" sz="1200" dirty="0">
                 <a:solidFill>
                   <a:srgbClr val="24313F"/>
                 </a:solidFill>
@@ -8246,9 +7216,9 @@
                 <a:ea typeface="Malgun Gothic" pitchFamily="34" charset="-122"/>
                 <a:cs typeface="Malgun Gothic" pitchFamily="34" charset="-120"/>
               </a:rPr>
-              <a:t>장애 격리: 클라이언트·CARLA를 재시작해도 모델은 그대로</a:t>
-            </a:r>
-            <a:endParaRPr lang="en-US" sz="1300" dirty="0"/>
+              <a:t>실행마다 A·B 양쪽에서 자동 기록: 요청 왕복 시간, 서버 추론 시간, 요청 크기, 업로드 대역폭, 궤적 나이, GPU 메모리·사용률, CPU</a:t>
+            </a:r>
+            <a:endParaRPr lang="en-US" sz="1200" dirty="0"/>
           </a:p>
           <a:p>
             <a:pPr marL="152400" indent="-152400">
@@ -8259,7 +7229,7 @@
               <a:buChar char="•"/>
             </a:pPr>
             <a:r>
-              <a:rPr lang="en-US" sz="1300" dirty="0">
+              <a:rPr lang="en-US" sz="1200" dirty="0">
                 <a:solidFill>
                   <a:srgbClr val="24313F"/>
                 </a:solidFill>
@@ -8267,9 +7237,9 @@
                 <a:ea typeface="Malgun Gothic" pitchFamily="34" charset="-122"/>
                 <a:cs typeface="Malgun Gothic" pitchFamily="34" charset="-120"/>
               </a:rPr>
-              <a:t>추론 인터페이스가 계약(.proto)으로 고정되어 다른 모델·다른 시뮬레이터도 같은 방식으로 연결 가능</a:t>
-            </a:r>
-            <a:endParaRPr lang="en-US" sz="1300" dirty="0"/>
+              <a:t>왕복 시간 − 서버 처리 시간 = 네트워크+인코딩 오버헤드</a:t>
+            </a:r>
+            <a:endParaRPr lang="en-US" sz="1200" dirty="0"/>
           </a:p>
           <a:p>
             <a:pPr marL="152400" indent="-152400">
@@ -8280,7 +7250,7 @@
               <a:buChar char="•"/>
             </a:pPr>
             <a:r>
-              <a:rPr lang="en-US" sz="1300" dirty="0">
+              <a:rPr lang="en-US" sz="1200" dirty="0">
                 <a:solidFill>
                   <a:srgbClr val="24313F"/>
                 </a:solidFill>
@@ -8288,9 +7258,817 @@
                 <a:ea typeface="Malgun Gothic" pitchFamily="34" charset="-122"/>
                 <a:cs typeface="Malgun Gothic" pitchFamily="34" charset="-120"/>
               </a:rPr>
-              <a:t>업스트림 Carlamayo와 같은 명령 체계 유지(플래그 하나 추가)</a:t>
-            </a:r>
-            <a:endParaRPr lang="en-US" sz="1300" dirty="0"/>
+              <a:t>예상: 모델 추론(수 초) ≫ 인코딩(0.1~0.3 s) ≫ 네트워크(&lt; 1 ms). 분리 비용은 작다</a:t>
+            </a:r>
+            <a:endParaRPr lang="en-US" sz="1200" dirty="0"/>
+          </a:p>
+          <a:p>
+            <a:pPr marL="152400" indent="-152400">
+              <a:spcAft>
+                <a:spcPts val="400"/>
+              </a:spcAft>
+              <a:buSzPct val="100000"/>
+              <a:buChar char="•"/>
+            </a:pPr>
+            <a:r>
+              <a:rPr lang="en-US" sz="1200" dirty="0">
+                <a:solidFill>
+                  <a:srgbClr val="24313F"/>
+                </a:solidFill>
+                <a:latin typeface="Malgun Gothic" pitchFamily="34" charset="0"/>
+                <a:ea typeface="Malgun Gothic" pitchFamily="34" charset="-122"/>
+                <a:cs typeface="Malgun Gothic" pitchFamily="34" charset="-120"/>
+              </a:rPr>
+              <a:t>표와 그래프로 정리한 요약 보고서 제시</a:t>
+            </a:r>
+            <a:endParaRPr lang="en-US" sz="1200" dirty="0"/>
+          </a:p>
+        </p:txBody>
+      </p:sp>
+      <p:sp>
+        <p:nvSpPr>
+          <p:cNvPr id="21" name="Text 19"/>
+          <p:cNvSpPr txBox="1"/>
+          <p:nvPr/>
+        </p:nvSpPr>
+        <p:spPr>
+          <a:xfrm>
+            <a:off x="548640" y="4846320"/>
+            <a:ext cx="11094415" cy="274320"/>
+          </a:xfrm>
+          <a:prstGeom prst="rect">
+            <a:avLst/>
+          </a:prstGeom>
+          <a:noFill/>
+          <a:ln/>
+        </p:spPr>
+        <p:txBody>
+          <a:bodyPr wrap="square" lIns="0" tIns="0" rIns="0" bIns="0" rtlCol="0" anchor="t"/>
+          <a:lstStyle/>
+          <a:p>
+            <a:pPr indent="0" marL="0">
+              <a:buNone/>
+            </a:pPr>
+            <a:r>
+              <a:rPr lang="en-US" sz="1100" b="1" dirty="0">
+                <a:solidFill>
+                  <a:srgbClr val="1B2A41"/>
+                </a:solidFill>
+                <a:latin typeface="Malgun Gothic" pitchFamily="34" charset="0"/>
+                <a:ea typeface="Malgun Gothic" pitchFamily="34" charset="-122"/>
+                <a:cs typeface="Malgun Gothic" pitchFamily="34" charset="-120"/>
+              </a:rPr>
+              <a:t>데모 진행 순서</a:t>
+            </a:r>
+            <a:endParaRPr lang="en-US" sz="1100" dirty="0"/>
+          </a:p>
+        </p:txBody>
+      </p:sp>
+      <p:sp>
+        <p:nvSpPr>
+          <p:cNvPr id="22" name="Shape 20"/>
+          <p:cNvSpPr/>
+          <p:nvPr/>
+        </p:nvSpPr>
+        <p:spPr>
+          <a:xfrm>
+            <a:off x="548640" y="5138928"/>
+            <a:ext cx="2602154" cy="1005840"/>
+          </a:xfrm>
+          <a:prstGeom prst="roundRect">
+            <a:avLst>
+              <a:gd name="adj" fmla="val 7273"/>
+            </a:avLst>
+          </a:prstGeom>
+          <a:solidFill>
+            <a:srgbClr val="F3F5F8"/>
+          </a:solidFill>
+          <a:ln w="9525">
+            <a:solidFill>
+              <a:srgbClr val="1B2A41"/>
+            </a:solidFill>
+            <a:prstDash val="solid"/>
+          </a:ln>
+        </p:spPr>
+      </p:sp>
+      <p:sp>
+        <p:nvSpPr>
+          <p:cNvPr id="23" name="Shape 21"/>
+          <p:cNvSpPr/>
+          <p:nvPr/>
+        </p:nvSpPr>
+        <p:spPr>
+          <a:xfrm>
+            <a:off x="658368" y="5248656"/>
+            <a:ext cx="310896" cy="310896"/>
+          </a:xfrm>
+          <a:prstGeom prst="ellipse">
+            <a:avLst/>
+          </a:prstGeom>
+          <a:solidFill>
+            <a:srgbClr val="1B2A41"/>
+          </a:solidFill>
+          <a:ln w="12700">
+            <a:solidFill>
+              <a:srgbClr val="1B2A41"/>
+            </a:solidFill>
+            <a:prstDash val="solid"/>
+          </a:ln>
+        </p:spPr>
+      </p:sp>
+      <p:sp>
+        <p:nvSpPr>
+          <p:cNvPr id="24" name="Text 22"/>
+          <p:cNvSpPr txBox="1"/>
+          <p:nvPr/>
+        </p:nvSpPr>
+        <p:spPr>
+          <a:xfrm>
+            <a:off x="658368" y="5248656"/>
+            <a:ext cx="310896" cy="310896"/>
+          </a:xfrm>
+          <a:prstGeom prst="rect">
+            <a:avLst/>
+          </a:prstGeom>
+          <a:noFill/>
+          <a:ln/>
+        </p:spPr>
+        <p:txBody>
+          <a:bodyPr wrap="square" lIns="0" tIns="0" rIns="0" bIns="0" rtlCol="0" anchor="ctr"/>
+          <a:lstStyle/>
+          <a:p>
+            <a:pPr algn="ctr" indent="0" marL="0">
+              <a:buNone/>
+            </a:pPr>
+            <a:r>
+              <a:rPr lang="en-US" sz="1100" b="1" dirty="0">
+                <a:solidFill>
+                  <a:srgbClr val="FFFFFF"/>
+                </a:solidFill>
+                <a:latin typeface="Malgun Gothic" pitchFamily="34" charset="0"/>
+                <a:ea typeface="Malgun Gothic" pitchFamily="34" charset="-122"/>
+                <a:cs typeface="Malgun Gothic" pitchFamily="34" charset="-120"/>
+              </a:rPr>
+              <a:t>1</a:t>
+            </a:r>
+            <a:endParaRPr lang="en-US" sz="1100" dirty="0"/>
+          </a:p>
+        </p:txBody>
+      </p:sp>
+      <p:sp>
+        <p:nvSpPr>
+          <p:cNvPr id="25" name="Text 23"/>
+          <p:cNvSpPr txBox="1"/>
+          <p:nvPr/>
+        </p:nvSpPr>
+        <p:spPr>
+          <a:xfrm>
+            <a:off x="1024128" y="5230368"/>
+            <a:ext cx="2035226" cy="347472"/>
+          </a:xfrm>
+          <a:prstGeom prst="rect">
+            <a:avLst/>
+          </a:prstGeom>
+          <a:noFill/>
+          <a:ln/>
+        </p:spPr>
+        <p:txBody>
+          <a:bodyPr wrap="square" lIns="0" tIns="0" rIns="0" bIns="0" rtlCol="0" anchor="ctr"/>
+          <a:lstStyle/>
+          <a:p>
+            <a:pPr indent="0" marL="0">
+              <a:buNone/>
+            </a:pPr>
+            <a:r>
+              <a:rPr lang="en-US" sz="1150" b="1" dirty="0">
+                <a:solidFill>
+                  <a:srgbClr val="1B2A41"/>
+                </a:solidFill>
+                <a:latin typeface="Malgun Gothic" pitchFamily="34" charset="0"/>
+                <a:ea typeface="Malgun Gothic" pitchFamily="34" charset="-122"/>
+                <a:cs typeface="Malgun Gothic" pitchFamily="34" charset="-120"/>
+              </a:rPr>
+              <a:t>open-loop</a:t>
+            </a:r>
+            <a:endParaRPr lang="en-US" sz="1150" dirty="0"/>
+          </a:p>
+        </p:txBody>
+      </p:sp>
+      <p:sp>
+        <p:nvSpPr>
+          <p:cNvPr id="26" name="Text 24"/>
+          <p:cNvSpPr txBox="1"/>
+          <p:nvPr/>
+        </p:nvSpPr>
+        <p:spPr>
+          <a:xfrm>
+            <a:off x="658368" y="5596128"/>
+            <a:ext cx="2382698" cy="475488"/>
+          </a:xfrm>
+          <a:prstGeom prst="rect">
+            <a:avLst/>
+          </a:prstGeom>
+          <a:noFill/>
+          <a:ln/>
+        </p:spPr>
+        <p:txBody>
+          <a:bodyPr wrap="square" lIns="0" tIns="0" rIns="0" bIns="0" rtlCol="0" anchor="t"/>
+          <a:lstStyle/>
+          <a:p>
+            <a:pPr indent="0" marL="0">
+              <a:buNone/>
+            </a:pPr>
+            <a:r>
+              <a:rPr lang="en-US" sz="950" dirty="0">
+                <a:solidFill>
+                  <a:srgbClr val="24313F"/>
+                </a:solidFill>
+                <a:latin typeface="Malgun Gothic" pitchFamily="34" charset="0"/>
+                <a:ea typeface="Malgun Gothic" pitchFamily="34" charset="-122"/>
+                <a:cs typeface="Malgun Gothic" pitchFamily="34" charset="-120"/>
+              </a:rPr>
+              <a:t>녹화 데이터 재생으로 원격 추론 경로 검증, B 로컬 결과와 일치 확인</a:t>
+            </a:r>
+            <a:endParaRPr lang="en-US" sz="950" dirty="0"/>
+          </a:p>
+        </p:txBody>
+      </p:sp>
+      <p:sp>
+        <p:nvSpPr>
+          <p:cNvPr id="27" name="Shape 25"/>
+          <p:cNvSpPr/>
+          <p:nvPr/>
+        </p:nvSpPr>
+        <p:spPr>
+          <a:xfrm>
+            <a:off x="3178226" y="5641848"/>
+            <a:ext cx="173736" cy="0"/>
+          </a:xfrm>
+          <a:prstGeom prst="line">
+            <a:avLst/>
+          </a:prstGeom>
+          <a:noFill/>
+          <a:ln w="15875">
+            <a:solidFill>
+              <a:srgbClr val="6B7A8C"/>
+            </a:solidFill>
+            <a:prstDash val="solid"/>
+            <a:tailEnd type="triangle"/>
+          </a:ln>
+        </p:spPr>
+      </p:sp>
+      <p:sp>
+        <p:nvSpPr>
+          <p:cNvPr id="28" name="Shape 26"/>
+          <p:cNvSpPr/>
+          <p:nvPr/>
+        </p:nvSpPr>
+        <p:spPr>
+          <a:xfrm>
+            <a:off x="3379394" y="5138928"/>
+            <a:ext cx="2602154" cy="1005840"/>
+          </a:xfrm>
+          <a:prstGeom prst="roundRect">
+            <a:avLst>
+              <a:gd name="adj" fmla="val 7273"/>
+            </a:avLst>
+          </a:prstGeom>
+          <a:solidFill>
+            <a:srgbClr val="F3F5F8"/>
+          </a:solidFill>
+          <a:ln w="9525">
+            <a:solidFill>
+              <a:srgbClr val="2A6FDB"/>
+            </a:solidFill>
+            <a:prstDash val="solid"/>
+          </a:ln>
+        </p:spPr>
+      </p:sp>
+      <p:sp>
+        <p:nvSpPr>
+          <p:cNvPr id="29" name="Shape 27"/>
+          <p:cNvSpPr/>
+          <p:nvPr/>
+        </p:nvSpPr>
+        <p:spPr>
+          <a:xfrm>
+            <a:off x="3489122" y="5248656"/>
+            <a:ext cx="310896" cy="310896"/>
+          </a:xfrm>
+          <a:prstGeom prst="ellipse">
+            <a:avLst/>
+          </a:prstGeom>
+          <a:solidFill>
+            <a:srgbClr val="2A6FDB"/>
+          </a:solidFill>
+          <a:ln w="12700">
+            <a:solidFill>
+              <a:srgbClr val="2A6FDB"/>
+            </a:solidFill>
+            <a:prstDash val="solid"/>
+          </a:ln>
+        </p:spPr>
+      </p:sp>
+      <p:sp>
+        <p:nvSpPr>
+          <p:cNvPr id="30" name="Text 28"/>
+          <p:cNvSpPr txBox="1"/>
+          <p:nvPr/>
+        </p:nvSpPr>
+        <p:spPr>
+          <a:xfrm>
+            <a:off x="3489122" y="5248656"/>
+            <a:ext cx="310896" cy="310896"/>
+          </a:xfrm>
+          <a:prstGeom prst="rect">
+            <a:avLst/>
+          </a:prstGeom>
+          <a:noFill/>
+          <a:ln/>
+        </p:spPr>
+        <p:txBody>
+          <a:bodyPr wrap="square" lIns="0" tIns="0" rIns="0" bIns="0" rtlCol="0" anchor="ctr"/>
+          <a:lstStyle/>
+          <a:p>
+            <a:pPr algn="ctr" indent="0" marL="0">
+              <a:buNone/>
+            </a:pPr>
+            <a:r>
+              <a:rPr lang="en-US" sz="1100" b="1" dirty="0">
+                <a:solidFill>
+                  <a:srgbClr val="FFFFFF"/>
+                </a:solidFill>
+                <a:latin typeface="Malgun Gothic" pitchFamily="34" charset="0"/>
+                <a:ea typeface="Malgun Gothic" pitchFamily="34" charset="-122"/>
+                <a:cs typeface="Malgun Gothic" pitchFamily="34" charset="-120"/>
+              </a:rPr>
+              <a:t>2</a:t>
+            </a:r>
+            <a:endParaRPr lang="en-US" sz="1100" dirty="0"/>
+          </a:p>
+        </p:txBody>
+      </p:sp>
+      <p:sp>
+        <p:nvSpPr>
+          <p:cNvPr id="31" name="Text 29"/>
+          <p:cNvSpPr txBox="1"/>
+          <p:nvPr/>
+        </p:nvSpPr>
+        <p:spPr>
+          <a:xfrm>
+            <a:off x="3854882" y="5230368"/>
+            <a:ext cx="2035226" cy="347472"/>
+          </a:xfrm>
+          <a:prstGeom prst="rect">
+            <a:avLst/>
+          </a:prstGeom>
+          <a:noFill/>
+          <a:ln/>
+        </p:spPr>
+        <p:txBody>
+          <a:bodyPr wrap="square" lIns="0" tIns="0" rIns="0" bIns="0" rtlCol="0" anchor="ctr"/>
+          <a:lstStyle/>
+          <a:p>
+            <a:pPr indent="0" marL="0">
+              <a:buNone/>
+            </a:pPr>
+            <a:r>
+              <a:rPr lang="en-US" sz="1150" b="1" dirty="0">
+                <a:solidFill>
+                  <a:srgbClr val="2A6FDB"/>
+                </a:solidFill>
+                <a:latin typeface="Malgun Gothic" pitchFamily="34" charset="0"/>
+                <a:ea typeface="Malgun Gothic" pitchFamily="34" charset="-122"/>
+                <a:cs typeface="Malgun Gothic" pitchFamily="34" charset="-120"/>
+              </a:rPr>
+              <a:t>closed-loop</a:t>
+            </a:r>
+            <a:endParaRPr lang="en-US" sz="1150" dirty="0"/>
+          </a:p>
+        </p:txBody>
+      </p:sp>
+      <p:sp>
+        <p:nvSpPr>
+          <p:cNvPr id="32" name="Text 30"/>
+          <p:cNvSpPr txBox="1"/>
+          <p:nvPr/>
+        </p:nvSpPr>
+        <p:spPr>
+          <a:xfrm>
+            <a:off x="3489122" y="5596128"/>
+            <a:ext cx="2382698" cy="475488"/>
+          </a:xfrm>
+          <a:prstGeom prst="rect">
+            <a:avLst/>
+          </a:prstGeom>
+          <a:noFill/>
+          <a:ln/>
+        </p:spPr>
+        <p:txBody>
+          <a:bodyPr wrap="square" lIns="0" tIns="0" rIns="0" bIns="0" rtlCol="0" anchor="t"/>
+          <a:lstStyle/>
+          <a:p>
+            <a:pPr indent="0" marL="0">
+              <a:buNone/>
+            </a:pPr>
+            <a:r>
+              <a:rPr lang="en-US" sz="950" dirty="0">
+                <a:solidFill>
+                  <a:srgbClr val="24313F"/>
+                </a:solidFill>
+                <a:latin typeface="Malgun Gothic" pitchFamily="34" charset="0"/>
+                <a:ea typeface="Malgun Gothic" pitchFamily="34" charset="-122"/>
+                <a:cs typeface="Malgun Gothic" pitchFamily="34" charset="-120"/>
+              </a:rPr>
+              <a:t>모델이 실제로 운전. 비동기 모드, pygame 화면</a:t>
+            </a:r>
+            <a:endParaRPr lang="en-US" sz="950" dirty="0"/>
+          </a:p>
+        </p:txBody>
+      </p:sp>
+      <p:sp>
+        <p:nvSpPr>
+          <p:cNvPr id="33" name="Shape 31"/>
+          <p:cNvSpPr/>
+          <p:nvPr/>
+        </p:nvSpPr>
+        <p:spPr>
+          <a:xfrm>
+            <a:off x="6008980" y="5641848"/>
+            <a:ext cx="173736" cy="0"/>
+          </a:xfrm>
+          <a:prstGeom prst="line">
+            <a:avLst/>
+          </a:prstGeom>
+          <a:noFill/>
+          <a:ln w="15875">
+            <a:solidFill>
+              <a:srgbClr val="6B7A8C"/>
+            </a:solidFill>
+            <a:prstDash val="solid"/>
+            <a:tailEnd type="triangle"/>
+          </a:ln>
+        </p:spPr>
+      </p:sp>
+      <p:sp>
+        <p:nvSpPr>
+          <p:cNvPr id="34" name="Shape 32"/>
+          <p:cNvSpPr/>
+          <p:nvPr/>
+        </p:nvSpPr>
+        <p:spPr>
+          <a:xfrm>
+            <a:off x="6210148" y="5138928"/>
+            <a:ext cx="2602154" cy="1005840"/>
+          </a:xfrm>
+          <a:prstGeom prst="roundRect">
+            <a:avLst>
+              <a:gd name="adj" fmla="val 7273"/>
+            </a:avLst>
+          </a:prstGeom>
+          <a:solidFill>
+            <a:srgbClr val="F3F5F8"/>
+          </a:solidFill>
+          <a:ln w="9525">
+            <a:solidFill>
+              <a:srgbClr val="E0762B"/>
+            </a:solidFill>
+            <a:prstDash val="solid"/>
+          </a:ln>
+        </p:spPr>
+      </p:sp>
+      <p:sp>
+        <p:nvSpPr>
+          <p:cNvPr id="35" name="Shape 33"/>
+          <p:cNvSpPr/>
+          <p:nvPr/>
+        </p:nvSpPr>
+        <p:spPr>
+          <a:xfrm>
+            <a:off x="6319876" y="5248656"/>
+            <a:ext cx="310896" cy="310896"/>
+          </a:xfrm>
+          <a:prstGeom prst="ellipse">
+            <a:avLst/>
+          </a:prstGeom>
+          <a:solidFill>
+            <a:srgbClr val="E0762B"/>
+          </a:solidFill>
+          <a:ln w="12700">
+            <a:solidFill>
+              <a:srgbClr val="E0762B"/>
+            </a:solidFill>
+            <a:prstDash val="solid"/>
+          </a:ln>
+        </p:spPr>
+      </p:sp>
+      <p:sp>
+        <p:nvSpPr>
+          <p:cNvPr id="36" name="Text 34"/>
+          <p:cNvSpPr txBox="1"/>
+          <p:nvPr/>
+        </p:nvSpPr>
+        <p:spPr>
+          <a:xfrm>
+            <a:off x="6319876" y="5248656"/>
+            <a:ext cx="310896" cy="310896"/>
+          </a:xfrm>
+          <a:prstGeom prst="rect">
+            <a:avLst/>
+          </a:prstGeom>
+          <a:noFill/>
+          <a:ln/>
+        </p:spPr>
+        <p:txBody>
+          <a:bodyPr wrap="square" lIns="0" tIns="0" rIns="0" bIns="0" rtlCol="0" anchor="ctr"/>
+          <a:lstStyle/>
+          <a:p>
+            <a:pPr algn="ctr" indent="0" marL="0">
+              <a:buNone/>
+            </a:pPr>
+            <a:r>
+              <a:rPr lang="en-US" sz="1100" b="1" dirty="0">
+                <a:solidFill>
+                  <a:srgbClr val="FFFFFF"/>
+                </a:solidFill>
+                <a:latin typeface="Malgun Gothic" pitchFamily="34" charset="0"/>
+                <a:ea typeface="Malgun Gothic" pitchFamily="34" charset="-122"/>
+                <a:cs typeface="Malgun Gothic" pitchFamily="34" charset="-120"/>
+              </a:rPr>
+              <a:t>3</a:t>
+            </a:r>
+            <a:endParaRPr lang="en-US" sz="1100" dirty="0"/>
+          </a:p>
+        </p:txBody>
+      </p:sp>
+      <p:sp>
+        <p:nvSpPr>
+          <p:cNvPr id="37" name="Text 35"/>
+          <p:cNvSpPr txBox="1"/>
+          <p:nvPr/>
+        </p:nvSpPr>
+        <p:spPr>
+          <a:xfrm>
+            <a:off x="6685636" y="5230368"/>
+            <a:ext cx="2035226" cy="347472"/>
+          </a:xfrm>
+          <a:prstGeom prst="rect">
+            <a:avLst/>
+          </a:prstGeom>
+          <a:noFill/>
+          <a:ln/>
+        </p:spPr>
+        <p:txBody>
+          <a:bodyPr wrap="square" lIns="0" tIns="0" rIns="0" bIns="0" rtlCol="0" anchor="ctr"/>
+          <a:lstStyle/>
+          <a:p>
+            <a:pPr indent="0" marL="0">
+              <a:buNone/>
+            </a:pPr>
+            <a:r>
+              <a:rPr lang="en-US" sz="1150" b="1" dirty="0">
+                <a:solidFill>
+                  <a:srgbClr val="E0762B"/>
+                </a:solidFill>
+                <a:latin typeface="Malgun Gothic" pitchFamily="34" charset="0"/>
+                <a:ea typeface="Malgun Gothic" pitchFamily="34" charset="-122"/>
+                <a:cs typeface="Malgun Gothic" pitchFamily="34" charset="-120"/>
+              </a:rPr>
+              <a:t>navigation + CFG</a:t>
+            </a:r>
+            <a:endParaRPr lang="en-US" sz="1150" dirty="0"/>
+          </a:p>
+        </p:txBody>
+      </p:sp>
+      <p:sp>
+        <p:nvSpPr>
+          <p:cNvPr id="38" name="Text 36"/>
+          <p:cNvSpPr txBox="1"/>
+          <p:nvPr/>
+        </p:nvSpPr>
+        <p:spPr>
+          <a:xfrm>
+            <a:off x="6319876" y="5596128"/>
+            <a:ext cx="2382698" cy="475488"/>
+          </a:xfrm>
+          <a:prstGeom prst="rect">
+            <a:avLst/>
+          </a:prstGeom>
+          <a:noFill/>
+          <a:ln/>
+        </p:spPr>
+        <p:txBody>
+          <a:bodyPr wrap="square" lIns="0" tIns="0" rIns="0" bIns="0" rtlCol="0" anchor="t"/>
+          <a:lstStyle/>
+          <a:p>
+            <a:pPr indent="0" marL="0">
+              <a:buNone/>
+            </a:pPr>
+            <a:r>
+              <a:rPr lang="en-US" sz="950" dirty="0">
+                <a:solidFill>
+                  <a:srgbClr val="24313F"/>
+                </a:solidFill>
+                <a:latin typeface="Malgun Gothic" pitchFamily="34" charset="0"/>
+                <a:ea typeface="Malgun Gothic" pitchFamily="34" charset="-122"/>
+                <a:cs typeface="Malgun Gothic" pitchFamily="34" charset="-120"/>
+              </a:rPr>
+              <a:t>주행 중 자연어 지시·가중치 입력, 궤적 변화 관찰</a:t>
+            </a:r>
+            <a:endParaRPr lang="en-US" sz="950" dirty="0"/>
+          </a:p>
+        </p:txBody>
+      </p:sp>
+      <p:sp>
+        <p:nvSpPr>
+          <p:cNvPr id="39" name="Shape 37"/>
+          <p:cNvSpPr/>
+          <p:nvPr/>
+        </p:nvSpPr>
+        <p:spPr>
+          <a:xfrm>
+            <a:off x="8839733" y="5641848"/>
+            <a:ext cx="173736" cy="0"/>
+          </a:xfrm>
+          <a:prstGeom prst="line">
+            <a:avLst/>
+          </a:prstGeom>
+          <a:noFill/>
+          <a:ln w="15875">
+            <a:solidFill>
+              <a:srgbClr val="6B7A8C"/>
+            </a:solidFill>
+            <a:prstDash val="solid"/>
+            <a:tailEnd type="triangle"/>
+          </a:ln>
+        </p:spPr>
+      </p:sp>
+      <p:sp>
+        <p:nvSpPr>
+          <p:cNvPr id="40" name="Shape 38"/>
+          <p:cNvSpPr/>
+          <p:nvPr/>
+        </p:nvSpPr>
+        <p:spPr>
+          <a:xfrm>
+            <a:off x="9040901" y="5138928"/>
+            <a:ext cx="2602154" cy="1005840"/>
+          </a:xfrm>
+          <a:prstGeom prst="roundRect">
+            <a:avLst>
+              <a:gd name="adj" fmla="val 7273"/>
+            </a:avLst>
+          </a:prstGeom>
+          <a:solidFill>
+            <a:srgbClr val="F3F5F8"/>
+          </a:solidFill>
+          <a:ln w="9525">
+            <a:solidFill>
+              <a:srgbClr val="E0762B"/>
+            </a:solidFill>
+            <a:prstDash val="solid"/>
+          </a:ln>
+        </p:spPr>
+      </p:sp>
+      <p:sp>
+        <p:nvSpPr>
+          <p:cNvPr id="41" name="Shape 39"/>
+          <p:cNvSpPr/>
+          <p:nvPr/>
+        </p:nvSpPr>
+        <p:spPr>
+          <a:xfrm>
+            <a:off x="9150629" y="5248656"/>
+            <a:ext cx="310896" cy="310896"/>
+          </a:xfrm>
+          <a:prstGeom prst="ellipse">
+            <a:avLst/>
+          </a:prstGeom>
+          <a:solidFill>
+            <a:srgbClr val="E0762B"/>
+          </a:solidFill>
+          <a:ln w="12700">
+            <a:solidFill>
+              <a:srgbClr val="E0762B"/>
+            </a:solidFill>
+            <a:prstDash val="solid"/>
+          </a:ln>
+        </p:spPr>
+      </p:sp>
+      <p:sp>
+        <p:nvSpPr>
+          <p:cNvPr id="42" name="Text 40"/>
+          <p:cNvSpPr txBox="1"/>
+          <p:nvPr/>
+        </p:nvSpPr>
+        <p:spPr>
+          <a:xfrm>
+            <a:off x="9150629" y="5248656"/>
+            <a:ext cx="310896" cy="310896"/>
+          </a:xfrm>
+          <a:prstGeom prst="rect">
+            <a:avLst/>
+          </a:prstGeom>
+          <a:noFill/>
+          <a:ln/>
+        </p:spPr>
+        <p:txBody>
+          <a:bodyPr wrap="square" lIns="0" tIns="0" rIns="0" bIns="0" rtlCol="0" anchor="ctr"/>
+          <a:lstStyle/>
+          <a:p>
+            <a:pPr algn="ctr" indent="0" marL="0">
+              <a:buNone/>
+            </a:pPr>
+            <a:r>
+              <a:rPr lang="en-US" sz="1100" b="1" dirty="0">
+                <a:solidFill>
+                  <a:srgbClr val="FFFFFF"/>
+                </a:solidFill>
+                <a:latin typeface="Malgun Gothic" pitchFamily="34" charset="0"/>
+                <a:ea typeface="Malgun Gothic" pitchFamily="34" charset="-122"/>
+                <a:cs typeface="Malgun Gothic" pitchFamily="34" charset="-120"/>
+              </a:rPr>
+              <a:t>4</a:t>
+            </a:r>
+            <a:endParaRPr lang="en-US" sz="1100" dirty="0"/>
+          </a:p>
+        </p:txBody>
+      </p:sp>
+      <p:sp>
+        <p:nvSpPr>
+          <p:cNvPr id="43" name="Text 41"/>
+          <p:cNvSpPr txBox="1"/>
+          <p:nvPr/>
+        </p:nvSpPr>
+        <p:spPr>
+          <a:xfrm>
+            <a:off x="9516389" y="5230368"/>
+            <a:ext cx="2035226" cy="347472"/>
+          </a:xfrm>
+          <a:prstGeom prst="rect">
+            <a:avLst/>
+          </a:prstGeom>
+          <a:noFill/>
+          <a:ln/>
+        </p:spPr>
+        <p:txBody>
+          <a:bodyPr wrap="square" lIns="0" tIns="0" rIns="0" bIns="0" rtlCol="0" anchor="ctr"/>
+          <a:lstStyle/>
+          <a:p>
+            <a:pPr indent="0" marL="0">
+              <a:buNone/>
+            </a:pPr>
+            <a:r>
+              <a:rPr lang="en-US" sz="1150" b="1" dirty="0">
+                <a:solidFill>
+                  <a:srgbClr val="E0762B"/>
+                </a:solidFill>
+                <a:latin typeface="Malgun Gothic" pitchFamily="34" charset="0"/>
+                <a:ea typeface="Malgun Gothic" pitchFamily="34" charset="-122"/>
+                <a:cs typeface="Malgun Gothic" pitchFamily="34" charset="-120"/>
+              </a:rPr>
+              <a:t>VQA</a:t>
+            </a:r>
+            <a:endParaRPr lang="en-US" sz="1150" dirty="0"/>
+          </a:p>
+        </p:txBody>
+      </p:sp>
+      <p:sp>
+        <p:nvSpPr>
+          <p:cNvPr id="44" name="Text 42"/>
+          <p:cNvSpPr txBox="1"/>
+          <p:nvPr/>
+        </p:nvSpPr>
+        <p:spPr>
+          <a:xfrm>
+            <a:off x="9150629" y="5596128"/>
+            <a:ext cx="2382698" cy="475488"/>
+          </a:xfrm>
+          <a:prstGeom prst="rect">
+            <a:avLst/>
+          </a:prstGeom>
+          <a:noFill/>
+          <a:ln/>
+        </p:spPr>
+        <p:txBody>
+          <a:bodyPr wrap="square" lIns="0" tIns="0" rIns="0" bIns="0" rtlCol="0" anchor="t"/>
+          <a:lstStyle/>
+          <a:p>
+            <a:pPr indent="0" marL="0">
+              <a:buNone/>
+            </a:pPr>
+            <a:r>
+              <a:rPr lang="en-US" sz="950" dirty="0">
+                <a:solidFill>
+                  <a:srgbClr val="24313F"/>
+                </a:solidFill>
+                <a:latin typeface="Malgun Gothic" pitchFamily="34" charset="0"/>
+                <a:ea typeface="Malgun Gothic" pitchFamily="34" charset="-122"/>
+                <a:cs typeface="Malgun Gothic" pitchFamily="34" charset="-120"/>
+              </a:rPr>
+              <a:t>정차 후 질문, 모델의 답 확인</a:t>
+            </a:r>
+            <a:endParaRPr lang="en-US" sz="950" dirty="0"/>
           </a:p>
         </p:txBody>
       </p:sp>
@@ -8359,7 +8137,7 @@
                 <a:ea typeface="Malgun Gothic" pitchFamily="34" charset="-122"/>
                 <a:cs typeface="Malgun Gothic" pitchFamily="34" charset="-120"/>
               </a:rPr>
-              <a:t>부록: 용어집</a:t>
+              <a:t>시사점</a:t>
             </a:r>
             <a:endParaRPr lang="en-US" sz="2800" dirty="0"/>
           </a:p>
@@ -8368,6 +8146,45 @@
       <p:sp>
         <p:nvSpPr>
           <p:cNvPr id="3" name="Text 1"/>
+          <p:cNvSpPr txBox="1"/>
+          <p:nvPr/>
+        </p:nvSpPr>
+        <p:spPr>
+          <a:xfrm>
+            <a:off x="548640" y="960120"/>
+            <a:ext cx="11094415" cy="365760"/>
+          </a:xfrm>
+          <a:prstGeom prst="rect">
+            <a:avLst/>
+          </a:prstGeom>
+          <a:noFill/>
+          <a:ln/>
+        </p:spPr>
+        <p:txBody>
+          <a:bodyPr wrap="square" lIns="0" tIns="0" rIns="0" bIns="0" rtlCol="0" anchor="t"/>
+          <a:lstStyle/>
+          <a:p>
+            <a:pPr indent="0" marL="0">
+              <a:buNone/>
+            </a:pPr>
+            <a:r>
+              <a:rPr lang="en-US" sz="1400" dirty="0">
+                <a:solidFill>
+                  <a:srgbClr val="6B7A8C"/>
+                </a:solidFill>
+                <a:latin typeface="Malgun Gothic" pitchFamily="34" charset="0"/>
+                <a:ea typeface="Malgun Gothic" pitchFamily="34" charset="-122"/>
+                <a:cs typeface="Malgun Gothic" pitchFamily="34" charset="-120"/>
+              </a:rPr>
+              <a:t>CARLA의 'x86' 요구와 Alpamayo의 '대용량 VRAM' 요구를 서로 다른 인스턴스로 분리해도 closed-loop가 성립함을 입증</a:t>
+            </a:r>
+            <a:endParaRPr lang="en-US" sz="1400" dirty="0"/>
+          </a:p>
+        </p:txBody>
+      </p:sp>
+      <p:sp>
+        <p:nvSpPr>
+          <p:cNvPr id="4" name="Text 2"/>
           <p:cNvSpPr txBox="1"/>
           <p:nvPr/>
         </p:nvSpPr>
@@ -8406,7 +8223,7 @@
       </p:sp>
       <p:sp>
         <p:nvSpPr>
-          <p:cNvPr id="4" name="Text 2"/>
+          <p:cNvPr id="5" name="Text 3"/>
           <p:cNvSpPr txBox="1"/>
           <p:nvPr/>
         </p:nvSpPr>
@@ -8438,6 +8255,1015 @@
                 <a:cs typeface="Malgun Gothic" pitchFamily="34" charset="-120"/>
               </a:rPr>
               <a:t>6</a:t>
+            </a:r>
+            <a:endParaRPr lang="en-US" sz="900" dirty="0"/>
+          </a:p>
+        </p:txBody>
+      </p:sp>
+      <p:sp>
+        <p:nvSpPr>
+          <p:cNvPr id="6" name="Shape 4"/>
+          <p:cNvSpPr/>
+          <p:nvPr/>
+        </p:nvSpPr>
+        <p:spPr>
+          <a:xfrm>
+            <a:off x="548640" y="1463040"/>
+            <a:ext cx="5432908" cy="2011680"/>
+          </a:xfrm>
+          <a:prstGeom prst="roundRect">
+            <a:avLst>
+              <a:gd name="adj" fmla="val 3636"/>
+            </a:avLst>
+          </a:prstGeom>
+          <a:solidFill>
+            <a:srgbClr val="F3F5F8"/>
+          </a:solidFill>
+          <a:ln w="9525">
+            <a:solidFill>
+              <a:srgbClr val="D5DBE3"/>
+            </a:solidFill>
+            <a:prstDash val="solid"/>
+          </a:ln>
+        </p:spPr>
+      </p:sp>
+      <p:sp>
+        <p:nvSpPr>
+          <p:cNvPr id="7" name="Shape 5"/>
+          <p:cNvSpPr/>
+          <p:nvPr/>
+        </p:nvSpPr>
+        <p:spPr>
+          <a:xfrm>
+            <a:off x="731520" y="1627632"/>
+            <a:ext cx="384048" cy="384048"/>
+          </a:xfrm>
+          <a:prstGeom prst="ellipse">
+            <a:avLst/>
+          </a:prstGeom>
+          <a:solidFill>
+            <a:srgbClr val="2A6FDB"/>
+          </a:solidFill>
+          <a:ln w="12700">
+            <a:solidFill>
+              <a:srgbClr val="2A6FDB"/>
+            </a:solidFill>
+            <a:prstDash val="solid"/>
+          </a:ln>
+        </p:spPr>
+      </p:sp>
+      <p:sp>
+        <p:nvSpPr>
+          <p:cNvPr id="8" name="Text 6"/>
+          <p:cNvSpPr txBox="1"/>
+          <p:nvPr/>
+        </p:nvSpPr>
+        <p:spPr>
+          <a:xfrm>
+            <a:off x="731520" y="1627632"/>
+            <a:ext cx="384048" cy="384048"/>
+          </a:xfrm>
+          <a:prstGeom prst="rect">
+            <a:avLst/>
+          </a:prstGeom>
+          <a:noFill/>
+          <a:ln/>
+        </p:spPr>
+        <p:txBody>
+          <a:bodyPr wrap="square" lIns="0" tIns="0" rIns="0" bIns="0" rtlCol="0" anchor="ctr"/>
+          <a:lstStyle/>
+          <a:p>
+            <a:pPr algn="ctr" indent="0" marL="0">
+              <a:buNone/>
+            </a:pPr>
+            <a:r>
+              <a:rPr lang="en-US" sz="1400" b="1" dirty="0">
+                <a:solidFill>
+                  <a:srgbClr val="FFFFFF"/>
+                </a:solidFill>
+                <a:latin typeface="Malgun Gothic" pitchFamily="34" charset="0"/>
+                <a:ea typeface="Malgun Gothic" pitchFamily="34" charset="-122"/>
+                <a:cs typeface="Malgun Gothic" pitchFamily="34" charset="-120"/>
+              </a:rPr>
+              <a:t>1</a:t>
+            </a:r>
+            <a:endParaRPr lang="en-US" sz="1400" dirty="0"/>
+          </a:p>
+        </p:txBody>
+      </p:sp>
+      <p:sp>
+        <p:nvSpPr>
+          <p:cNvPr id="9" name="Text 7"/>
+          <p:cNvSpPr txBox="1"/>
+          <p:nvPr/>
+        </p:nvSpPr>
+        <p:spPr>
+          <a:xfrm>
+            <a:off x="1234440" y="1627632"/>
+            <a:ext cx="4564228" cy="384048"/>
+          </a:xfrm>
+          <a:prstGeom prst="rect">
+            <a:avLst/>
+          </a:prstGeom>
+          <a:noFill/>
+          <a:ln/>
+        </p:spPr>
+        <p:txBody>
+          <a:bodyPr wrap="square" lIns="0" tIns="0" rIns="0" bIns="0" rtlCol="0" anchor="ctr"/>
+          <a:lstStyle/>
+          <a:p>
+            <a:pPr indent="0" marL="0">
+              <a:buNone/>
+            </a:pPr>
+            <a:r>
+              <a:rPr lang="en-US" sz="1500" b="1" dirty="0">
+                <a:solidFill>
+                  <a:srgbClr val="2A6FDB"/>
+                </a:solidFill>
+                <a:latin typeface="Malgun Gothic" pitchFamily="34" charset="0"/>
+                <a:ea typeface="Malgun Gothic" pitchFamily="34" charset="-122"/>
+                <a:cs typeface="Malgun Gothic" pitchFamily="34" charset="-120"/>
+              </a:rPr>
+              <a:t>요구사항 분리 입증</a:t>
+            </a:r>
+            <a:endParaRPr lang="en-US" sz="1500" dirty="0"/>
+          </a:p>
+        </p:txBody>
+      </p:sp>
+      <p:sp>
+        <p:nvSpPr>
+          <p:cNvPr id="10" name="Text 8"/>
+          <p:cNvSpPr txBox="1"/>
+          <p:nvPr/>
+        </p:nvSpPr>
+        <p:spPr>
+          <a:xfrm>
+            <a:off x="731520" y="2084832"/>
+            <a:ext cx="5067148" cy="1252728"/>
+          </a:xfrm>
+          <a:prstGeom prst="rect">
+            <a:avLst/>
+          </a:prstGeom>
+          <a:noFill/>
+          <a:ln/>
+        </p:spPr>
+        <p:txBody>
+          <a:bodyPr wrap="square" lIns="0" tIns="0" rIns="0" bIns="0" rtlCol="0" anchor="t"/>
+          <a:lstStyle/>
+          <a:p>
+            <a:pPr marL="152400" indent="-152400">
+              <a:spcAft>
+                <a:spcPts val="400"/>
+              </a:spcAft>
+              <a:buSzPct val="100000"/>
+              <a:buChar char="•"/>
+            </a:pPr>
+            <a:r>
+              <a:rPr lang="en-US" sz="1300" dirty="0">
+                <a:solidFill>
+                  <a:srgbClr val="24313F"/>
+                </a:solidFill>
+                <a:latin typeface="Malgun Gothic" pitchFamily="34" charset="0"/>
+                <a:ea typeface="Malgun Gothic" pitchFamily="34" charset="-122"/>
+                <a:cs typeface="Malgun Gothic" pitchFamily="34" charset="-120"/>
+              </a:rPr>
+              <a:t>CARLA(UE4)는 x86 CPU가 필수이지만 GPU는 6 GB면 충분</a:t>
+            </a:r>
+            <a:endParaRPr lang="en-US" sz="1300" dirty="0"/>
+          </a:p>
+          <a:p>
+            <a:pPr marL="152400" indent="-152400">
+              <a:spcAft>
+                <a:spcPts val="400"/>
+              </a:spcAft>
+              <a:buSzPct val="100000"/>
+              <a:buChar char="•"/>
+            </a:pPr>
+            <a:r>
+              <a:rPr lang="en-US" sz="1300" dirty="0">
+                <a:solidFill>
+                  <a:srgbClr val="24313F"/>
+                </a:solidFill>
+                <a:latin typeface="Malgun Gothic" pitchFamily="34" charset="0"/>
+                <a:ea typeface="Malgun Gothic" pitchFamily="34" charset="-122"/>
+                <a:cs typeface="Malgun Gothic" pitchFamily="34" charset="-120"/>
+              </a:rPr>
+              <a:t>Alpamayo는 VRAM 24 GB 이상이 필요하지만 CPU 아키텍처에는 무관</a:t>
+            </a:r>
+            <a:endParaRPr lang="en-US" sz="1300" dirty="0"/>
+          </a:p>
+          <a:p>
+            <a:pPr marL="152400" indent="-152400">
+              <a:spcAft>
+                <a:spcPts val="400"/>
+              </a:spcAft>
+              <a:buSzPct val="100000"/>
+              <a:buChar char="•"/>
+            </a:pPr>
+            <a:r>
+              <a:rPr lang="en-US" sz="1300" dirty="0">
+                <a:solidFill>
+                  <a:srgbClr val="24313F"/>
+                </a:solidFill>
+                <a:latin typeface="Malgun Gothic" pitchFamily="34" charset="0"/>
+                <a:ea typeface="Malgun Gothic" pitchFamily="34" charset="-122"/>
+                <a:cs typeface="Malgun Gothic" pitchFamily="34" charset="-120"/>
+              </a:rPr>
+              <a:t>둘을 같은 머신에 두던 제약(양자화·OOM-free 대책)이 사라짐</a:t>
+            </a:r>
+            <a:endParaRPr lang="en-US" sz="1300" dirty="0"/>
+          </a:p>
+        </p:txBody>
+      </p:sp>
+      <p:sp>
+        <p:nvSpPr>
+          <p:cNvPr id="11" name="Shape 9"/>
+          <p:cNvSpPr/>
+          <p:nvPr/>
+        </p:nvSpPr>
+        <p:spPr>
+          <a:xfrm>
+            <a:off x="6210148" y="1463040"/>
+            <a:ext cx="5432908" cy="2011680"/>
+          </a:xfrm>
+          <a:prstGeom prst="roundRect">
+            <a:avLst>
+              <a:gd name="adj" fmla="val 3636"/>
+            </a:avLst>
+          </a:prstGeom>
+          <a:solidFill>
+            <a:srgbClr val="F3F5F8"/>
+          </a:solidFill>
+          <a:ln w="9525">
+            <a:solidFill>
+              <a:srgbClr val="D5DBE3"/>
+            </a:solidFill>
+            <a:prstDash val="solid"/>
+          </a:ln>
+        </p:spPr>
+      </p:sp>
+      <p:sp>
+        <p:nvSpPr>
+          <p:cNvPr id="12" name="Shape 10"/>
+          <p:cNvSpPr/>
+          <p:nvPr/>
+        </p:nvSpPr>
+        <p:spPr>
+          <a:xfrm>
+            <a:off x="6393028" y="1627632"/>
+            <a:ext cx="384048" cy="384048"/>
+          </a:xfrm>
+          <a:prstGeom prst="ellipse">
+            <a:avLst/>
+          </a:prstGeom>
+          <a:solidFill>
+            <a:srgbClr val="E0762B"/>
+          </a:solidFill>
+          <a:ln w="12700">
+            <a:solidFill>
+              <a:srgbClr val="E0762B"/>
+            </a:solidFill>
+            <a:prstDash val="solid"/>
+          </a:ln>
+        </p:spPr>
+      </p:sp>
+      <p:sp>
+        <p:nvSpPr>
+          <p:cNvPr id="13" name="Text 11"/>
+          <p:cNvSpPr txBox="1"/>
+          <p:nvPr/>
+        </p:nvSpPr>
+        <p:spPr>
+          <a:xfrm>
+            <a:off x="6393028" y="1627632"/>
+            <a:ext cx="384048" cy="384048"/>
+          </a:xfrm>
+          <a:prstGeom prst="rect">
+            <a:avLst/>
+          </a:prstGeom>
+          <a:noFill/>
+          <a:ln/>
+        </p:spPr>
+        <p:txBody>
+          <a:bodyPr wrap="square" lIns="0" tIns="0" rIns="0" bIns="0" rtlCol="0" anchor="ctr"/>
+          <a:lstStyle/>
+          <a:p>
+            <a:pPr algn="ctr" indent="0" marL="0">
+              <a:buNone/>
+            </a:pPr>
+            <a:r>
+              <a:rPr lang="en-US" sz="1400" b="1" dirty="0">
+                <a:solidFill>
+                  <a:srgbClr val="FFFFFF"/>
+                </a:solidFill>
+                <a:latin typeface="Malgun Gothic" pitchFamily="34" charset="0"/>
+                <a:ea typeface="Malgun Gothic" pitchFamily="34" charset="-122"/>
+                <a:cs typeface="Malgun Gothic" pitchFamily="34" charset="-120"/>
+              </a:rPr>
+              <a:t>2</a:t>
+            </a:r>
+            <a:endParaRPr lang="en-US" sz="1400" dirty="0"/>
+          </a:p>
+        </p:txBody>
+      </p:sp>
+      <p:sp>
+        <p:nvSpPr>
+          <p:cNvPr id="14" name="Text 12"/>
+          <p:cNvSpPr txBox="1"/>
+          <p:nvPr/>
+        </p:nvSpPr>
+        <p:spPr>
+          <a:xfrm>
+            <a:off x="6895948" y="1627632"/>
+            <a:ext cx="4564228" cy="384048"/>
+          </a:xfrm>
+          <a:prstGeom prst="rect">
+            <a:avLst/>
+          </a:prstGeom>
+          <a:noFill/>
+          <a:ln/>
+        </p:spPr>
+        <p:txBody>
+          <a:bodyPr wrap="square" lIns="0" tIns="0" rIns="0" bIns="0" rtlCol="0" anchor="ctr"/>
+          <a:lstStyle/>
+          <a:p>
+            <a:pPr indent="0" marL="0">
+              <a:buNone/>
+            </a:pPr>
+            <a:r>
+              <a:rPr lang="en-US" sz="1500" b="1" dirty="0">
+                <a:solidFill>
+                  <a:srgbClr val="E0762B"/>
+                </a:solidFill>
+                <a:latin typeface="Malgun Gothic" pitchFamily="34" charset="0"/>
+                <a:ea typeface="Malgun Gothic" pitchFamily="34" charset="-122"/>
+                <a:cs typeface="Malgun Gothic" pitchFamily="34" charset="-120"/>
+              </a:rPr>
+              <a:t>인스턴스 선택 유연성</a:t>
+            </a:r>
+            <a:endParaRPr lang="en-US" sz="1500" dirty="0"/>
+          </a:p>
+        </p:txBody>
+      </p:sp>
+      <p:sp>
+        <p:nvSpPr>
+          <p:cNvPr id="15" name="Text 13"/>
+          <p:cNvSpPr txBox="1"/>
+          <p:nvPr/>
+        </p:nvSpPr>
+        <p:spPr>
+          <a:xfrm>
+            <a:off x="6393028" y="2084832"/>
+            <a:ext cx="5067148" cy="1252728"/>
+          </a:xfrm>
+          <a:prstGeom prst="rect">
+            <a:avLst/>
+          </a:prstGeom>
+          <a:noFill/>
+          <a:ln/>
+        </p:spPr>
+        <p:txBody>
+          <a:bodyPr wrap="square" lIns="0" tIns="0" rIns="0" bIns="0" rtlCol="0" anchor="t"/>
+          <a:lstStyle/>
+          <a:p>
+            <a:pPr marL="152400" indent="-152400">
+              <a:spcAft>
+                <a:spcPts val="400"/>
+              </a:spcAft>
+              <a:buSzPct val="100000"/>
+              <a:buChar char="•"/>
+            </a:pPr>
+            <a:r>
+              <a:rPr lang="en-US" sz="1300" dirty="0">
+                <a:solidFill>
+                  <a:srgbClr val="24313F"/>
+                </a:solidFill>
+                <a:latin typeface="Malgun Gothic" pitchFamily="34" charset="0"/>
+                <a:ea typeface="Malgun Gothic" pitchFamily="34" charset="-122"/>
+                <a:cs typeface="Malgun Gothic" pitchFamily="34" charset="-120"/>
+              </a:rPr>
+              <a:t>추론 호스트는 x86/ARM 가리지 않고 VRAM 기준으로만 선택 (ARM Graviton GPU 인스턴스 검토 가능)</a:t>
+            </a:r>
+            <a:endParaRPr lang="en-US" sz="1300" dirty="0"/>
+          </a:p>
+          <a:p>
+            <a:pPr marL="152400" indent="-152400">
+              <a:spcAft>
+                <a:spcPts val="400"/>
+              </a:spcAft>
+              <a:buSzPct val="100000"/>
+              <a:buChar char="•"/>
+            </a:pPr>
+            <a:r>
+              <a:rPr lang="en-US" sz="1300" dirty="0">
+                <a:solidFill>
+                  <a:srgbClr val="24313F"/>
+                </a:solidFill>
+                <a:latin typeface="Malgun Gothic" pitchFamily="34" charset="0"/>
+                <a:ea typeface="Malgun Gothic" pitchFamily="34" charset="-122"/>
+                <a:cs typeface="Malgun Gothic" pitchFamily="34" charset="-120"/>
+              </a:rPr>
+              <a:t>모델을 키우거나(Alpamayo 2, 7카메라) 샘플 수·CFG를 늘릴 때 B만 교체</a:t>
+            </a:r>
+            <a:endParaRPr lang="en-US" sz="1300" dirty="0"/>
+          </a:p>
+          <a:p>
+            <a:pPr marL="152400" indent="-152400">
+              <a:spcAft>
+                <a:spcPts val="400"/>
+              </a:spcAft>
+              <a:buSzPct val="100000"/>
+              <a:buChar char="•"/>
+            </a:pPr>
+            <a:r>
+              <a:rPr lang="en-US" sz="1300" dirty="0">
+                <a:solidFill>
+                  <a:srgbClr val="24313F"/>
+                </a:solidFill>
+                <a:latin typeface="Malgun Gothic" pitchFamily="34" charset="0"/>
+                <a:ea typeface="Malgun Gothic" pitchFamily="34" charset="-122"/>
+                <a:cs typeface="Malgun Gothic" pitchFamily="34" charset="-120"/>
+              </a:rPr>
+              <a:t>시뮬레이터 호스트는 그대로 유지</a:t>
+            </a:r>
+            <a:endParaRPr lang="en-US" sz="1300" dirty="0"/>
+          </a:p>
+        </p:txBody>
+      </p:sp>
+      <p:sp>
+        <p:nvSpPr>
+          <p:cNvPr id="16" name="Shape 14"/>
+          <p:cNvSpPr/>
+          <p:nvPr/>
+        </p:nvSpPr>
+        <p:spPr>
+          <a:xfrm>
+            <a:off x="548640" y="3703320"/>
+            <a:ext cx="5432908" cy="2011680"/>
+          </a:xfrm>
+          <a:prstGeom prst="roundRect">
+            <a:avLst>
+              <a:gd name="adj" fmla="val 3636"/>
+            </a:avLst>
+          </a:prstGeom>
+          <a:solidFill>
+            <a:srgbClr val="F3F5F8"/>
+          </a:solidFill>
+          <a:ln w="9525">
+            <a:solidFill>
+              <a:srgbClr val="D5DBE3"/>
+            </a:solidFill>
+            <a:prstDash val="solid"/>
+          </a:ln>
+        </p:spPr>
+      </p:sp>
+      <p:sp>
+        <p:nvSpPr>
+          <p:cNvPr id="17" name="Shape 15"/>
+          <p:cNvSpPr/>
+          <p:nvPr/>
+        </p:nvSpPr>
+        <p:spPr>
+          <a:xfrm>
+            <a:off x="731520" y="3867912"/>
+            <a:ext cx="384048" cy="384048"/>
+          </a:xfrm>
+          <a:prstGeom prst="ellipse">
+            <a:avLst/>
+          </a:prstGeom>
+          <a:solidFill>
+            <a:srgbClr val="2E8B57"/>
+          </a:solidFill>
+          <a:ln w="12700">
+            <a:solidFill>
+              <a:srgbClr val="2E8B57"/>
+            </a:solidFill>
+            <a:prstDash val="solid"/>
+          </a:ln>
+        </p:spPr>
+      </p:sp>
+      <p:sp>
+        <p:nvSpPr>
+          <p:cNvPr id="18" name="Text 16"/>
+          <p:cNvSpPr txBox="1"/>
+          <p:nvPr/>
+        </p:nvSpPr>
+        <p:spPr>
+          <a:xfrm>
+            <a:off x="731520" y="3867912"/>
+            <a:ext cx="384048" cy="384048"/>
+          </a:xfrm>
+          <a:prstGeom prst="rect">
+            <a:avLst/>
+          </a:prstGeom>
+          <a:noFill/>
+          <a:ln/>
+        </p:spPr>
+        <p:txBody>
+          <a:bodyPr wrap="square" lIns="0" tIns="0" rIns="0" bIns="0" rtlCol="0" anchor="ctr"/>
+          <a:lstStyle/>
+          <a:p>
+            <a:pPr algn="ctr" indent="0" marL="0">
+              <a:buNone/>
+            </a:pPr>
+            <a:r>
+              <a:rPr lang="en-US" sz="1400" b="1" dirty="0">
+                <a:solidFill>
+                  <a:srgbClr val="FFFFFF"/>
+                </a:solidFill>
+                <a:latin typeface="Malgun Gothic" pitchFamily="34" charset="0"/>
+                <a:ea typeface="Malgun Gothic" pitchFamily="34" charset="-122"/>
+                <a:cs typeface="Malgun Gothic" pitchFamily="34" charset="-120"/>
+              </a:rPr>
+              <a:t>3</a:t>
+            </a:r>
+            <a:endParaRPr lang="en-US" sz="1400" dirty="0"/>
+          </a:p>
+        </p:txBody>
+      </p:sp>
+      <p:sp>
+        <p:nvSpPr>
+          <p:cNvPr id="19" name="Text 17"/>
+          <p:cNvSpPr txBox="1"/>
+          <p:nvPr/>
+        </p:nvSpPr>
+        <p:spPr>
+          <a:xfrm>
+            <a:off x="1234440" y="3867912"/>
+            <a:ext cx="4564228" cy="384048"/>
+          </a:xfrm>
+          <a:prstGeom prst="rect">
+            <a:avLst/>
+          </a:prstGeom>
+          <a:noFill/>
+          <a:ln/>
+        </p:spPr>
+        <p:txBody>
+          <a:bodyPr wrap="square" lIns="0" tIns="0" rIns="0" bIns="0" rtlCol="0" anchor="ctr"/>
+          <a:lstStyle/>
+          <a:p>
+            <a:pPr indent="0" marL="0">
+              <a:buNone/>
+            </a:pPr>
+            <a:r>
+              <a:rPr lang="en-US" sz="1500" b="1" dirty="0">
+                <a:solidFill>
+                  <a:srgbClr val="2E8B57"/>
+                </a:solidFill>
+                <a:latin typeface="Malgun Gothic" pitchFamily="34" charset="0"/>
+                <a:ea typeface="Malgun Gothic" pitchFamily="34" charset="-122"/>
+                <a:cs typeface="Malgun Gothic" pitchFamily="34" charset="-120"/>
+              </a:rPr>
+              <a:t>비용 최적화</a:t>
+            </a:r>
+            <a:endParaRPr lang="en-US" sz="1500" dirty="0"/>
+          </a:p>
+        </p:txBody>
+      </p:sp>
+      <p:sp>
+        <p:nvSpPr>
+          <p:cNvPr id="20" name="Text 18"/>
+          <p:cNvSpPr txBox="1"/>
+          <p:nvPr/>
+        </p:nvSpPr>
+        <p:spPr>
+          <a:xfrm>
+            <a:off x="731520" y="4325112"/>
+            <a:ext cx="5067148" cy="1252728"/>
+          </a:xfrm>
+          <a:prstGeom prst="rect">
+            <a:avLst/>
+          </a:prstGeom>
+          <a:noFill/>
+          <a:ln/>
+        </p:spPr>
+        <p:txBody>
+          <a:bodyPr wrap="square" lIns="0" tIns="0" rIns="0" bIns="0" rtlCol="0" anchor="t"/>
+          <a:lstStyle/>
+          <a:p>
+            <a:pPr marL="152400" indent="-152400">
+              <a:spcAft>
+                <a:spcPts val="400"/>
+              </a:spcAft>
+              <a:buSzPct val="100000"/>
+              <a:buChar char="•"/>
+            </a:pPr>
+            <a:r>
+              <a:rPr lang="en-US" sz="1300" dirty="0">
+                <a:solidFill>
+                  <a:srgbClr val="24313F"/>
+                </a:solidFill>
+                <a:latin typeface="Malgun Gothic" pitchFamily="34" charset="0"/>
+                <a:ea typeface="Malgun Gothic" pitchFamily="34" charset="-122"/>
+                <a:cs typeface="Malgun Gothic" pitchFamily="34" charset="-120"/>
+              </a:rPr>
+              <a:t>CARLA와 모델을 함께 담을 초대형 단일 GPU 인스턴스가 필요 없음</a:t>
+            </a:r>
+            <a:endParaRPr lang="en-US" sz="1300" dirty="0"/>
+          </a:p>
+          <a:p>
+            <a:pPr marL="152400" indent="-152400">
+              <a:spcAft>
+                <a:spcPts val="400"/>
+              </a:spcAft>
+              <a:buSzPct val="100000"/>
+              <a:buChar char="•"/>
+            </a:pPr>
+            <a:r>
+              <a:rPr lang="en-US" sz="1300" dirty="0">
+                <a:solidFill>
+                  <a:srgbClr val="24313F"/>
+                </a:solidFill>
+                <a:latin typeface="Malgun Gothic" pitchFamily="34" charset="0"/>
+                <a:ea typeface="Malgun Gothic" pitchFamily="34" charset="-122"/>
+                <a:cs typeface="Malgun Gothic" pitchFamily="34" charset="-120"/>
+              </a:rPr>
+              <a:t>필요 없는 쪽만 정지: open-loop·노트북 실험 때는 A 정지, 데이터 수집 때는 B 정지</a:t>
+            </a:r>
+            <a:endParaRPr lang="en-US" sz="1300" dirty="0"/>
+          </a:p>
+          <a:p>
+            <a:pPr marL="152400" indent="-152400">
+              <a:spcAft>
+                <a:spcPts val="400"/>
+              </a:spcAft>
+              <a:buSzPct val="100000"/>
+              <a:buChar char="•"/>
+            </a:pPr>
+            <a:r>
+              <a:rPr lang="en-US" sz="1300" dirty="0">
+                <a:solidFill>
+                  <a:srgbClr val="24313F"/>
+                </a:solidFill>
+                <a:latin typeface="Malgun Gothic" pitchFamily="34" charset="0"/>
+                <a:ea typeface="Malgun Gothic" pitchFamily="34" charset="-122"/>
+                <a:cs typeface="Malgun Gothic" pitchFamily="34" charset="-120"/>
+              </a:rPr>
+              <a:t>모델을 한 번만 로드해 상주시키므로 반복 실험의 대기 시간 감소  [요금 비교: 요금표 확인 후 기입]</a:t>
+            </a:r>
+            <a:endParaRPr lang="en-US" sz="1300" dirty="0"/>
+          </a:p>
+        </p:txBody>
+      </p:sp>
+      <p:sp>
+        <p:nvSpPr>
+          <p:cNvPr id="21" name="Shape 19"/>
+          <p:cNvSpPr/>
+          <p:nvPr/>
+        </p:nvSpPr>
+        <p:spPr>
+          <a:xfrm>
+            <a:off x="6210148" y="3703320"/>
+            <a:ext cx="5432908" cy="2011680"/>
+          </a:xfrm>
+          <a:prstGeom prst="roundRect">
+            <a:avLst>
+              <a:gd name="adj" fmla="val 3636"/>
+            </a:avLst>
+          </a:prstGeom>
+          <a:solidFill>
+            <a:srgbClr val="F3F5F8"/>
+          </a:solidFill>
+          <a:ln w="9525">
+            <a:solidFill>
+              <a:srgbClr val="D5DBE3"/>
+            </a:solidFill>
+            <a:prstDash val="solid"/>
+          </a:ln>
+        </p:spPr>
+      </p:sp>
+      <p:sp>
+        <p:nvSpPr>
+          <p:cNvPr id="22" name="Shape 20"/>
+          <p:cNvSpPr/>
+          <p:nvPr/>
+        </p:nvSpPr>
+        <p:spPr>
+          <a:xfrm>
+            <a:off x="6393028" y="3867912"/>
+            <a:ext cx="384048" cy="384048"/>
+          </a:xfrm>
+          <a:prstGeom prst="ellipse">
+            <a:avLst/>
+          </a:prstGeom>
+          <a:solidFill>
+            <a:srgbClr val="1B2A41"/>
+          </a:solidFill>
+          <a:ln w="12700">
+            <a:solidFill>
+              <a:srgbClr val="1B2A41"/>
+            </a:solidFill>
+            <a:prstDash val="solid"/>
+          </a:ln>
+        </p:spPr>
+      </p:sp>
+      <p:sp>
+        <p:nvSpPr>
+          <p:cNvPr id="23" name="Text 21"/>
+          <p:cNvSpPr txBox="1"/>
+          <p:nvPr/>
+        </p:nvSpPr>
+        <p:spPr>
+          <a:xfrm>
+            <a:off x="6393028" y="3867912"/>
+            <a:ext cx="384048" cy="384048"/>
+          </a:xfrm>
+          <a:prstGeom prst="rect">
+            <a:avLst/>
+          </a:prstGeom>
+          <a:noFill/>
+          <a:ln/>
+        </p:spPr>
+        <p:txBody>
+          <a:bodyPr wrap="square" lIns="0" tIns="0" rIns="0" bIns="0" rtlCol="0" anchor="ctr"/>
+          <a:lstStyle/>
+          <a:p>
+            <a:pPr algn="ctr" indent="0" marL="0">
+              <a:buNone/>
+            </a:pPr>
+            <a:r>
+              <a:rPr lang="en-US" sz="1400" b="1" dirty="0">
+                <a:solidFill>
+                  <a:srgbClr val="FFFFFF"/>
+                </a:solidFill>
+                <a:latin typeface="Malgun Gothic" pitchFamily="34" charset="0"/>
+                <a:ea typeface="Malgun Gothic" pitchFamily="34" charset="-122"/>
+                <a:cs typeface="Malgun Gothic" pitchFamily="34" charset="-120"/>
+              </a:rPr>
+              <a:t>4</a:t>
+            </a:r>
+            <a:endParaRPr lang="en-US" sz="1400" dirty="0"/>
+          </a:p>
+        </p:txBody>
+      </p:sp>
+      <p:sp>
+        <p:nvSpPr>
+          <p:cNvPr id="24" name="Text 22"/>
+          <p:cNvSpPr txBox="1"/>
+          <p:nvPr/>
+        </p:nvSpPr>
+        <p:spPr>
+          <a:xfrm>
+            <a:off x="6895948" y="3867912"/>
+            <a:ext cx="4564228" cy="384048"/>
+          </a:xfrm>
+          <a:prstGeom prst="rect">
+            <a:avLst/>
+          </a:prstGeom>
+          <a:noFill/>
+          <a:ln/>
+        </p:spPr>
+        <p:txBody>
+          <a:bodyPr wrap="square" lIns="0" tIns="0" rIns="0" bIns="0" rtlCol="0" anchor="ctr"/>
+          <a:lstStyle/>
+          <a:p>
+            <a:pPr indent="0" marL="0">
+              <a:buNone/>
+            </a:pPr>
+            <a:r>
+              <a:rPr lang="en-US" sz="1500" b="1" dirty="0">
+                <a:solidFill>
+                  <a:srgbClr val="1B2A41"/>
+                </a:solidFill>
+                <a:latin typeface="Malgun Gothic" pitchFamily="34" charset="0"/>
+                <a:ea typeface="Malgun Gothic" pitchFamily="34" charset="-122"/>
+                <a:cs typeface="Malgun Gothic" pitchFamily="34" charset="-120"/>
+              </a:rPr>
+              <a:t>운영·확장</a:t>
+            </a:r>
+            <a:endParaRPr lang="en-US" sz="1500" dirty="0"/>
+          </a:p>
+        </p:txBody>
+      </p:sp>
+      <p:sp>
+        <p:nvSpPr>
+          <p:cNvPr id="25" name="Text 23"/>
+          <p:cNvSpPr txBox="1"/>
+          <p:nvPr/>
+        </p:nvSpPr>
+        <p:spPr>
+          <a:xfrm>
+            <a:off x="6393028" y="4325112"/>
+            <a:ext cx="5067148" cy="1252728"/>
+          </a:xfrm>
+          <a:prstGeom prst="rect">
+            <a:avLst/>
+          </a:prstGeom>
+          <a:noFill/>
+          <a:ln/>
+        </p:spPr>
+        <p:txBody>
+          <a:bodyPr wrap="square" lIns="0" tIns="0" rIns="0" bIns="0" rtlCol="0" anchor="t"/>
+          <a:lstStyle/>
+          <a:p>
+            <a:pPr marL="152400" indent="-152400">
+              <a:spcAft>
+                <a:spcPts val="400"/>
+              </a:spcAft>
+              <a:buSzPct val="100000"/>
+              <a:buChar char="•"/>
+            </a:pPr>
+            <a:r>
+              <a:rPr lang="en-US" sz="1300" dirty="0">
+                <a:solidFill>
+                  <a:srgbClr val="24313F"/>
+                </a:solidFill>
+                <a:latin typeface="Malgun Gothic" pitchFamily="34" charset="0"/>
+                <a:ea typeface="Malgun Gothic" pitchFamily="34" charset="-122"/>
+                <a:cs typeface="Malgun Gothic" pitchFamily="34" charset="-120"/>
+              </a:rPr>
+              <a:t>장애 격리: 클라이언트·CARLA를 재시작해도 모델은 그대로</a:t>
+            </a:r>
+            <a:endParaRPr lang="en-US" sz="1300" dirty="0"/>
+          </a:p>
+          <a:p>
+            <a:pPr marL="152400" indent="-152400">
+              <a:spcAft>
+                <a:spcPts val="400"/>
+              </a:spcAft>
+              <a:buSzPct val="100000"/>
+              <a:buChar char="•"/>
+            </a:pPr>
+            <a:r>
+              <a:rPr lang="en-US" sz="1300" dirty="0">
+                <a:solidFill>
+                  <a:srgbClr val="24313F"/>
+                </a:solidFill>
+                <a:latin typeface="Malgun Gothic" pitchFamily="34" charset="0"/>
+                <a:ea typeface="Malgun Gothic" pitchFamily="34" charset="-122"/>
+                <a:cs typeface="Malgun Gothic" pitchFamily="34" charset="-120"/>
+              </a:rPr>
+              <a:t>추론 인터페이스가 계약(.proto)으로 고정되어 다른 모델·다른 시뮬레이터도 같은 방식으로 연결 가능</a:t>
+            </a:r>
+            <a:endParaRPr lang="en-US" sz="1300" dirty="0"/>
+          </a:p>
+          <a:p>
+            <a:pPr marL="152400" indent="-152400">
+              <a:spcAft>
+                <a:spcPts val="400"/>
+              </a:spcAft>
+              <a:buSzPct val="100000"/>
+              <a:buChar char="•"/>
+            </a:pPr>
+            <a:r>
+              <a:rPr lang="en-US" sz="1300" dirty="0">
+                <a:solidFill>
+                  <a:srgbClr val="24313F"/>
+                </a:solidFill>
+                <a:latin typeface="Malgun Gothic" pitchFamily="34" charset="0"/>
+                <a:ea typeface="Malgun Gothic" pitchFamily="34" charset="-122"/>
+                <a:cs typeface="Malgun Gothic" pitchFamily="34" charset="-120"/>
+              </a:rPr>
+              <a:t>업스트림 Carlamayo와 같은 명령 체계 유지(플래그 하나 추가)</a:t>
+            </a:r>
+            <a:endParaRPr lang="en-US" sz="1300" dirty="0"/>
+          </a:p>
+        </p:txBody>
+      </p:sp>
+    </p:spTree>
+  </p:cSld>
+  <p:clrMapOvr>
+    <a:masterClrMapping/>
+  </p:clrMapOvr>
+</p:sld>
+</file>
+
+<file path=ppt/slides/slide7.xml><?xml version="1.0" encoding="utf-8"?>
+<p:sld xmlns:a="http://schemas.openxmlformats.org/drawingml/2006/main" xmlns:r="http://schemas.openxmlformats.org/officeDocument/2006/relationships" xmlns:p="http://schemas.openxmlformats.org/presentationml/2006/main">
+  <p:cSld name="Slide 7">
+    <p:bg>
+      <p:bgPr>
+        <a:solidFill>
+          <a:srgbClr val="FFFFFF"/>
+        </a:solidFill>
+      </p:bgPr>
+    </p:bg>
+    <p:spTree>
+      <p:nvGrpSpPr>
+        <p:cNvPr id="1" name=""/>
+        <p:cNvGrpSpPr/>
+        <p:nvPr/>
+      </p:nvGrpSpPr>
+      <p:grpSpPr>
+        <a:xfrm>
+          <a:off x="0" y="0"/>
+          <a:ext cx="0" cy="0"/>
+          <a:chOff x="0" y="0"/>
+          <a:chExt cx="0" cy="0"/>
+        </a:xfrm>
+      </p:grpSpPr>
+      <p:sp>
+        <p:nvSpPr>
+          <p:cNvPr id="2" name="Text 0"/>
+          <p:cNvSpPr txBox="1"/>
+          <p:nvPr/>
+        </p:nvSpPr>
+        <p:spPr>
+          <a:xfrm>
+            <a:off x="548640" y="347472"/>
+            <a:ext cx="11094415" cy="640080"/>
+          </a:xfrm>
+          <a:prstGeom prst="rect">
+            <a:avLst/>
+          </a:prstGeom>
+          <a:noFill/>
+          <a:ln/>
+        </p:spPr>
+        <p:txBody>
+          <a:bodyPr wrap="square" lIns="0" tIns="0" rIns="0" bIns="0" rtlCol="0" anchor="t"/>
+          <a:lstStyle/>
+          <a:p>
+            <a:pPr indent="0" marL="0">
+              <a:buNone/>
+            </a:pPr>
+            <a:r>
+              <a:rPr lang="en-US" sz="2800" b="1" dirty="0">
+                <a:solidFill>
+                  <a:srgbClr val="1B2A41"/>
+                </a:solidFill>
+                <a:latin typeface="Malgun Gothic" pitchFamily="34" charset="0"/>
+                <a:ea typeface="Malgun Gothic" pitchFamily="34" charset="-122"/>
+                <a:cs typeface="Malgun Gothic" pitchFamily="34" charset="-120"/>
+              </a:rPr>
+              <a:t>부록: 용어집</a:t>
+            </a:r>
+            <a:endParaRPr lang="en-US" sz="2800" dirty="0"/>
+          </a:p>
+        </p:txBody>
+      </p:sp>
+      <p:sp>
+        <p:nvSpPr>
+          <p:cNvPr id="3" name="Text 1"/>
+          <p:cNvSpPr txBox="1"/>
+          <p:nvPr/>
+        </p:nvSpPr>
+        <p:spPr>
+          <a:xfrm>
+            <a:off x="548640" y="6446520"/>
+            <a:ext cx="5486400" cy="274320"/>
+          </a:xfrm>
+          <a:prstGeom prst="rect">
+            <a:avLst/>
+          </a:prstGeom>
+          <a:noFill/>
+          <a:ln/>
+        </p:spPr>
+        <p:txBody>
+          <a:bodyPr wrap="square" lIns="0" tIns="0" rIns="0" bIns="0" rtlCol="0" anchor="ctr"/>
+          <a:lstStyle/>
+          <a:p>
+            <a:pPr indent="0" marL="0">
+              <a:buNone/>
+            </a:pPr>
+            <a:r>
+              <a:rPr lang="en-US" sz="900" dirty="0">
+                <a:solidFill>
+                  <a:srgbClr val="6B7A8C"/>
+                </a:solidFill>
+                <a:latin typeface="Malgun Gothic" pitchFamily="34" charset="0"/>
+                <a:ea typeface="Malgun Gothic" pitchFamily="34" charset="-122"/>
+                <a:cs typeface="Malgun Gothic" pitchFamily="34" charset="-120"/>
+              </a:rPr>
+              <a:t>Carlamayo 분산 데모</a:t>
+            </a:r>
+            <a:endParaRPr lang="en-US" sz="900" dirty="0"/>
+          </a:p>
+        </p:txBody>
+      </p:sp>
+      <p:sp>
+        <p:nvSpPr>
+          <p:cNvPr id="4" name="Text 2"/>
+          <p:cNvSpPr txBox="1"/>
+          <p:nvPr/>
+        </p:nvSpPr>
+        <p:spPr>
+          <a:xfrm>
+            <a:off x="10728655" y="6446520"/>
+            <a:ext cx="914400" cy="274320"/>
+          </a:xfrm>
+          <a:prstGeom prst="rect">
+            <a:avLst/>
+          </a:prstGeom>
+          <a:noFill/>
+          <a:ln/>
+        </p:spPr>
+        <p:txBody>
+          <a:bodyPr wrap="square" lIns="0" tIns="0" rIns="0" bIns="0" rtlCol="0" anchor="ctr"/>
+          <a:lstStyle/>
+          <a:p>
+            <a:pPr algn="r" indent="0" marL="0">
+              <a:buNone/>
+            </a:pPr>
+            <a:r>
+              <a:rPr lang="en-US" sz="900" dirty="0">
+                <a:solidFill>
+                  <a:srgbClr val="6B7A8C"/>
+                </a:solidFill>
+                <a:latin typeface="Malgun Gothic" pitchFamily="34" charset="0"/>
+                <a:ea typeface="Malgun Gothic" pitchFamily="34" charset="-122"/>
+                <a:cs typeface="Malgun Gothic" pitchFamily="34" charset="-120"/>
+              </a:rPr>
+              <a:t>7</a:t>
             </a:r>
             <a:endParaRPr lang="en-US" sz="900" dirty="0"/>
           </a:p>

--- a/docs/distributed/demo-overview-short.pptx
+++ b/docs/distributed/demo-overview-short.pptx
@@ -3588,7 +3588,7 @@
                 <a:ea typeface="Malgun Gothic" pitchFamily="34" charset="-122"/>
                 <a:cs typeface="Malgun Gothic" pitchFamily="34" charset="-120"/>
               </a:rPr>
-              <a:t>배포 다이어그램과 closed-loop 한 사이클</a:t>
+              <a:t>배포 전/후 비교: 같은 컴포넌트, 모델 위치만 다르다</a:t>
             </a:r>
             <a:endParaRPr lang="en-US" sz="2800" dirty="0"/>
           </a:p>
@@ -3627,7 +3627,7 @@
                 <a:ea typeface="Malgun Gothic" pitchFamily="34" charset="-122"/>
                 <a:cs typeface="Malgun Gothic" pitchFamily="34" charset="-120"/>
               </a:rPr>
-              <a:t>①~④가 약 1초마다 반복된다. 그 사이 시뮬레이터는 10 Hz로 계속 진행하고, 응답(③)은 요청(②)과 같은 gRPC 연결로 돌아온다</a:t>
+              <a:t>두 그림은 같은 컴포넌트 집합. 달라진 것은 어댑터 상자, 모델 상자의 위치, GPU가 두 호스트로 나뉜 것뿐 (①~④ = closed-loop 한 사이클)</a:t>
             </a:r>
             <a:endParaRPr lang="en-US" sz="1400" dirty="0"/>
           </a:p>
@@ -3711,9 +3711,48 @@
           </a:p>
         </p:txBody>
       </p:sp>
+      <p:sp>
+        <p:nvSpPr>
+          <p:cNvPr id="6" name="Text 4"/>
+          <p:cNvSpPr txBox="1"/>
+          <p:nvPr/>
+        </p:nvSpPr>
+        <p:spPr>
+          <a:xfrm>
+            <a:off x="548640" y="1371600"/>
+            <a:ext cx="11094415" cy="256032"/>
+          </a:xfrm>
+          <a:prstGeom prst="rect">
+            <a:avLst/>
+          </a:prstGeom>
+          <a:noFill/>
+          <a:ln/>
+        </p:spPr>
+        <p:txBody>
+          <a:bodyPr wrap="square" lIns="0" tIns="0" rIns="0" bIns="0" rtlCol="0" anchor="t"/>
+          <a:lstStyle/>
+          <a:p>
+            <a:pPr indent="0" marL="0">
+              <a:buNone/>
+            </a:pPr>
+            <a:r>
+              <a:rPr lang="en-US" sz="1050" b="1" dirty="0">
+                <a:solidFill>
+                  <a:srgbClr val="1B2A41"/>
+                </a:solidFill>
+                <a:latin typeface="Malgun Gothic" pitchFamily="34" charset="0"/>
+                <a:ea typeface="Malgun Gothic" pitchFamily="34" charset="-122"/>
+                <a:cs typeface="Malgun Gothic" pitchFamily="34" charset="-120"/>
+              </a:rPr>
+              <a:t>분리 전 (업스트림 Carlamayo, 단일 호스트): 모델이 클라이언트 프로세스 안에 있고 CARLA와 GPU를 나눠 쓴다</a:t>
+            </a:r>
+            <a:endParaRPr lang="en-US" sz="1050" dirty="0"/>
+          </a:p>
+        </p:txBody>
+      </p:sp>
       <p:pic>
         <p:nvPicPr>
-          <p:cNvPr id="6" name="Image 0" descr="split-deployment.png">    </p:cNvPr>
+          <p:cNvPr id="7" name="Image 0" descr="current-deployment.png">    </p:cNvPr>
           <p:cNvPicPr>
             <a:picLocks noChangeAspect="1"/>
           </p:cNvPicPr>
@@ -3727,8 +3766,8 @@
         </p:blipFill>
         <p:spPr>
           <a:xfrm>
-            <a:off x="548640" y="1371600"/>
-            <a:ext cx="11094415" cy="1952843"/>
+            <a:off x="1112368" y="1645920"/>
+            <a:ext cx="9966960" cy="2453601"/>
           </a:xfrm>
           <a:prstGeom prst="rect">
             <a:avLst/>
@@ -3737,507 +3776,30 @@
       </p:pic>
       <p:sp>
         <p:nvSpPr>
-          <p:cNvPr id="7" name="Shape 4"/>
-          <p:cNvSpPr/>
-          <p:nvPr/>
-        </p:nvSpPr>
-        <p:spPr>
-          <a:xfrm>
-            <a:off x="548640" y="3644483"/>
-            <a:ext cx="2602154" cy="1188720"/>
-          </a:xfrm>
-          <a:prstGeom prst="roundRect">
-            <a:avLst>
-              <a:gd name="adj" fmla="val 6154"/>
-            </a:avLst>
-          </a:prstGeom>
-          <a:solidFill>
-            <a:srgbClr val="F3F5F8"/>
-          </a:solidFill>
-          <a:ln w="9525">
-            <a:solidFill>
-              <a:srgbClr val="2A6FDB"/>
-            </a:solidFill>
-            <a:prstDash val="solid"/>
-          </a:ln>
-        </p:spPr>
-      </p:sp>
-      <p:sp>
-        <p:nvSpPr>
-          <p:cNvPr id="8" name="Shape 5"/>
-          <p:cNvSpPr/>
-          <p:nvPr/>
-        </p:nvSpPr>
-        <p:spPr>
-          <a:xfrm>
-            <a:off x="658368" y="3754211"/>
-            <a:ext cx="310896" cy="310896"/>
-          </a:xfrm>
-          <a:prstGeom prst="ellipse">
-            <a:avLst/>
-          </a:prstGeom>
-          <a:solidFill>
-            <a:srgbClr val="2A6FDB"/>
-          </a:solidFill>
-          <a:ln w="12700">
-            <a:solidFill>
-              <a:srgbClr val="2A6FDB"/>
-            </a:solidFill>
-            <a:prstDash val="solid"/>
-          </a:ln>
-        </p:spPr>
-      </p:sp>
-      <p:sp>
-        <p:nvSpPr>
-          <p:cNvPr id="9" name="Text 6"/>
-          <p:cNvSpPr txBox="1"/>
-          <p:nvPr/>
-        </p:nvSpPr>
-        <p:spPr>
-          <a:xfrm>
-            <a:off x="658368" y="3754211"/>
-            <a:ext cx="310896" cy="310896"/>
-          </a:xfrm>
-          <a:prstGeom prst="rect">
-            <a:avLst/>
-          </a:prstGeom>
-          <a:noFill/>
-          <a:ln/>
-        </p:spPr>
-        <p:txBody>
-          <a:bodyPr wrap="square" lIns="0" tIns="0" rIns="0" bIns="0" rtlCol="0" anchor="ctr"/>
-          <a:lstStyle/>
-          <a:p>
-            <a:pPr algn="ctr" indent="0" marL="0">
-              <a:buNone/>
-            </a:pPr>
-            <a:r>
-              <a:rPr lang="en-US" sz="1100" b="1" dirty="0">
-                <a:solidFill>
-                  <a:srgbClr val="FFFFFF"/>
-                </a:solidFill>
-                <a:latin typeface="Malgun Gothic" pitchFamily="34" charset="0"/>
-                <a:ea typeface="Malgun Gothic" pitchFamily="34" charset="-122"/>
-                <a:cs typeface="Malgun Gothic" pitchFamily="34" charset="-120"/>
-              </a:rPr>
-              <a:t>1</a:t>
-            </a:r>
-            <a:endParaRPr lang="en-US" sz="1100" dirty="0"/>
-          </a:p>
-        </p:txBody>
-      </p:sp>
-      <p:sp>
-        <p:nvSpPr>
-          <p:cNvPr id="10" name="Text 7"/>
-          <p:cNvSpPr txBox="1"/>
-          <p:nvPr/>
-        </p:nvSpPr>
-        <p:spPr>
-          <a:xfrm>
-            <a:off x="1024128" y="3735923"/>
-            <a:ext cx="2035226" cy="347472"/>
-          </a:xfrm>
-          <a:prstGeom prst="rect">
-            <a:avLst/>
-          </a:prstGeom>
-          <a:noFill/>
-          <a:ln/>
-        </p:spPr>
-        <p:txBody>
-          <a:bodyPr wrap="square" lIns="0" tIns="0" rIns="0" bIns="0" rtlCol="0" anchor="ctr"/>
+          <p:cNvPr id="8" name="Text 5"/>
+          <p:cNvSpPr txBox="1"/>
+          <p:nvPr/>
+        </p:nvSpPr>
+        <p:spPr>
+          <a:xfrm>
+            <a:off x="548640" y="4264113"/>
+            <a:ext cx="11094415" cy="256032"/>
+          </a:xfrm>
+          <a:prstGeom prst="rect">
+            <a:avLst/>
+          </a:prstGeom>
+          <a:noFill/>
+          <a:ln/>
+        </p:spPr>
+        <p:txBody>
+          <a:bodyPr wrap="square" lIns="0" tIns="0" rIns="0" bIns="0" rtlCol="0" anchor="t"/>
           <a:lstStyle/>
           <a:p>
             <a:pPr indent="0" marL="0">
               <a:buNone/>
             </a:pPr>
             <a:r>
-              <a:rPr lang="en-US" sz="1150" b="1" dirty="0">
-                <a:solidFill>
-                  <a:srgbClr val="2A6FDB"/>
-                </a:solidFill>
-                <a:latin typeface="Malgun Gothic" pitchFamily="34" charset="0"/>
-                <a:ea typeface="Malgun Gothic" pitchFamily="34" charset="-122"/>
-                <a:cs typeface="Malgun Gothic" pitchFamily="34" charset="-120"/>
-              </a:rPr>
-              <a:t>카메라 캡처</a:t>
-            </a:r>
-            <a:endParaRPr lang="en-US" sz="1150" dirty="0"/>
-          </a:p>
-        </p:txBody>
-      </p:sp>
-      <p:sp>
-        <p:nvSpPr>
-          <p:cNvPr id="11" name="Text 8"/>
-          <p:cNvSpPr txBox="1"/>
-          <p:nvPr/>
-        </p:nvSpPr>
-        <p:spPr>
-          <a:xfrm>
-            <a:off x="658368" y="4101683"/>
-            <a:ext cx="2382698" cy="658368"/>
-          </a:xfrm>
-          <a:prstGeom prst="rect">
-            <a:avLst/>
-          </a:prstGeom>
-          <a:noFill/>
-          <a:ln/>
-        </p:spPr>
-        <p:txBody>
-          <a:bodyPr wrap="square" lIns="0" tIns="0" rIns="0" bIns="0" rtlCol="0" anchor="t"/>
-          <a:lstStyle/>
-          <a:p>
-            <a:pPr indent="0" marL="0">
-              <a:buNone/>
-            </a:pPr>
-            <a:r>
-              <a:rPr lang="en-US" sz="950" dirty="0">
-                <a:solidFill>
-                  <a:srgbClr val="24313F"/>
-                </a:solidFill>
-                <a:latin typeface="Malgun Gothic" pitchFamily="34" charset="0"/>
-                <a:ea typeface="Malgun Gothic" pitchFamily="34" charset="-122"/>
-                <a:cs typeface="Malgun Gothic" pitchFamily="34" charset="-120"/>
-              </a:rPr>
-              <a:t>A: CARLA가 4대 카메라 최근 4프레임을 클라이언트에 전달 (loopback)</a:t>
-            </a:r>
-            <a:endParaRPr lang="en-US" sz="950" dirty="0"/>
-          </a:p>
-        </p:txBody>
-      </p:sp>
-      <p:sp>
-        <p:nvSpPr>
-          <p:cNvPr id="12" name="Shape 9"/>
-          <p:cNvSpPr/>
-          <p:nvPr/>
-        </p:nvSpPr>
-        <p:spPr>
-          <a:xfrm>
-            <a:off x="3178226" y="4238843"/>
-            <a:ext cx="173736" cy="0"/>
-          </a:xfrm>
-          <a:prstGeom prst="line">
-            <a:avLst/>
-          </a:prstGeom>
-          <a:noFill/>
-          <a:ln w="15875">
-            <a:solidFill>
-              <a:srgbClr val="6B7A8C"/>
-            </a:solidFill>
-            <a:prstDash val="solid"/>
-            <a:tailEnd type="triangle"/>
-          </a:ln>
-        </p:spPr>
-      </p:sp>
-      <p:sp>
-        <p:nvSpPr>
-          <p:cNvPr id="13" name="Shape 10"/>
-          <p:cNvSpPr/>
-          <p:nvPr/>
-        </p:nvSpPr>
-        <p:spPr>
-          <a:xfrm>
-            <a:off x="3379394" y="3644483"/>
-            <a:ext cx="2602154" cy="1188720"/>
-          </a:xfrm>
-          <a:prstGeom prst="roundRect">
-            <a:avLst>
-              <a:gd name="adj" fmla="val 6154"/>
-            </a:avLst>
-          </a:prstGeom>
-          <a:solidFill>
-            <a:srgbClr val="F3F5F8"/>
-          </a:solidFill>
-          <a:ln w="9525">
-            <a:solidFill>
-              <a:srgbClr val="2A6FDB"/>
-            </a:solidFill>
-            <a:prstDash val="solid"/>
-          </a:ln>
-        </p:spPr>
-      </p:sp>
-      <p:sp>
-        <p:nvSpPr>
-          <p:cNvPr id="14" name="Shape 11"/>
-          <p:cNvSpPr/>
-          <p:nvPr/>
-        </p:nvSpPr>
-        <p:spPr>
-          <a:xfrm>
-            <a:off x="3489122" y="3754211"/>
-            <a:ext cx="310896" cy="310896"/>
-          </a:xfrm>
-          <a:prstGeom prst="ellipse">
-            <a:avLst/>
-          </a:prstGeom>
-          <a:solidFill>
-            <a:srgbClr val="2A6FDB"/>
-          </a:solidFill>
-          <a:ln w="12700">
-            <a:solidFill>
-              <a:srgbClr val="2A6FDB"/>
-            </a:solidFill>
-            <a:prstDash val="solid"/>
-          </a:ln>
-        </p:spPr>
-      </p:sp>
-      <p:sp>
-        <p:nvSpPr>
-          <p:cNvPr id="15" name="Text 12"/>
-          <p:cNvSpPr txBox="1"/>
-          <p:nvPr/>
-        </p:nvSpPr>
-        <p:spPr>
-          <a:xfrm>
-            <a:off x="3489122" y="3754211"/>
-            <a:ext cx="310896" cy="310896"/>
-          </a:xfrm>
-          <a:prstGeom prst="rect">
-            <a:avLst/>
-          </a:prstGeom>
-          <a:noFill/>
-          <a:ln/>
-        </p:spPr>
-        <p:txBody>
-          <a:bodyPr wrap="square" lIns="0" tIns="0" rIns="0" bIns="0" rtlCol="0" anchor="ctr"/>
-          <a:lstStyle/>
-          <a:p>
-            <a:pPr algn="ctr" indent="0" marL="0">
-              <a:buNone/>
-            </a:pPr>
-            <a:r>
-              <a:rPr lang="en-US" sz="1100" b="1" dirty="0">
-                <a:solidFill>
-                  <a:srgbClr val="FFFFFF"/>
-                </a:solidFill>
-                <a:latin typeface="Malgun Gothic" pitchFamily="34" charset="0"/>
-                <a:ea typeface="Malgun Gothic" pitchFamily="34" charset="-122"/>
-                <a:cs typeface="Malgun Gothic" pitchFamily="34" charset="-120"/>
-              </a:rPr>
-              <a:t>2</a:t>
-            </a:r>
-            <a:endParaRPr lang="en-US" sz="1100" dirty="0"/>
-          </a:p>
-        </p:txBody>
-      </p:sp>
-      <p:sp>
-        <p:nvSpPr>
-          <p:cNvPr id="16" name="Text 13"/>
-          <p:cNvSpPr txBox="1"/>
-          <p:nvPr/>
-        </p:nvSpPr>
-        <p:spPr>
-          <a:xfrm>
-            <a:off x="3854882" y="3735923"/>
-            <a:ext cx="2035226" cy="347472"/>
-          </a:xfrm>
-          <a:prstGeom prst="rect">
-            <a:avLst/>
-          </a:prstGeom>
-          <a:noFill/>
-          <a:ln/>
-        </p:spPr>
-        <p:txBody>
-          <a:bodyPr wrap="square" lIns="0" tIns="0" rIns="0" bIns="0" rtlCol="0" anchor="ctr"/>
-          <a:lstStyle/>
-          <a:p>
-            <a:pPr indent="0" marL="0">
-              <a:buNone/>
-            </a:pPr>
-            <a:r>
-              <a:rPr lang="en-US" sz="1150" b="1" dirty="0">
-                <a:solidFill>
-                  <a:srgbClr val="2A6FDB"/>
-                </a:solidFill>
-                <a:latin typeface="Malgun Gothic" pitchFamily="34" charset="0"/>
-                <a:ea typeface="Malgun Gothic" pitchFamily="34" charset="-122"/>
-                <a:cs typeface="Malgun Gothic" pitchFamily="34" charset="-120"/>
-              </a:rPr>
-              <a:t>인코딩·전송</a:t>
-            </a:r>
-            <a:endParaRPr lang="en-US" sz="1150" dirty="0"/>
-          </a:p>
-        </p:txBody>
-      </p:sp>
-      <p:sp>
-        <p:nvSpPr>
-          <p:cNvPr id="17" name="Text 14"/>
-          <p:cNvSpPr txBox="1"/>
-          <p:nvPr/>
-        </p:nvSpPr>
-        <p:spPr>
-          <a:xfrm>
-            <a:off x="3489122" y="4101683"/>
-            <a:ext cx="2382698" cy="658368"/>
-          </a:xfrm>
-          <a:prstGeom prst="rect">
-            <a:avLst/>
-          </a:prstGeom>
-          <a:noFill/>
-          <a:ln/>
-        </p:spPr>
-        <p:txBody>
-          <a:bodyPr wrap="square" lIns="0" tIns="0" rIns="0" bIns="0" rtlCol="0" anchor="t"/>
-          <a:lstStyle/>
-          <a:p>
-            <a:pPr indent="0" marL="0">
-              <a:buNone/>
-            </a:pPr>
-            <a:r>
-              <a:rPr lang="en-US" sz="950" dirty="0">
-                <a:solidFill>
-                  <a:srgbClr val="24313F"/>
-                </a:solidFill>
-                <a:latin typeface="Malgun Gothic" pitchFamily="34" charset="0"/>
-                <a:ea typeface="Malgun Gothic" pitchFamily="34" charset="-122"/>
-                <a:cs typeface="Malgun Gothic" pitchFamily="34" charset="-120"/>
-              </a:rPr>
-              <a:t>A: JPEG로 압축해 자차 이력·프롬프트와 함께 gRPC 요청</a:t>
-            </a:r>
-            <a:endParaRPr lang="en-US" sz="950" dirty="0"/>
-          </a:p>
-        </p:txBody>
-      </p:sp>
-      <p:sp>
-        <p:nvSpPr>
-          <p:cNvPr id="18" name="Shape 15"/>
-          <p:cNvSpPr/>
-          <p:nvPr/>
-        </p:nvSpPr>
-        <p:spPr>
-          <a:xfrm>
-            <a:off x="6008980" y="4238843"/>
-            <a:ext cx="173736" cy="0"/>
-          </a:xfrm>
-          <a:prstGeom prst="line">
-            <a:avLst/>
-          </a:prstGeom>
-          <a:noFill/>
-          <a:ln w="15875">
-            <a:solidFill>
-              <a:srgbClr val="6B7A8C"/>
-            </a:solidFill>
-            <a:prstDash val="solid"/>
-            <a:tailEnd type="triangle"/>
-          </a:ln>
-        </p:spPr>
-      </p:sp>
-      <p:sp>
-        <p:nvSpPr>
-          <p:cNvPr id="19" name="Shape 16"/>
-          <p:cNvSpPr/>
-          <p:nvPr/>
-        </p:nvSpPr>
-        <p:spPr>
-          <a:xfrm>
-            <a:off x="6210148" y="3644483"/>
-            <a:ext cx="2602154" cy="1188720"/>
-          </a:xfrm>
-          <a:prstGeom prst="roundRect">
-            <a:avLst>
-              <a:gd name="adj" fmla="val 6154"/>
-            </a:avLst>
-          </a:prstGeom>
-          <a:solidFill>
-            <a:srgbClr val="F3F5F8"/>
-          </a:solidFill>
-          <a:ln w="9525">
-            <a:solidFill>
-              <a:srgbClr val="E0762B"/>
-            </a:solidFill>
-            <a:prstDash val="solid"/>
-          </a:ln>
-        </p:spPr>
-      </p:sp>
-      <p:sp>
-        <p:nvSpPr>
-          <p:cNvPr id="20" name="Shape 17"/>
-          <p:cNvSpPr/>
-          <p:nvPr/>
-        </p:nvSpPr>
-        <p:spPr>
-          <a:xfrm>
-            <a:off x="6319876" y="3754211"/>
-            <a:ext cx="310896" cy="310896"/>
-          </a:xfrm>
-          <a:prstGeom prst="ellipse">
-            <a:avLst/>
-          </a:prstGeom>
-          <a:solidFill>
-            <a:srgbClr val="E0762B"/>
-          </a:solidFill>
-          <a:ln w="12700">
-            <a:solidFill>
-              <a:srgbClr val="E0762B"/>
-            </a:solidFill>
-            <a:prstDash val="solid"/>
-          </a:ln>
-        </p:spPr>
-      </p:sp>
-      <p:sp>
-        <p:nvSpPr>
-          <p:cNvPr id="21" name="Text 18"/>
-          <p:cNvSpPr txBox="1"/>
-          <p:nvPr/>
-        </p:nvSpPr>
-        <p:spPr>
-          <a:xfrm>
-            <a:off x="6319876" y="3754211"/>
-            <a:ext cx="310896" cy="310896"/>
-          </a:xfrm>
-          <a:prstGeom prst="rect">
-            <a:avLst/>
-          </a:prstGeom>
-          <a:noFill/>
-          <a:ln/>
-        </p:spPr>
-        <p:txBody>
-          <a:bodyPr wrap="square" lIns="0" tIns="0" rIns="0" bIns="0" rtlCol="0" anchor="ctr"/>
-          <a:lstStyle/>
-          <a:p>
-            <a:pPr algn="ctr" indent="0" marL="0">
-              <a:buNone/>
-            </a:pPr>
-            <a:r>
-              <a:rPr lang="en-US" sz="1100" b="1" dirty="0">
-                <a:solidFill>
-                  <a:srgbClr val="FFFFFF"/>
-                </a:solidFill>
-                <a:latin typeface="Malgun Gothic" pitchFamily="34" charset="0"/>
-                <a:ea typeface="Malgun Gothic" pitchFamily="34" charset="-122"/>
-                <a:cs typeface="Malgun Gothic" pitchFamily="34" charset="-120"/>
-              </a:rPr>
-              <a:t>3</a:t>
-            </a:r>
-            <a:endParaRPr lang="en-US" sz="1100" dirty="0"/>
-          </a:p>
-        </p:txBody>
-      </p:sp>
-      <p:sp>
-        <p:nvSpPr>
-          <p:cNvPr id="22" name="Text 19"/>
-          <p:cNvSpPr txBox="1"/>
-          <p:nvPr/>
-        </p:nvSpPr>
-        <p:spPr>
-          <a:xfrm>
-            <a:off x="6685636" y="3735923"/>
-            <a:ext cx="2035226" cy="347472"/>
-          </a:xfrm>
-          <a:prstGeom prst="rect">
-            <a:avLst/>
-          </a:prstGeom>
-          <a:noFill/>
-          <a:ln/>
-        </p:spPr>
-        <p:txBody>
-          <a:bodyPr wrap="square" lIns="0" tIns="0" rIns="0" bIns="0" rtlCol="0" anchor="ctr"/>
-          <a:lstStyle/>
-          <a:p>
-            <a:pPr indent="0" marL="0">
-              <a:buNone/>
-            </a:pPr>
-            <a:r>
-              <a:rPr lang="en-US" sz="1150" b="1" dirty="0">
+              <a:rPr lang="en-US" sz="1050" b="1" dirty="0">
                 <a:solidFill>
                   <a:srgbClr val="E0762B"/>
                 </a:solidFill>
@@ -4245,283 +3807,36 @@
                 <a:ea typeface="Malgun Gothic" pitchFamily="34" charset="-122"/>
                 <a:cs typeface="Malgun Gothic" pitchFamily="34" charset="-120"/>
               </a:rPr>
-              <a:t>추론·응답</a:t>
-            </a:r>
-            <a:endParaRPr lang="en-US" sz="1150" dirty="0"/>
-          </a:p>
-        </p:txBody>
-      </p:sp>
-      <p:sp>
-        <p:nvSpPr>
-          <p:cNvPr id="23" name="Text 20"/>
-          <p:cNvSpPr txBox="1"/>
-          <p:nvPr/>
-        </p:nvSpPr>
-        <p:spPr>
-          <a:xfrm>
-            <a:off x="6319876" y="4101683"/>
-            <a:ext cx="2382698" cy="658368"/>
-          </a:xfrm>
-          <a:prstGeom prst="rect">
-            <a:avLst/>
-          </a:prstGeom>
-          <a:noFill/>
-          <a:ln/>
-        </p:spPr>
-        <p:txBody>
-          <a:bodyPr wrap="square" lIns="0" tIns="0" rIns="0" bIns="0" rtlCol="0" anchor="t"/>
-          <a:lstStyle/>
-          <a:p>
-            <a:pPr indent="0" marL="0">
-              <a:buNone/>
-            </a:pPr>
-            <a:r>
-              <a:rPr lang="en-US" sz="950" dirty="0">
-                <a:solidFill>
-                  <a:srgbClr val="24313F"/>
-                </a:solidFill>
-                <a:latin typeface="Malgun Gothic" pitchFamily="34" charset="0"/>
-                <a:ea typeface="Malgun Gothic" pitchFamily="34" charset="-122"/>
-                <a:cs typeface="Malgun Gothic" pitchFamily="34" charset="-120"/>
-              </a:rPr>
-              <a:t>B: 디코딩 → Alpamayo 1.5 → 궤적 64점 + CoT를 같은 연결로 회신</a:t>
-            </a:r>
-            <a:endParaRPr lang="en-US" sz="950" dirty="0"/>
-          </a:p>
-        </p:txBody>
-      </p:sp>
-      <p:sp>
-        <p:nvSpPr>
-          <p:cNvPr id="24" name="Shape 21"/>
-          <p:cNvSpPr/>
-          <p:nvPr/>
-        </p:nvSpPr>
-        <p:spPr>
-          <a:xfrm>
-            <a:off x="8839733" y="4238843"/>
-            <a:ext cx="173736" cy="0"/>
-          </a:xfrm>
-          <a:prstGeom prst="line">
-            <a:avLst/>
-          </a:prstGeom>
-          <a:noFill/>
-          <a:ln w="15875">
-            <a:solidFill>
-              <a:srgbClr val="6B7A8C"/>
-            </a:solidFill>
-            <a:prstDash val="solid"/>
-            <a:tailEnd type="triangle"/>
-          </a:ln>
-        </p:spPr>
-      </p:sp>
-      <p:sp>
-        <p:nvSpPr>
-          <p:cNvPr id="25" name="Shape 22"/>
-          <p:cNvSpPr/>
-          <p:nvPr/>
-        </p:nvSpPr>
-        <p:spPr>
-          <a:xfrm>
-            <a:off x="9040901" y="3644483"/>
-            <a:ext cx="2602154" cy="1188720"/>
-          </a:xfrm>
-          <a:prstGeom prst="roundRect">
-            <a:avLst>
-              <a:gd name="adj" fmla="val 6154"/>
-            </a:avLst>
-          </a:prstGeom>
-          <a:solidFill>
-            <a:srgbClr val="F3F5F8"/>
-          </a:solidFill>
-          <a:ln w="9525">
-            <a:solidFill>
-              <a:srgbClr val="2A6FDB"/>
-            </a:solidFill>
-            <a:prstDash val="solid"/>
-          </a:ln>
-        </p:spPr>
-      </p:sp>
-      <p:sp>
-        <p:nvSpPr>
-          <p:cNvPr id="26" name="Shape 23"/>
-          <p:cNvSpPr/>
-          <p:nvPr/>
-        </p:nvSpPr>
-        <p:spPr>
-          <a:xfrm>
-            <a:off x="9150629" y="3754211"/>
-            <a:ext cx="310896" cy="310896"/>
-          </a:xfrm>
-          <a:prstGeom prst="ellipse">
-            <a:avLst/>
-          </a:prstGeom>
-          <a:solidFill>
-            <a:srgbClr val="2A6FDB"/>
-          </a:solidFill>
-          <a:ln w="12700">
-            <a:solidFill>
-              <a:srgbClr val="2A6FDB"/>
-            </a:solidFill>
-            <a:prstDash val="solid"/>
-          </a:ln>
-        </p:spPr>
-      </p:sp>
-      <p:sp>
-        <p:nvSpPr>
-          <p:cNvPr id="27" name="Text 24"/>
-          <p:cNvSpPr txBox="1"/>
-          <p:nvPr/>
-        </p:nvSpPr>
-        <p:spPr>
-          <a:xfrm>
-            <a:off x="9150629" y="3754211"/>
-            <a:ext cx="310896" cy="310896"/>
-          </a:xfrm>
-          <a:prstGeom prst="rect">
-            <a:avLst/>
-          </a:prstGeom>
-          <a:noFill/>
-          <a:ln/>
-        </p:spPr>
-        <p:txBody>
-          <a:bodyPr wrap="square" lIns="0" tIns="0" rIns="0" bIns="0" rtlCol="0" anchor="ctr"/>
-          <a:lstStyle/>
-          <a:p>
-            <a:pPr algn="ctr" indent="0" marL="0">
-              <a:buNone/>
-            </a:pPr>
-            <a:r>
-              <a:rPr lang="en-US" sz="1100" b="1" dirty="0">
-                <a:solidFill>
-                  <a:srgbClr val="FFFFFF"/>
-                </a:solidFill>
-                <a:latin typeface="Malgun Gothic" pitchFamily="34" charset="0"/>
-                <a:ea typeface="Malgun Gothic" pitchFamily="34" charset="-122"/>
-                <a:cs typeface="Malgun Gothic" pitchFamily="34" charset="-120"/>
-              </a:rPr>
-              <a:t>4</a:t>
-            </a:r>
-            <a:endParaRPr lang="en-US" sz="1100" dirty="0"/>
-          </a:p>
-        </p:txBody>
-      </p:sp>
-      <p:sp>
-        <p:nvSpPr>
-          <p:cNvPr id="28" name="Text 25"/>
-          <p:cNvSpPr txBox="1"/>
-          <p:nvPr/>
-        </p:nvSpPr>
-        <p:spPr>
-          <a:xfrm>
-            <a:off x="9516389" y="3735923"/>
-            <a:ext cx="2035226" cy="347472"/>
-          </a:xfrm>
-          <a:prstGeom prst="rect">
-            <a:avLst/>
-          </a:prstGeom>
-          <a:noFill/>
-          <a:ln/>
-        </p:spPr>
-        <p:txBody>
-          <a:bodyPr wrap="square" lIns="0" tIns="0" rIns="0" bIns="0" rtlCol="0" anchor="ctr"/>
-          <a:lstStyle/>
-          <a:p>
-            <a:pPr indent="0" marL="0">
-              <a:buNone/>
-            </a:pPr>
-            <a:r>
-              <a:rPr lang="en-US" sz="1150" b="1" dirty="0">
-                <a:solidFill>
-                  <a:srgbClr val="2A6FDB"/>
-                </a:solidFill>
-                <a:latin typeface="Malgun Gothic" pitchFamily="34" charset="0"/>
-                <a:ea typeface="Malgun Gothic" pitchFamily="34" charset="-122"/>
-                <a:cs typeface="Malgun Gothic" pitchFamily="34" charset="-120"/>
-              </a:rPr>
-              <a:t>PID 제어</a:t>
-            </a:r>
-            <a:endParaRPr lang="en-US" sz="1150" dirty="0"/>
-          </a:p>
-        </p:txBody>
-      </p:sp>
-      <p:sp>
-        <p:nvSpPr>
-          <p:cNvPr id="29" name="Text 26"/>
-          <p:cNvSpPr txBox="1"/>
-          <p:nvPr/>
-        </p:nvSpPr>
-        <p:spPr>
-          <a:xfrm>
-            <a:off x="9150629" y="4101683"/>
-            <a:ext cx="2382698" cy="658368"/>
-          </a:xfrm>
-          <a:prstGeom prst="rect">
-            <a:avLst/>
-          </a:prstGeom>
-          <a:noFill/>
-          <a:ln/>
-        </p:spPr>
-        <p:txBody>
-          <a:bodyPr wrap="square" lIns="0" tIns="0" rIns="0" bIns="0" rtlCol="0" anchor="t"/>
-          <a:lstStyle/>
-          <a:p>
-            <a:pPr indent="0" marL="0">
-              <a:buNone/>
-            </a:pPr>
-            <a:r>
-              <a:rPr lang="en-US" sz="950" dirty="0">
-                <a:solidFill>
-                  <a:srgbClr val="24313F"/>
-                </a:solidFill>
-                <a:latin typeface="Malgun Gothic" pitchFamily="34" charset="0"/>
-                <a:ea typeface="Malgun Gothic" pitchFamily="34" charset="-122"/>
-                <a:cs typeface="Malgun Gothic" pitchFamily="34" charset="-120"/>
-              </a:rPr>
-              <a:t>A: 궤적을 따라 조향·가감속 → CARLA tick → 다음 장면. 6초 넘게 오래된 궤적은 폐기</a:t>
-            </a:r>
-            <a:endParaRPr lang="en-US" sz="950" dirty="0"/>
-          </a:p>
-        </p:txBody>
-      </p:sp>
-      <p:sp>
-        <p:nvSpPr>
-          <p:cNvPr id="30" name="Text 27"/>
-          <p:cNvSpPr txBox="1"/>
-          <p:nvPr/>
-        </p:nvSpPr>
-        <p:spPr>
-          <a:xfrm>
-            <a:off x="548640" y="4970363"/>
-            <a:ext cx="11094415" cy="320040"/>
-          </a:xfrm>
-          <a:prstGeom prst="rect">
-            <a:avLst/>
-          </a:prstGeom>
-          <a:noFill/>
-          <a:ln/>
-        </p:spPr>
-        <p:txBody>
-          <a:bodyPr wrap="square" lIns="0" tIns="0" rIns="0" bIns="0" rtlCol="0" anchor="t"/>
-          <a:lstStyle/>
-          <a:p>
-            <a:pPr indent="0" marL="0">
-              <a:buNone/>
-            </a:pPr>
-            <a:r>
-              <a:rPr lang="en-US" sz="1000" dirty="0">
-                <a:solidFill>
-                  <a:srgbClr val="6B7A8C"/>
-                </a:solidFill>
-                <a:latin typeface="Malgun Gothic" pitchFamily="34" charset="0"/>
-                <a:ea typeface="Malgun Gothic" pitchFamily="34" charset="-122"/>
-                <a:cs typeface="Malgun Gothic" pitchFamily="34" charset="-120"/>
-              </a:rPr>
-              <a:t>점선 = 운영자 SSH/DCV 접속과 파일 복사(rsync/scp). 실시간 경로는 실선뿐이다.</a:t>
-            </a:r>
-            <a:endParaRPr lang="en-US" sz="1000" dirty="0"/>
-          </a:p>
-        </p:txBody>
-      </p:sp>
+              <a:t>분리 후 (이번 데모): 어댑터가 gRPC 클라이언트로 바뀌고, 모델은 B의 alpamayo_server.py 프로세스에 상주. ② 요청 / ③ 응답이 VPC 안 TCP를 건넌다</a:t>
+            </a:r>
+            <a:endParaRPr lang="en-US" sz="1050" dirty="0"/>
+          </a:p>
+        </p:txBody>
+      </p:sp>
+      <p:pic>
+        <p:nvPicPr>
+          <p:cNvPr id="9" name="Image 1" descr="split-deployment.png">    </p:cNvPr>
+          <p:cNvPicPr>
+            <a:picLocks noChangeAspect="1"/>
+          </p:cNvPicPr>
+          <p:nvPr/>
+        </p:nvPicPr>
+        <p:blipFill>
+          <a:blip r:embed="rId2"/>
+          <a:stretch>
+            <a:fillRect/>
+          </a:stretch>
+        </p:blipFill>
+        <p:spPr>
+          <a:xfrm>
+            <a:off x="1112368" y="4538433"/>
+            <a:ext cx="9966960" cy="1919657"/>
+          </a:xfrm>
+          <a:prstGeom prst="rect">
+            <a:avLst/>
+          </a:prstGeom>
+        </p:spPr>
+      </p:pic>
     </p:spTree>
   </p:cSld>
   <p:clrMapOvr>

--- a/docs/distributed/demo-overview-short.pptx
+++ b/docs/distributed/demo-overview-short.pptx
@@ -1506,8 +1506,8 @@
         </p:nvSpPr>
         <p:spPr>
           <a:xfrm>
-            <a:off x="548640" y="2011680"/>
-            <a:ext cx="11094415" cy="822960"/>
+            <a:off x="548640" y="1188720"/>
+            <a:ext cx="6675120" cy="1737360"/>
           </a:xfrm>
           <a:prstGeom prst="rect">
             <a:avLst/>
@@ -1523,7 +1523,7 @@
               <a:buNone/>
             </a:pPr>
             <a:r>
-              <a:rPr lang="en-US" sz="3400" b="1" dirty="0">
+              <a:rPr lang="en-US" sz="3200" b="1" dirty="0">
                 <a:solidFill>
                   <a:srgbClr val="FFFFFF"/>
                 </a:solidFill>
@@ -1531,9 +1531,9 @@
                 <a:ea typeface="Malgun Gothic" pitchFamily="34" charset="-122"/>
                 <a:cs typeface="Malgun Gothic" pitchFamily="34" charset="-120"/>
               </a:rPr>
-              <a:t>CARLA ↔ Alpamayo 물리 분리 closed-loop 데모</a:t>
-            </a:r>
-            <a:endParaRPr lang="en-US" sz="3400" dirty="0"/>
+              <a:t>CARLA와 Alpamayo를 서로 다른 인스턴스에서 돌리는 closed-loop 자율주행 데모</a:t>
+            </a:r>
+            <a:endParaRPr lang="en-US" sz="3200" dirty="0"/>
           </a:p>
         </p:txBody>
       </p:sp>
@@ -1545,8 +1545,8 @@
         </p:nvSpPr>
         <p:spPr>
           <a:xfrm>
-            <a:off x="548640" y="2880360"/>
-            <a:ext cx="11094415" cy="457200"/>
+            <a:off x="548640" y="3017520"/>
+            <a:ext cx="6675120" cy="822960"/>
           </a:xfrm>
           <a:prstGeom prst="rect">
             <a:avLst/>
@@ -1562,7 +1562,7 @@
               <a:buNone/>
             </a:pPr>
             <a:r>
-              <a:rPr lang="en-US" sz="1800" dirty="0">
+              <a:rPr lang="en-US" sz="1500" dirty="0">
                 <a:solidFill>
                   <a:srgbClr val="CADCFC"/>
                 </a:solidFill>
@@ -1570,9 +1570,9 @@
                 <a:ea typeface="Malgun Gothic" pitchFamily="34" charset="-122"/>
                 <a:cs typeface="Malgun Gothic" pitchFamily="34" charset="-120"/>
               </a:rPr>
-              <a:t>분산 환경 Carlamayo: open-loop · closed-loop · navigation(CFG) · VQA</a:t>
-            </a:r>
-            <a:endParaRPr lang="en-US" sz="1800" dirty="0"/>
+              <a:t>시뮬레이터는 x86 인스턴스, 모델은 GPU 인스턴스. 둘을 gRPC로 잇고 open-loop · closed-loop · navigation(CFG) · VQA를 시연한다</a:t>
+            </a:r>
+            <a:endParaRPr lang="en-US" sz="1500" dirty="0"/>
           </a:p>
         </p:txBody>
       </p:sp>
@@ -1584,18 +1584,321 @@
         </p:nvSpPr>
         <p:spPr>
           <a:xfrm>
-            <a:off x="548640" y="3931920"/>
-            <a:ext cx="1737360" cy="548640"/>
+            <a:off x="548640" y="4069080"/>
+            <a:ext cx="1197864" cy="384048"/>
           </a:xfrm>
           <a:prstGeom prst="roundRect">
             <a:avLst>
-              <a:gd name="adj" fmla="val 13333"/>
+              <a:gd name="adj" fmla="val 50000"/>
             </a:avLst>
           </a:prstGeom>
           <a:solidFill>
-            <a:srgbClr val="2A6FDB"/>
+            <a:srgbClr val="2A3B55"/>
           </a:solidFill>
           <a:ln w="12700">
+            <a:solidFill>
+              <a:srgbClr val="4C6A9A"/>
+            </a:solidFill>
+            <a:prstDash val="solid"/>
+          </a:ln>
+        </p:spPr>
+      </p:sp>
+      <p:sp>
+        <p:nvSpPr>
+          <p:cNvPr id="5" name="Text 3"/>
+          <p:cNvSpPr txBox="1"/>
+          <p:nvPr/>
+        </p:nvSpPr>
+        <p:spPr>
+          <a:xfrm>
+            <a:off x="548640" y="4069080"/>
+            <a:ext cx="1197864" cy="384048"/>
+          </a:xfrm>
+          <a:prstGeom prst="rect">
+            <a:avLst/>
+          </a:prstGeom>
+          <a:noFill/>
+          <a:ln/>
+        </p:spPr>
+        <p:txBody>
+          <a:bodyPr wrap="square" lIns="0" tIns="0" rIns="0" bIns="0" rtlCol="0" anchor="ctr"/>
+          <a:lstStyle/>
+          <a:p>
+            <a:pPr algn="ctr" indent="0" marL="0">
+              <a:buNone/>
+            </a:pPr>
+            <a:r>
+              <a:rPr lang="en-US" sz="1100" dirty="0">
+                <a:solidFill>
+                  <a:srgbClr val="FFFFFF"/>
+                </a:solidFill>
+                <a:latin typeface="Malgun Gothic" pitchFamily="34" charset="0"/>
+                <a:ea typeface="Malgun Gothic" pitchFamily="34" charset="-122"/>
+                <a:cs typeface="Malgun Gothic" pitchFamily="34" charset="-120"/>
+              </a:rPr>
+              <a:t>open-loop</a:t>
+            </a:r>
+            <a:endParaRPr lang="en-US" sz="1100" dirty="0"/>
+          </a:p>
+        </p:txBody>
+      </p:sp>
+      <p:sp>
+        <p:nvSpPr>
+          <p:cNvPr id="6" name="Shape 4"/>
+          <p:cNvSpPr/>
+          <p:nvPr/>
+        </p:nvSpPr>
+        <p:spPr>
+          <a:xfrm>
+            <a:off x="1883664" y="4069080"/>
+            <a:ext cx="1399032" cy="384048"/>
+          </a:xfrm>
+          <a:prstGeom prst="roundRect">
+            <a:avLst>
+              <a:gd name="adj" fmla="val 50000"/>
+            </a:avLst>
+          </a:prstGeom>
+          <a:solidFill>
+            <a:srgbClr val="2A3B55"/>
+          </a:solidFill>
+          <a:ln w="12700">
+            <a:solidFill>
+              <a:srgbClr val="4C6A9A"/>
+            </a:solidFill>
+            <a:prstDash val="solid"/>
+          </a:ln>
+        </p:spPr>
+      </p:sp>
+      <p:sp>
+        <p:nvSpPr>
+          <p:cNvPr id="7" name="Text 5"/>
+          <p:cNvSpPr txBox="1"/>
+          <p:nvPr/>
+        </p:nvSpPr>
+        <p:spPr>
+          <a:xfrm>
+            <a:off x="1883664" y="4069080"/>
+            <a:ext cx="1399032" cy="384048"/>
+          </a:xfrm>
+          <a:prstGeom prst="rect">
+            <a:avLst/>
+          </a:prstGeom>
+          <a:noFill/>
+          <a:ln/>
+        </p:spPr>
+        <p:txBody>
+          <a:bodyPr wrap="square" lIns="0" tIns="0" rIns="0" bIns="0" rtlCol="0" anchor="ctr"/>
+          <a:lstStyle/>
+          <a:p>
+            <a:pPr algn="ctr" indent="0" marL="0">
+              <a:buNone/>
+            </a:pPr>
+            <a:r>
+              <a:rPr lang="en-US" sz="1100" dirty="0">
+                <a:solidFill>
+                  <a:srgbClr val="FFFFFF"/>
+                </a:solidFill>
+                <a:latin typeface="Malgun Gothic" pitchFamily="34" charset="0"/>
+                <a:ea typeface="Malgun Gothic" pitchFamily="34" charset="-122"/>
+                <a:cs typeface="Malgun Gothic" pitchFamily="34" charset="-120"/>
+              </a:rPr>
+              <a:t>closed-loop</a:t>
+            </a:r>
+            <a:endParaRPr lang="en-US" sz="1100" dirty="0"/>
+          </a:p>
+        </p:txBody>
+      </p:sp>
+      <p:sp>
+        <p:nvSpPr>
+          <p:cNvPr id="8" name="Shape 6"/>
+          <p:cNvSpPr/>
+          <p:nvPr/>
+        </p:nvSpPr>
+        <p:spPr>
+          <a:xfrm>
+            <a:off x="3419856" y="4069080"/>
+            <a:ext cx="1901952" cy="384048"/>
+          </a:xfrm>
+          <a:prstGeom prst="roundRect">
+            <a:avLst>
+              <a:gd name="adj" fmla="val 50000"/>
+            </a:avLst>
+          </a:prstGeom>
+          <a:solidFill>
+            <a:srgbClr val="2A3B55"/>
+          </a:solidFill>
+          <a:ln w="12700">
+            <a:solidFill>
+              <a:srgbClr val="4C6A9A"/>
+            </a:solidFill>
+            <a:prstDash val="solid"/>
+          </a:ln>
+        </p:spPr>
+      </p:sp>
+      <p:sp>
+        <p:nvSpPr>
+          <p:cNvPr id="9" name="Text 7"/>
+          <p:cNvSpPr txBox="1"/>
+          <p:nvPr/>
+        </p:nvSpPr>
+        <p:spPr>
+          <a:xfrm>
+            <a:off x="3419856" y="4069080"/>
+            <a:ext cx="1901952" cy="384048"/>
+          </a:xfrm>
+          <a:prstGeom prst="rect">
+            <a:avLst/>
+          </a:prstGeom>
+          <a:noFill/>
+          <a:ln/>
+        </p:spPr>
+        <p:txBody>
+          <a:bodyPr wrap="square" lIns="0" tIns="0" rIns="0" bIns="0" rtlCol="0" anchor="ctr"/>
+          <a:lstStyle/>
+          <a:p>
+            <a:pPr algn="ctr" indent="0" marL="0">
+              <a:buNone/>
+            </a:pPr>
+            <a:r>
+              <a:rPr lang="en-US" sz="1100" dirty="0">
+                <a:solidFill>
+                  <a:srgbClr val="FFFFFF"/>
+                </a:solidFill>
+                <a:latin typeface="Malgun Gothic" pitchFamily="34" charset="0"/>
+                <a:ea typeface="Malgun Gothic" pitchFamily="34" charset="-122"/>
+                <a:cs typeface="Malgun Gothic" pitchFamily="34" charset="-120"/>
+              </a:rPr>
+              <a:t>navigation (CFG)</a:t>
+            </a:r>
+            <a:endParaRPr lang="en-US" sz="1100" dirty="0"/>
+          </a:p>
+        </p:txBody>
+      </p:sp>
+      <p:sp>
+        <p:nvSpPr>
+          <p:cNvPr id="10" name="Shape 8"/>
+          <p:cNvSpPr/>
+          <p:nvPr/>
+        </p:nvSpPr>
+        <p:spPr>
+          <a:xfrm>
+            <a:off x="5458968" y="4069080"/>
+            <a:ext cx="594360" cy="384048"/>
+          </a:xfrm>
+          <a:prstGeom prst="roundRect">
+            <a:avLst>
+              <a:gd name="adj" fmla="val 50000"/>
+            </a:avLst>
+          </a:prstGeom>
+          <a:solidFill>
+            <a:srgbClr val="2A3B55"/>
+          </a:solidFill>
+          <a:ln w="12700">
+            <a:solidFill>
+              <a:srgbClr val="4C6A9A"/>
+            </a:solidFill>
+            <a:prstDash val="solid"/>
+          </a:ln>
+        </p:spPr>
+      </p:sp>
+      <p:sp>
+        <p:nvSpPr>
+          <p:cNvPr id="11" name="Text 9"/>
+          <p:cNvSpPr txBox="1"/>
+          <p:nvPr/>
+        </p:nvSpPr>
+        <p:spPr>
+          <a:xfrm>
+            <a:off x="5458968" y="4069080"/>
+            <a:ext cx="594360" cy="384048"/>
+          </a:xfrm>
+          <a:prstGeom prst="rect">
+            <a:avLst/>
+          </a:prstGeom>
+          <a:noFill/>
+          <a:ln/>
+        </p:spPr>
+        <p:txBody>
+          <a:bodyPr wrap="square" lIns="0" tIns="0" rIns="0" bIns="0" rtlCol="0" anchor="ctr"/>
+          <a:lstStyle/>
+          <a:p>
+            <a:pPr algn="ctr" indent="0" marL="0">
+              <a:buNone/>
+            </a:pPr>
+            <a:r>
+              <a:rPr lang="en-US" sz="1100" dirty="0">
+                <a:solidFill>
+                  <a:srgbClr val="FFFFFF"/>
+                </a:solidFill>
+                <a:latin typeface="Malgun Gothic" pitchFamily="34" charset="0"/>
+                <a:ea typeface="Malgun Gothic" pitchFamily="34" charset="-122"/>
+                <a:cs typeface="Malgun Gothic" pitchFamily="34" charset="-120"/>
+              </a:rPr>
+              <a:t>VQA</a:t>
+            </a:r>
+            <a:endParaRPr lang="en-US" sz="1100" dirty="0"/>
+          </a:p>
+        </p:txBody>
+      </p:sp>
+      <p:sp>
+        <p:nvSpPr>
+          <p:cNvPr id="12" name="Text 10"/>
+          <p:cNvSpPr txBox="1"/>
+          <p:nvPr/>
+        </p:nvSpPr>
+        <p:spPr>
+          <a:xfrm>
+            <a:off x="548640" y="5806440"/>
+            <a:ext cx="6675120" cy="365760"/>
+          </a:xfrm>
+          <a:prstGeom prst="rect">
+            <a:avLst/>
+          </a:prstGeom>
+          <a:noFill/>
+          <a:ln/>
+        </p:spPr>
+        <p:txBody>
+          <a:bodyPr wrap="square" lIns="0" tIns="0" rIns="0" bIns="0" rtlCol="0" anchor="t"/>
+          <a:lstStyle/>
+          <a:p>
+            <a:pPr indent="0" marL="0">
+              <a:buNone/>
+            </a:pPr>
+            <a:r>
+              <a:rPr lang="en-US" sz="1200" dirty="0">
+                <a:solidFill>
+                  <a:srgbClr val="CADCFC"/>
+                </a:solidFill>
+                <a:latin typeface="Malgun Gothic" pitchFamily="34" charset="0"/>
+                <a:ea typeface="Malgun Gothic" pitchFamily="34" charset="-122"/>
+                <a:cs typeface="Malgun Gothic" pitchFamily="34" charset="-120"/>
+              </a:rPr>
+              <a:t>2026-10-01   ·   발표자: ____________</a:t>
+            </a:r>
+            <a:endParaRPr lang="en-US" sz="1200" dirty="0"/>
+          </a:p>
+        </p:txBody>
+      </p:sp>
+      <p:sp>
+        <p:nvSpPr>
+          <p:cNvPr id="13" name="Shape 11"/>
+          <p:cNvSpPr/>
+          <p:nvPr/>
+        </p:nvSpPr>
+        <p:spPr>
+          <a:xfrm>
+            <a:off x="7315200" y="1554480"/>
+            <a:ext cx="1920240" cy="3291840"/>
+          </a:xfrm>
+          <a:prstGeom prst="roundRect">
+            <a:avLst>
+              <a:gd name="adj" fmla="val 4762"/>
+            </a:avLst>
+          </a:prstGeom>
+          <a:solidFill>
+            <a:srgbClr val="243650"/>
+          </a:solidFill>
+          <a:ln w="19050">
             <a:solidFill>
               <a:srgbClr val="2A6FDB"/>
             </a:solidFill>
@@ -1605,14 +1908,14 @@
       </p:sp>
       <p:sp>
         <p:nvSpPr>
-          <p:cNvPr id="5" name="Text 3"/>
-          <p:cNvSpPr txBox="1"/>
-          <p:nvPr/>
-        </p:nvSpPr>
-        <p:spPr>
-          <a:xfrm>
-            <a:off x="548640" y="3931920"/>
-            <a:ext cx="1737360" cy="548640"/>
+          <p:cNvPr id="14" name="Text 12"/>
+          <p:cNvSpPr txBox="1"/>
+          <p:nvPr/>
+        </p:nvSpPr>
+        <p:spPr>
+          <a:xfrm>
+            <a:off x="7424928" y="1664208"/>
+            <a:ext cx="1700784" cy="457200"/>
           </a:xfrm>
           <a:prstGeom prst="rect">
             <a:avLst/>
@@ -1624,19 +1927,19 @@
           <a:bodyPr wrap="square" lIns="0" tIns="0" rIns="0" bIns="0" rtlCol="0" anchor="ctr"/>
           <a:lstStyle/>
           <a:p>
-            <a:pPr algn="ctr" indent="0" marL="0">
+            <a:pPr indent="0" marL="0">
               <a:buNone/>
             </a:pPr>
             <a:r>
               <a:rPr lang="en-US" sz="1200" b="1" dirty="0">
                 <a:solidFill>
-                  <a:srgbClr val="FFFFFF"/>
-                </a:solidFill>
-                <a:latin typeface="Malgun Gothic" pitchFamily="34" charset="0"/>
-                <a:ea typeface="Malgun Gothic" pitchFamily="34" charset="-122"/>
-                <a:cs typeface="Malgun Gothic" pitchFamily="34" charset="-120"/>
-              </a:rPr>
-              <a:t>CARLA (x86)</a:t>
+                  <a:srgbClr val="2A6FDB"/>
+                </a:solidFill>
+                <a:latin typeface="Malgun Gothic" pitchFamily="34" charset="0"/>
+                <a:ea typeface="Malgun Gothic" pitchFamily="34" charset="-122"/>
+                <a:cs typeface="Malgun Gothic" pitchFamily="34" charset="-120"/>
+              </a:rPr>
+              <a:t>A · 시뮬레이션</a:t>
             </a:r>
             <a:endParaRPr lang="en-US" sz="1200" dirty="0"/>
           </a:p>
@@ -1644,14 +1947,578 @@
       </p:sp>
       <p:sp>
         <p:nvSpPr>
-          <p:cNvPr id="6" name="Shape 4"/>
+          <p:cNvPr id="15" name="Shape 13"/>
           <p:cNvSpPr/>
           <p:nvPr/>
         </p:nvSpPr>
         <p:spPr>
           <a:xfrm>
-            <a:off x="2423160" y="4206240"/>
-            <a:ext cx="1371600" cy="0"/>
+            <a:off x="7452360" y="2240280"/>
+            <a:ext cx="1645920" cy="731520"/>
+          </a:xfrm>
+          <a:prstGeom prst="roundRect">
+            <a:avLst>
+              <a:gd name="adj" fmla="val 7500"/>
+            </a:avLst>
+          </a:prstGeom>
+          <a:solidFill>
+            <a:srgbClr val="2F4566"/>
+          </a:solidFill>
+          <a:ln w="12700">
+            <a:solidFill>
+              <a:srgbClr val="2F4566"/>
+            </a:solidFill>
+            <a:prstDash val="solid"/>
+          </a:ln>
+        </p:spPr>
+      </p:sp>
+      <p:sp>
+        <p:nvSpPr>
+          <p:cNvPr id="16" name="Text 14"/>
+          <p:cNvSpPr txBox="1"/>
+          <p:nvPr/>
+        </p:nvSpPr>
+        <p:spPr>
+          <a:xfrm>
+            <a:off x="7516368" y="2240280"/>
+            <a:ext cx="1517904" cy="731520"/>
+          </a:xfrm>
+          <a:prstGeom prst="rect">
+            <a:avLst/>
+          </a:prstGeom>
+          <a:noFill/>
+          <a:ln/>
+        </p:spPr>
+        <p:txBody>
+          <a:bodyPr wrap="square" lIns="0" tIns="0" rIns="0" bIns="0" rtlCol="0" anchor="ctr"/>
+          <a:lstStyle/>
+          <a:p>
+            <a:pPr indent="0" marL="0">
+              <a:buNone/>
+            </a:pPr>
+            <a:r>
+              <a:rPr lang="en-US" sz="950" dirty="0">
+                <a:solidFill>
+                  <a:srgbClr val="E6EDF7"/>
+                </a:solidFill>
+                <a:latin typeface="Malgun Gothic" pitchFamily="34" charset="0"/>
+                <a:ea typeface="Malgun Gothic" pitchFamily="34" charset="-122"/>
+                <a:cs typeface="Malgun Gothic" pitchFamily="34" charset="-120"/>
+              </a:rPr>
+              <a:t>CARLA 0.9.16 서버</a:t>
+            </a:r>
+            <a:endParaRPr lang="en-US" sz="950" dirty="0"/>
+          </a:p>
+          <a:p>
+            <a:pPr indent="0" marL="0">
+              <a:buNone/>
+            </a:pPr>
+            <a:r>
+              <a:rPr lang="en-US" sz="950" dirty="0">
+                <a:solidFill>
+                  <a:srgbClr val="E6EDF7"/>
+                </a:solidFill>
+                <a:latin typeface="Malgun Gothic" pitchFamily="34" charset="0"/>
+                <a:ea typeface="Malgun Gothic" pitchFamily="34" charset="-122"/>
+                <a:cs typeface="Malgun Gothic" pitchFamily="34" charset="-120"/>
+              </a:rPr>
+              <a:t>carlamayo.py 루프·PID·UI</a:t>
+            </a:r>
+            <a:endParaRPr lang="en-US" sz="950" dirty="0"/>
+          </a:p>
+        </p:txBody>
+      </p:sp>
+      <p:sp>
+        <p:nvSpPr>
+          <p:cNvPr id="17" name="Shape 15"/>
+          <p:cNvSpPr/>
+          <p:nvPr/>
+        </p:nvSpPr>
+        <p:spPr>
+          <a:xfrm>
+            <a:off x="7452360" y="3081528"/>
+            <a:ext cx="1645920" cy="731520"/>
+          </a:xfrm>
+          <a:prstGeom prst="roundRect">
+            <a:avLst>
+              <a:gd name="adj" fmla="val 7500"/>
+            </a:avLst>
+          </a:prstGeom>
+          <a:solidFill>
+            <a:srgbClr val="2F4566"/>
+          </a:solidFill>
+          <a:ln w="12700">
+            <a:solidFill>
+              <a:srgbClr val="2F4566"/>
+            </a:solidFill>
+            <a:prstDash val="solid"/>
+          </a:ln>
+        </p:spPr>
+      </p:sp>
+      <p:sp>
+        <p:nvSpPr>
+          <p:cNvPr id="18" name="Text 16"/>
+          <p:cNvSpPr txBox="1"/>
+          <p:nvPr/>
+        </p:nvSpPr>
+        <p:spPr>
+          <a:xfrm>
+            <a:off x="7516368" y="3081528"/>
+            <a:ext cx="1517904" cy="731520"/>
+          </a:xfrm>
+          <a:prstGeom prst="rect">
+            <a:avLst/>
+          </a:prstGeom>
+          <a:noFill/>
+          <a:ln/>
+        </p:spPr>
+        <p:txBody>
+          <a:bodyPr wrap="square" lIns="0" tIns="0" rIns="0" bIns="0" rtlCol="0" anchor="ctr"/>
+          <a:lstStyle/>
+          <a:p>
+            <a:pPr indent="0" marL="0">
+              <a:buNone/>
+            </a:pPr>
+            <a:r>
+              <a:rPr lang="en-US" sz="950" dirty="0">
+                <a:solidFill>
+                  <a:srgbClr val="E6EDF7"/>
+                </a:solidFill>
+                <a:latin typeface="Malgun Gothic" pitchFamily="34" charset="0"/>
+                <a:ea typeface="Malgun Gothic" pitchFamily="34" charset="-122"/>
+                <a:cs typeface="Malgun Gothic" pitchFamily="34" charset="-120"/>
+              </a:rPr>
+              <a:t>Python 3.10 (torch 없음)</a:t>
+            </a:r>
+            <a:endParaRPr lang="en-US" sz="950" dirty="0"/>
+          </a:p>
+          <a:p>
+            <a:pPr indent="0" marL="0">
+              <a:buNone/>
+            </a:pPr>
+            <a:r>
+              <a:rPr lang="en-US" sz="950" dirty="0">
+                <a:solidFill>
+                  <a:srgbClr val="E6EDF7"/>
+                </a:solidFill>
+                <a:latin typeface="Malgun Gothic" pitchFamily="34" charset="0"/>
+                <a:ea typeface="Malgun Gothic" pitchFamily="34" charset="-122"/>
+                <a:cs typeface="Malgun Gothic" pitchFamily="34" charset="-120"/>
+              </a:rPr>
+              <a:t>Unreal Engine 4</a:t>
+            </a:r>
+            <a:endParaRPr lang="en-US" sz="950" dirty="0"/>
+          </a:p>
+        </p:txBody>
+      </p:sp>
+      <p:sp>
+        <p:nvSpPr>
+          <p:cNvPr id="19" name="Shape 17"/>
+          <p:cNvSpPr/>
+          <p:nvPr/>
+        </p:nvSpPr>
+        <p:spPr>
+          <a:xfrm>
+            <a:off x="7452360" y="3922776"/>
+            <a:ext cx="1645920" cy="731520"/>
+          </a:xfrm>
+          <a:prstGeom prst="roundRect">
+            <a:avLst>
+              <a:gd name="adj" fmla="val 7500"/>
+            </a:avLst>
+          </a:prstGeom>
+          <a:solidFill>
+            <a:srgbClr val="2F4566"/>
+          </a:solidFill>
+          <a:ln w="12700">
+            <a:solidFill>
+              <a:srgbClr val="2F4566"/>
+            </a:solidFill>
+            <a:prstDash val="solid"/>
+          </a:ln>
+        </p:spPr>
+      </p:sp>
+      <p:sp>
+        <p:nvSpPr>
+          <p:cNvPr id="20" name="Text 18"/>
+          <p:cNvSpPr txBox="1"/>
+          <p:nvPr/>
+        </p:nvSpPr>
+        <p:spPr>
+          <a:xfrm>
+            <a:off x="7516368" y="3922776"/>
+            <a:ext cx="1517904" cy="731520"/>
+          </a:xfrm>
+          <a:prstGeom prst="rect">
+            <a:avLst/>
+          </a:prstGeom>
+          <a:noFill/>
+          <a:ln/>
+        </p:spPr>
+        <p:txBody>
+          <a:bodyPr wrap="square" lIns="0" tIns="0" rIns="0" bIns="0" rtlCol="0" anchor="ctr"/>
+          <a:lstStyle/>
+          <a:p>
+            <a:pPr indent="0" marL="0">
+              <a:buNone/>
+            </a:pPr>
+            <a:r>
+              <a:rPr lang="en-US" sz="950" dirty="0">
+                <a:solidFill>
+                  <a:srgbClr val="E6EDF7"/>
+                </a:solidFill>
+                <a:latin typeface="Malgun Gothic" pitchFamily="34" charset="0"/>
+                <a:ea typeface="Malgun Gothic" pitchFamily="34" charset="-122"/>
+                <a:cs typeface="Malgun Gothic" pitchFamily="34" charset="-120"/>
+              </a:rPr>
+              <a:t>g5.2xlarge · x86</a:t>
+            </a:r>
+            <a:endParaRPr lang="en-US" sz="950" dirty="0"/>
+          </a:p>
+          <a:p>
+            <a:pPr indent="0" marL="0">
+              <a:buNone/>
+            </a:pPr>
+            <a:r>
+              <a:rPr lang="en-US" sz="950" dirty="0">
+                <a:solidFill>
+                  <a:srgbClr val="E6EDF7"/>
+                </a:solidFill>
+                <a:latin typeface="Malgun Gothic" pitchFamily="34" charset="0"/>
+                <a:ea typeface="Malgun Gothic" pitchFamily="34" charset="-122"/>
+                <a:cs typeface="Malgun Gothic" pitchFamily="34" charset="-120"/>
+              </a:rPr>
+              <a:t>A10G 24 GB</a:t>
+            </a:r>
+            <a:endParaRPr lang="en-US" sz="950" dirty="0"/>
+          </a:p>
+        </p:txBody>
+      </p:sp>
+      <p:sp>
+        <p:nvSpPr>
+          <p:cNvPr id="21" name="Shape 19"/>
+          <p:cNvSpPr/>
+          <p:nvPr/>
+        </p:nvSpPr>
+        <p:spPr>
+          <a:xfrm>
+            <a:off x="10012680" y="1554480"/>
+            <a:ext cx="1920240" cy="3291840"/>
+          </a:xfrm>
+          <a:prstGeom prst="roundRect">
+            <a:avLst>
+              <a:gd name="adj" fmla="val 4762"/>
+            </a:avLst>
+          </a:prstGeom>
+          <a:solidFill>
+            <a:srgbClr val="243650"/>
+          </a:solidFill>
+          <a:ln w="19050">
+            <a:solidFill>
+              <a:srgbClr val="E0762B"/>
+            </a:solidFill>
+            <a:prstDash val="solid"/>
+          </a:ln>
+        </p:spPr>
+      </p:sp>
+      <p:sp>
+        <p:nvSpPr>
+          <p:cNvPr id="22" name="Text 20"/>
+          <p:cNvSpPr txBox="1"/>
+          <p:nvPr/>
+        </p:nvSpPr>
+        <p:spPr>
+          <a:xfrm>
+            <a:off x="10122408" y="1664208"/>
+            <a:ext cx="1700784" cy="457200"/>
+          </a:xfrm>
+          <a:prstGeom prst="rect">
+            <a:avLst/>
+          </a:prstGeom>
+          <a:noFill/>
+          <a:ln/>
+        </p:spPr>
+        <p:txBody>
+          <a:bodyPr wrap="square" lIns="0" tIns="0" rIns="0" bIns="0" rtlCol="0" anchor="ctr"/>
+          <a:lstStyle/>
+          <a:p>
+            <a:pPr indent="0" marL="0">
+              <a:buNone/>
+            </a:pPr>
+            <a:r>
+              <a:rPr lang="en-US" sz="1200" b="1" dirty="0">
+                <a:solidFill>
+                  <a:srgbClr val="E0762B"/>
+                </a:solidFill>
+                <a:latin typeface="Malgun Gothic" pitchFamily="34" charset="0"/>
+                <a:ea typeface="Malgun Gothic" pitchFamily="34" charset="-122"/>
+                <a:cs typeface="Malgun Gothic" pitchFamily="34" charset="-120"/>
+              </a:rPr>
+              <a:t>B · 추론</a:t>
+            </a:r>
+            <a:endParaRPr lang="en-US" sz="1200" dirty="0"/>
+          </a:p>
+        </p:txBody>
+      </p:sp>
+      <p:sp>
+        <p:nvSpPr>
+          <p:cNvPr id="23" name="Shape 21"/>
+          <p:cNvSpPr/>
+          <p:nvPr/>
+        </p:nvSpPr>
+        <p:spPr>
+          <a:xfrm>
+            <a:off x="10149840" y="2240280"/>
+            <a:ext cx="1645920" cy="731520"/>
+          </a:xfrm>
+          <a:prstGeom prst="roundRect">
+            <a:avLst>
+              <a:gd name="adj" fmla="val 7500"/>
+            </a:avLst>
+          </a:prstGeom>
+          <a:solidFill>
+            <a:srgbClr val="2F4566"/>
+          </a:solidFill>
+          <a:ln w="12700">
+            <a:solidFill>
+              <a:srgbClr val="2F4566"/>
+            </a:solidFill>
+            <a:prstDash val="solid"/>
+          </a:ln>
+        </p:spPr>
+      </p:sp>
+      <p:sp>
+        <p:nvSpPr>
+          <p:cNvPr id="24" name="Text 22"/>
+          <p:cNvSpPr txBox="1"/>
+          <p:nvPr/>
+        </p:nvSpPr>
+        <p:spPr>
+          <a:xfrm>
+            <a:off x="10213848" y="2240280"/>
+            <a:ext cx="1517904" cy="731520"/>
+          </a:xfrm>
+          <a:prstGeom prst="rect">
+            <a:avLst/>
+          </a:prstGeom>
+          <a:noFill/>
+          <a:ln/>
+        </p:spPr>
+        <p:txBody>
+          <a:bodyPr wrap="square" lIns="0" tIns="0" rIns="0" bIns="0" rtlCol="0" anchor="ctr"/>
+          <a:lstStyle/>
+          <a:p>
+            <a:pPr indent="0" marL="0">
+              <a:buNone/>
+            </a:pPr>
+            <a:r>
+              <a:rPr lang="en-US" sz="950" dirty="0">
+                <a:solidFill>
+                  <a:srgbClr val="E6EDF7"/>
+                </a:solidFill>
+                <a:latin typeface="Malgun Gothic" pitchFamily="34" charset="0"/>
+                <a:ea typeface="Malgun Gothic" pitchFamily="34" charset="-122"/>
+                <a:cs typeface="Malgun Gothic" pitchFamily="34" charset="-120"/>
+              </a:rPr>
+              <a:t>alpamayo_server.py</a:t>
+            </a:r>
+            <a:endParaRPr lang="en-US" sz="950" dirty="0"/>
+          </a:p>
+          <a:p>
+            <a:pPr indent="0" marL="0">
+              <a:buNone/>
+            </a:pPr>
+            <a:r>
+              <a:rPr lang="en-US" sz="950" dirty="0">
+                <a:solidFill>
+                  <a:srgbClr val="E6EDF7"/>
+                </a:solidFill>
+                <a:latin typeface="Malgun Gothic" pitchFamily="34" charset="0"/>
+                <a:ea typeface="Malgun Gothic" pitchFamily="34" charset="-122"/>
+                <a:cs typeface="Malgun Gothic" pitchFamily="34" charset="-120"/>
+              </a:rPr>
+              <a:t>gRPC :50051</a:t>
+            </a:r>
+            <a:endParaRPr lang="en-US" sz="950" dirty="0"/>
+          </a:p>
+        </p:txBody>
+      </p:sp>
+      <p:sp>
+        <p:nvSpPr>
+          <p:cNvPr id="25" name="Shape 23"/>
+          <p:cNvSpPr/>
+          <p:nvPr/>
+        </p:nvSpPr>
+        <p:spPr>
+          <a:xfrm>
+            <a:off x="10149840" y="3081528"/>
+            <a:ext cx="1645920" cy="731520"/>
+          </a:xfrm>
+          <a:prstGeom prst="roundRect">
+            <a:avLst>
+              <a:gd name="adj" fmla="val 7500"/>
+            </a:avLst>
+          </a:prstGeom>
+          <a:solidFill>
+            <a:srgbClr val="2F4566"/>
+          </a:solidFill>
+          <a:ln w="12700">
+            <a:solidFill>
+              <a:srgbClr val="2F4566"/>
+            </a:solidFill>
+            <a:prstDash val="solid"/>
+          </a:ln>
+        </p:spPr>
+      </p:sp>
+      <p:sp>
+        <p:nvSpPr>
+          <p:cNvPr id="26" name="Text 24"/>
+          <p:cNvSpPr txBox="1"/>
+          <p:nvPr/>
+        </p:nvSpPr>
+        <p:spPr>
+          <a:xfrm>
+            <a:off x="10213848" y="3081528"/>
+            <a:ext cx="1517904" cy="731520"/>
+          </a:xfrm>
+          <a:prstGeom prst="rect">
+            <a:avLst/>
+          </a:prstGeom>
+          <a:noFill/>
+          <a:ln/>
+        </p:spPr>
+        <p:txBody>
+          <a:bodyPr wrap="square" lIns="0" tIns="0" rIns="0" bIns="0" rtlCol="0" anchor="ctr"/>
+          <a:lstStyle/>
+          <a:p>
+            <a:pPr indent="0" marL="0">
+              <a:buNone/>
+            </a:pPr>
+            <a:r>
+              <a:rPr lang="en-US" sz="950" dirty="0">
+                <a:solidFill>
+                  <a:srgbClr val="E6EDF7"/>
+                </a:solidFill>
+                <a:latin typeface="Malgun Gothic" pitchFamily="34" charset="0"/>
+                <a:ea typeface="Malgun Gothic" pitchFamily="34" charset="-122"/>
+                <a:cs typeface="Malgun Gothic" pitchFamily="34" charset="-120"/>
+              </a:rPr>
+              <a:t>Python 3.12 · torch 2.8</a:t>
+            </a:r>
+            <a:endParaRPr lang="en-US" sz="950" dirty="0"/>
+          </a:p>
+          <a:p>
+            <a:pPr indent="0" marL="0">
+              <a:buNone/>
+            </a:pPr>
+            <a:r>
+              <a:rPr lang="en-US" sz="950" dirty="0">
+                <a:solidFill>
+                  <a:srgbClr val="E6EDF7"/>
+                </a:solidFill>
+                <a:latin typeface="Malgun Gothic" pitchFamily="34" charset="0"/>
+                <a:ea typeface="Malgun Gothic" pitchFamily="34" charset="-122"/>
+                <a:cs typeface="Malgun Gothic" pitchFamily="34" charset="-120"/>
+              </a:rPr>
+              <a:t>Alpamayo 1.5 (bf16 24 GB)</a:t>
+            </a:r>
+            <a:endParaRPr lang="en-US" sz="950" dirty="0"/>
+          </a:p>
+        </p:txBody>
+      </p:sp>
+      <p:sp>
+        <p:nvSpPr>
+          <p:cNvPr id="27" name="Shape 25"/>
+          <p:cNvSpPr/>
+          <p:nvPr/>
+        </p:nvSpPr>
+        <p:spPr>
+          <a:xfrm>
+            <a:off x="10149840" y="3922776"/>
+            <a:ext cx="1645920" cy="731520"/>
+          </a:xfrm>
+          <a:prstGeom prst="roundRect">
+            <a:avLst>
+              <a:gd name="adj" fmla="val 7500"/>
+            </a:avLst>
+          </a:prstGeom>
+          <a:solidFill>
+            <a:srgbClr val="2F4566"/>
+          </a:solidFill>
+          <a:ln w="12700">
+            <a:solidFill>
+              <a:srgbClr val="2F4566"/>
+            </a:solidFill>
+            <a:prstDash val="solid"/>
+          </a:ln>
+        </p:spPr>
+      </p:sp>
+      <p:sp>
+        <p:nvSpPr>
+          <p:cNvPr id="28" name="Text 26"/>
+          <p:cNvSpPr txBox="1"/>
+          <p:nvPr/>
+        </p:nvSpPr>
+        <p:spPr>
+          <a:xfrm>
+            <a:off x="10213848" y="3922776"/>
+            <a:ext cx="1517904" cy="731520"/>
+          </a:xfrm>
+          <a:prstGeom prst="rect">
+            <a:avLst/>
+          </a:prstGeom>
+          <a:noFill/>
+          <a:ln/>
+        </p:spPr>
+        <p:txBody>
+          <a:bodyPr wrap="square" lIns="0" tIns="0" rIns="0" bIns="0" rtlCol="0" anchor="ctr"/>
+          <a:lstStyle/>
+          <a:p>
+            <a:pPr indent="0" marL="0">
+              <a:buNone/>
+            </a:pPr>
+            <a:r>
+              <a:rPr lang="en-US" sz="950" dirty="0">
+                <a:solidFill>
+                  <a:srgbClr val="E6EDF7"/>
+                </a:solidFill>
+                <a:latin typeface="Malgun Gothic" pitchFamily="34" charset="0"/>
+                <a:ea typeface="Malgun Gothic" pitchFamily="34" charset="-122"/>
+                <a:cs typeface="Malgun Gothic" pitchFamily="34" charset="-120"/>
+              </a:rPr>
+              <a:t>g6e.xlarge · x86/ARM</a:t>
+            </a:r>
+            <a:endParaRPr lang="en-US" sz="950" dirty="0"/>
+          </a:p>
+          <a:p>
+            <a:pPr indent="0" marL="0">
+              <a:buNone/>
+            </a:pPr>
+            <a:r>
+              <a:rPr lang="en-US" sz="950" dirty="0">
+                <a:solidFill>
+                  <a:srgbClr val="E6EDF7"/>
+                </a:solidFill>
+                <a:latin typeface="Malgun Gothic" pitchFamily="34" charset="0"/>
+                <a:ea typeface="Malgun Gothic" pitchFamily="34" charset="-122"/>
+                <a:cs typeface="Malgun Gothic" pitchFamily="34" charset="-120"/>
+              </a:rPr>
+              <a:t>L40S 48 GB</a:t>
+            </a:r>
+            <a:endParaRPr lang="en-US" sz="950" dirty="0"/>
+          </a:p>
+        </p:txBody>
+      </p:sp>
+      <p:sp>
+        <p:nvSpPr>
+          <p:cNvPr id="29" name="Shape 27"/>
+          <p:cNvSpPr/>
+          <p:nvPr/>
+        </p:nvSpPr>
+        <p:spPr>
+          <a:xfrm>
+            <a:off x="9308592" y="2606040"/>
+            <a:ext cx="630936" cy="0"/>
           </a:xfrm>
           <a:prstGeom prst="line">
             <a:avLst/>
@@ -1669,14 +2536,14 @@
       </p:sp>
       <p:sp>
         <p:nvSpPr>
-          <p:cNvPr id="7" name="Text 5"/>
-          <p:cNvSpPr txBox="1"/>
-          <p:nvPr/>
-        </p:nvSpPr>
-        <p:spPr>
-          <a:xfrm>
-            <a:off x="2377440" y="3794760"/>
-            <a:ext cx="1463040" cy="274320"/>
+          <p:cNvPr id="30" name="Text 28"/>
+          <p:cNvSpPr txBox="1"/>
+          <p:nvPr/>
+        </p:nvSpPr>
+        <p:spPr>
+          <a:xfrm>
+            <a:off x="9235440" y="2221992"/>
+            <a:ext cx="777240" cy="274320"/>
           </a:xfrm>
           <a:prstGeom prst="rect">
             <a:avLst/>
@@ -1708,96 +2575,30 @@
       </p:sp>
       <p:sp>
         <p:nvSpPr>
-          <p:cNvPr id="8" name="Shape 6"/>
-          <p:cNvSpPr/>
-          <p:nvPr/>
-        </p:nvSpPr>
-        <p:spPr>
-          <a:xfrm>
-            <a:off x="3931920" y="3931920"/>
-            <a:ext cx="2194560" cy="548640"/>
-          </a:xfrm>
-          <a:prstGeom prst="roundRect">
-            <a:avLst>
-              <a:gd name="adj" fmla="val 13333"/>
-            </a:avLst>
-          </a:prstGeom>
-          <a:solidFill>
-            <a:srgbClr val="E0762B"/>
-          </a:solidFill>
-          <a:ln w="12700">
-            <a:solidFill>
-              <a:srgbClr val="E0762B"/>
-            </a:solidFill>
-            <a:prstDash val="solid"/>
-          </a:ln>
-        </p:spPr>
-      </p:sp>
-      <p:sp>
-        <p:nvSpPr>
-          <p:cNvPr id="9" name="Text 7"/>
-          <p:cNvSpPr txBox="1"/>
-          <p:nvPr/>
-        </p:nvSpPr>
-        <p:spPr>
-          <a:xfrm>
-            <a:off x="3931920" y="3931920"/>
-            <a:ext cx="2194560" cy="548640"/>
-          </a:xfrm>
-          <a:prstGeom prst="rect">
-            <a:avLst/>
-          </a:prstGeom>
-          <a:noFill/>
-          <a:ln/>
-        </p:spPr>
-        <p:txBody>
-          <a:bodyPr wrap="square" lIns="0" tIns="0" rIns="0" bIns="0" rtlCol="0" anchor="ctr"/>
+          <p:cNvPr id="31" name="Text 29"/>
+          <p:cNvSpPr txBox="1"/>
+          <p:nvPr/>
+        </p:nvSpPr>
+        <p:spPr>
+          <a:xfrm>
+            <a:off x="9144000" y="2715768"/>
+            <a:ext cx="960120" cy="457200"/>
+          </a:xfrm>
+          <a:prstGeom prst="rect">
+            <a:avLst/>
+          </a:prstGeom>
+          <a:noFill/>
+          <a:ln/>
+        </p:spPr>
+        <p:txBody>
+          <a:bodyPr wrap="square" lIns="0" tIns="0" rIns="0" bIns="0" rtlCol="0" anchor="t"/>
           <a:lstStyle/>
           <a:p>
             <a:pPr algn="ctr" indent="0" marL="0">
               <a:buNone/>
             </a:pPr>
             <a:r>
-              <a:rPr lang="en-US" sz="1200" b="1" dirty="0">
-                <a:solidFill>
-                  <a:srgbClr val="FFFFFF"/>
-                </a:solidFill>
-                <a:latin typeface="Malgun Gothic" pitchFamily="34" charset="0"/>
-                <a:ea typeface="Malgun Gothic" pitchFamily="34" charset="-122"/>
-                <a:cs typeface="Malgun Gothic" pitchFamily="34" charset="-120"/>
-              </a:rPr>
-              <a:t>Alpamayo 추론 (GPU)</a:t>
-            </a:r>
-            <a:endParaRPr lang="en-US" sz="1200" dirty="0"/>
-          </a:p>
-        </p:txBody>
-      </p:sp>
-      <p:sp>
-        <p:nvSpPr>
-          <p:cNvPr id="10" name="Text 8"/>
-          <p:cNvSpPr txBox="1"/>
-          <p:nvPr/>
-        </p:nvSpPr>
-        <p:spPr>
-          <a:xfrm>
-            <a:off x="548640" y="5760720"/>
-            <a:ext cx="11094415" cy="365760"/>
-          </a:xfrm>
-          <a:prstGeom prst="rect">
-            <a:avLst/>
-          </a:prstGeom>
-          <a:noFill/>
-          <a:ln/>
-        </p:spPr>
-        <p:txBody>
-          <a:bodyPr wrap="square" lIns="0" tIns="0" rIns="0" bIns="0" rtlCol="0" anchor="t"/>
-          <a:lstStyle/>
-          <a:p>
-            <a:pPr indent="0" marL="0">
-              <a:buNone/>
-            </a:pPr>
-            <a:r>
-              <a:rPr lang="en-US" sz="1300" dirty="0">
+              <a:rPr lang="en-US" sz="800" dirty="0">
                 <a:solidFill>
                   <a:srgbClr val="CADCFC"/>
                 </a:solidFill>
@@ -1805,9 +2606,26 @@
                 <a:ea typeface="Malgun Gothic" pitchFamily="34" charset="-122"/>
                 <a:cs typeface="Malgun Gothic" pitchFamily="34" charset="-120"/>
               </a:rPr>
-              <a:t>2026-10-01   ·   발표자: ____________</a:t>
-            </a:r>
-            <a:endParaRPr lang="en-US" sz="1300" dirty="0"/>
+              <a:t>요청 5~8 MB</a:t>
+            </a:r>
+            <a:endParaRPr lang="en-US" sz="800" dirty="0"/>
+          </a:p>
+          <a:p>
+            <a:pPr algn="ctr" indent="0" marL="0">
+              <a:buNone/>
+            </a:pPr>
+            <a:r>
+              <a:rPr lang="en-US" sz="800" dirty="0">
+                <a:solidFill>
+                  <a:srgbClr val="CADCFC"/>
+                </a:solidFill>
+                <a:latin typeface="Malgun Gothic" pitchFamily="34" charset="0"/>
+                <a:ea typeface="Malgun Gothic" pitchFamily="34" charset="-122"/>
+                <a:cs typeface="Malgun Gothic" pitchFamily="34" charset="-120"/>
+              </a:rPr>
+              <a:t>응답 &lt; 10 KB</a:t>
+            </a:r>
+            <a:endParaRPr lang="en-US" sz="800" dirty="0"/>
           </a:p>
         </p:txBody>
       </p:sp>
@@ -4809,7 +5627,7 @@
                 <a:ea typeface="Malgun Gothic" pitchFamily="34" charset="-122"/>
                 <a:cs typeface="Malgun Gothic" pitchFamily="34" charset="-120"/>
               </a:rPr>
-              <a:t>같은 모델(Alpamayo 1.5)을 녹화 클립 재생·평가에서 실시간 주행·물리 분리로 옮겼다</a:t>
+              <a:t>같은 모델(Alpamayo 1.5)을 녹화 클립 재생·평가에서 실시간 주행으로, 한 호스트에서 두 인스턴스로 옮겼다</a:t>
             </a:r>
             <a:endParaRPr lang="en-US" sz="1400" dirty="0"/>
           </a:p>
@@ -5059,7 +5877,7 @@
                       <a:tailEnd type="none" w="med" len="med"/>
                     </a:lnB>
                     <a:solidFill>
-                      <a:srgbClr val="1B2A41"/>
+                      <a:srgbClr val="6B7A8C"/>
                     </a:solidFill>
                   </a:tcPr>
                 </a:tc>
@@ -5083,7 +5901,7 @@
                           <a:ea typeface="Malgun Gothic" pitchFamily="34" charset="-122"/>
                           <a:cs typeface="Malgun Gothic" pitchFamily="34" charset="-120"/>
                         </a:rPr>
-                        <a:t>이번 데모: 분산 closed-loop</a:t>
+                        <a:t>이번 데모: 두 인스턴스 closed-loop</a:t>
                       </a:r>
                       <a:endParaRPr lang="en-US" sz="1200" dirty="0">
                         <a:latin typeface="Malgun Gothic" charset="0"/>
@@ -5130,7 +5948,7 @@
                       <a:tailEnd type="none" w="med" len="med"/>
                     </a:lnB>
                     <a:solidFill>
-                      <a:srgbClr val="1B2A41"/>
+                      <a:srgbClr val="E0762B"/>
                     </a:solidFill>
                   </a:tcPr>
                 </a:tc>
@@ -5203,7 +6021,7 @@
                       <a:tailEnd type="none" w="med" len="med"/>
                     </a:lnB>
                     <a:solidFill>
-                      <a:srgbClr val="FFFFFF"/>
+                      <a:srgbClr val="F3F5F8"/>
                     </a:solidFill>
                   </a:tcPr>
                 </a:tc>
@@ -5489,7 +6307,7 @@
                       <a:tailEnd type="none" w="med" len="med"/>
                     </a:lnB>
                     <a:solidFill>
-                      <a:srgbClr val="F3F5F8"/>
+                      <a:srgbClr val="FFFFFF"/>
                     </a:solidFill>
                   </a:tcPr>
                 </a:tc>
@@ -5560,7 +6378,7 @@
                       <a:tailEnd type="none" w="med" len="med"/>
                     </a:lnB>
                     <a:solidFill>
-                      <a:srgbClr val="F3F5F8"/>
+                      <a:srgbClr val="FFFFFF"/>
                     </a:solidFill>
                   </a:tcPr>
                 </a:tc>
@@ -5633,7 +6451,7 @@
                       <a:tailEnd type="none" w="med" len="med"/>
                     </a:lnB>
                     <a:solidFill>
-                      <a:srgbClr val="FFFFFF"/>
+                      <a:srgbClr val="F3F5F8"/>
                     </a:solidFill>
                   </a:tcPr>
                 </a:tc>
@@ -5919,7 +6737,7 @@
                       <a:tailEnd type="none" w="med" len="med"/>
                     </a:lnB>
                     <a:solidFill>
-                      <a:srgbClr val="F3F5F8"/>
+                      <a:srgbClr val="FFFFFF"/>
                     </a:solidFill>
                   </a:tcPr>
                 </a:tc>
@@ -5943,7 +6761,7 @@
                           <a:ea typeface="Malgun Gothic" pitchFamily="34" charset="-122"/>
                           <a:cs typeface="Malgun Gothic" pitchFamily="34" charset="-120"/>
                         </a:rPr>
-                        <a:t>A: x86 + A10G (CARLA 전용) / B: L40S 48 GB (모델 전용). 두 인스턴스 물리 분리</a:t>
+                        <a:t>A: x86 + A10G (CARLA 전용) / B: L40S 48 GB (모델 전용). 서로 다른 인스턴스</a:t>
                       </a:r>
                       <a:endParaRPr lang="en-US" sz="1200" dirty="0">
                         <a:latin typeface="Malgun Gothic" charset="0"/>
@@ -5990,7 +6808,7 @@
                       <a:tailEnd type="none" w="med" len="med"/>
                     </a:lnB>
                     <a:solidFill>
-                      <a:srgbClr val="F3F5F8"/>
+                      <a:srgbClr val="FFFFFF"/>
                     </a:solidFill>
                   </a:tcPr>
                 </a:tc>
@@ -6063,7 +6881,7 @@
                       <a:tailEnd type="none" w="med" len="med"/>
                     </a:lnB>
                     <a:solidFill>
-                      <a:srgbClr val="FFFFFF"/>
+                      <a:srgbClr val="F3F5F8"/>
                     </a:solidFill>
                   </a:tcPr>
                 </a:tc>
@@ -6349,7 +7167,7 @@
                       <a:tailEnd type="none" w="med" len="med"/>
                     </a:lnB>
                     <a:solidFill>
-                      <a:srgbClr val="F3F5F8"/>
+                      <a:srgbClr val="FFFFFF"/>
                     </a:solidFill>
                   </a:tcPr>
                 </a:tc>
@@ -6420,7 +7238,7 @@
                       <a:tailEnd type="none" w="med" len="med"/>
                     </a:lnB>
                     <a:solidFill>
-                      <a:srgbClr val="F3F5F8"/>
+                      <a:srgbClr val="FFFFFF"/>
                     </a:solidFill>
                   </a:tcPr>
                 </a:tc>
@@ -6493,7 +7311,7 @@
                       <a:tailEnd type="none" w="med" len="med"/>
                     </a:lnB>
                     <a:solidFill>
-                      <a:srgbClr val="FFFFFF"/>
+                      <a:srgbClr val="F3F5F8"/>
                     </a:solidFill>
                   </a:tcPr>
                 </a:tc>
@@ -6748,7 +7566,7 @@
                 <a:ea typeface="Malgun Gothic" pitchFamily="34" charset="-122"/>
                 <a:cs typeface="Malgun Gothic" pitchFamily="34" charset="-120"/>
               </a:rPr>
-              <a:t>물리적으로 떨어진 두 인스턴스에서 자율주행이 되는지, 조작이 실시간으로 반영되는지, 어디가 느린지</a:t>
+              <a:t>서로 다른 인스턴스에서 자율주행이 되는지, 조작이 실시간으로 반영되는지, 어디가 느린지</a:t>
             </a:r>
             <a:endParaRPr lang="en-US" sz="1400" dirty="0"/>
           </a:p>
@@ -6832,907 +7650,55 @@
           </a:p>
         </p:txBody>
       </p:sp>
-      <p:graphicFrame>
-        <p:nvGraphicFramePr>
-          <p:cNvPr id="7" name="Table 0"/>
-          <p:cNvGraphicFramePr>
-            <a:graphicFrameLocks noGrp="1"/>
-          </p:cNvGraphicFramePr>
-          <p:nvPr>
-            <p:extLst>
-              <p:ext uri="{D42A27DB-BD31-4B8C-83A1-F6EECF244321}">
-                <p14:modId xmlns:p14="http://schemas.microsoft.com/office/powerpoint/2010/main" val="1579011935"/>
-              </p:ext>
-            </p:extLst>
-          </p:nvPr>
-        </p:nvGraphicFramePr>
-        <p:xfrm>
-          <a:off x="548640" y="1417320"/>
-          <a:ext cx="11094415" cy="914400"/>
-        </p:xfrm>
-        <a:graphic>
-          <a:graphicData uri="http://schemas.openxmlformats.org/drawingml/2006/table">
-            <a:tbl>
-              <a:tblPr/>
-              <a:tblGrid>
-                <a:gridCol w="2377440"/>
-                <a:gridCol w="4754880"/>
-                <a:gridCol w="3959352"/>
-              </a:tblGrid>
-              <a:tr h="0">
-                <a:tc>
-                  <a:txBody>
-                    <a:bodyPr/>
-                    <a:lstStyle/>
-                    <a:p>
-                      <a:pPr algn="l" indent="0" marL="0">
-                        <a:lnSpc>
-                          <a:spcPct val="110000"/>
-                        </a:lnSpc>
-                        <a:buNone/>
-                      </a:pPr>
-                      <a:r>
-                        <a:rPr lang="en-US" sz="1200" b="1" dirty="0">
-                          <a:solidFill>
-                            <a:srgbClr val="FFFFFF"/>
-                          </a:solidFill>
-                          <a:latin typeface="Malgun Gothic" pitchFamily="34" charset="0"/>
-                          <a:ea typeface="Malgun Gothic" pitchFamily="34" charset="-122"/>
-                          <a:cs typeface="Malgun Gothic" pitchFamily="34" charset="-120"/>
-                        </a:rPr>
-                        <a:t>항목</a:t>
-                      </a:r>
-                      <a:endParaRPr lang="en-US" sz="1200" dirty="0">
-                        <a:latin typeface="Malgun Gothic" charset="0"/>
-                        <a:ea typeface="Malgun Gothic" charset="0"/>
-                        <a:cs typeface="Malgun Gothic" charset="0"/>
-                      </a:endParaRPr>
-                    </a:p>
-                  </a:txBody>
-                  <a:tcPr marL="101600" marR="101600" marT="76200" marB="76200" anchor="ctr">
-                    <a:lnL w="6350" cap="flat" cmpd="sng" algn="ctr">
-                      <a:solidFill>
-                        <a:srgbClr val="D5DBE3"/>
-                      </a:solidFill>
-                      <a:prstDash val="solid"/>
-                      <a:round/>
-                      <a:headEnd type="none" w="med" len="med"/>
-                      <a:tailEnd type="none" w="med" len="med"/>
-                    </a:lnL>
-                    <a:lnR w="6350" cap="flat" cmpd="sng" algn="ctr">
-                      <a:solidFill>
-                        <a:srgbClr val="D5DBE3"/>
-                      </a:solidFill>
-                      <a:prstDash val="solid"/>
-                      <a:round/>
-                      <a:headEnd type="none" w="med" len="med"/>
-                      <a:tailEnd type="none" w="med" len="med"/>
-                    </a:lnR>
-                    <a:lnT w="6350" cap="flat" cmpd="sng" algn="ctr">
-                      <a:solidFill>
-                        <a:srgbClr val="D5DBE3"/>
-                      </a:solidFill>
-                      <a:prstDash val="solid"/>
-                      <a:round/>
-                      <a:headEnd type="none" w="med" len="med"/>
-                      <a:tailEnd type="none" w="med" len="med"/>
-                    </a:lnT>
-                    <a:lnB w="6350" cap="flat" cmpd="sng" algn="ctr">
-                      <a:solidFill>
-                        <a:srgbClr val="D5DBE3"/>
-                      </a:solidFill>
-                      <a:prstDash val="solid"/>
-                      <a:round/>
-                      <a:headEnd type="none" w="med" len="med"/>
-                      <a:tailEnd type="none" w="med" len="med"/>
-                    </a:lnB>
-                    <a:solidFill>
-                      <a:srgbClr val="1B2A41"/>
-                    </a:solidFill>
-                  </a:tcPr>
-                </a:tc>
-                <a:tc>
-                  <a:txBody>
-                    <a:bodyPr/>
-                    <a:lstStyle/>
-                    <a:p>
-                      <a:pPr algn="l" indent="0" marL="0">
-                        <a:lnSpc>
-                          <a:spcPct val="110000"/>
-                        </a:lnSpc>
-                        <a:buNone/>
-                      </a:pPr>
-                      <a:r>
-                        <a:rPr lang="en-US" sz="1200" b="1" dirty="0">
-                          <a:solidFill>
-                            <a:srgbClr val="FFFFFF"/>
-                          </a:solidFill>
-                          <a:latin typeface="Malgun Gothic" pitchFamily="34" charset="0"/>
-                          <a:ea typeface="Malgun Gothic" pitchFamily="34" charset="-122"/>
-                          <a:cs typeface="Malgun Gothic" pitchFamily="34" charset="-120"/>
-                        </a:rPr>
-                        <a:t>시연 내용</a:t>
-                      </a:r>
-                      <a:endParaRPr lang="en-US" sz="1200" dirty="0">
-                        <a:latin typeface="Malgun Gothic" charset="0"/>
-                        <a:ea typeface="Malgun Gothic" charset="0"/>
-                        <a:cs typeface="Malgun Gothic" charset="0"/>
-                      </a:endParaRPr>
-                    </a:p>
-                  </a:txBody>
-                  <a:tcPr marL="101600" marR="101600" marT="76200" marB="76200" anchor="ctr">
-                    <a:lnL w="6350" cap="flat" cmpd="sng" algn="ctr">
-                      <a:solidFill>
-                        <a:srgbClr val="D5DBE3"/>
-                      </a:solidFill>
-                      <a:prstDash val="solid"/>
-                      <a:round/>
-                      <a:headEnd type="none" w="med" len="med"/>
-                      <a:tailEnd type="none" w="med" len="med"/>
-                    </a:lnL>
-                    <a:lnR w="6350" cap="flat" cmpd="sng" algn="ctr">
-                      <a:solidFill>
-                        <a:srgbClr val="D5DBE3"/>
-                      </a:solidFill>
-                      <a:prstDash val="solid"/>
-                      <a:round/>
-                      <a:headEnd type="none" w="med" len="med"/>
-                      <a:tailEnd type="none" w="med" len="med"/>
-                    </a:lnR>
-                    <a:lnT w="6350" cap="flat" cmpd="sng" algn="ctr">
-                      <a:solidFill>
-                        <a:srgbClr val="D5DBE3"/>
-                      </a:solidFill>
-                      <a:prstDash val="solid"/>
-                      <a:round/>
-                      <a:headEnd type="none" w="med" len="med"/>
-                      <a:tailEnd type="none" w="med" len="med"/>
-                    </a:lnT>
-                    <a:lnB w="6350" cap="flat" cmpd="sng" algn="ctr">
-                      <a:solidFill>
-                        <a:srgbClr val="D5DBE3"/>
-                      </a:solidFill>
-                      <a:prstDash val="solid"/>
-                      <a:round/>
-                      <a:headEnd type="none" w="med" len="med"/>
-                      <a:tailEnd type="none" w="med" len="med"/>
-                    </a:lnB>
-                    <a:solidFill>
-                      <a:srgbClr val="1B2A41"/>
-                    </a:solidFill>
-                  </a:tcPr>
-                </a:tc>
-                <a:tc>
-                  <a:txBody>
-                    <a:bodyPr/>
-                    <a:lstStyle/>
-                    <a:p>
-                      <a:pPr algn="l" indent="0" marL="0">
-                        <a:lnSpc>
-                          <a:spcPct val="110000"/>
-                        </a:lnSpc>
-                        <a:buNone/>
-                      </a:pPr>
-                      <a:r>
-                        <a:rPr lang="en-US" sz="1200" b="1" dirty="0">
-                          <a:solidFill>
-                            <a:srgbClr val="FFFFFF"/>
-                          </a:solidFill>
-                          <a:latin typeface="Malgun Gothic" pitchFamily="34" charset="0"/>
-                          <a:ea typeface="Malgun Gothic" pitchFamily="34" charset="-122"/>
-                          <a:cs typeface="Malgun Gothic" pitchFamily="34" charset="-120"/>
-                        </a:rPr>
-                        <a:t>확인 포인트</a:t>
-                      </a:r>
-                      <a:endParaRPr lang="en-US" sz="1200" dirty="0">
-                        <a:latin typeface="Malgun Gothic" charset="0"/>
-                        <a:ea typeface="Malgun Gothic" charset="0"/>
-                        <a:cs typeface="Malgun Gothic" charset="0"/>
-                      </a:endParaRPr>
-                    </a:p>
-                  </a:txBody>
-                  <a:tcPr marL="101600" marR="101600" marT="76200" marB="76200" anchor="ctr">
-                    <a:lnL w="6350" cap="flat" cmpd="sng" algn="ctr">
-                      <a:solidFill>
-                        <a:srgbClr val="D5DBE3"/>
-                      </a:solidFill>
-                      <a:prstDash val="solid"/>
-                      <a:round/>
-                      <a:headEnd type="none" w="med" len="med"/>
-                      <a:tailEnd type="none" w="med" len="med"/>
-                    </a:lnL>
-                    <a:lnR w="6350" cap="flat" cmpd="sng" algn="ctr">
-                      <a:solidFill>
-                        <a:srgbClr val="D5DBE3"/>
-                      </a:solidFill>
-                      <a:prstDash val="solid"/>
-                      <a:round/>
-                      <a:headEnd type="none" w="med" len="med"/>
-                      <a:tailEnd type="none" w="med" len="med"/>
-                    </a:lnR>
-                    <a:lnT w="6350" cap="flat" cmpd="sng" algn="ctr">
-                      <a:solidFill>
-                        <a:srgbClr val="D5DBE3"/>
-                      </a:solidFill>
-                      <a:prstDash val="solid"/>
-                      <a:round/>
-                      <a:headEnd type="none" w="med" len="med"/>
-                      <a:tailEnd type="none" w="med" len="med"/>
-                    </a:lnT>
-                    <a:lnB w="6350" cap="flat" cmpd="sng" algn="ctr">
-                      <a:solidFill>
-                        <a:srgbClr val="D5DBE3"/>
-                      </a:solidFill>
-                      <a:prstDash val="solid"/>
-                      <a:round/>
-                      <a:headEnd type="none" w="med" len="med"/>
-                      <a:tailEnd type="none" w="med" len="med"/>
-                    </a:lnB>
-                    <a:solidFill>
-                      <a:srgbClr val="1B2A41"/>
-                    </a:solidFill>
-                  </a:tcPr>
-                </a:tc>
-              </a:tr>
-              <a:tr h="0">
-                <a:tc>
-                  <a:txBody>
-                    <a:bodyPr/>
-                    <a:lstStyle/>
-                    <a:p>
-                      <a:pPr algn="l" indent="0" marL="0">
-                        <a:lnSpc>
-                          <a:spcPct val="110000"/>
-                        </a:lnSpc>
-                        <a:buNone/>
-                      </a:pPr>
-                      <a:r>
-                        <a:rPr lang="en-US" sz="1200" b="1" dirty="0">
-                          <a:solidFill>
-                            <a:srgbClr val="24313F"/>
-                          </a:solidFill>
-                          <a:latin typeface="Malgun Gothic" pitchFamily="34" charset="0"/>
-                          <a:ea typeface="Malgun Gothic" pitchFamily="34" charset="-122"/>
-                          <a:cs typeface="Malgun Gothic" pitchFamily="34" charset="-120"/>
-                        </a:rPr>
-                        <a:t>① 물리 분리 closed-loop 자율주행</a:t>
-                      </a:r>
-                      <a:endParaRPr lang="en-US" sz="1200" dirty="0">
-                        <a:latin typeface="Malgun Gothic" charset="0"/>
-                        <a:ea typeface="Malgun Gothic" charset="0"/>
-                        <a:cs typeface="Malgun Gothic" charset="0"/>
-                      </a:endParaRPr>
-                    </a:p>
-                  </a:txBody>
-                  <a:tcPr marL="101600" marR="101600" marT="76200" marB="76200" anchor="ctr">
-                    <a:lnL w="6350" cap="flat" cmpd="sng" algn="ctr">
-                      <a:solidFill>
-                        <a:srgbClr val="D5DBE3"/>
-                      </a:solidFill>
-                      <a:prstDash val="solid"/>
-                      <a:round/>
-                      <a:headEnd type="none" w="med" len="med"/>
-                      <a:tailEnd type="none" w="med" len="med"/>
-                    </a:lnL>
-                    <a:lnR w="6350" cap="flat" cmpd="sng" algn="ctr">
-                      <a:solidFill>
-                        <a:srgbClr val="D5DBE3"/>
-                      </a:solidFill>
-                      <a:prstDash val="solid"/>
-                      <a:round/>
-                      <a:headEnd type="none" w="med" len="med"/>
-                      <a:tailEnd type="none" w="med" len="med"/>
-                    </a:lnR>
-                    <a:lnT w="6350" cap="flat" cmpd="sng" algn="ctr">
-                      <a:solidFill>
-                        <a:srgbClr val="D5DBE3"/>
-                      </a:solidFill>
-                      <a:prstDash val="solid"/>
-                      <a:round/>
-                      <a:headEnd type="none" w="med" len="med"/>
-                      <a:tailEnd type="none" w="med" len="med"/>
-                    </a:lnT>
-                    <a:lnB w="6350" cap="flat" cmpd="sng" algn="ctr">
-                      <a:solidFill>
-                        <a:srgbClr val="D5DBE3"/>
-                      </a:solidFill>
-                      <a:prstDash val="solid"/>
-                      <a:round/>
-                      <a:headEnd type="none" w="med" len="med"/>
-                      <a:tailEnd type="none" w="med" len="med"/>
-                    </a:lnB>
-                    <a:solidFill>
-                      <a:srgbClr val="FFFFFF"/>
-                    </a:solidFill>
-                  </a:tcPr>
-                </a:tc>
-                <a:tc>
-                  <a:txBody>
-                    <a:bodyPr/>
-                    <a:lstStyle/>
-                    <a:p>
-                      <a:pPr algn="l" indent="0" marL="0">
-                        <a:lnSpc>
-                          <a:spcPct val="110000"/>
-                        </a:lnSpc>
-                        <a:buNone/>
-                      </a:pPr>
-                      <a:r>
-                        <a:rPr lang="en-US" sz="1200" dirty="0">
-                          <a:solidFill>
-                            <a:srgbClr val="24313F"/>
-                          </a:solidFill>
-                          <a:latin typeface="Malgun Gothic" pitchFamily="34" charset="0"/>
-                          <a:ea typeface="Malgun Gothic" pitchFamily="34" charset="-122"/>
-                          <a:cs typeface="Malgun Gothic" pitchFamily="34" charset="-120"/>
-                        </a:rPr>
-                        <a:t>CARLA는 A, 모델은 B. 비동기 모드로 시뮬레이터는 10 Hz로 계속 돌고 약 1초마다 새 궤적으로 교체. 화면에는 카메라 영상 위 궤적(빨간 선)과 추론 근거(CoT)</a:t>
-                      </a:r>
-                      <a:endParaRPr lang="en-US" sz="1200" dirty="0">
-                        <a:latin typeface="Malgun Gothic" charset="0"/>
-                        <a:ea typeface="Malgun Gothic" charset="0"/>
-                        <a:cs typeface="Malgun Gothic" charset="0"/>
-                      </a:endParaRPr>
-                    </a:p>
-                  </a:txBody>
-                  <a:tcPr marL="101600" marR="101600" marT="76200" marB="76200" anchor="ctr">
-                    <a:lnL w="6350" cap="flat" cmpd="sng" algn="ctr">
-                      <a:solidFill>
-                        <a:srgbClr val="D5DBE3"/>
-                      </a:solidFill>
-                      <a:prstDash val="solid"/>
-                      <a:round/>
-                      <a:headEnd type="none" w="med" len="med"/>
-                      <a:tailEnd type="none" w="med" len="med"/>
-                    </a:lnL>
-                    <a:lnR w="6350" cap="flat" cmpd="sng" algn="ctr">
-                      <a:solidFill>
-                        <a:srgbClr val="D5DBE3"/>
-                      </a:solidFill>
-                      <a:prstDash val="solid"/>
-                      <a:round/>
-                      <a:headEnd type="none" w="med" len="med"/>
-                      <a:tailEnd type="none" w="med" len="med"/>
-                    </a:lnR>
-                    <a:lnT w="6350" cap="flat" cmpd="sng" algn="ctr">
-                      <a:solidFill>
-                        <a:srgbClr val="D5DBE3"/>
-                      </a:solidFill>
-                      <a:prstDash val="solid"/>
-                      <a:round/>
-                      <a:headEnd type="none" w="med" len="med"/>
-                      <a:tailEnd type="none" w="med" len="med"/>
-                    </a:lnT>
-                    <a:lnB w="6350" cap="flat" cmpd="sng" algn="ctr">
-                      <a:solidFill>
-                        <a:srgbClr val="D5DBE3"/>
-                      </a:solidFill>
-                      <a:prstDash val="solid"/>
-                      <a:round/>
-                      <a:headEnd type="none" w="med" len="med"/>
-                      <a:tailEnd type="none" w="med" len="med"/>
-                    </a:lnB>
-                    <a:solidFill>
-                      <a:srgbClr val="FFFFFF"/>
-                    </a:solidFill>
-                  </a:tcPr>
-                </a:tc>
-                <a:tc>
-                  <a:txBody>
-                    <a:bodyPr/>
-                    <a:lstStyle/>
-                    <a:p>
-                      <a:pPr algn="l" indent="0" marL="0">
-                        <a:lnSpc>
-                          <a:spcPct val="110000"/>
-                        </a:lnSpc>
-                        <a:buNone/>
-                      </a:pPr>
-                      <a:r>
-                        <a:rPr lang="en-US" sz="1200" dirty="0">
-                          <a:solidFill>
-                            <a:srgbClr val="24313F"/>
-                          </a:solidFill>
-                          <a:latin typeface="Malgun Gothic" pitchFamily="34" charset="0"/>
-                          <a:ea typeface="Malgun Gothic" pitchFamily="34" charset="-122"/>
-                          <a:cs typeface="Malgun Gothic" pitchFamily="34" charset="-120"/>
-                        </a:rPr>
-                        <a:t>차선 유지, 교차로 정지·회전, 앞차에 맞춘 감속. 네트워크가 끊기면 6초 뒤 정지하는 안전장치</a:t>
-                      </a:r>
-                      <a:endParaRPr lang="en-US" sz="1200" dirty="0">
-                        <a:latin typeface="Malgun Gothic" charset="0"/>
-                        <a:ea typeface="Malgun Gothic" charset="0"/>
-                        <a:cs typeface="Malgun Gothic" charset="0"/>
-                      </a:endParaRPr>
-                    </a:p>
-                  </a:txBody>
-                  <a:tcPr marL="101600" marR="101600" marT="76200" marB="76200" anchor="ctr">
-                    <a:lnL w="6350" cap="flat" cmpd="sng" algn="ctr">
-                      <a:solidFill>
-                        <a:srgbClr val="D5DBE3"/>
-                      </a:solidFill>
-                      <a:prstDash val="solid"/>
-                      <a:round/>
-                      <a:headEnd type="none" w="med" len="med"/>
-                      <a:tailEnd type="none" w="med" len="med"/>
-                    </a:lnL>
-                    <a:lnR w="6350" cap="flat" cmpd="sng" algn="ctr">
-                      <a:solidFill>
-                        <a:srgbClr val="D5DBE3"/>
-                      </a:solidFill>
-                      <a:prstDash val="solid"/>
-                      <a:round/>
-                      <a:headEnd type="none" w="med" len="med"/>
-                      <a:tailEnd type="none" w="med" len="med"/>
-                    </a:lnR>
-                    <a:lnT w="6350" cap="flat" cmpd="sng" algn="ctr">
-                      <a:solidFill>
-                        <a:srgbClr val="D5DBE3"/>
-                      </a:solidFill>
-                      <a:prstDash val="solid"/>
-                      <a:round/>
-                      <a:headEnd type="none" w="med" len="med"/>
-                      <a:tailEnd type="none" w="med" len="med"/>
-                    </a:lnT>
-                    <a:lnB w="6350" cap="flat" cmpd="sng" algn="ctr">
-                      <a:solidFill>
-                        <a:srgbClr val="D5DBE3"/>
-                      </a:solidFill>
-                      <a:prstDash val="solid"/>
-                      <a:round/>
-                      <a:headEnd type="none" w="med" len="med"/>
-                      <a:tailEnd type="none" w="med" len="med"/>
-                    </a:lnB>
-                    <a:solidFill>
-                      <a:srgbClr val="FFFFFF"/>
-                    </a:solidFill>
-                  </a:tcPr>
-                </a:tc>
-              </a:tr>
-              <a:tr h="0">
-                <a:tc>
-                  <a:txBody>
-                    <a:bodyPr/>
-                    <a:lstStyle/>
-                    <a:p>
-                      <a:pPr algn="l" indent="0" marL="0">
-                        <a:lnSpc>
-                          <a:spcPct val="110000"/>
-                        </a:lnSpc>
-                        <a:buNone/>
-                      </a:pPr>
-                      <a:r>
-                        <a:rPr lang="en-US" sz="1200" b="1" dirty="0">
-                          <a:solidFill>
-                            <a:srgbClr val="24313F"/>
-                          </a:solidFill>
-                          <a:latin typeface="Malgun Gothic" pitchFamily="34" charset="0"/>
-                          <a:ea typeface="Malgun Gothic" pitchFamily="34" charset="-122"/>
-                          <a:cs typeface="Malgun Gothic" pitchFamily="34" charset="-120"/>
-                        </a:rPr>
-                        <a:t>② navigation(CFG)·VQA 실시간 반영</a:t>
-                      </a:r>
-                      <a:endParaRPr lang="en-US" sz="1200" dirty="0">
-                        <a:latin typeface="Malgun Gothic" charset="0"/>
-                        <a:ea typeface="Malgun Gothic" charset="0"/>
-                        <a:cs typeface="Malgun Gothic" charset="0"/>
-                      </a:endParaRPr>
-                    </a:p>
-                  </a:txBody>
-                  <a:tcPr marL="101600" marR="101600" marT="76200" marB="76200" anchor="ctr">
-                    <a:lnL w="6350" cap="flat" cmpd="sng" algn="ctr">
-                      <a:solidFill>
-                        <a:srgbClr val="D5DBE3"/>
-                      </a:solidFill>
-                      <a:prstDash val="solid"/>
-                      <a:round/>
-                      <a:headEnd type="none" w="med" len="med"/>
-                      <a:tailEnd type="none" w="med" len="med"/>
-                    </a:lnL>
-                    <a:lnR w="6350" cap="flat" cmpd="sng" algn="ctr">
-                      <a:solidFill>
-                        <a:srgbClr val="D5DBE3"/>
-                      </a:solidFill>
-                      <a:prstDash val="solid"/>
-                      <a:round/>
-                      <a:headEnd type="none" w="med" len="med"/>
-                      <a:tailEnd type="none" w="med" len="med"/>
-                    </a:lnR>
-                    <a:lnT w="6350" cap="flat" cmpd="sng" algn="ctr">
-                      <a:solidFill>
-                        <a:srgbClr val="D5DBE3"/>
-                      </a:solidFill>
-                      <a:prstDash val="solid"/>
-                      <a:round/>
-                      <a:headEnd type="none" w="med" len="med"/>
-                      <a:tailEnd type="none" w="med" len="med"/>
-                    </a:lnT>
-                    <a:lnB w="6350" cap="flat" cmpd="sng" algn="ctr">
-                      <a:solidFill>
-                        <a:srgbClr val="D5DBE3"/>
-                      </a:solidFill>
-                      <a:prstDash val="solid"/>
-                      <a:round/>
-                      <a:headEnd type="none" w="med" len="med"/>
-                      <a:tailEnd type="none" w="med" len="med"/>
-                    </a:lnB>
-                    <a:solidFill>
-                      <a:srgbClr val="F3F5F8"/>
-                    </a:solidFill>
-                  </a:tcPr>
-                </a:tc>
-                <a:tc>
-                  <a:txBody>
-                    <a:bodyPr/>
-                    <a:lstStyle/>
-                    <a:p>
-                      <a:pPr algn="l" indent="0" marL="0">
-                        <a:lnSpc>
-                          <a:spcPct val="110000"/>
-                        </a:lnSpc>
-                        <a:buNone/>
-                      </a:pPr>
-                      <a:r>
-                        <a:rPr lang="en-US" sz="1200" dirty="0">
-                          <a:solidFill>
-                            <a:srgbClr val="24313F"/>
-                          </a:solidFill>
-                          <a:latin typeface="Malgun Gothic" pitchFamily="34" charset="0"/>
-                          <a:ea typeface="Malgun Gothic" pitchFamily="34" charset="-122"/>
-                          <a:cs typeface="Malgun Gothic" pitchFamily="34" charset="-120"/>
-                        </a:rPr>
-                        <a:t>주행 중 창에 자연어 지시("Turn right in 30m")와 CFG 가중치(1.5) 입력 → 다음 추론부터 반영. 차량을 세우고 "What is ahead?" 질문 → 답 표시</a:t>
-                      </a:r>
-                      <a:endParaRPr lang="en-US" sz="1200" dirty="0">
-                        <a:latin typeface="Malgun Gothic" charset="0"/>
-                        <a:ea typeface="Malgun Gothic" charset="0"/>
-                        <a:cs typeface="Malgun Gothic" charset="0"/>
-                      </a:endParaRPr>
-                    </a:p>
-                  </a:txBody>
-                  <a:tcPr marL="101600" marR="101600" marT="76200" marB="76200" anchor="ctr">
-                    <a:lnL w="6350" cap="flat" cmpd="sng" algn="ctr">
-                      <a:solidFill>
-                        <a:srgbClr val="D5DBE3"/>
-                      </a:solidFill>
-                      <a:prstDash val="solid"/>
-                      <a:round/>
-                      <a:headEnd type="none" w="med" len="med"/>
-                      <a:tailEnd type="none" w="med" len="med"/>
-                    </a:lnL>
-                    <a:lnR w="6350" cap="flat" cmpd="sng" algn="ctr">
-                      <a:solidFill>
-                        <a:srgbClr val="D5DBE3"/>
-                      </a:solidFill>
-                      <a:prstDash val="solid"/>
-                      <a:round/>
-                      <a:headEnd type="none" w="med" len="med"/>
-                      <a:tailEnd type="none" w="med" len="med"/>
-                    </a:lnR>
-                    <a:lnT w="6350" cap="flat" cmpd="sng" algn="ctr">
-                      <a:solidFill>
-                        <a:srgbClr val="D5DBE3"/>
-                      </a:solidFill>
-                      <a:prstDash val="solid"/>
-                      <a:round/>
-                      <a:headEnd type="none" w="med" len="med"/>
-                      <a:tailEnd type="none" w="med" len="med"/>
-                    </a:lnT>
-                    <a:lnB w="6350" cap="flat" cmpd="sng" algn="ctr">
-                      <a:solidFill>
-                        <a:srgbClr val="D5DBE3"/>
-                      </a:solidFill>
-                      <a:prstDash val="solid"/>
-                      <a:round/>
-                      <a:headEnd type="none" w="med" len="med"/>
-                      <a:tailEnd type="none" w="med" len="med"/>
-                    </a:lnB>
-                    <a:solidFill>
-                      <a:srgbClr val="F3F5F8"/>
-                    </a:solidFill>
-                  </a:tcPr>
-                </a:tc>
-                <a:tc>
-                  <a:txBody>
-                    <a:bodyPr/>
-                    <a:lstStyle/>
-                    <a:p>
-                      <a:pPr algn="l" indent="0" marL="0">
-                        <a:lnSpc>
-                          <a:spcPct val="110000"/>
-                        </a:lnSpc>
-                        <a:buNone/>
-                      </a:pPr>
-                      <a:r>
-                        <a:rPr lang="en-US" sz="1200" dirty="0">
-                          <a:solidFill>
-                            <a:srgbClr val="24313F"/>
-                          </a:solidFill>
-                          <a:latin typeface="Malgun Gothic" pitchFamily="34" charset="0"/>
-                          <a:ea typeface="Malgun Gothic" pitchFamily="34" charset="-122"/>
-                          <a:cs typeface="Malgun Gothic" pitchFamily="34" charset="-120"/>
-                        </a:rPr>
-                        <a:t>지시 후 궤적 변화, 가중치 1.0 vs 1.5 차이, 질문 후 수 초 내 답. 모든 조작은 A에서, B는 서버만 켜 둔 채 변화 없음</a:t>
-                      </a:r>
-                      <a:endParaRPr lang="en-US" sz="1200" dirty="0">
-                        <a:latin typeface="Malgun Gothic" charset="0"/>
-                        <a:ea typeface="Malgun Gothic" charset="0"/>
-                        <a:cs typeface="Malgun Gothic" charset="0"/>
-                      </a:endParaRPr>
-                    </a:p>
-                  </a:txBody>
-                  <a:tcPr marL="101600" marR="101600" marT="76200" marB="76200" anchor="ctr">
-                    <a:lnL w="6350" cap="flat" cmpd="sng" algn="ctr">
-                      <a:solidFill>
-                        <a:srgbClr val="D5DBE3"/>
-                      </a:solidFill>
-                      <a:prstDash val="solid"/>
-                      <a:round/>
-                      <a:headEnd type="none" w="med" len="med"/>
-                      <a:tailEnd type="none" w="med" len="med"/>
-                    </a:lnL>
-                    <a:lnR w="6350" cap="flat" cmpd="sng" algn="ctr">
-                      <a:solidFill>
-                        <a:srgbClr val="D5DBE3"/>
-                      </a:solidFill>
-                      <a:prstDash val="solid"/>
-                      <a:round/>
-                      <a:headEnd type="none" w="med" len="med"/>
-                      <a:tailEnd type="none" w="med" len="med"/>
-                    </a:lnR>
-                    <a:lnT w="6350" cap="flat" cmpd="sng" algn="ctr">
-                      <a:solidFill>
-                        <a:srgbClr val="D5DBE3"/>
-                      </a:solidFill>
-                      <a:prstDash val="solid"/>
-                      <a:round/>
-                      <a:headEnd type="none" w="med" len="med"/>
-                      <a:tailEnd type="none" w="med" len="med"/>
-                    </a:lnT>
-                    <a:lnB w="6350" cap="flat" cmpd="sng" algn="ctr">
-                      <a:solidFill>
-                        <a:srgbClr val="D5DBE3"/>
-                      </a:solidFill>
-                      <a:prstDash val="solid"/>
-                      <a:round/>
-                      <a:headEnd type="none" w="med" len="med"/>
-                      <a:tailEnd type="none" w="med" len="med"/>
-                    </a:lnB>
-                    <a:solidFill>
-                      <a:srgbClr val="F3F5F8"/>
-                    </a:solidFill>
-                  </a:tcPr>
-                </a:tc>
-              </a:tr>
-              <a:tr h="0">
-                <a:tc>
-                  <a:txBody>
-                    <a:bodyPr/>
-                    <a:lstStyle/>
-                    <a:p>
-                      <a:pPr algn="l" indent="0" marL="0">
-                        <a:lnSpc>
-                          <a:spcPct val="110000"/>
-                        </a:lnSpc>
-                        <a:buNone/>
-                      </a:pPr>
-                      <a:r>
-                        <a:rPr lang="en-US" sz="1200" b="1" dirty="0">
-                          <a:solidFill>
-                            <a:srgbClr val="24313F"/>
-                          </a:solidFill>
-                          <a:latin typeface="Malgun Gothic" pitchFamily="34" charset="0"/>
-                          <a:ea typeface="Malgun Gothic" pitchFamily="34" charset="-122"/>
-                          <a:cs typeface="Malgun Gothic" pitchFamily="34" charset="-120"/>
-                        </a:rPr>
-                        <a:t>③ 실측 자원 데이터로 병목 분석</a:t>
-                      </a:r>
-                      <a:endParaRPr lang="en-US" sz="1200" dirty="0">
-                        <a:latin typeface="Malgun Gothic" charset="0"/>
-                        <a:ea typeface="Malgun Gothic" charset="0"/>
-                        <a:cs typeface="Malgun Gothic" charset="0"/>
-                      </a:endParaRPr>
-                    </a:p>
-                  </a:txBody>
-                  <a:tcPr marL="101600" marR="101600" marT="76200" marB="76200" anchor="ctr">
-                    <a:lnL w="6350" cap="flat" cmpd="sng" algn="ctr">
-                      <a:solidFill>
-                        <a:srgbClr val="D5DBE3"/>
-                      </a:solidFill>
-                      <a:prstDash val="solid"/>
-                      <a:round/>
-                      <a:headEnd type="none" w="med" len="med"/>
-                      <a:tailEnd type="none" w="med" len="med"/>
-                    </a:lnL>
-                    <a:lnR w="6350" cap="flat" cmpd="sng" algn="ctr">
-                      <a:solidFill>
-                        <a:srgbClr val="D5DBE3"/>
-                      </a:solidFill>
-                      <a:prstDash val="solid"/>
-                      <a:round/>
-                      <a:headEnd type="none" w="med" len="med"/>
-                      <a:tailEnd type="none" w="med" len="med"/>
-                    </a:lnR>
-                    <a:lnT w="6350" cap="flat" cmpd="sng" algn="ctr">
-                      <a:solidFill>
-                        <a:srgbClr val="D5DBE3"/>
-                      </a:solidFill>
-                      <a:prstDash val="solid"/>
-                      <a:round/>
-                      <a:headEnd type="none" w="med" len="med"/>
-                      <a:tailEnd type="none" w="med" len="med"/>
-                    </a:lnT>
-                    <a:lnB w="6350" cap="flat" cmpd="sng" algn="ctr">
-                      <a:solidFill>
-                        <a:srgbClr val="D5DBE3"/>
-                      </a:solidFill>
-                      <a:prstDash val="solid"/>
-                      <a:round/>
-                      <a:headEnd type="none" w="med" len="med"/>
-                      <a:tailEnd type="none" w="med" len="med"/>
-                    </a:lnB>
-                    <a:solidFill>
-                      <a:srgbClr val="FFFFFF"/>
-                    </a:solidFill>
-                  </a:tcPr>
-                </a:tc>
-                <a:tc>
-                  <a:txBody>
-                    <a:bodyPr/>
-                    <a:lstStyle/>
-                    <a:p>
-                      <a:pPr algn="l" indent="0" marL="0">
-                        <a:lnSpc>
-                          <a:spcPct val="110000"/>
-                        </a:lnSpc>
-                        <a:buNone/>
-                      </a:pPr>
-                      <a:r>
-                        <a:rPr lang="en-US" sz="1200" dirty="0">
-                          <a:solidFill>
-                            <a:srgbClr val="24313F"/>
-                          </a:solidFill>
-                          <a:latin typeface="Malgun Gothic" pitchFamily="34" charset="0"/>
-                          <a:ea typeface="Malgun Gothic" pitchFamily="34" charset="-122"/>
-                          <a:cs typeface="Malgun Gothic" pitchFamily="34" charset="-120"/>
-                        </a:rPr>
-                        <a:t>실행마다 A·B 양쪽에서 자동 기록: 요청 왕복 시간, 서버 추론 시간, 요청 크기, 업로드 대역폭, 궤적 나이, GPU 메모리·사용률, CPU</a:t>
-                      </a:r>
-                      <a:endParaRPr lang="en-US" sz="1200" dirty="0">
-                        <a:latin typeface="Malgun Gothic" charset="0"/>
-                        <a:ea typeface="Malgun Gothic" charset="0"/>
-                        <a:cs typeface="Malgun Gothic" charset="0"/>
-                      </a:endParaRPr>
-                    </a:p>
-                  </a:txBody>
-                  <a:tcPr marL="101600" marR="101600" marT="76200" marB="76200" anchor="ctr">
-                    <a:lnL w="6350" cap="flat" cmpd="sng" algn="ctr">
-                      <a:solidFill>
-                        <a:srgbClr val="D5DBE3"/>
-                      </a:solidFill>
-                      <a:prstDash val="solid"/>
-                      <a:round/>
-                      <a:headEnd type="none" w="med" len="med"/>
-                      <a:tailEnd type="none" w="med" len="med"/>
-                    </a:lnL>
-                    <a:lnR w="6350" cap="flat" cmpd="sng" algn="ctr">
-                      <a:solidFill>
-                        <a:srgbClr val="D5DBE3"/>
-                      </a:solidFill>
-                      <a:prstDash val="solid"/>
-                      <a:round/>
-                      <a:headEnd type="none" w="med" len="med"/>
-                      <a:tailEnd type="none" w="med" len="med"/>
-                    </a:lnR>
-                    <a:lnT w="6350" cap="flat" cmpd="sng" algn="ctr">
-                      <a:solidFill>
-                        <a:srgbClr val="D5DBE3"/>
-                      </a:solidFill>
-                      <a:prstDash val="solid"/>
-                      <a:round/>
-                      <a:headEnd type="none" w="med" len="med"/>
-                      <a:tailEnd type="none" w="med" len="med"/>
-                    </a:lnT>
-                    <a:lnB w="6350" cap="flat" cmpd="sng" algn="ctr">
-                      <a:solidFill>
-                        <a:srgbClr val="D5DBE3"/>
-                      </a:solidFill>
-                      <a:prstDash val="solid"/>
-                      <a:round/>
-                      <a:headEnd type="none" w="med" len="med"/>
-                      <a:tailEnd type="none" w="med" len="med"/>
-                    </a:lnB>
-                    <a:solidFill>
-                      <a:srgbClr val="FFFFFF"/>
-                    </a:solidFill>
-                  </a:tcPr>
-                </a:tc>
-                <a:tc>
-                  <a:txBody>
-                    <a:bodyPr/>
-                    <a:lstStyle/>
-                    <a:p>
-                      <a:pPr algn="l" indent="0" marL="0">
-                        <a:lnSpc>
-                          <a:spcPct val="110000"/>
-                        </a:lnSpc>
-                        <a:buNone/>
-                      </a:pPr>
-                      <a:r>
-                        <a:rPr lang="en-US" sz="1200" dirty="0">
-                          <a:solidFill>
-                            <a:srgbClr val="24313F"/>
-                          </a:solidFill>
-                          <a:latin typeface="Malgun Gothic" pitchFamily="34" charset="0"/>
-                          <a:ea typeface="Malgun Gothic" pitchFamily="34" charset="-122"/>
-                          <a:cs typeface="Malgun Gothic" pitchFamily="34" charset="-120"/>
-                        </a:rPr>
-                        <a:t>왕복 시간 − 서버 처리 시간 = 네트워크+인코딩 오버헤드. 예상: 모델 추론(수 초) ≫ 인코딩(0.1~0.3 s) ≫ 네트워크(&lt; 1 ms)</a:t>
-                      </a:r>
-                      <a:endParaRPr lang="en-US" sz="1200" dirty="0">
-                        <a:latin typeface="Malgun Gothic" charset="0"/>
-                        <a:ea typeface="Malgun Gothic" charset="0"/>
-                        <a:cs typeface="Malgun Gothic" charset="0"/>
-                      </a:endParaRPr>
-                    </a:p>
-                  </a:txBody>
-                  <a:tcPr marL="101600" marR="101600" marT="76200" marB="76200" anchor="ctr">
-                    <a:lnL w="6350" cap="flat" cmpd="sng" algn="ctr">
-                      <a:solidFill>
-                        <a:srgbClr val="D5DBE3"/>
-                      </a:solidFill>
-                      <a:prstDash val="solid"/>
-                      <a:round/>
-                      <a:headEnd type="none" w="med" len="med"/>
-                      <a:tailEnd type="none" w="med" len="med"/>
-                    </a:lnL>
-                    <a:lnR w="6350" cap="flat" cmpd="sng" algn="ctr">
-                      <a:solidFill>
-                        <a:srgbClr val="D5DBE3"/>
-                      </a:solidFill>
-                      <a:prstDash val="solid"/>
-                      <a:round/>
-                      <a:headEnd type="none" w="med" len="med"/>
-                      <a:tailEnd type="none" w="med" len="med"/>
-                    </a:lnR>
-                    <a:lnT w="6350" cap="flat" cmpd="sng" algn="ctr">
-                      <a:solidFill>
-                        <a:srgbClr val="D5DBE3"/>
-                      </a:solidFill>
-                      <a:prstDash val="solid"/>
-                      <a:round/>
-                      <a:headEnd type="none" w="med" len="med"/>
-                      <a:tailEnd type="none" w="med" len="med"/>
-                    </a:lnT>
-                    <a:lnB w="6350" cap="flat" cmpd="sng" algn="ctr">
-                      <a:solidFill>
-                        <a:srgbClr val="D5DBE3"/>
-                      </a:solidFill>
-                      <a:prstDash val="solid"/>
-                      <a:round/>
-                      <a:headEnd type="none" w="med" len="med"/>
-                      <a:tailEnd type="none" w="med" len="med"/>
-                    </a:lnB>
-                    <a:solidFill>
-                      <a:srgbClr val="FFFFFF"/>
-                    </a:solidFill>
-                  </a:tcPr>
-                </a:tc>
-              </a:tr>
-            </a:tbl>
-          </a:graphicData>
-        </a:graphic>
-      </p:graphicFrame>
-      <p:sp>
-        <p:nvSpPr>
-          <p:cNvPr id="7" name="Text 4"/>
-          <p:cNvSpPr txBox="1"/>
-          <p:nvPr/>
-        </p:nvSpPr>
-        <p:spPr>
-          <a:xfrm>
-            <a:off x="548640" y="4892040"/>
-            <a:ext cx="11094415" cy="347472"/>
+      <p:sp>
+        <p:nvSpPr>
+          <p:cNvPr id="6" name="Text 4"/>
+          <p:cNvSpPr txBox="1"/>
+          <p:nvPr/>
+        </p:nvSpPr>
+        <p:spPr>
+          <a:xfrm>
+            <a:off x="548640" y="1325880"/>
+            <a:ext cx="822960" cy="822960"/>
+          </a:xfrm>
+          <a:prstGeom prst="rect">
+            <a:avLst/>
+          </a:prstGeom>
+          <a:noFill/>
+          <a:ln/>
+        </p:spPr>
+        <p:txBody>
+          <a:bodyPr wrap="square" lIns="0" tIns="0" rIns="0" bIns="0" rtlCol="0" anchor="t"/>
+          <a:lstStyle/>
+          <a:p>
+            <a:pPr indent="0" marL="0">
+              <a:buNone/>
+            </a:pPr>
+            <a:r>
+              <a:rPr lang="en-US" sz="4400" b="1" dirty="0">
+                <a:solidFill>
+                  <a:srgbClr val="2A6FDB"/>
+                </a:solidFill>
+                <a:latin typeface="Malgun Gothic" pitchFamily="34" charset="0"/>
+                <a:ea typeface="Malgun Gothic" pitchFamily="34" charset="-122"/>
+                <a:cs typeface="Malgun Gothic" pitchFamily="34" charset="-120"/>
+              </a:rPr>
+              <a:t>1</a:t>
+            </a:r>
+            <a:endParaRPr lang="en-US" sz="4400" dirty="0"/>
+          </a:p>
+        </p:txBody>
+      </p:sp>
+      <p:sp>
+        <p:nvSpPr>
+          <p:cNvPr id="7" name="Text 5"/>
+          <p:cNvSpPr txBox="1"/>
+          <p:nvPr/>
+        </p:nvSpPr>
+        <p:spPr>
+          <a:xfrm>
+            <a:off x="1417320" y="1417320"/>
+            <a:ext cx="2585618" cy="384048"/>
           </a:xfrm>
           <a:prstGeom prst="rect">
             <a:avLst/>
@@ -7748,7 +7714,7 @@
               <a:buNone/>
             </a:pPr>
             <a:r>
-              <a:rPr lang="en-US" sz="1400" b="1" dirty="0">
+              <a:rPr lang="en-US" sz="1600" b="1" dirty="0">
                 <a:solidFill>
                   <a:srgbClr val="1B2A41"/>
                 </a:solidFill>
@@ -7756,22 +7722,22 @@
                 <a:ea typeface="Malgun Gothic" pitchFamily="34" charset="-122"/>
                 <a:cs typeface="Malgun Gothic" pitchFamily="34" charset="-120"/>
               </a:rPr>
-              <a:t>진행 순서</a:t>
-            </a:r>
-            <a:endParaRPr lang="en-US" sz="1400" dirty="0"/>
-          </a:p>
-        </p:txBody>
-      </p:sp>
-      <p:sp>
-        <p:nvSpPr>
-          <p:cNvPr id="8" name="Text 5"/>
-          <p:cNvSpPr txBox="1"/>
-          <p:nvPr/>
-        </p:nvSpPr>
-        <p:spPr>
-          <a:xfrm>
-            <a:off x="548640" y="5276088"/>
-            <a:ext cx="11094415" cy="896112"/>
+              <a:t>두 인스턴스 closed-loop 자율주행</a:t>
+            </a:r>
+            <a:endParaRPr lang="en-US" sz="1600" dirty="0"/>
+          </a:p>
+        </p:txBody>
+      </p:sp>
+      <p:sp>
+        <p:nvSpPr>
+          <p:cNvPr id="8" name="Text 6"/>
+          <p:cNvSpPr txBox="1"/>
+          <p:nvPr/>
+        </p:nvSpPr>
+        <p:spPr>
+          <a:xfrm>
+            <a:off x="1417320" y="1856232"/>
+            <a:ext cx="2585618" cy="2670048"/>
           </a:xfrm>
           <a:prstGeom prst="rect">
             <a:avLst/>
@@ -7788,7 +7754,7 @@
                 <a:spcPct val="115000"/>
               </a:lnSpc>
               <a:spcAft>
-                <a:spcPts val="900"/>
+                <a:spcPts val="800"/>
               </a:spcAft>
               <a:buNone/>
             </a:pPr>
@@ -7801,9 +7767,1053 @@
                 <a:ea typeface="Malgun Gothic" pitchFamily="34" charset="-122"/>
                 <a:cs typeface="Malgun Gothic" pitchFamily="34" charset="-120"/>
               </a:rPr>
-              <a:t>open-loop(녹화 데이터 재생으로 원격 추론 경로 검증)  →  closed-loop(모델이 운전)  →  navigation + CFG(주행 중 지시 입력)  →  VQA(정차 후 질문)  →  측정 결과(요약 표·그래프)</a:t>
+              <a:t>CARLA는 A, 모델은 B. 비동기 모드로 시뮬레이터는 10 Hz로 계속 돌고 약 1초마다 새 궤적으로 교체</a:t>
             </a:r>
             <a:endParaRPr lang="en-US" sz="1200" dirty="0"/>
+          </a:p>
+          <a:p>
+            <a:pPr indent="0" marL="0">
+              <a:lnSpc>
+                <a:spcPct val="115000"/>
+              </a:lnSpc>
+              <a:spcAft>
+                <a:spcPts val="800"/>
+              </a:spcAft>
+              <a:buNone/>
+            </a:pPr>
+            <a:r>
+              <a:rPr lang="en-US" sz="1200" dirty="0">
+                <a:solidFill>
+                  <a:srgbClr val="24313F"/>
+                </a:solidFill>
+                <a:latin typeface="Malgun Gothic" pitchFamily="34" charset="0"/>
+                <a:ea typeface="Malgun Gothic" pitchFamily="34" charset="-122"/>
+                <a:cs typeface="Malgun Gothic" pitchFamily="34" charset="-120"/>
+              </a:rPr>
+              <a:t>화면: 카메라 영상 위 궤적(빨간 선)과 추론 근거(CoT)</a:t>
+            </a:r>
+            <a:endParaRPr lang="en-US" sz="1200" dirty="0"/>
+          </a:p>
+          <a:p>
+            <a:pPr indent="0" marL="0">
+              <a:lnSpc>
+                <a:spcPct val="115000"/>
+              </a:lnSpc>
+              <a:spcAft>
+                <a:spcPts val="800"/>
+              </a:spcAft>
+              <a:buNone/>
+            </a:pPr>
+            <a:r>
+              <a:rPr lang="en-US" sz="1200" dirty="0">
+                <a:solidFill>
+                  <a:srgbClr val="24313F"/>
+                </a:solidFill>
+                <a:latin typeface="Malgun Gothic" pitchFamily="34" charset="0"/>
+                <a:ea typeface="Malgun Gothic" pitchFamily="34" charset="-122"/>
+                <a:cs typeface="Malgun Gothic" pitchFamily="34" charset="-120"/>
+              </a:rPr>
+              <a:t>확인: 차선 유지, 교차로 정지·회전, 앞차에 맞춘 감속. 네트워크가 끊기면 6초 뒤 정지</a:t>
+            </a:r>
+            <a:endParaRPr lang="en-US" sz="1200" dirty="0"/>
+          </a:p>
+        </p:txBody>
+      </p:sp>
+      <p:sp>
+        <p:nvSpPr>
+          <p:cNvPr id="9" name="Text 7"/>
+          <p:cNvSpPr txBox="1"/>
+          <p:nvPr/>
+        </p:nvSpPr>
+        <p:spPr>
+          <a:xfrm>
+            <a:off x="4368698" y="1325880"/>
+            <a:ext cx="822960" cy="822960"/>
+          </a:xfrm>
+          <a:prstGeom prst="rect">
+            <a:avLst/>
+          </a:prstGeom>
+          <a:noFill/>
+          <a:ln/>
+        </p:spPr>
+        <p:txBody>
+          <a:bodyPr wrap="square" lIns="0" tIns="0" rIns="0" bIns="0" rtlCol="0" anchor="t"/>
+          <a:lstStyle/>
+          <a:p>
+            <a:pPr indent="0" marL="0">
+              <a:buNone/>
+            </a:pPr>
+            <a:r>
+              <a:rPr lang="en-US" sz="4400" b="1" dirty="0">
+                <a:solidFill>
+                  <a:srgbClr val="E0762B"/>
+                </a:solidFill>
+                <a:latin typeface="Malgun Gothic" pitchFamily="34" charset="0"/>
+                <a:ea typeface="Malgun Gothic" pitchFamily="34" charset="-122"/>
+                <a:cs typeface="Malgun Gothic" pitchFamily="34" charset="-120"/>
+              </a:rPr>
+              <a:t>2</a:t>
+            </a:r>
+            <a:endParaRPr lang="en-US" sz="4400" dirty="0"/>
+          </a:p>
+        </p:txBody>
+      </p:sp>
+      <p:sp>
+        <p:nvSpPr>
+          <p:cNvPr id="10" name="Text 8"/>
+          <p:cNvSpPr txBox="1"/>
+          <p:nvPr/>
+        </p:nvSpPr>
+        <p:spPr>
+          <a:xfrm>
+            <a:off x="5237378" y="1417320"/>
+            <a:ext cx="2585618" cy="384048"/>
+          </a:xfrm>
+          <a:prstGeom prst="rect">
+            <a:avLst/>
+          </a:prstGeom>
+          <a:noFill/>
+          <a:ln/>
+        </p:spPr>
+        <p:txBody>
+          <a:bodyPr wrap="square" lIns="0" tIns="0" rIns="0" bIns="0" rtlCol="0" anchor="ctr"/>
+          <a:lstStyle/>
+          <a:p>
+            <a:pPr indent="0" marL="0">
+              <a:buNone/>
+            </a:pPr>
+            <a:r>
+              <a:rPr lang="en-US" sz="1600" b="1" dirty="0">
+                <a:solidFill>
+                  <a:srgbClr val="1B2A41"/>
+                </a:solidFill>
+                <a:latin typeface="Malgun Gothic" pitchFamily="34" charset="0"/>
+                <a:ea typeface="Malgun Gothic" pitchFamily="34" charset="-122"/>
+                <a:cs typeface="Malgun Gothic" pitchFamily="34" charset="-120"/>
+              </a:rPr>
+              <a:t>navigation(CFG)·VQA 실시간 반영</a:t>
+            </a:r>
+            <a:endParaRPr lang="en-US" sz="1600" dirty="0"/>
+          </a:p>
+        </p:txBody>
+      </p:sp>
+      <p:sp>
+        <p:nvSpPr>
+          <p:cNvPr id="11" name="Text 9"/>
+          <p:cNvSpPr txBox="1"/>
+          <p:nvPr/>
+        </p:nvSpPr>
+        <p:spPr>
+          <a:xfrm>
+            <a:off x="5237378" y="1856232"/>
+            <a:ext cx="2585618" cy="2670048"/>
+          </a:xfrm>
+          <a:prstGeom prst="rect">
+            <a:avLst/>
+          </a:prstGeom>
+          <a:noFill/>
+          <a:ln/>
+        </p:spPr>
+        <p:txBody>
+          <a:bodyPr wrap="square" lIns="0" tIns="0" rIns="0" bIns="0" rtlCol="0" anchor="t"/>
+          <a:lstStyle/>
+          <a:p>
+            <a:pPr indent="0" marL="0">
+              <a:lnSpc>
+                <a:spcPct val="115000"/>
+              </a:lnSpc>
+              <a:spcAft>
+                <a:spcPts val="800"/>
+              </a:spcAft>
+              <a:buNone/>
+            </a:pPr>
+            <a:r>
+              <a:rPr lang="en-US" sz="1200" dirty="0">
+                <a:solidFill>
+                  <a:srgbClr val="24313F"/>
+                </a:solidFill>
+                <a:latin typeface="Malgun Gothic" pitchFamily="34" charset="0"/>
+                <a:ea typeface="Malgun Gothic" pitchFamily="34" charset="-122"/>
+                <a:cs typeface="Malgun Gothic" pitchFamily="34" charset="-120"/>
+              </a:rPr>
+              <a:t>주행 중 창에 자연어 지시("Turn right in 30m")와 CFG 가중치(1.5) 입력 → 다음 추론부터 반영</a:t>
+            </a:r>
+            <a:endParaRPr lang="en-US" sz="1200" dirty="0"/>
+          </a:p>
+          <a:p>
+            <a:pPr indent="0" marL="0">
+              <a:lnSpc>
+                <a:spcPct val="115000"/>
+              </a:lnSpc>
+              <a:spcAft>
+                <a:spcPts val="800"/>
+              </a:spcAft>
+              <a:buNone/>
+            </a:pPr>
+            <a:r>
+              <a:rPr lang="en-US" sz="1200" dirty="0">
+                <a:solidFill>
+                  <a:srgbClr val="24313F"/>
+                </a:solidFill>
+                <a:latin typeface="Malgun Gothic" pitchFamily="34" charset="0"/>
+                <a:ea typeface="Malgun Gothic" pitchFamily="34" charset="-122"/>
+                <a:cs typeface="Malgun Gothic" pitchFamily="34" charset="-120"/>
+              </a:rPr>
+              <a:t>차량을 세우고 "What is ahead?" 질문 → 수 초 내 답 표시</a:t>
+            </a:r>
+            <a:endParaRPr lang="en-US" sz="1200" dirty="0"/>
+          </a:p>
+          <a:p>
+            <a:pPr indent="0" marL="0">
+              <a:lnSpc>
+                <a:spcPct val="115000"/>
+              </a:lnSpc>
+              <a:spcAft>
+                <a:spcPts val="800"/>
+              </a:spcAft>
+              <a:buNone/>
+            </a:pPr>
+            <a:r>
+              <a:rPr lang="en-US" sz="1200" dirty="0">
+                <a:solidFill>
+                  <a:srgbClr val="24313F"/>
+                </a:solidFill>
+                <a:latin typeface="Malgun Gothic" pitchFamily="34" charset="0"/>
+                <a:ea typeface="Malgun Gothic" pitchFamily="34" charset="-122"/>
+                <a:cs typeface="Malgun Gothic" pitchFamily="34" charset="-120"/>
+              </a:rPr>
+              <a:t>확인: 지시 후 궤적 변화, 가중치 1.0 vs 1.5 차이. B는 서버만 켜 둔 채 변화 없음</a:t>
+            </a:r>
+            <a:endParaRPr lang="en-US" sz="1200" dirty="0"/>
+          </a:p>
+        </p:txBody>
+      </p:sp>
+      <p:sp>
+        <p:nvSpPr>
+          <p:cNvPr id="12" name="Text 10"/>
+          <p:cNvSpPr txBox="1"/>
+          <p:nvPr/>
+        </p:nvSpPr>
+        <p:spPr>
+          <a:xfrm>
+            <a:off x="8188757" y="1325880"/>
+            <a:ext cx="822960" cy="822960"/>
+          </a:xfrm>
+          <a:prstGeom prst="rect">
+            <a:avLst/>
+          </a:prstGeom>
+          <a:noFill/>
+          <a:ln/>
+        </p:spPr>
+        <p:txBody>
+          <a:bodyPr wrap="square" lIns="0" tIns="0" rIns="0" bIns="0" rtlCol="0" anchor="t"/>
+          <a:lstStyle/>
+          <a:p>
+            <a:pPr indent="0" marL="0">
+              <a:buNone/>
+            </a:pPr>
+            <a:r>
+              <a:rPr lang="en-US" sz="4400" b="1" dirty="0">
+                <a:solidFill>
+                  <a:srgbClr val="1B2A41"/>
+                </a:solidFill>
+                <a:latin typeface="Malgun Gothic" pitchFamily="34" charset="0"/>
+                <a:ea typeface="Malgun Gothic" pitchFamily="34" charset="-122"/>
+                <a:cs typeface="Malgun Gothic" pitchFamily="34" charset="-120"/>
+              </a:rPr>
+              <a:t>3</a:t>
+            </a:r>
+            <a:endParaRPr lang="en-US" sz="4400" dirty="0"/>
+          </a:p>
+        </p:txBody>
+      </p:sp>
+      <p:sp>
+        <p:nvSpPr>
+          <p:cNvPr id="13" name="Text 11"/>
+          <p:cNvSpPr txBox="1"/>
+          <p:nvPr/>
+        </p:nvSpPr>
+        <p:spPr>
+          <a:xfrm>
+            <a:off x="9057437" y="1417320"/>
+            <a:ext cx="2585618" cy="384048"/>
+          </a:xfrm>
+          <a:prstGeom prst="rect">
+            <a:avLst/>
+          </a:prstGeom>
+          <a:noFill/>
+          <a:ln/>
+        </p:spPr>
+        <p:txBody>
+          <a:bodyPr wrap="square" lIns="0" tIns="0" rIns="0" bIns="0" rtlCol="0" anchor="ctr"/>
+          <a:lstStyle/>
+          <a:p>
+            <a:pPr indent="0" marL="0">
+              <a:buNone/>
+            </a:pPr>
+            <a:r>
+              <a:rPr lang="en-US" sz="1600" b="1" dirty="0">
+                <a:solidFill>
+                  <a:srgbClr val="1B2A41"/>
+                </a:solidFill>
+                <a:latin typeface="Malgun Gothic" pitchFamily="34" charset="0"/>
+                <a:ea typeface="Malgun Gothic" pitchFamily="34" charset="-122"/>
+                <a:cs typeface="Malgun Gothic" pitchFamily="34" charset="-120"/>
+              </a:rPr>
+              <a:t>실측 자원 데이터로 병목 분석</a:t>
+            </a:r>
+            <a:endParaRPr lang="en-US" sz="1600" dirty="0"/>
+          </a:p>
+        </p:txBody>
+      </p:sp>
+      <p:sp>
+        <p:nvSpPr>
+          <p:cNvPr id="14" name="Text 12"/>
+          <p:cNvSpPr txBox="1"/>
+          <p:nvPr/>
+        </p:nvSpPr>
+        <p:spPr>
+          <a:xfrm>
+            <a:off x="9057437" y="1856232"/>
+            <a:ext cx="2585618" cy="2670048"/>
+          </a:xfrm>
+          <a:prstGeom prst="rect">
+            <a:avLst/>
+          </a:prstGeom>
+          <a:noFill/>
+          <a:ln/>
+        </p:spPr>
+        <p:txBody>
+          <a:bodyPr wrap="square" lIns="0" tIns="0" rIns="0" bIns="0" rtlCol="0" anchor="t"/>
+          <a:lstStyle/>
+          <a:p>
+            <a:pPr indent="0" marL="0">
+              <a:lnSpc>
+                <a:spcPct val="115000"/>
+              </a:lnSpc>
+              <a:spcAft>
+                <a:spcPts val="800"/>
+              </a:spcAft>
+              <a:buNone/>
+            </a:pPr>
+            <a:r>
+              <a:rPr lang="en-US" sz="1200" dirty="0">
+                <a:solidFill>
+                  <a:srgbClr val="24313F"/>
+                </a:solidFill>
+                <a:latin typeface="Malgun Gothic" pitchFamily="34" charset="0"/>
+                <a:ea typeface="Malgun Gothic" pitchFamily="34" charset="-122"/>
+                <a:cs typeface="Malgun Gothic" pitchFamily="34" charset="-120"/>
+              </a:rPr>
+              <a:t>A·B 양쪽에서 자동 기록: 요청 왕복 시간, 서버 추론 시간, 요청 크기, 업로드 대역폭, 궤적 나이, GPU 메모리·사용률, CPU</a:t>
+            </a:r>
+            <a:endParaRPr lang="en-US" sz="1200" dirty="0"/>
+          </a:p>
+          <a:p>
+            <a:pPr indent="0" marL="0">
+              <a:lnSpc>
+                <a:spcPct val="115000"/>
+              </a:lnSpc>
+              <a:spcAft>
+                <a:spcPts val="800"/>
+              </a:spcAft>
+              <a:buNone/>
+            </a:pPr>
+            <a:r>
+              <a:rPr lang="en-US" sz="1200" dirty="0">
+                <a:solidFill>
+                  <a:srgbClr val="24313F"/>
+                </a:solidFill>
+                <a:latin typeface="Malgun Gothic" pitchFamily="34" charset="0"/>
+                <a:ea typeface="Malgun Gothic" pitchFamily="34" charset="-122"/>
+                <a:cs typeface="Malgun Gothic" pitchFamily="34" charset="-120"/>
+              </a:rPr>
+              <a:t>왕복 시간 − 서버 처리 시간 = 네트워크 + 인코딩 오버헤드</a:t>
+            </a:r>
+            <a:endParaRPr lang="en-US" sz="1200" dirty="0"/>
+          </a:p>
+          <a:p>
+            <a:pPr indent="0" marL="0">
+              <a:lnSpc>
+                <a:spcPct val="115000"/>
+              </a:lnSpc>
+              <a:spcAft>
+                <a:spcPts val="800"/>
+              </a:spcAft>
+              <a:buNone/>
+            </a:pPr>
+            <a:r>
+              <a:rPr lang="en-US" sz="1200" dirty="0">
+                <a:solidFill>
+                  <a:srgbClr val="24313F"/>
+                </a:solidFill>
+                <a:latin typeface="Malgun Gothic" pitchFamily="34" charset="0"/>
+                <a:ea typeface="Malgun Gothic" pitchFamily="34" charset="-122"/>
+                <a:cs typeface="Malgun Gothic" pitchFamily="34" charset="-120"/>
+              </a:rPr>
+              <a:t>예상: 모델 추론(수 초) ≫ 인코딩(0.1~0.3 s) ≫ 네트워크(&lt; 1 ms)</a:t>
+            </a:r>
+            <a:endParaRPr lang="en-US" sz="1200" dirty="0"/>
+          </a:p>
+        </p:txBody>
+      </p:sp>
+      <p:sp>
+        <p:nvSpPr>
+          <p:cNvPr id="15" name="Text 13"/>
+          <p:cNvSpPr txBox="1"/>
+          <p:nvPr/>
+        </p:nvSpPr>
+        <p:spPr>
+          <a:xfrm>
+            <a:off x="548640" y="4709160"/>
+            <a:ext cx="3657600" cy="274320"/>
+          </a:xfrm>
+          <a:prstGeom prst="rect">
+            <a:avLst/>
+          </a:prstGeom>
+          <a:noFill/>
+          <a:ln/>
+        </p:spPr>
+        <p:txBody>
+          <a:bodyPr wrap="square" lIns="0" tIns="0" rIns="0" bIns="0" rtlCol="0" anchor="t"/>
+          <a:lstStyle/>
+          <a:p>
+            <a:pPr indent="0" marL="0">
+              <a:buNone/>
+            </a:pPr>
+            <a:r>
+              <a:rPr lang="en-US" sz="1300" b="1" dirty="0">
+                <a:solidFill>
+                  <a:srgbClr val="1B2A41"/>
+                </a:solidFill>
+                <a:latin typeface="Malgun Gothic" pitchFamily="34" charset="0"/>
+                <a:ea typeface="Malgun Gothic" pitchFamily="34" charset="-122"/>
+                <a:cs typeface="Malgun Gothic" pitchFamily="34" charset="-120"/>
+              </a:rPr>
+              <a:t>진행 순서</a:t>
+            </a:r>
+            <a:endParaRPr lang="en-US" sz="1300" dirty="0"/>
+          </a:p>
+        </p:txBody>
+      </p:sp>
+      <p:sp>
+        <p:nvSpPr>
+          <p:cNvPr id="16" name="Shape 14"/>
+          <p:cNvSpPr/>
+          <p:nvPr/>
+        </p:nvSpPr>
+        <p:spPr>
+          <a:xfrm>
+            <a:off x="548640" y="5029200"/>
+            <a:ext cx="1962851" cy="548640"/>
+          </a:xfrm>
+          <a:prstGeom prst="roundRect">
+            <a:avLst>
+              <a:gd name="adj" fmla="val 58333"/>
+            </a:avLst>
+          </a:prstGeom>
+          <a:solidFill>
+            <a:srgbClr val="FFFFFF"/>
+          </a:solidFill>
+          <a:ln w="15875">
+            <a:solidFill>
+              <a:srgbClr val="1B2A41"/>
+            </a:solidFill>
+            <a:prstDash val="solid"/>
+          </a:ln>
+        </p:spPr>
+      </p:sp>
+      <p:sp>
+        <p:nvSpPr>
+          <p:cNvPr id="17" name="Text 15"/>
+          <p:cNvSpPr txBox="1"/>
+          <p:nvPr/>
+        </p:nvSpPr>
+        <p:spPr>
+          <a:xfrm>
+            <a:off x="685800" y="5029200"/>
+            <a:ext cx="1688531" cy="548640"/>
+          </a:xfrm>
+          <a:prstGeom prst="rect">
+            <a:avLst/>
+          </a:prstGeom>
+          <a:noFill/>
+          <a:ln/>
+        </p:spPr>
+        <p:txBody>
+          <a:bodyPr wrap="square" lIns="0" tIns="0" rIns="0" bIns="0" rtlCol="0" anchor="ctr"/>
+          <a:lstStyle/>
+          <a:p>
+            <a:pPr algn="ctr" indent="0" marL="0">
+              <a:buNone/>
+            </a:pPr>
+            <a:r>
+              <a:rPr lang="en-US" sz="1150" b="1" dirty="0">
+                <a:solidFill>
+                  <a:srgbClr val="1B2A41"/>
+                </a:solidFill>
+                <a:latin typeface="Malgun Gothic" pitchFamily="34" charset="0"/>
+                <a:ea typeface="Malgun Gothic" pitchFamily="34" charset="-122"/>
+                <a:cs typeface="Malgun Gothic" pitchFamily="34" charset="-120"/>
+              </a:rPr>
+              <a:t>1.  open-loop</a:t>
+            </a:r>
+            <a:endParaRPr lang="en-US" sz="1150" dirty="0"/>
+          </a:p>
+        </p:txBody>
+      </p:sp>
+      <p:sp>
+        <p:nvSpPr>
+          <p:cNvPr id="18" name="Text 16"/>
+          <p:cNvSpPr txBox="1"/>
+          <p:nvPr/>
+        </p:nvSpPr>
+        <p:spPr>
+          <a:xfrm>
+            <a:off x="548640" y="5650992"/>
+            <a:ext cx="1962851" cy="640080"/>
+          </a:xfrm>
+          <a:prstGeom prst="rect">
+            <a:avLst/>
+          </a:prstGeom>
+          <a:noFill/>
+          <a:ln/>
+        </p:spPr>
+        <p:txBody>
+          <a:bodyPr wrap="square" lIns="0" tIns="0" rIns="0" bIns="0" rtlCol="0" anchor="t"/>
+          <a:lstStyle/>
+          <a:p>
+            <a:pPr algn="ctr" indent="0" marL="0">
+              <a:buNone/>
+            </a:pPr>
+            <a:r>
+              <a:rPr lang="en-US" sz="1000" dirty="0">
+                <a:solidFill>
+                  <a:srgbClr val="24313F"/>
+                </a:solidFill>
+                <a:latin typeface="Malgun Gothic" pitchFamily="34" charset="0"/>
+                <a:ea typeface="Malgun Gothic" pitchFamily="34" charset="-122"/>
+                <a:cs typeface="Malgun Gothic" pitchFamily="34" charset="-120"/>
+              </a:rPr>
+              <a:t>녹화 데이터 재생으로 원격 추론 경로 검증</a:t>
+            </a:r>
+            <a:endParaRPr lang="en-US" sz="1000" dirty="0"/>
+          </a:p>
+        </p:txBody>
+      </p:sp>
+      <p:sp>
+        <p:nvSpPr>
+          <p:cNvPr id="19" name="Shape 17"/>
+          <p:cNvSpPr/>
+          <p:nvPr/>
+        </p:nvSpPr>
+        <p:spPr>
+          <a:xfrm>
+            <a:off x="2557211" y="5303520"/>
+            <a:ext cx="228600" cy="0"/>
+          </a:xfrm>
+          <a:prstGeom prst="line">
+            <a:avLst/>
+          </a:prstGeom>
+          <a:noFill/>
+          <a:ln w="15875">
+            <a:solidFill>
+              <a:srgbClr val="6B7A8C"/>
+            </a:solidFill>
+            <a:prstDash val="solid"/>
+            <a:tailEnd type="triangle"/>
+          </a:ln>
+        </p:spPr>
+      </p:sp>
+      <p:sp>
+        <p:nvSpPr>
+          <p:cNvPr id="20" name="Shape 18"/>
+          <p:cNvSpPr/>
+          <p:nvPr/>
+        </p:nvSpPr>
+        <p:spPr>
+          <a:xfrm>
+            <a:off x="2831531" y="5029200"/>
+            <a:ext cx="1962851" cy="548640"/>
+          </a:xfrm>
+          <a:prstGeom prst="roundRect">
+            <a:avLst>
+              <a:gd name="adj" fmla="val 58333"/>
+            </a:avLst>
+          </a:prstGeom>
+          <a:solidFill>
+            <a:srgbClr val="FFFFFF"/>
+          </a:solidFill>
+          <a:ln w="15875">
+            <a:solidFill>
+              <a:srgbClr val="2A6FDB"/>
+            </a:solidFill>
+            <a:prstDash val="solid"/>
+          </a:ln>
+        </p:spPr>
+      </p:sp>
+      <p:sp>
+        <p:nvSpPr>
+          <p:cNvPr id="21" name="Text 19"/>
+          <p:cNvSpPr txBox="1"/>
+          <p:nvPr/>
+        </p:nvSpPr>
+        <p:spPr>
+          <a:xfrm>
+            <a:off x="2968691" y="5029200"/>
+            <a:ext cx="1688531" cy="548640"/>
+          </a:xfrm>
+          <a:prstGeom prst="rect">
+            <a:avLst/>
+          </a:prstGeom>
+          <a:noFill/>
+          <a:ln/>
+        </p:spPr>
+        <p:txBody>
+          <a:bodyPr wrap="square" lIns="0" tIns="0" rIns="0" bIns="0" rtlCol="0" anchor="ctr"/>
+          <a:lstStyle/>
+          <a:p>
+            <a:pPr algn="ctr" indent="0" marL="0">
+              <a:buNone/>
+            </a:pPr>
+            <a:r>
+              <a:rPr lang="en-US" sz="1150" b="1" dirty="0">
+                <a:solidFill>
+                  <a:srgbClr val="2A6FDB"/>
+                </a:solidFill>
+                <a:latin typeface="Malgun Gothic" pitchFamily="34" charset="0"/>
+                <a:ea typeface="Malgun Gothic" pitchFamily="34" charset="-122"/>
+                <a:cs typeface="Malgun Gothic" pitchFamily="34" charset="-120"/>
+              </a:rPr>
+              <a:t>2.  closed-loop</a:t>
+            </a:r>
+            <a:endParaRPr lang="en-US" sz="1150" dirty="0"/>
+          </a:p>
+        </p:txBody>
+      </p:sp>
+      <p:sp>
+        <p:nvSpPr>
+          <p:cNvPr id="22" name="Text 20"/>
+          <p:cNvSpPr txBox="1"/>
+          <p:nvPr/>
+        </p:nvSpPr>
+        <p:spPr>
+          <a:xfrm>
+            <a:off x="2831531" y="5650992"/>
+            <a:ext cx="1962851" cy="640080"/>
+          </a:xfrm>
+          <a:prstGeom prst="rect">
+            <a:avLst/>
+          </a:prstGeom>
+          <a:noFill/>
+          <a:ln/>
+        </p:spPr>
+        <p:txBody>
+          <a:bodyPr wrap="square" lIns="0" tIns="0" rIns="0" bIns="0" rtlCol="0" anchor="t"/>
+          <a:lstStyle/>
+          <a:p>
+            <a:pPr algn="ctr" indent="0" marL="0">
+              <a:buNone/>
+            </a:pPr>
+            <a:r>
+              <a:rPr lang="en-US" sz="1000" dirty="0">
+                <a:solidFill>
+                  <a:srgbClr val="24313F"/>
+                </a:solidFill>
+                <a:latin typeface="Malgun Gothic" pitchFamily="34" charset="0"/>
+                <a:ea typeface="Malgun Gothic" pitchFamily="34" charset="-122"/>
+                <a:cs typeface="Malgun Gothic" pitchFamily="34" charset="-120"/>
+              </a:rPr>
+              <a:t>모델이 운전 (비동기, pygame 화면)</a:t>
+            </a:r>
+            <a:endParaRPr lang="en-US" sz="1000" dirty="0"/>
+          </a:p>
+        </p:txBody>
+      </p:sp>
+      <p:sp>
+        <p:nvSpPr>
+          <p:cNvPr id="23" name="Shape 21"/>
+          <p:cNvSpPr/>
+          <p:nvPr/>
+        </p:nvSpPr>
+        <p:spPr>
+          <a:xfrm>
+            <a:off x="4840102" y="5303520"/>
+            <a:ext cx="228600" cy="0"/>
+          </a:xfrm>
+          <a:prstGeom prst="line">
+            <a:avLst/>
+          </a:prstGeom>
+          <a:noFill/>
+          <a:ln w="15875">
+            <a:solidFill>
+              <a:srgbClr val="6B7A8C"/>
+            </a:solidFill>
+            <a:prstDash val="solid"/>
+            <a:tailEnd type="triangle"/>
+          </a:ln>
+        </p:spPr>
+      </p:sp>
+      <p:sp>
+        <p:nvSpPr>
+          <p:cNvPr id="24" name="Shape 22"/>
+          <p:cNvSpPr/>
+          <p:nvPr/>
+        </p:nvSpPr>
+        <p:spPr>
+          <a:xfrm>
+            <a:off x="5114422" y="5029200"/>
+            <a:ext cx="1962851" cy="548640"/>
+          </a:xfrm>
+          <a:prstGeom prst="roundRect">
+            <a:avLst>
+              <a:gd name="adj" fmla="val 58333"/>
+            </a:avLst>
+          </a:prstGeom>
+          <a:solidFill>
+            <a:srgbClr val="FFFFFF"/>
+          </a:solidFill>
+          <a:ln w="15875">
+            <a:solidFill>
+              <a:srgbClr val="E0762B"/>
+            </a:solidFill>
+            <a:prstDash val="solid"/>
+          </a:ln>
+        </p:spPr>
+      </p:sp>
+      <p:sp>
+        <p:nvSpPr>
+          <p:cNvPr id="25" name="Text 23"/>
+          <p:cNvSpPr txBox="1"/>
+          <p:nvPr/>
+        </p:nvSpPr>
+        <p:spPr>
+          <a:xfrm>
+            <a:off x="5251582" y="5029200"/>
+            <a:ext cx="1688531" cy="548640"/>
+          </a:xfrm>
+          <a:prstGeom prst="rect">
+            <a:avLst/>
+          </a:prstGeom>
+          <a:noFill/>
+          <a:ln/>
+        </p:spPr>
+        <p:txBody>
+          <a:bodyPr wrap="square" lIns="0" tIns="0" rIns="0" bIns="0" rtlCol="0" anchor="ctr"/>
+          <a:lstStyle/>
+          <a:p>
+            <a:pPr algn="ctr" indent="0" marL="0">
+              <a:buNone/>
+            </a:pPr>
+            <a:r>
+              <a:rPr lang="en-US" sz="1150" b="1" dirty="0">
+                <a:solidFill>
+                  <a:srgbClr val="E0762B"/>
+                </a:solidFill>
+                <a:latin typeface="Malgun Gothic" pitchFamily="34" charset="0"/>
+                <a:ea typeface="Malgun Gothic" pitchFamily="34" charset="-122"/>
+                <a:cs typeface="Malgun Gothic" pitchFamily="34" charset="-120"/>
+              </a:rPr>
+              <a:t>3.  navigation + CFG</a:t>
+            </a:r>
+            <a:endParaRPr lang="en-US" sz="1150" dirty="0"/>
+          </a:p>
+        </p:txBody>
+      </p:sp>
+      <p:sp>
+        <p:nvSpPr>
+          <p:cNvPr id="26" name="Text 24"/>
+          <p:cNvSpPr txBox="1"/>
+          <p:nvPr/>
+        </p:nvSpPr>
+        <p:spPr>
+          <a:xfrm>
+            <a:off x="5114422" y="5650992"/>
+            <a:ext cx="1962851" cy="640080"/>
+          </a:xfrm>
+          <a:prstGeom prst="rect">
+            <a:avLst/>
+          </a:prstGeom>
+          <a:noFill/>
+          <a:ln/>
+        </p:spPr>
+        <p:txBody>
+          <a:bodyPr wrap="square" lIns="0" tIns="0" rIns="0" bIns="0" rtlCol="0" anchor="t"/>
+          <a:lstStyle/>
+          <a:p>
+            <a:pPr algn="ctr" indent="0" marL="0">
+              <a:buNone/>
+            </a:pPr>
+            <a:r>
+              <a:rPr lang="en-US" sz="1000" dirty="0">
+                <a:solidFill>
+                  <a:srgbClr val="24313F"/>
+                </a:solidFill>
+                <a:latin typeface="Malgun Gothic" pitchFamily="34" charset="0"/>
+                <a:ea typeface="Malgun Gothic" pitchFamily="34" charset="-122"/>
+                <a:cs typeface="Malgun Gothic" pitchFamily="34" charset="-120"/>
+              </a:rPr>
+              <a:t>주행 중 지시·가중치 입력</a:t>
+            </a:r>
+            <a:endParaRPr lang="en-US" sz="1000" dirty="0"/>
+          </a:p>
+        </p:txBody>
+      </p:sp>
+      <p:sp>
+        <p:nvSpPr>
+          <p:cNvPr id="27" name="Shape 25"/>
+          <p:cNvSpPr/>
+          <p:nvPr/>
+        </p:nvSpPr>
+        <p:spPr>
+          <a:xfrm>
+            <a:off x="7122993" y="5303520"/>
+            <a:ext cx="228600" cy="0"/>
+          </a:xfrm>
+          <a:prstGeom prst="line">
+            <a:avLst/>
+          </a:prstGeom>
+          <a:noFill/>
+          <a:ln w="15875">
+            <a:solidFill>
+              <a:srgbClr val="6B7A8C"/>
+            </a:solidFill>
+            <a:prstDash val="solid"/>
+            <a:tailEnd type="triangle"/>
+          </a:ln>
+        </p:spPr>
+      </p:sp>
+      <p:sp>
+        <p:nvSpPr>
+          <p:cNvPr id="28" name="Shape 26"/>
+          <p:cNvSpPr/>
+          <p:nvPr/>
+        </p:nvSpPr>
+        <p:spPr>
+          <a:xfrm>
+            <a:off x="7397313" y="5029200"/>
+            <a:ext cx="1962851" cy="548640"/>
+          </a:xfrm>
+          <a:prstGeom prst="roundRect">
+            <a:avLst>
+              <a:gd name="adj" fmla="val 58333"/>
+            </a:avLst>
+          </a:prstGeom>
+          <a:solidFill>
+            <a:srgbClr val="FFFFFF"/>
+          </a:solidFill>
+          <a:ln w="15875">
+            <a:solidFill>
+              <a:srgbClr val="E0762B"/>
+            </a:solidFill>
+            <a:prstDash val="solid"/>
+          </a:ln>
+        </p:spPr>
+      </p:sp>
+      <p:sp>
+        <p:nvSpPr>
+          <p:cNvPr id="29" name="Text 27"/>
+          <p:cNvSpPr txBox="1"/>
+          <p:nvPr/>
+        </p:nvSpPr>
+        <p:spPr>
+          <a:xfrm>
+            <a:off x="7534473" y="5029200"/>
+            <a:ext cx="1688531" cy="548640"/>
+          </a:xfrm>
+          <a:prstGeom prst="rect">
+            <a:avLst/>
+          </a:prstGeom>
+          <a:noFill/>
+          <a:ln/>
+        </p:spPr>
+        <p:txBody>
+          <a:bodyPr wrap="square" lIns="0" tIns="0" rIns="0" bIns="0" rtlCol="0" anchor="ctr"/>
+          <a:lstStyle/>
+          <a:p>
+            <a:pPr algn="ctr" indent="0" marL="0">
+              <a:buNone/>
+            </a:pPr>
+            <a:r>
+              <a:rPr lang="en-US" sz="1150" b="1" dirty="0">
+                <a:solidFill>
+                  <a:srgbClr val="E0762B"/>
+                </a:solidFill>
+                <a:latin typeface="Malgun Gothic" pitchFamily="34" charset="0"/>
+                <a:ea typeface="Malgun Gothic" pitchFamily="34" charset="-122"/>
+                <a:cs typeface="Malgun Gothic" pitchFamily="34" charset="-120"/>
+              </a:rPr>
+              <a:t>4.  VQA</a:t>
+            </a:r>
+            <a:endParaRPr lang="en-US" sz="1150" dirty="0"/>
+          </a:p>
+        </p:txBody>
+      </p:sp>
+      <p:sp>
+        <p:nvSpPr>
+          <p:cNvPr id="30" name="Text 28"/>
+          <p:cNvSpPr txBox="1"/>
+          <p:nvPr/>
+        </p:nvSpPr>
+        <p:spPr>
+          <a:xfrm>
+            <a:off x="7397313" y="5650992"/>
+            <a:ext cx="1962851" cy="640080"/>
+          </a:xfrm>
+          <a:prstGeom prst="rect">
+            <a:avLst/>
+          </a:prstGeom>
+          <a:noFill/>
+          <a:ln/>
+        </p:spPr>
+        <p:txBody>
+          <a:bodyPr wrap="square" lIns="0" tIns="0" rIns="0" bIns="0" rtlCol="0" anchor="t"/>
+          <a:lstStyle/>
+          <a:p>
+            <a:pPr algn="ctr" indent="0" marL="0">
+              <a:buNone/>
+            </a:pPr>
+            <a:r>
+              <a:rPr lang="en-US" sz="1000" dirty="0">
+                <a:solidFill>
+                  <a:srgbClr val="24313F"/>
+                </a:solidFill>
+                <a:latin typeface="Malgun Gothic" pitchFamily="34" charset="0"/>
+                <a:ea typeface="Malgun Gothic" pitchFamily="34" charset="-122"/>
+                <a:cs typeface="Malgun Gothic" pitchFamily="34" charset="-120"/>
+              </a:rPr>
+              <a:t>정차 후 질문·답</a:t>
+            </a:r>
+            <a:endParaRPr lang="en-US" sz="1000" dirty="0"/>
+          </a:p>
+        </p:txBody>
+      </p:sp>
+      <p:sp>
+        <p:nvSpPr>
+          <p:cNvPr id="31" name="Shape 29"/>
+          <p:cNvSpPr/>
+          <p:nvPr/>
+        </p:nvSpPr>
+        <p:spPr>
+          <a:xfrm>
+            <a:off x="9405884" y="5303520"/>
+            <a:ext cx="228600" cy="0"/>
+          </a:xfrm>
+          <a:prstGeom prst="line">
+            <a:avLst/>
+          </a:prstGeom>
+          <a:noFill/>
+          <a:ln w="15875">
+            <a:solidFill>
+              <a:srgbClr val="6B7A8C"/>
+            </a:solidFill>
+            <a:prstDash val="solid"/>
+            <a:tailEnd type="triangle"/>
+          </a:ln>
+        </p:spPr>
+      </p:sp>
+      <p:sp>
+        <p:nvSpPr>
+          <p:cNvPr id="32" name="Shape 30"/>
+          <p:cNvSpPr/>
+          <p:nvPr/>
+        </p:nvSpPr>
+        <p:spPr>
+          <a:xfrm>
+            <a:off x="9680204" y="5029200"/>
+            <a:ext cx="1962851" cy="548640"/>
+          </a:xfrm>
+          <a:prstGeom prst="roundRect">
+            <a:avLst>
+              <a:gd name="adj" fmla="val 58333"/>
+            </a:avLst>
+          </a:prstGeom>
+          <a:solidFill>
+            <a:srgbClr val="FFFFFF"/>
+          </a:solidFill>
+          <a:ln w="15875">
+            <a:solidFill>
+              <a:srgbClr val="1B2A41"/>
+            </a:solidFill>
+            <a:prstDash val="solid"/>
+          </a:ln>
+        </p:spPr>
+      </p:sp>
+      <p:sp>
+        <p:nvSpPr>
+          <p:cNvPr id="33" name="Text 31"/>
+          <p:cNvSpPr txBox="1"/>
+          <p:nvPr/>
+        </p:nvSpPr>
+        <p:spPr>
+          <a:xfrm>
+            <a:off x="9817364" y="5029200"/>
+            <a:ext cx="1688531" cy="548640"/>
+          </a:xfrm>
+          <a:prstGeom prst="rect">
+            <a:avLst/>
+          </a:prstGeom>
+          <a:noFill/>
+          <a:ln/>
+        </p:spPr>
+        <p:txBody>
+          <a:bodyPr wrap="square" lIns="0" tIns="0" rIns="0" bIns="0" rtlCol="0" anchor="ctr"/>
+          <a:lstStyle/>
+          <a:p>
+            <a:pPr algn="ctr" indent="0" marL="0">
+              <a:buNone/>
+            </a:pPr>
+            <a:r>
+              <a:rPr lang="en-US" sz="1150" b="1" dirty="0">
+                <a:solidFill>
+                  <a:srgbClr val="1B2A41"/>
+                </a:solidFill>
+                <a:latin typeface="Malgun Gothic" pitchFamily="34" charset="0"/>
+                <a:ea typeface="Malgun Gothic" pitchFamily="34" charset="-122"/>
+                <a:cs typeface="Malgun Gothic" pitchFamily="34" charset="-120"/>
+              </a:rPr>
+              <a:t>5.  측정 결과</a:t>
+            </a:r>
+            <a:endParaRPr lang="en-US" sz="1150" dirty="0"/>
+          </a:p>
+        </p:txBody>
+      </p:sp>
+      <p:sp>
+        <p:nvSpPr>
+          <p:cNvPr id="34" name="Text 32"/>
+          <p:cNvSpPr txBox="1"/>
+          <p:nvPr/>
+        </p:nvSpPr>
+        <p:spPr>
+          <a:xfrm>
+            <a:off x="9680204" y="5650992"/>
+            <a:ext cx="1962851" cy="640080"/>
+          </a:xfrm>
+          <a:prstGeom prst="rect">
+            <a:avLst/>
+          </a:prstGeom>
+          <a:noFill/>
+          <a:ln/>
+        </p:spPr>
+        <p:txBody>
+          <a:bodyPr wrap="square" lIns="0" tIns="0" rIns="0" bIns="0" rtlCol="0" anchor="t"/>
+          <a:lstStyle/>
+          <a:p>
+            <a:pPr algn="ctr" indent="0" marL="0">
+              <a:buNone/>
+            </a:pPr>
+            <a:r>
+              <a:rPr lang="en-US" sz="1000" dirty="0">
+                <a:solidFill>
+                  <a:srgbClr val="24313F"/>
+                </a:solidFill>
+                <a:latin typeface="Malgun Gothic" pitchFamily="34" charset="0"/>
+                <a:ea typeface="Malgun Gothic" pitchFamily="34" charset="-122"/>
+                <a:cs typeface="Malgun Gothic" pitchFamily="34" charset="-120"/>
+              </a:rPr>
+              <a:t>요약 표·그래프</a:t>
+            </a:r>
+            <a:endParaRPr lang="en-US" sz="1000" dirty="0"/>
           </a:p>
         </p:txBody>
       </p:sp>
@@ -7911,7 +8921,7 @@
                 <a:ea typeface="Malgun Gothic" pitchFamily="34" charset="-122"/>
                 <a:cs typeface="Malgun Gothic" pitchFamily="34" charset="-120"/>
               </a:rPr>
-              <a:t>CARLA의 x86 요구와 Alpamayo의 대용량 VRAM 요구를 서로 다른 인스턴스로 분리해도 closed-loop가 성립한다</a:t>
+              <a:t>CARLA의 x86 요구와 Alpamayo의 대용량 VRAM 요구를 서로 다른 인스턴스로 나눠도 closed-loop가 성립한다</a:t>
             </a:r>
             <a:endParaRPr lang="en-US" sz="1400" dirty="0"/>
           </a:p>
@@ -7995,1112 +9005,590 @@
           </a:p>
         </p:txBody>
       </p:sp>
-      <p:graphicFrame>
-        <p:nvGraphicFramePr>
-          <p:cNvPr id="8" name="Table 0"/>
-          <p:cNvGraphicFramePr>
-            <a:graphicFrameLocks noGrp="1"/>
-          </p:cNvGraphicFramePr>
-          <p:nvPr>
-            <p:extLst>
-              <p:ext uri="{D42A27DB-BD31-4B8C-83A1-F6EECF244321}">
-                <p14:modId xmlns:p14="http://schemas.microsoft.com/office/powerpoint/2010/main" val="1579011935"/>
-              </p:ext>
-            </p:extLst>
-          </p:nvPr>
-        </p:nvGraphicFramePr>
-        <p:xfrm>
-          <a:off x="548640" y="1417320"/>
-          <a:ext cx="11094415" cy="914400"/>
-        </p:xfrm>
-        <a:graphic>
-          <a:graphicData uri="http://schemas.openxmlformats.org/drawingml/2006/table">
-            <a:tbl>
-              <a:tblPr/>
-              <a:tblGrid>
-                <a:gridCol w="2011680"/>
-                <a:gridCol w="4663440"/>
-                <a:gridCol w="4416552"/>
-              </a:tblGrid>
-              <a:tr h="0">
-                <a:tc>
-                  <a:txBody>
-                    <a:bodyPr/>
-                    <a:lstStyle/>
-                    <a:p>
-                      <a:pPr algn="l" indent="0" marL="0">
-                        <a:lnSpc>
-                          <a:spcPct val="110000"/>
-                        </a:lnSpc>
-                        <a:buNone/>
-                      </a:pPr>
-                      <a:r>
-                        <a:rPr lang="en-US" sz="1200" b="1" dirty="0">
-                          <a:solidFill>
-                            <a:srgbClr val="FFFFFF"/>
-                          </a:solidFill>
-                          <a:latin typeface="Malgun Gothic" pitchFamily="34" charset="0"/>
-                          <a:ea typeface="Malgun Gothic" pitchFamily="34" charset="-122"/>
-                          <a:cs typeface="Malgun Gothic" pitchFamily="34" charset="-120"/>
-                        </a:rPr>
-                        <a:t>시사점</a:t>
-                      </a:r>
-                      <a:endParaRPr lang="en-US" sz="1200" dirty="0">
-                        <a:latin typeface="Malgun Gothic" charset="0"/>
-                        <a:ea typeface="Malgun Gothic" charset="0"/>
-                        <a:cs typeface="Malgun Gothic" charset="0"/>
-                      </a:endParaRPr>
-                    </a:p>
-                  </a:txBody>
-                  <a:tcPr marL="101600" marR="101600" marT="76200" marB="76200" anchor="ctr">
-                    <a:lnL w="6350" cap="flat" cmpd="sng" algn="ctr">
-                      <a:solidFill>
-                        <a:srgbClr val="D5DBE3"/>
-                      </a:solidFill>
-                      <a:prstDash val="solid"/>
-                      <a:round/>
-                      <a:headEnd type="none" w="med" len="med"/>
-                      <a:tailEnd type="none" w="med" len="med"/>
-                    </a:lnL>
-                    <a:lnR w="6350" cap="flat" cmpd="sng" algn="ctr">
-                      <a:solidFill>
-                        <a:srgbClr val="D5DBE3"/>
-                      </a:solidFill>
-                      <a:prstDash val="solid"/>
-                      <a:round/>
-                      <a:headEnd type="none" w="med" len="med"/>
-                      <a:tailEnd type="none" w="med" len="med"/>
-                    </a:lnR>
-                    <a:lnT w="6350" cap="flat" cmpd="sng" algn="ctr">
-                      <a:solidFill>
-                        <a:srgbClr val="D5DBE3"/>
-                      </a:solidFill>
-                      <a:prstDash val="solid"/>
-                      <a:round/>
-                      <a:headEnd type="none" w="med" len="med"/>
-                      <a:tailEnd type="none" w="med" len="med"/>
-                    </a:lnT>
-                    <a:lnB w="6350" cap="flat" cmpd="sng" algn="ctr">
-                      <a:solidFill>
-                        <a:srgbClr val="D5DBE3"/>
-                      </a:solidFill>
-                      <a:prstDash val="solid"/>
-                      <a:round/>
-                      <a:headEnd type="none" w="med" len="med"/>
-                      <a:tailEnd type="none" w="med" len="med"/>
-                    </a:lnB>
-                    <a:solidFill>
-                      <a:srgbClr val="1B2A41"/>
-                    </a:solidFill>
-                  </a:tcPr>
-                </a:tc>
-                <a:tc>
-                  <a:txBody>
-                    <a:bodyPr/>
-                    <a:lstStyle/>
-                    <a:p>
-                      <a:pPr algn="l" indent="0" marL="0">
-                        <a:lnSpc>
-                          <a:spcPct val="110000"/>
-                        </a:lnSpc>
-                        <a:buNone/>
-                      </a:pPr>
-                      <a:r>
-                        <a:rPr lang="en-US" sz="1200" b="1" dirty="0">
-                          <a:solidFill>
-                            <a:srgbClr val="FFFFFF"/>
-                          </a:solidFill>
-                          <a:latin typeface="Malgun Gothic" pitchFamily="34" charset="0"/>
-                          <a:ea typeface="Malgun Gothic" pitchFamily="34" charset="-122"/>
-                          <a:cs typeface="Malgun Gothic" pitchFamily="34" charset="-120"/>
-                        </a:rPr>
-                        <a:t>근거</a:t>
-                      </a:r>
-                      <a:endParaRPr lang="en-US" sz="1200" dirty="0">
-                        <a:latin typeface="Malgun Gothic" charset="0"/>
-                        <a:ea typeface="Malgun Gothic" charset="0"/>
-                        <a:cs typeface="Malgun Gothic" charset="0"/>
-                      </a:endParaRPr>
-                    </a:p>
-                  </a:txBody>
-                  <a:tcPr marL="101600" marR="101600" marT="76200" marB="76200" anchor="ctr">
-                    <a:lnL w="6350" cap="flat" cmpd="sng" algn="ctr">
-                      <a:solidFill>
-                        <a:srgbClr val="D5DBE3"/>
-                      </a:solidFill>
-                      <a:prstDash val="solid"/>
-                      <a:round/>
-                      <a:headEnd type="none" w="med" len="med"/>
-                      <a:tailEnd type="none" w="med" len="med"/>
-                    </a:lnL>
-                    <a:lnR w="6350" cap="flat" cmpd="sng" algn="ctr">
-                      <a:solidFill>
-                        <a:srgbClr val="D5DBE3"/>
-                      </a:solidFill>
-                      <a:prstDash val="solid"/>
-                      <a:round/>
-                      <a:headEnd type="none" w="med" len="med"/>
-                      <a:tailEnd type="none" w="med" len="med"/>
-                    </a:lnR>
-                    <a:lnT w="6350" cap="flat" cmpd="sng" algn="ctr">
-                      <a:solidFill>
-                        <a:srgbClr val="D5DBE3"/>
-                      </a:solidFill>
-                      <a:prstDash val="solid"/>
-                      <a:round/>
-                      <a:headEnd type="none" w="med" len="med"/>
-                      <a:tailEnd type="none" w="med" len="med"/>
-                    </a:lnT>
-                    <a:lnB w="6350" cap="flat" cmpd="sng" algn="ctr">
-                      <a:solidFill>
-                        <a:srgbClr val="D5DBE3"/>
-                      </a:solidFill>
-                      <a:prstDash val="solid"/>
-                      <a:round/>
-                      <a:headEnd type="none" w="med" len="med"/>
-                      <a:tailEnd type="none" w="med" len="med"/>
-                    </a:lnB>
-                    <a:solidFill>
-                      <a:srgbClr val="1B2A41"/>
-                    </a:solidFill>
-                  </a:tcPr>
-                </a:tc>
-                <a:tc>
-                  <a:txBody>
-                    <a:bodyPr/>
-                    <a:lstStyle/>
-                    <a:p>
-                      <a:pPr algn="l" indent="0" marL="0">
-                        <a:lnSpc>
-                          <a:spcPct val="110000"/>
-                        </a:lnSpc>
-                        <a:buNone/>
-                      </a:pPr>
-                      <a:r>
-                        <a:rPr lang="en-US" sz="1200" b="1" dirty="0">
-                          <a:solidFill>
-                            <a:srgbClr val="FFFFFF"/>
-                          </a:solidFill>
-                          <a:latin typeface="Malgun Gothic" pitchFamily="34" charset="0"/>
-                          <a:ea typeface="Malgun Gothic" pitchFamily="34" charset="-122"/>
-                          <a:cs typeface="Malgun Gothic" pitchFamily="34" charset="-120"/>
-                        </a:rPr>
-                        <a:t>기대 효과</a:t>
-                      </a:r>
-                      <a:endParaRPr lang="en-US" sz="1200" dirty="0">
-                        <a:latin typeface="Malgun Gothic" charset="0"/>
-                        <a:ea typeface="Malgun Gothic" charset="0"/>
-                        <a:cs typeface="Malgun Gothic" charset="0"/>
-                      </a:endParaRPr>
-                    </a:p>
-                  </a:txBody>
-                  <a:tcPr marL="101600" marR="101600" marT="76200" marB="76200" anchor="ctr">
-                    <a:lnL w="6350" cap="flat" cmpd="sng" algn="ctr">
-                      <a:solidFill>
-                        <a:srgbClr val="D5DBE3"/>
-                      </a:solidFill>
-                      <a:prstDash val="solid"/>
-                      <a:round/>
-                      <a:headEnd type="none" w="med" len="med"/>
-                      <a:tailEnd type="none" w="med" len="med"/>
-                    </a:lnL>
-                    <a:lnR w="6350" cap="flat" cmpd="sng" algn="ctr">
-                      <a:solidFill>
-                        <a:srgbClr val="D5DBE3"/>
-                      </a:solidFill>
-                      <a:prstDash val="solid"/>
-                      <a:round/>
-                      <a:headEnd type="none" w="med" len="med"/>
-                      <a:tailEnd type="none" w="med" len="med"/>
-                    </a:lnR>
-                    <a:lnT w="6350" cap="flat" cmpd="sng" algn="ctr">
-                      <a:solidFill>
-                        <a:srgbClr val="D5DBE3"/>
-                      </a:solidFill>
-                      <a:prstDash val="solid"/>
-                      <a:round/>
-                      <a:headEnd type="none" w="med" len="med"/>
-                      <a:tailEnd type="none" w="med" len="med"/>
-                    </a:lnT>
-                    <a:lnB w="6350" cap="flat" cmpd="sng" algn="ctr">
-                      <a:solidFill>
-                        <a:srgbClr val="D5DBE3"/>
-                      </a:solidFill>
-                      <a:prstDash val="solid"/>
-                      <a:round/>
-                      <a:headEnd type="none" w="med" len="med"/>
-                      <a:tailEnd type="none" w="med" len="med"/>
-                    </a:lnB>
-                    <a:solidFill>
-                      <a:srgbClr val="1B2A41"/>
-                    </a:solidFill>
-                  </a:tcPr>
-                </a:tc>
-              </a:tr>
-              <a:tr h="0">
-                <a:tc>
-                  <a:txBody>
-                    <a:bodyPr/>
-                    <a:lstStyle/>
-                    <a:p>
-                      <a:pPr algn="l" indent="0" marL="0">
-                        <a:lnSpc>
-                          <a:spcPct val="110000"/>
-                        </a:lnSpc>
-                        <a:buNone/>
-                      </a:pPr>
-                      <a:r>
-                        <a:rPr lang="en-US" sz="1200" b="1" dirty="0">
-                          <a:solidFill>
-                            <a:srgbClr val="24313F"/>
-                          </a:solidFill>
-                          <a:latin typeface="Malgun Gothic" pitchFamily="34" charset="0"/>
-                          <a:ea typeface="Malgun Gothic" pitchFamily="34" charset="-122"/>
-                          <a:cs typeface="Malgun Gothic" pitchFamily="34" charset="-120"/>
-                        </a:rPr>
-                        <a:t>요구사항 분리 입증</a:t>
-                      </a:r>
-                      <a:endParaRPr lang="en-US" sz="1200" dirty="0">
-                        <a:latin typeface="Malgun Gothic" charset="0"/>
-                        <a:ea typeface="Malgun Gothic" charset="0"/>
-                        <a:cs typeface="Malgun Gothic" charset="0"/>
-                      </a:endParaRPr>
-                    </a:p>
-                  </a:txBody>
-                  <a:tcPr marL="101600" marR="101600" marT="76200" marB="76200" anchor="ctr">
-                    <a:lnL w="6350" cap="flat" cmpd="sng" algn="ctr">
-                      <a:solidFill>
-                        <a:srgbClr val="D5DBE3"/>
-                      </a:solidFill>
-                      <a:prstDash val="solid"/>
-                      <a:round/>
-                      <a:headEnd type="none" w="med" len="med"/>
-                      <a:tailEnd type="none" w="med" len="med"/>
-                    </a:lnL>
-                    <a:lnR w="6350" cap="flat" cmpd="sng" algn="ctr">
-                      <a:solidFill>
-                        <a:srgbClr val="D5DBE3"/>
-                      </a:solidFill>
-                      <a:prstDash val="solid"/>
-                      <a:round/>
-                      <a:headEnd type="none" w="med" len="med"/>
-                      <a:tailEnd type="none" w="med" len="med"/>
-                    </a:lnR>
-                    <a:lnT w="6350" cap="flat" cmpd="sng" algn="ctr">
-                      <a:solidFill>
-                        <a:srgbClr val="D5DBE3"/>
-                      </a:solidFill>
-                      <a:prstDash val="solid"/>
-                      <a:round/>
-                      <a:headEnd type="none" w="med" len="med"/>
-                      <a:tailEnd type="none" w="med" len="med"/>
-                    </a:lnT>
-                    <a:lnB w="6350" cap="flat" cmpd="sng" algn="ctr">
-                      <a:solidFill>
-                        <a:srgbClr val="D5DBE3"/>
-                      </a:solidFill>
-                      <a:prstDash val="solid"/>
-                      <a:round/>
-                      <a:headEnd type="none" w="med" len="med"/>
-                      <a:tailEnd type="none" w="med" len="med"/>
-                    </a:lnB>
-                    <a:solidFill>
-                      <a:srgbClr val="FFFFFF"/>
-                    </a:solidFill>
-                  </a:tcPr>
-                </a:tc>
-                <a:tc>
-                  <a:txBody>
-                    <a:bodyPr/>
-                    <a:lstStyle/>
-                    <a:p>
-                      <a:pPr algn="l" indent="0" marL="0">
-                        <a:lnSpc>
-                          <a:spcPct val="110000"/>
-                        </a:lnSpc>
-                        <a:buNone/>
-                      </a:pPr>
-                      <a:r>
-                        <a:rPr lang="en-US" sz="1200" dirty="0">
-                          <a:solidFill>
-                            <a:srgbClr val="24313F"/>
-                          </a:solidFill>
-                          <a:latin typeface="Malgun Gothic" pitchFamily="34" charset="0"/>
-                          <a:ea typeface="Malgun Gothic" pitchFamily="34" charset="-122"/>
-                          <a:cs typeface="Malgun Gothic" pitchFamily="34" charset="-120"/>
-                        </a:rPr>
-                        <a:t>CARLA(UE4)는 x86 CPU가 필수이지만 GPU는 6 GB면 충분. Alpamayo는 VRAM 24 GB 이상이 필요하지만 CPU 아키텍처에는 무관</a:t>
-                      </a:r>
-                      <a:endParaRPr lang="en-US" sz="1200" dirty="0">
-                        <a:latin typeface="Malgun Gothic" charset="0"/>
-                        <a:ea typeface="Malgun Gothic" charset="0"/>
-                        <a:cs typeface="Malgun Gothic" charset="0"/>
-                      </a:endParaRPr>
-                    </a:p>
-                  </a:txBody>
-                  <a:tcPr marL="101600" marR="101600" marT="76200" marB="76200" anchor="ctr">
-                    <a:lnL w="6350" cap="flat" cmpd="sng" algn="ctr">
-                      <a:solidFill>
-                        <a:srgbClr val="D5DBE3"/>
-                      </a:solidFill>
-                      <a:prstDash val="solid"/>
-                      <a:round/>
-                      <a:headEnd type="none" w="med" len="med"/>
-                      <a:tailEnd type="none" w="med" len="med"/>
-                    </a:lnL>
-                    <a:lnR w="6350" cap="flat" cmpd="sng" algn="ctr">
-                      <a:solidFill>
-                        <a:srgbClr val="D5DBE3"/>
-                      </a:solidFill>
-                      <a:prstDash val="solid"/>
-                      <a:round/>
-                      <a:headEnd type="none" w="med" len="med"/>
-                      <a:tailEnd type="none" w="med" len="med"/>
-                    </a:lnR>
-                    <a:lnT w="6350" cap="flat" cmpd="sng" algn="ctr">
-                      <a:solidFill>
-                        <a:srgbClr val="D5DBE3"/>
-                      </a:solidFill>
-                      <a:prstDash val="solid"/>
-                      <a:round/>
-                      <a:headEnd type="none" w="med" len="med"/>
-                      <a:tailEnd type="none" w="med" len="med"/>
-                    </a:lnT>
-                    <a:lnB w="6350" cap="flat" cmpd="sng" algn="ctr">
-                      <a:solidFill>
-                        <a:srgbClr val="D5DBE3"/>
-                      </a:solidFill>
-                      <a:prstDash val="solid"/>
-                      <a:round/>
-                      <a:headEnd type="none" w="med" len="med"/>
-                      <a:tailEnd type="none" w="med" len="med"/>
-                    </a:lnB>
-                    <a:solidFill>
-                      <a:srgbClr val="FFFFFF"/>
-                    </a:solidFill>
-                  </a:tcPr>
-                </a:tc>
-                <a:tc>
-                  <a:txBody>
-                    <a:bodyPr/>
-                    <a:lstStyle/>
-                    <a:p>
-                      <a:pPr algn="l" indent="0" marL="0">
-                        <a:lnSpc>
-                          <a:spcPct val="110000"/>
-                        </a:lnSpc>
-                        <a:buNone/>
-                      </a:pPr>
-                      <a:r>
-                        <a:rPr lang="en-US" sz="1200" dirty="0">
-                          <a:solidFill>
-                            <a:srgbClr val="24313F"/>
-                          </a:solidFill>
-                          <a:latin typeface="Malgun Gothic" pitchFamily="34" charset="0"/>
-                          <a:ea typeface="Malgun Gothic" pitchFamily="34" charset="-122"/>
-                          <a:cs typeface="Malgun Gothic" pitchFamily="34" charset="-120"/>
-                        </a:rPr>
-                        <a:t>같은 머신에 두던 제약(4-bit 양자화, OOM-free 대책, venv 3개)이 사라진다</a:t>
-                      </a:r>
-                      <a:endParaRPr lang="en-US" sz="1200" dirty="0">
-                        <a:latin typeface="Malgun Gothic" charset="0"/>
-                        <a:ea typeface="Malgun Gothic" charset="0"/>
-                        <a:cs typeface="Malgun Gothic" charset="0"/>
-                      </a:endParaRPr>
-                    </a:p>
-                  </a:txBody>
-                  <a:tcPr marL="101600" marR="101600" marT="76200" marB="76200" anchor="ctr">
-                    <a:lnL w="6350" cap="flat" cmpd="sng" algn="ctr">
-                      <a:solidFill>
-                        <a:srgbClr val="D5DBE3"/>
-                      </a:solidFill>
-                      <a:prstDash val="solid"/>
-                      <a:round/>
-                      <a:headEnd type="none" w="med" len="med"/>
-                      <a:tailEnd type="none" w="med" len="med"/>
-                    </a:lnL>
-                    <a:lnR w="6350" cap="flat" cmpd="sng" algn="ctr">
-                      <a:solidFill>
-                        <a:srgbClr val="D5DBE3"/>
-                      </a:solidFill>
-                      <a:prstDash val="solid"/>
-                      <a:round/>
-                      <a:headEnd type="none" w="med" len="med"/>
-                      <a:tailEnd type="none" w="med" len="med"/>
-                    </a:lnR>
-                    <a:lnT w="6350" cap="flat" cmpd="sng" algn="ctr">
-                      <a:solidFill>
-                        <a:srgbClr val="D5DBE3"/>
-                      </a:solidFill>
-                      <a:prstDash val="solid"/>
-                      <a:round/>
-                      <a:headEnd type="none" w="med" len="med"/>
-                      <a:tailEnd type="none" w="med" len="med"/>
-                    </a:lnT>
-                    <a:lnB w="6350" cap="flat" cmpd="sng" algn="ctr">
-                      <a:solidFill>
-                        <a:srgbClr val="D5DBE3"/>
-                      </a:solidFill>
-                      <a:prstDash val="solid"/>
-                      <a:round/>
-                      <a:headEnd type="none" w="med" len="med"/>
-                      <a:tailEnd type="none" w="med" len="med"/>
-                    </a:lnB>
-                    <a:solidFill>
-                      <a:srgbClr val="FFFFFF"/>
-                    </a:solidFill>
-                  </a:tcPr>
-                </a:tc>
-              </a:tr>
-              <a:tr h="0">
-                <a:tc>
-                  <a:txBody>
-                    <a:bodyPr/>
-                    <a:lstStyle/>
-                    <a:p>
-                      <a:pPr algn="l" indent="0" marL="0">
-                        <a:lnSpc>
-                          <a:spcPct val="110000"/>
-                        </a:lnSpc>
-                        <a:buNone/>
-                      </a:pPr>
-                      <a:r>
-                        <a:rPr lang="en-US" sz="1200" b="1" dirty="0">
-                          <a:solidFill>
-                            <a:srgbClr val="24313F"/>
-                          </a:solidFill>
-                          <a:latin typeface="Malgun Gothic" pitchFamily="34" charset="0"/>
-                          <a:ea typeface="Malgun Gothic" pitchFamily="34" charset="-122"/>
-                          <a:cs typeface="Malgun Gothic" pitchFamily="34" charset="-120"/>
-                        </a:rPr>
-                        <a:t>인스턴스 선택 유연성</a:t>
-                      </a:r>
-                      <a:endParaRPr lang="en-US" sz="1200" dirty="0">
-                        <a:latin typeface="Malgun Gothic" charset="0"/>
-                        <a:ea typeface="Malgun Gothic" charset="0"/>
-                        <a:cs typeface="Malgun Gothic" charset="0"/>
-                      </a:endParaRPr>
-                    </a:p>
-                  </a:txBody>
-                  <a:tcPr marL="101600" marR="101600" marT="76200" marB="76200" anchor="ctr">
-                    <a:lnL w="6350" cap="flat" cmpd="sng" algn="ctr">
-                      <a:solidFill>
-                        <a:srgbClr val="D5DBE3"/>
-                      </a:solidFill>
-                      <a:prstDash val="solid"/>
-                      <a:round/>
-                      <a:headEnd type="none" w="med" len="med"/>
-                      <a:tailEnd type="none" w="med" len="med"/>
-                    </a:lnL>
-                    <a:lnR w="6350" cap="flat" cmpd="sng" algn="ctr">
-                      <a:solidFill>
-                        <a:srgbClr val="D5DBE3"/>
-                      </a:solidFill>
-                      <a:prstDash val="solid"/>
-                      <a:round/>
-                      <a:headEnd type="none" w="med" len="med"/>
-                      <a:tailEnd type="none" w="med" len="med"/>
-                    </a:lnR>
-                    <a:lnT w="6350" cap="flat" cmpd="sng" algn="ctr">
-                      <a:solidFill>
-                        <a:srgbClr val="D5DBE3"/>
-                      </a:solidFill>
-                      <a:prstDash val="solid"/>
-                      <a:round/>
-                      <a:headEnd type="none" w="med" len="med"/>
-                      <a:tailEnd type="none" w="med" len="med"/>
-                    </a:lnT>
-                    <a:lnB w="6350" cap="flat" cmpd="sng" algn="ctr">
-                      <a:solidFill>
-                        <a:srgbClr val="D5DBE3"/>
-                      </a:solidFill>
-                      <a:prstDash val="solid"/>
-                      <a:round/>
-                      <a:headEnd type="none" w="med" len="med"/>
-                      <a:tailEnd type="none" w="med" len="med"/>
-                    </a:lnB>
-                    <a:solidFill>
-                      <a:srgbClr val="F3F5F8"/>
-                    </a:solidFill>
-                  </a:tcPr>
-                </a:tc>
-                <a:tc>
-                  <a:txBody>
-                    <a:bodyPr/>
-                    <a:lstStyle/>
-                    <a:p>
-                      <a:pPr algn="l" indent="0" marL="0">
-                        <a:lnSpc>
-                          <a:spcPct val="110000"/>
-                        </a:lnSpc>
-                        <a:buNone/>
-                      </a:pPr>
-                      <a:r>
-                        <a:rPr lang="en-US" sz="1200" dirty="0">
-                          <a:solidFill>
-                            <a:srgbClr val="24313F"/>
-                          </a:solidFill>
-                          <a:latin typeface="Malgun Gothic" pitchFamily="34" charset="0"/>
-                          <a:ea typeface="Malgun Gothic" pitchFamily="34" charset="-122"/>
-                          <a:cs typeface="Malgun Gothic" pitchFamily="34" charset="-120"/>
-                        </a:rPr>
-                        <a:t>추론 호스트는 x86/ARM과 무관하게 VRAM 기준으로만 고른다. 시뮬레이터 호스트는 그대로</a:t>
-                      </a:r>
-                      <a:endParaRPr lang="en-US" sz="1200" dirty="0">
-                        <a:latin typeface="Malgun Gothic" charset="0"/>
-                        <a:ea typeface="Malgun Gothic" charset="0"/>
-                        <a:cs typeface="Malgun Gothic" charset="0"/>
-                      </a:endParaRPr>
-                    </a:p>
-                  </a:txBody>
-                  <a:tcPr marL="101600" marR="101600" marT="76200" marB="76200" anchor="ctr">
-                    <a:lnL w="6350" cap="flat" cmpd="sng" algn="ctr">
-                      <a:solidFill>
-                        <a:srgbClr val="D5DBE3"/>
-                      </a:solidFill>
-                      <a:prstDash val="solid"/>
-                      <a:round/>
-                      <a:headEnd type="none" w="med" len="med"/>
-                      <a:tailEnd type="none" w="med" len="med"/>
-                    </a:lnL>
-                    <a:lnR w="6350" cap="flat" cmpd="sng" algn="ctr">
-                      <a:solidFill>
-                        <a:srgbClr val="D5DBE3"/>
-                      </a:solidFill>
-                      <a:prstDash val="solid"/>
-                      <a:round/>
-                      <a:headEnd type="none" w="med" len="med"/>
-                      <a:tailEnd type="none" w="med" len="med"/>
-                    </a:lnR>
-                    <a:lnT w="6350" cap="flat" cmpd="sng" algn="ctr">
-                      <a:solidFill>
-                        <a:srgbClr val="D5DBE3"/>
-                      </a:solidFill>
-                      <a:prstDash val="solid"/>
-                      <a:round/>
-                      <a:headEnd type="none" w="med" len="med"/>
-                      <a:tailEnd type="none" w="med" len="med"/>
-                    </a:lnT>
-                    <a:lnB w="6350" cap="flat" cmpd="sng" algn="ctr">
-                      <a:solidFill>
-                        <a:srgbClr val="D5DBE3"/>
-                      </a:solidFill>
-                      <a:prstDash val="solid"/>
-                      <a:round/>
-                      <a:headEnd type="none" w="med" len="med"/>
-                      <a:tailEnd type="none" w="med" len="med"/>
-                    </a:lnB>
-                    <a:solidFill>
-                      <a:srgbClr val="F3F5F8"/>
-                    </a:solidFill>
-                  </a:tcPr>
-                </a:tc>
-                <a:tc>
-                  <a:txBody>
-                    <a:bodyPr/>
-                    <a:lstStyle/>
-                    <a:p>
-                      <a:pPr algn="l" indent="0" marL="0">
-                        <a:lnSpc>
-                          <a:spcPct val="110000"/>
-                        </a:lnSpc>
-                        <a:buNone/>
-                      </a:pPr>
-                      <a:r>
-                        <a:rPr lang="en-US" sz="1200" dirty="0">
-                          <a:solidFill>
-                            <a:srgbClr val="24313F"/>
-                          </a:solidFill>
-                          <a:latin typeface="Malgun Gothic" pitchFamily="34" charset="0"/>
-                          <a:ea typeface="Malgun Gothic" pitchFamily="34" charset="-122"/>
-                          <a:cs typeface="Malgun Gothic" pitchFamily="34" charset="-120"/>
-                        </a:rPr>
-                        <a:t>ARM Graviton GPU 인스턴스 검토 가능. Alpamayo 2(7카메라)나 샘플 수·CFG를 늘릴 때 B만 교체</a:t>
-                      </a:r>
-                      <a:endParaRPr lang="en-US" sz="1200" dirty="0">
-                        <a:latin typeface="Malgun Gothic" charset="0"/>
-                        <a:ea typeface="Malgun Gothic" charset="0"/>
-                        <a:cs typeface="Malgun Gothic" charset="0"/>
-                      </a:endParaRPr>
-                    </a:p>
-                  </a:txBody>
-                  <a:tcPr marL="101600" marR="101600" marT="76200" marB="76200" anchor="ctr">
-                    <a:lnL w="6350" cap="flat" cmpd="sng" algn="ctr">
-                      <a:solidFill>
-                        <a:srgbClr val="D5DBE3"/>
-                      </a:solidFill>
-                      <a:prstDash val="solid"/>
-                      <a:round/>
-                      <a:headEnd type="none" w="med" len="med"/>
-                      <a:tailEnd type="none" w="med" len="med"/>
-                    </a:lnL>
-                    <a:lnR w="6350" cap="flat" cmpd="sng" algn="ctr">
-                      <a:solidFill>
-                        <a:srgbClr val="D5DBE3"/>
-                      </a:solidFill>
-                      <a:prstDash val="solid"/>
-                      <a:round/>
-                      <a:headEnd type="none" w="med" len="med"/>
-                      <a:tailEnd type="none" w="med" len="med"/>
-                    </a:lnR>
-                    <a:lnT w="6350" cap="flat" cmpd="sng" algn="ctr">
-                      <a:solidFill>
-                        <a:srgbClr val="D5DBE3"/>
-                      </a:solidFill>
-                      <a:prstDash val="solid"/>
-                      <a:round/>
-                      <a:headEnd type="none" w="med" len="med"/>
-                      <a:tailEnd type="none" w="med" len="med"/>
-                    </a:lnT>
-                    <a:lnB w="6350" cap="flat" cmpd="sng" algn="ctr">
-                      <a:solidFill>
-                        <a:srgbClr val="D5DBE3"/>
-                      </a:solidFill>
-                      <a:prstDash val="solid"/>
-                      <a:round/>
-                      <a:headEnd type="none" w="med" len="med"/>
-                      <a:tailEnd type="none" w="med" len="med"/>
-                    </a:lnB>
-                    <a:solidFill>
-                      <a:srgbClr val="F3F5F8"/>
-                    </a:solidFill>
-                  </a:tcPr>
-                </a:tc>
-              </a:tr>
-              <a:tr h="0">
-                <a:tc>
-                  <a:txBody>
-                    <a:bodyPr/>
-                    <a:lstStyle/>
-                    <a:p>
-                      <a:pPr algn="l" indent="0" marL="0">
-                        <a:lnSpc>
-                          <a:spcPct val="110000"/>
-                        </a:lnSpc>
-                        <a:buNone/>
-                      </a:pPr>
-                      <a:r>
-                        <a:rPr lang="en-US" sz="1200" b="1" dirty="0">
-                          <a:solidFill>
-                            <a:srgbClr val="24313F"/>
-                          </a:solidFill>
-                          <a:latin typeface="Malgun Gothic" pitchFamily="34" charset="0"/>
-                          <a:ea typeface="Malgun Gothic" pitchFamily="34" charset="-122"/>
-                          <a:cs typeface="Malgun Gothic" pitchFamily="34" charset="-120"/>
-                        </a:rPr>
-                        <a:t>비용 최적화</a:t>
-                      </a:r>
-                      <a:endParaRPr lang="en-US" sz="1200" dirty="0">
-                        <a:latin typeface="Malgun Gothic" charset="0"/>
-                        <a:ea typeface="Malgun Gothic" charset="0"/>
-                        <a:cs typeface="Malgun Gothic" charset="0"/>
-                      </a:endParaRPr>
-                    </a:p>
-                  </a:txBody>
-                  <a:tcPr marL="101600" marR="101600" marT="76200" marB="76200" anchor="ctr">
-                    <a:lnL w="6350" cap="flat" cmpd="sng" algn="ctr">
-                      <a:solidFill>
-                        <a:srgbClr val="D5DBE3"/>
-                      </a:solidFill>
-                      <a:prstDash val="solid"/>
-                      <a:round/>
-                      <a:headEnd type="none" w="med" len="med"/>
-                      <a:tailEnd type="none" w="med" len="med"/>
-                    </a:lnL>
-                    <a:lnR w="6350" cap="flat" cmpd="sng" algn="ctr">
-                      <a:solidFill>
-                        <a:srgbClr val="D5DBE3"/>
-                      </a:solidFill>
-                      <a:prstDash val="solid"/>
-                      <a:round/>
-                      <a:headEnd type="none" w="med" len="med"/>
-                      <a:tailEnd type="none" w="med" len="med"/>
-                    </a:lnR>
-                    <a:lnT w="6350" cap="flat" cmpd="sng" algn="ctr">
-                      <a:solidFill>
-                        <a:srgbClr val="D5DBE3"/>
-                      </a:solidFill>
-                      <a:prstDash val="solid"/>
-                      <a:round/>
-                      <a:headEnd type="none" w="med" len="med"/>
-                      <a:tailEnd type="none" w="med" len="med"/>
-                    </a:lnT>
-                    <a:lnB w="6350" cap="flat" cmpd="sng" algn="ctr">
-                      <a:solidFill>
-                        <a:srgbClr val="D5DBE3"/>
-                      </a:solidFill>
-                      <a:prstDash val="solid"/>
-                      <a:round/>
-                      <a:headEnd type="none" w="med" len="med"/>
-                      <a:tailEnd type="none" w="med" len="med"/>
-                    </a:lnB>
-                    <a:solidFill>
-                      <a:srgbClr val="FFFFFF"/>
-                    </a:solidFill>
-                  </a:tcPr>
-                </a:tc>
-                <a:tc>
-                  <a:txBody>
-                    <a:bodyPr/>
-                    <a:lstStyle/>
-                    <a:p>
-                      <a:pPr algn="l" indent="0" marL="0">
-                        <a:lnSpc>
-                          <a:spcPct val="110000"/>
-                        </a:lnSpc>
-                        <a:buNone/>
-                      </a:pPr>
-                      <a:r>
-                        <a:rPr lang="en-US" sz="1200" dirty="0">
-                          <a:solidFill>
-                            <a:srgbClr val="24313F"/>
-                          </a:solidFill>
-                          <a:latin typeface="Malgun Gothic" pitchFamily="34" charset="0"/>
-                          <a:ea typeface="Malgun Gothic" pitchFamily="34" charset="-122"/>
-                          <a:cs typeface="Malgun Gothic" pitchFamily="34" charset="-120"/>
-                        </a:rPr>
-                        <a:t>CARLA와 모델을 함께 담을 단일 대형 GPU 인스턴스가 필요 없다. 필요 없는 쪽만 정지 가능</a:t>
-                      </a:r>
-                      <a:endParaRPr lang="en-US" sz="1200" dirty="0">
-                        <a:latin typeface="Malgun Gothic" charset="0"/>
-                        <a:ea typeface="Malgun Gothic" charset="0"/>
-                        <a:cs typeface="Malgun Gothic" charset="0"/>
-                      </a:endParaRPr>
-                    </a:p>
-                  </a:txBody>
-                  <a:tcPr marL="101600" marR="101600" marT="76200" marB="76200" anchor="ctr">
-                    <a:lnL w="6350" cap="flat" cmpd="sng" algn="ctr">
-                      <a:solidFill>
-                        <a:srgbClr val="D5DBE3"/>
-                      </a:solidFill>
-                      <a:prstDash val="solid"/>
-                      <a:round/>
-                      <a:headEnd type="none" w="med" len="med"/>
-                      <a:tailEnd type="none" w="med" len="med"/>
-                    </a:lnL>
-                    <a:lnR w="6350" cap="flat" cmpd="sng" algn="ctr">
-                      <a:solidFill>
-                        <a:srgbClr val="D5DBE3"/>
-                      </a:solidFill>
-                      <a:prstDash val="solid"/>
-                      <a:round/>
-                      <a:headEnd type="none" w="med" len="med"/>
-                      <a:tailEnd type="none" w="med" len="med"/>
-                    </a:lnR>
-                    <a:lnT w="6350" cap="flat" cmpd="sng" algn="ctr">
-                      <a:solidFill>
-                        <a:srgbClr val="D5DBE3"/>
-                      </a:solidFill>
-                      <a:prstDash val="solid"/>
-                      <a:round/>
-                      <a:headEnd type="none" w="med" len="med"/>
-                      <a:tailEnd type="none" w="med" len="med"/>
-                    </a:lnT>
-                    <a:lnB w="6350" cap="flat" cmpd="sng" algn="ctr">
-                      <a:solidFill>
-                        <a:srgbClr val="D5DBE3"/>
-                      </a:solidFill>
-                      <a:prstDash val="solid"/>
-                      <a:round/>
-                      <a:headEnd type="none" w="med" len="med"/>
-                      <a:tailEnd type="none" w="med" len="med"/>
-                    </a:lnB>
-                    <a:solidFill>
-                      <a:srgbClr val="FFFFFF"/>
-                    </a:solidFill>
-                  </a:tcPr>
-                </a:tc>
-                <a:tc>
-                  <a:txBody>
-                    <a:bodyPr/>
-                    <a:lstStyle/>
-                    <a:p>
-                      <a:pPr algn="l" indent="0" marL="0">
-                        <a:lnSpc>
-                          <a:spcPct val="110000"/>
-                        </a:lnSpc>
-                        <a:buNone/>
-                      </a:pPr>
-                      <a:r>
-                        <a:rPr lang="en-US" sz="1200" dirty="0">
-                          <a:solidFill>
-                            <a:srgbClr val="24313F"/>
-                          </a:solidFill>
-                          <a:latin typeface="Malgun Gothic" pitchFamily="34" charset="0"/>
-                          <a:ea typeface="Malgun Gothic" pitchFamily="34" charset="-122"/>
-                          <a:cs typeface="Malgun Gothic" pitchFamily="34" charset="-120"/>
-                        </a:rPr>
-                        <a:t>open-loop·노트북 실험 때는 A 정지, 데이터 수집 때는 B 정지. 요금 비교: [요금표 확인 후 기입]</a:t>
-                      </a:r>
-                      <a:endParaRPr lang="en-US" sz="1200" dirty="0">
-                        <a:latin typeface="Malgun Gothic" charset="0"/>
-                        <a:ea typeface="Malgun Gothic" charset="0"/>
-                        <a:cs typeface="Malgun Gothic" charset="0"/>
-                      </a:endParaRPr>
-                    </a:p>
-                  </a:txBody>
-                  <a:tcPr marL="101600" marR="101600" marT="76200" marB="76200" anchor="ctr">
-                    <a:lnL w="6350" cap="flat" cmpd="sng" algn="ctr">
-                      <a:solidFill>
-                        <a:srgbClr val="D5DBE3"/>
-                      </a:solidFill>
-                      <a:prstDash val="solid"/>
-                      <a:round/>
-                      <a:headEnd type="none" w="med" len="med"/>
-                      <a:tailEnd type="none" w="med" len="med"/>
-                    </a:lnL>
-                    <a:lnR w="6350" cap="flat" cmpd="sng" algn="ctr">
-                      <a:solidFill>
-                        <a:srgbClr val="D5DBE3"/>
-                      </a:solidFill>
-                      <a:prstDash val="solid"/>
-                      <a:round/>
-                      <a:headEnd type="none" w="med" len="med"/>
-                      <a:tailEnd type="none" w="med" len="med"/>
-                    </a:lnR>
-                    <a:lnT w="6350" cap="flat" cmpd="sng" algn="ctr">
-                      <a:solidFill>
-                        <a:srgbClr val="D5DBE3"/>
-                      </a:solidFill>
-                      <a:prstDash val="solid"/>
-                      <a:round/>
-                      <a:headEnd type="none" w="med" len="med"/>
-                      <a:tailEnd type="none" w="med" len="med"/>
-                    </a:lnT>
-                    <a:lnB w="6350" cap="flat" cmpd="sng" algn="ctr">
-                      <a:solidFill>
-                        <a:srgbClr val="D5DBE3"/>
-                      </a:solidFill>
-                      <a:prstDash val="solid"/>
-                      <a:round/>
-                      <a:headEnd type="none" w="med" len="med"/>
-                      <a:tailEnd type="none" w="med" len="med"/>
-                    </a:lnB>
-                    <a:solidFill>
-                      <a:srgbClr val="FFFFFF"/>
-                    </a:solidFill>
-                  </a:tcPr>
-                </a:tc>
-              </a:tr>
-              <a:tr h="0">
-                <a:tc>
-                  <a:txBody>
-                    <a:bodyPr/>
-                    <a:lstStyle/>
-                    <a:p>
-                      <a:pPr algn="l" indent="0" marL="0">
-                        <a:lnSpc>
-                          <a:spcPct val="110000"/>
-                        </a:lnSpc>
-                        <a:buNone/>
-                      </a:pPr>
-                      <a:r>
-                        <a:rPr lang="en-US" sz="1200" b="1" dirty="0">
-                          <a:solidFill>
-                            <a:srgbClr val="24313F"/>
-                          </a:solidFill>
-                          <a:latin typeface="Malgun Gothic" pitchFamily="34" charset="0"/>
-                          <a:ea typeface="Malgun Gothic" pitchFamily="34" charset="-122"/>
-                          <a:cs typeface="Malgun Gothic" pitchFamily="34" charset="-120"/>
-                        </a:rPr>
-                        <a:t>운영·확장</a:t>
-                      </a:r>
-                      <a:endParaRPr lang="en-US" sz="1200" dirty="0">
-                        <a:latin typeface="Malgun Gothic" charset="0"/>
-                        <a:ea typeface="Malgun Gothic" charset="0"/>
-                        <a:cs typeface="Malgun Gothic" charset="0"/>
-                      </a:endParaRPr>
-                    </a:p>
-                  </a:txBody>
-                  <a:tcPr marL="101600" marR="101600" marT="76200" marB="76200" anchor="ctr">
-                    <a:lnL w="6350" cap="flat" cmpd="sng" algn="ctr">
-                      <a:solidFill>
-                        <a:srgbClr val="D5DBE3"/>
-                      </a:solidFill>
-                      <a:prstDash val="solid"/>
-                      <a:round/>
-                      <a:headEnd type="none" w="med" len="med"/>
-                      <a:tailEnd type="none" w="med" len="med"/>
-                    </a:lnL>
-                    <a:lnR w="6350" cap="flat" cmpd="sng" algn="ctr">
-                      <a:solidFill>
-                        <a:srgbClr val="D5DBE3"/>
-                      </a:solidFill>
-                      <a:prstDash val="solid"/>
-                      <a:round/>
-                      <a:headEnd type="none" w="med" len="med"/>
-                      <a:tailEnd type="none" w="med" len="med"/>
-                    </a:lnR>
-                    <a:lnT w="6350" cap="flat" cmpd="sng" algn="ctr">
-                      <a:solidFill>
-                        <a:srgbClr val="D5DBE3"/>
-                      </a:solidFill>
-                      <a:prstDash val="solid"/>
-                      <a:round/>
-                      <a:headEnd type="none" w="med" len="med"/>
-                      <a:tailEnd type="none" w="med" len="med"/>
-                    </a:lnT>
-                    <a:lnB w="6350" cap="flat" cmpd="sng" algn="ctr">
-                      <a:solidFill>
-                        <a:srgbClr val="D5DBE3"/>
-                      </a:solidFill>
-                      <a:prstDash val="solid"/>
-                      <a:round/>
-                      <a:headEnd type="none" w="med" len="med"/>
-                      <a:tailEnd type="none" w="med" len="med"/>
-                    </a:lnB>
-                    <a:solidFill>
-                      <a:srgbClr val="F3F5F8"/>
-                    </a:solidFill>
-                  </a:tcPr>
-                </a:tc>
-                <a:tc>
-                  <a:txBody>
-                    <a:bodyPr/>
-                    <a:lstStyle/>
-                    <a:p>
-                      <a:pPr algn="l" indent="0" marL="0">
-                        <a:lnSpc>
-                          <a:spcPct val="110000"/>
-                        </a:lnSpc>
-                        <a:buNone/>
-                      </a:pPr>
-                      <a:r>
-                        <a:rPr lang="en-US" sz="1200" dirty="0">
-                          <a:solidFill>
-                            <a:srgbClr val="24313F"/>
-                          </a:solidFill>
-                          <a:latin typeface="Malgun Gothic" pitchFamily="34" charset="0"/>
-                          <a:ea typeface="Malgun Gothic" pitchFamily="34" charset="-122"/>
-                          <a:cs typeface="Malgun Gothic" pitchFamily="34" charset="-120"/>
-                        </a:rPr>
-                        <a:t>모델을 한 번만 로드해 상주. 추론 인터페이스가 .proto 계약으로 고정</a:t>
-                      </a:r>
-                      <a:endParaRPr lang="en-US" sz="1200" dirty="0">
-                        <a:latin typeface="Malgun Gothic" charset="0"/>
-                        <a:ea typeface="Malgun Gothic" charset="0"/>
-                        <a:cs typeface="Malgun Gothic" charset="0"/>
-                      </a:endParaRPr>
-                    </a:p>
-                  </a:txBody>
-                  <a:tcPr marL="101600" marR="101600" marT="76200" marB="76200" anchor="ctr">
-                    <a:lnL w="6350" cap="flat" cmpd="sng" algn="ctr">
-                      <a:solidFill>
-                        <a:srgbClr val="D5DBE3"/>
-                      </a:solidFill>
-                      <a:prstDash val="solid"/>
-                      <a:round/>
-                      <a:headEnd type="none" w="med" len="med"/>
-                      <a:tailEnd type="none" w="med" len="med"/>
-                    </a:lnL>
-                    <a:lnR w="6350" cap="flat" cmpd="sng" algn="ctr">
-                      <a:solidFill>
-                        <a:srgbClr val="D5DBE3"/>
-                      </a:solidFill>
-                      <a:prstDash val="solid"/>
-                      <a:round/>
-                      <a:headEnd type="none" w="med" len="med"/>
-                      <a:tailEnd type="none" w="med" len="med"/>
-                    </a:lnR>
-                    <a:lnT w="6350" cap="flat" cmpd="sng" algn="ctr">
-                      <a:solidFill>
-                        <a:srgbClr val="D5DBE3"/>
-                      </a:solidFill>
-                      <a:prstDash val="solid"/>
-                      <a:round/>
-                      <a:headEnd type="none" w="med" len="med"/>
-                      <a:tailEnd type="none" w="med" len="med"/>
-                    </a:lnT>
-                    <a:lnB w="6350" cap="flat" cmpd="sng" algn="ctr">
-                      <a:solidFill>
-                        <a:srgbClr val="D5DBE3"/>
-                      </a:solidFill>
-                      <a:prstDash val="solid"/>
-                      <a:round/>
-                      <a:headEnd type="none" w="med" len="med"/>
-                      <a:tailEnd type="none" w="med" len="med"/>
-                    </a:lnB>
-                    <a:solidFill>
-                      <a:srgbClr val="F3F5F8"/>
-                    </a:solidFill>
-                  </a:tcPr>
-                </a:tc>
-                <a:tc>
-                  <a:txBody>
-                    <a:bodyPr/>
-                    <a:lstStyle/>
-                    <a:p>
-                      <a:pPr algn="l" indent="0" marL="0">
-                        <a:lnSpc>
-                          <a:spcPct val="110000"/>
-                        </a:lnSpc>
-                        <a:buNone/>
-                      </a:pPr>
-                      <a:r>
-                        <a:rPr lang="en-US" sz="1200" dirty="0">
-                          <a:solidFill>
-                            <a:srgbClr val="24313F"/>
-                          </a:solidFill>
-                          <a:latin typeface="Malgun Gothic" pitchFamily="34" charset="0"/>
-                          <a:ea typeface="Malgun Gothic" pitchFamily="34" charset="-122"/>
-                          <a:cs typeface="Malgun Gothic" pitchFamily="34" charset="-120"/>
-                        </a:rPr>
-                        <a:t>클라이언트·CARLA 재시작 시 모델 재로드 없음. 다른 모델·다른 시뮬레이터도 같은 방식으로 연결</a:t>
-                      </a:r>
-                      <a:endParaRPr lang="en-US" sz="1200" dirty="0">
-                        <a:latin typeface="Malgun Gothic" charset="0"/>
-                        <a:ea typeface="Malgun Gothic" charset="0"/>
-                        <a:cs typeface="Malgun Gothic" charset="0"/>
-                      </a:endParaRPr>
-                    </a:p>
-                  </a:txBody>
-                  <a:tcPr marL="101600" marR="101600" marT="76200" marB="76200" anchor="ctr">
-                    <a:lnL w="6350" cap="flat" cmpd="sng" algn="ctr">
-                      <a:solidFill>
-                        <a:srgbClr val="D5DBE3"/>
-                      </a:solidFill>
-                      <a:prstDash val="solid"/>
-                      <a:round/>
-                      <a:headEnd type="none" w="med" len="med"/>
-                      <a:tailEnd type="none" w="med" len="med"/>
-                    </a:lnL>
-                    <a:lnR w="6350" cap="flat" cmpd="sng" algn="ctr">
-                      <a:solidFill>
-                        <a:srgbClr val="D5DBE3"/>
-                      </a:solidFill>
-                      <a:prstDash val="solid"/>
-                      <a:round/>
-                      <a:headEnd type="none" w="med" len="med"/>
-                      <a:tailEnd type="none" w="med" len="med"/>
-                    </a:lnR>
-                    <a:lnT w="6350" cap="flat" cmpd="sng" algn="ctr">
-                      <a:solidFill>
-                        <a:srgbClr val="D5DBE3"/>
-                      </a:solidFill>
-                      <a:prstDash val="solid"/>
-                      <a:round/>
-                      <a:headEnd type="none" w="med" len="med"/>
-                      <a:tailEnd type="none" w="med" len="med"/>
-                    </a:lnT>
-                    <a:lnB w="6350" cap="flat" cmpd="sng" algn="ctr">
-                      <a:solidFill>
-                        <a:srgbClr val="D5DBE3"/>
-                      </a:solidFill>
-                      <a:prstDash val="solid"/>
-                      <a:round/>
-                      <a:headEnd type="none" w="med" len="med"/>
-                      <a:tailEnd type="none" w="med" len="med"/>
-                    </a:lnB>
-                    <a:solidFill>
-                      <a:srgbClr val="F3F5F8"/>
-                    </a:solidFill>
-                  </a:tcPr>
-                </a:tc>
-              </a:tr>
-            </a:tbl>
-          </a:graphicData>
-        </a:graphic>
-      </p:graphicFrame>
+      <p:sp>
+        <p:nvSpPr>
+          <p:cNvPr id="6" name="Text 4"/>
+          <p:cNvSpPr txBox="1"/>
+          <p:nvPr/>
+        </p:nvSpPr>
+        <p:spPr>
+          <a:xfrm>
+            <a:off x="548640" y="1371600"/>
+            <a:ext cx="822960" cy="822960"/>
+          </a:xfrm>
+          <a:prstGeom prst="rect">
+            <a:avLst/>
+          </a:prstGeom>
+          <a:noFill/>
+          <a:ln/>
+        </p:spPr>
+        <p:txBody>
+          <a:bodyPr wrap="square" lIns="0" tIns="0" rIns="0" bIns="0" rtlCol="0" anchor="t"/>
+          <a:lstStyle/>
+          <a:p>
+            <a:pPr indent="0" marL="0">
+              <a:buNone/>
+            </a:pPr>
+            <a:r>
+              <a:rPr lang="en-US" sz="4400" b="1" dirty="0">
+                <a:solidFill>
+                  <a:srgbClr val="2A6FDB"/>
+                </a:solidFill>
+                <a:latin typeface="Malgun Gothic" pitchFamily="34" charset="0"/>
+                <a:ea typeface="Malgun Gothic" pitchFamily="34" charset="-122"/>
+                <a:cs typeface="Malgun Gothic" pitchFamily="34" charset="-120"/>
+              </a:rPr>
+              <a:t>1</a:t>
+            </a:r>
+            <a:endParaRPr lang="en-US" sz="4400" dirty="0"/>
+          </a:p>
+        </p:txBody>
+      </p:sp>
+      <p:sp>
+        <p:nvSpPr>
+          <p:cNvPr id="7" name="Text 5"/>
+          <p:cNvSpPr txBox="1"/>
+          <p:nvPr/>
+        </p:nvSpPr>
+        <p:spPr>
+          <a:xfrm>
+            <a:off x="1417320" y="1463040"/>
+            <a:ext cx="4404208" cy="384048"/>
+          </a:xfrm>
+          <a:prstGeom prst="rect">
+            <a:avLst/>
+          </a:prstGeom>
+          <a:noFill/>
+          <a:ln/>
+        </p:spPr>
+        <p:txBody>
+          <a:bodyPr wrap="square" lIns="0" tIns="0" rIns="0" bIns="0" rtlCol="0" anchor="ctr"/>
+          <a:lstStyle/>
+          <a:p>
+            <a:pPr indent="0" marL="0">
+              <a:buNone/>
+            </a:pPr>
+            <a:r>
+              <a:rPr lang="en-US" sz="1600" b="1" dirty="0">
+                <a:solidFill>
+                  <a:srgbClr val="1B2A41"/>
+                </a:solidFill>
+                <a:latin typeface="Malgun Gothic" pitchFamily="34" charset="0"/>
+                <a:ea typeface="Malgun Gothic" pitchFamily="34" charset="-122"/>
+                <a:cs typeface="Malgun Gothic" pitchFamily="34" charset="-120"/>
+              </a:rPr>
+              <a:t>요구사항 분리 입증</a:t>
+            </a:r>
+            <a:endParaRPr lang="en-US" sz="1600" dirty="0"/>
+          </a:p>
+        </p:txBody>
+      </p:sp>
+      <p:sp>
+        <p:nvSpPr>
+          <p:cNvPr id="8" name="Text 6"/>
+          <p:cNvSpPr txBox="1"/>
+          <p:nvPr/>
+        </p:nvSpPr>
+        <p:spPr>
+          <a:xfrm>
+            <a:off x="1417320" y="1901952"/>
+            <a:ext cx="4404208" cy="1709928"/>
+          </a:xfrm>
+          <a:prstGeom prst="rect">
+            <a:avLst/>
+          </a:prstGeom>
+          <a:noFill/>
+          <a:ln/>
+        </p:spPr>
+        <p:txBody>
+          <a:bodyPr wrap="square" lIns="0" tIns="0" rIns="0" bIns="0" rtlCol="0" anchor="t"/>
+          <a:lstStyle/>
+          <a:p>
+            <a:pPr indent="0" marL="0">
+              <a:lnSpc>
+                <a:spcPct val="115000"/>
+              </a:lnSpc>
+              <a:spcAft>
+                <a:spcPts val="800"/>
+              </a:spcAft>
+              <a:buNone/>
+            </a:pPr>
+            <a:r>
+              <a:rPr lang="en-US" sz="1250" dirty="0">
+                <a:solidFill>
+                  <a:srgbClr val="24313F"/>
+                </a:solidFill>
+                <a:latin typeface="Malgun Gothic" pitchFamily="34" charset="0"/>
+                <a:ea typeface="Malgun Gothic" pitchFamily="34" charset="-122"/>
+                <a:cs typeface="Malgun Gothic" pitchFamily="34" charset="-120"/>
+              </a:rPr>
+              <a:t>근거: CARLA(UE4)는 x86 CPU가 필수이지만 GPU는 6 GB면 충분. Alpamayo는 VRAM 24 GB 이상이 필요하지만 CPU 아키텍처에는 무관</a:t>
+            </a:r>
+            <a:endParaRPr lang="en-US" sz="1250" dirty="0"/>
+          </a:p>
+          <a:p>
+            <a:pPr indent="0" marL="0">
+              <a:lnSpc>
+                <a:spcPct val="115000"/>
+              </a:lnSpc>
+              <a:spcAft>
+                <a:spcPts val="800"/>
+              </a:spcAft>
+              <a:buNone/>
+            </a:pPr>
+            <a:r>
+              <a:rPr lang="en-US" sz="1250" dirty="0">
+                <a:solidFill>
+                  <a:srgbClr val="24313F"/>
+                </a:solidFill>
+                <a:latin typeface="Malgun Gothic" pitchFamily="34" charset="0"/>
+                <a:ea typeface="Malgun Gothic" pitchFamily="34" charset="-122"/>
+                <a:cs typeface="Malgun Gothic" pitchFamily="34" charset="-120"/>
+              </a:rPr>
+              <a:t>효과: 같은 머신에 두던 제약(4-bit 양자화, OOM-free 대책, venv 3개)이 사라진다</a:t>
+            </a:r>
+            <a:endParaRPr lang="en-US" sz="1250" dirty="0"/>
+          </a:p>
+        </p:txBody>
+      </p:sp>
+      <p:sp>
+        <p:nvSpPr>
+          <p:cNvPr id="9" name="Text 7"/>
+          <p:cNvSpPr txBox="1"/>
+          <p:nvPr/>
+        </p:nvSpPr>
+        <p:spPr>
+          <a:xfrm>
+            <a:off x="6370168" y="1371600"/>
+            <a:ext cx="822960" cy="822960"/>
+          </a:xfrm>
+          <a:prstGeom prst="rect">
+            <a:avLst/>
+          </a:prstGeom>
+          <a:noFill/>
+          <a:ln/>
+        </p:spPr>
+        <p:txBody>
+          <a:bodyPr wrap="square" lIns="0" tIns="0" rIns="0" bIns="0" rtlCol="0" anchor="t"/>
+          <a:lstStyle/>
+          <a:p>
+            <a:pPr indent="0" marL="0">
+              <a:buNone/>
+            </a:pPr>
+            <a:r>
+              <a:rPr lang="en-US" sz="4400" b="1" dirty="0">
+                <a:solidFill>
+                  <a:srgbClr val="E0762B"/>
+                </a:solidFill>
+                <a:latin typeface="Malgun Gothic" pitchFamily="34" charset="0"/>
+                <a:ea typeface="Malgun Gothic" pitchFamily="34" charset="-122"/>
+                <a:cs typeface="Malgun Gothic" pitchFamily="34" charset="-120"/>
+              </a:rPr>
+              <a:t>2</a:t>
+            </a:r>
+            <a:endParaRPr lang="en-US" sz="4400" dirty="0"/>
+          </a:p>
+        </p:txBody>
+      </p:sp>
+      <p:sp>
+        <p:nvSpPr>
+          <p:cNvPr id="10" name="Text 8"/>
+          <p:cNvSpPr txBox="1"/>
+          <p:nvPr/>
+        </p:nvSpPr>
+        <p:spPr>
+          <a:xfrm>
+            <a:off x="7238848" y="1463040"/>
+            <a:ext cx="4404208" cy="384048"/>
+          </a:xfrm>
+          <a:prstGeom prst="rect">
+            <a:avLst/>
+          </a:prstGeom>
+          <a:noFill/>
+          <a:ln/>
+        </p:spPr>
+        <p:txBody>
+          <a:bodyPr wrap="square" lIns="0" tIns="0" rIns="0" bIns="0" rtlCol="0" anchor="ctr"/>
+          <a:lstStyle/>
+          <a:p>
+            <a:pPr indent="0" marL="0">
+              <a:buNone/>
+            </a:pPr>
+            <a:r>
+              <a:rPr lang="en-US" sz="1600" b="1" dirty="0">
+                <a:solidFill>
+                  <a:srgbClr val="1B2A41"/>
+                </a:solidFill>
+                <a:latin typeface="Malgun Gothic" pitchFamily="34" charset="0"/>
+                <a:ea typeface="Malgun Gothic" pitchFamily="34" charset="-122"/>
+                <a:cs typeface="Malgun Gothic" pitchFamily="34" charset="-120"/>
+              </a:rPr>
+              <a:t>인스턴스 선택 유연성</a:t>
+            </a:r>
+            <a:endParaRPr lang="en-US" sz="1600" dirty="0"/>
+          </a:p>
+        </p:txBody>
+      </p:sp>
+      <p:sp>
+        <p:nvSpPr>
+          <p:cNvPr id="11" name="Text 9"/>
+          <p:cNvSpPr txBox="1"/>
+          <p:nvPr/>
+        </p:nvSpPr>
+        <p:spPr>
+          <a:xfrm>
+            <a:off x="7238848" y="1901952"/>
+            <a:ext cx="4404208" cy="1709928"/>
+          </a:xfrm>
+          <a:prstGeom prst="rect">
+            <a:avLst/>
+          </a:prstGeom>
+          <a:noFill/>
+          <a:ln/>
+        </p:spPr>
+        <p:txBody>
+          <a:bodyPr wrap="square" lIns="0" tIns="0" rIns="0" bIns="0" rtlCol="0" anchor="t"/>
+          <a:lstStyle/>
+          <a:p>
+            <a:pPr indent="0" marL="0">
+              <a:lnSpc>
+                <a:spcPct val="115000"/>
+              </a:lnSpc>
+              <a:spcAft>
+                <a:spcPts val="800"/>
+              </a:spcAft>
+              <a:buNone/>
+            </a:pPr>
+            <a:r>
+              <a:rPr lang="en-US" sz="1250" dirty="0">
+                <a:solidFill>
+                  <a:srgbClr val="24313F"/>
+                </a:solidFill>
+                <a:latin typeface="Malgun Gothic" pitchFamily="34" charset="0"/>
+                <a:ea typeface="Malgun Gothic" pitchFamily="34" charset="-122"/>
+                <a:cs typeface="Malgun Gothic" pitchFamily="34" charset="-120"/>
+              </a:rPr>
+              <a:t>근거: 추론 호스트는 x86/ARM과 무관하게 VRAM 기준으로만 고른다. 시뮬레이터 호스트는 그대로</a:t>
+            </a:r>
+            <a:endParaRPr lang="en-US" sz="1250" dirty="0"/>
+          </a:p>
+          <a:p>
+            <a:pPr indent="0" marL="0">
+              <a:lnSpc>
+                <a:spcPct val="115000"/>
+              </a:lnSpc>
+              <a:spcAft>
+                <a:spcPts val="800"/>
+              </a:spcAft>
+              <a:buNone/>
+            </a:pPr>
+            <a:r>
+              <a:rPr lang="en-US" sz="1250" dirty="0">
+                <a:solidFill>
+                  <a:srgbClr val="24313F"/>
+                </a:solidFill>
+                <a:latin typeface="Malgun Gothic" pitchFamily="34" charset="0"/>
+                <a:ea typeface="Malgun Gothic" pitchFamily="34" charset="-122"/>
+                <a:cs typeface="Malgun Gothic" pitchFamily="34" charset="-120"/>
+              </a:rPr>
+              <a:t>효과: ARM Graviton GPU 인스턴스 검토 가능. Alpamayo 2(7카메라)나 샘플 수·CFG를 늘릴 때 B만 교체</a:t>
+            </a:r>
+            <a:endParaRPr lang="en-US" sz="1250" dirty="0"/>
+          </a:p>
+        </p:txBody>
+      </p:sp>
+      <p:sp>
+        <p:nvSpPr>
+          <p:cNvPr id="12" name="Text 10"/>
+          <p:cNvSpPr txBox="1"/>
+          <p:nvPr/>
+        </p:nvSpPr>
+        <p:spPr>
+          <a:xfrm>
+            <a:off x="548640" y="3749040"/>
+            <a:ext cx="822960" cy="822960"/>
+          </a:xfrm>
+          <a:prstGeom prst="rect">
+            <a:avLst/>
+          </a:prstGeom>
+          <a:noFill/>
+          <a:ln/>
+        </p:spPr>
+        <p:txBody>
+          <a:bodyPr wrap="square" lIns="0" tIns="0" rIns="0" bIns="0" rtlCol="0" anchor="t"/>
+          <a:lstStyle/>
+          <a:p>
+            <a:pPr indent="0" marL="0">
+              <a:buNone/>
+            </a:pPr>
+            <a:r>
+              <a:rPr lang="en-US" sz="4400" b="1" dirty="0">
+                <a:solidFill>
+                  <a:srgbClr val="2E8B57"/>
+                </a:solidFill>
+                <a:latin typeface="Malgun Gothic" pitchFamily="34" charset="0"/>
+                <a:ea typeface="Malgun Gothic" pitchFamily="34" charset="-122"/>
+                <a:cs typeface="Malgun Gothic" pitchFamily="34" charset="-120"/>
+              </a:rPr>
+              <a:t>3</a:t>
+            </a:r>
+            <a:endParaRPr lang="en-US" sz="4400" dirty="0"/>
+          </a:p>
+        </p:txBody>
+      </p:sp>
+      <p:sp>
+        <p:nvSpPr>
+          <p:cNvPr id="13" name="Text 11"/>
+          <p:cNvSpPr txBox="1"/>
+          <p:nvPr/>
+        </p:nvSpPr>
+        <p:spPr>
+          <a:xfrm>
+            <a:off x="1417320" y="3840480"/>
+            <a:ext cx="4404208" cy="384048"/>
+          </a:xfrm>
+          <a:prstGeom prst="rect">
+            <a:avLst/>
+          </a:prstGeom>
+          <a:noFill/>
+          <a:ln/>
+        </p:spPr>
+        <p:txBody>
+          <a:bodyPr wrap="square" lIns="0" tIns="0" rIns="0" bIns="0" rtlCol="0" anchor="ctr"/>
+          <a:lstStyle/>
+          <a:p>
+            <a:pPr indent="0" marL="0">
+              <a:buNone/>
+            </a:pPr>
+            <a:r>
+              <a:rPr lang="en-US" sz="1600" b="1" dirty="0">
+                <a:solidFill>
+                  <a:srgbClr val="1B2A41"/>
+                </a:solidFill>
+                <a:latin typeface="Malgun Gothic" pitchFamily="34" charset="0"/>
+                <a:ea typeface="Malgun Gothic" pitchFamily="34" charset="-122"/>
+                <a:cs typeface="Malgun Gothic" pitchFamily="34" charset="-120"/>
+              </a:rPr>
+              <a:t>비용 최적화</a:t>
+            </a:r>
+            <a:endParaRPr lang="en-US" sz="1600" dirty="0"/>
+          </a:p>
+        </p:txBody>
+      </p:sp>
+      <p:sp>
+        <p:nvSpPr>
+          <p:cNvPr id="14" name="Text 12"/>
+          <p:cNvSpPr txBox="1"/>
+          <p:nvPr/>
+        </p:nvSpPr>
+        <p:spPr>
+          <a:xfrm>
+            <a:off x="1417320" y="4279392"/>
+            <a:ext cx="4404208" cy="1709928"/>
+          </a:xfrm>
+          <a:prstGeom prst="rect">
+            <a:avLst/>
+          </a:prstGeom>
+          <a:noFill/>
+          <a:ln/>
+        </p:spPr>
+        <p:txBody>
+          <a:bodyPr wrap="square" lIns="0" tIns="0" rIns="0" bIns="0" rtlCol="0" anchor="t"/>
+          <a:lstStyle/>
+          <a:p>
+            <a:pPr indent="0" marL="0">
+              <a:lnSpc>
+                <a:spcPct val="115000"/>
+              </a:lnSpc>
+              <a:spcAft>
+                <a:spcPts val="800"/>
+              </a:spcAft>
+              <a:buNone/>
+            </a:pPr>
+            <a:r>
+              <a:rPr lang="en-US" sz="1250" dirty="0">
+                <a:solidFill>
+                  <a:srgbClr val="24313F"/>
+                </a:solidFill>
+                <a:latin typeface="Malgun Gothic" pitchFamily="34" charset="0"/>
+                <a:ea typeface="Malgun Gothic" pitchFamily="34" charset="-122"/>
+                <a:cs typeface="Malgun Gothic" pitchFamily="34" charset="-120"/>
+              </a:rPr>
+              <a:t>근거: CARLA와 모델을 함께 담을 단일 대형 GPU 인스턴스가 필요 없다. 필요 없는 쪽만 정지 가능</a:t>
+            </a:r>
+            <a:endParaRPr lang="en-US" sz="1250" dirty="0"/>
+          </a:p>
+          <a:p>
+            <a:pPr indent="0" marL="0">
+              <a:lnSpc>
+                <a:spcPct val="115000"/>
+              </a:lnSpc>
+              <a:spcAft>
+                <a:spcPts val="800"/>
+              </a:spcAft>
+              <a:buNone/>
+            </a:pPr>
+            <a:r>
+              <a:rPr lang="en-US" sz="1250" dirty="0">
+                <a:solidFill>
+                  <a:srgbClr val="24313F"/>
+                </a:solidFill>
+                <a:latin typeface="Malgun Gothic" pitchFamily="34" charset="0"/>
+                <a:ea typeface="Malgun Gothic" pitchFamily="34" charset="-122"/>
+                <a:cs typeface="Malgun Gothic" pitchFamily="34" charset="-120"/>
+              </a:rPr>
+              <a:t>효과: open-loop·노트북 실험 때는 A 정지, 데이터 수집 때는 B 정지. 요금 비교: [요금표 확인 후 기입]</a:t>
+            </a:r>
+            <a:endParaRPr lang="en-US" sz="1250" dirty="0"/>
+          </a:p>
+        </p:txBody>
+      </p:sp>
+      <p:sp>
+        <p:nvSpPr>
+          <p:cNvPr id="15" name="Text 13"/>
+          <p:cNvSpPr txBox="1"/>
+          <p:nvPr/>
+        </p:nvSpPr>
+        <p:spPr>
+          <a:xfrm>
+            <a:off x="6370168" y="3749040"/>
+            <a:ext cx="822960" cy="822960"/>
+          </a:xfrm>
+          <a:prstGeom prst="rect">
+            <a:avLst/>
+          </a:prstGeom>
+          <a:noFill/>
+          <a:ln/>
+        </p:spPr>
+        <p:txBody>
+          <a:bodyPr wrap="square" lIns="0" tIns="0" rIns="0" bIns="0" rtlCol="0" anchor="t"/>
+          <a:lstStyle/>
+          <a:p>
+            <a:pPr indent="0" marL="0">
+              <a:buNone/>
+            </a:pPr>
+            <a:r>
+              <a:rPr lang="en-US" sz="4400" b="1" dirty="0">
+                <a:solidFill>
+                  <a:srgbClr val="1B2A41"/>
+                </a:solidFill>
+                <a:latin typeface="Malgun Gothic" pitchFamily="34" charset="0"/>
+                <a:ea typeface="Malgun Gothic" pitchFamily="34" charset="-122"/>
+                <a:cs typeface="Malgun Gothic" pitchFamily="34" charset="-120"/>
+              </a:rPr>
+              <a:t>4</a:t>
+            </a:r>
+            <a:endParaRPr lang="en-US" sz="4400" dirty="0"/>
+          </a:p>
+        </p:txBody>
+      </p:sp>
+      <p:sp>
+        <p:nvSpPr>
+          <p:cNvPr id="16" name="Text 14"/>
+          <p:cNvSpPr txBox="1"/>
+          <p:nvPr/>
+        </p:nvSpPr>
+        <p:spPr>
+          <a:xfrm>
+            <a:off x="7238848" y="3840480"/>
+            <a:ext cx="4404208" cy="384048"/>
+          </a:xfrm>
+          <a:prstGeom prst="rect">
+            <a:avLst/>
+          </a:prstGeom>
+          <a:noFill/>
+          <a:ln/>
+        </p:spPr>
+        <p:txBody>
+          <a:bodyPr wrap="square" lIns="0" tIns="0" rIns="0" bIns="0" rtlCol="0" anchor="ctr"/>
+          <a:lstStyle/>
+          <a:p>
+            <a:pPr indent="0" marL="0">
+              <a:buNone/>
+            </a:pPr>
+            <a:r>
+              <a:rPr lang="en-US" sz="1600" b="1" dirty="0">
+                <a:solidFill>
+                  <a:srgbClr val="1B2A41"/>
+                </a:solidFill>
+                <a:latin typeface="Malgun Gothic" pitchFamily="34" charset="0"/>
+                <a:ea typeface="Malgun Gothic" pitchFamily="34" charset="-122"/>
+                <a:cs typeface="Malgun Gothic" pitchFamily="34" charset="-120"/>
+              </a:rPr>
+              <a:t>운영·확장</a:t>
+            </a:r>
+            <a:endParaRPr lang="en-US" sz="1600" dirty="0"/>
+          </a:p>
+        </p:txBody>
+      </p:sp>
+      <p:sp>
+        <p:nvSpPr>
+          <p:cNvPr id="17" name="Text 15"/>
+          <p:cNvSpPr txBox="1"/>
+          <p:nvPr/>
+        </p:nvSpPr>
+        <p:spPr>
+          <a:xfrm>
+            <a:off x="7238848" y="4279392"/>
+            <a:ext cx="4404208" cy="1709928"/>
+          </a:xfrm>
+          <a:prstGeom prst="rect">
+            <a:avLst/>
+          </a:prstGeom>
+          <a:noFill/>
+          <a:ln/>
+        </p:spPr>
+        <p:txBody>
+          <a:bodyPr wrap="square" lIns="0" tIns="0" rIns="0" bIns="0" rtlCol="0" anchor="t"/>
+          <a:lstStyle/>
+          <a:p>
+            <a:pPr indent="0" marL="0">
+              <a:lnSpc>
+                <a:spcPct val="115000"/>
+              </a:lnSpc>
+              <a:spcAft>
+                <a:spcPts val="800"/>
+              </a:spcAft>
+              <a:buNone/>
+            </a:pPr>
+            <a:r>
+              <a:rPr lang="en-US" sz="1250" dirty="0">
+                <a:solidFill>
+                  <a:srgbClr val="24313F"/>
+                </a:solidFill>
+                <a:latin typeface="Malgun Gothic" pitchFamily="34" charset="0"/>
+                <a:ea typeface="Malgun Gothic" pitchFamily="34" charset="-122"/>
+                <a:cs typeface="Malgun Gothic" pitchFamily="34" charset="-120"/>
+              </a:rPr>
+              <a:t>근거: 모델을 한 번만 로드해 상주. 추론 인터페이스가 .proto 계약으로 고정</a:t>
+            </a:r>
+            <a:endParaRPr lang="en-US" sz="1250" dirty="0"/>
+          </a:p>
+          <a:p>
+            <a:pPr indent="0" marL="0">
+              <a:lnSpc>
+                <a:spcPct val="115000"/>
+              </a:lnSpc>
+              <a:spcAft>
+                <a:spcPts val="800"/>
+              </a:spcAft>
+              <a:buNone/>
+            </a:pPr>
+            <a:r>
+              <a:rPr lang="en-US" sz="1250" dirty="0">
+                <a:solidFill>
+                  <a:srgbClr val="24313F"/>
+                </a:solidFill>
+                <a:latin typeface="Malgun Gothic" pitchFamily="34" charset="0"/>
+                <a:ea typeface="Malgun Gothic" pitchFamily="34" charset="-122"/>
+                <a:cs typeface="Malgun Gothic" pitchFamily="34" charset="-120"/>
+              </a:rPr>
+              <a:t>효과: 클라이언트·CARLA 재시작 시 모델 재로드 없음. 다른 모델·다른 시뮬레이터도 같은 방식으로 연결</a:t>
+            </a:r>
+            <a:endParaRPr lang="en-US" sz="1250" dirty="0"/>
+          </a:p>
+        </p:txBody>
+      </p:sp>
     </p:spTree>
   </p:cSld>
   <p:clrMapOvr>
@@ -9250,1332 +9738,814 @@
           </a:p>
         </p:txBody>
       </p:sp>
-      <p:graphicFrame>
-        <p:nvGraphicFramePr>
-          <p:cNvPr id="9" name="Table 0"/>
-          <p:cNvGraphicFramePr>
-            <a:graphicFrameLocks noGrp="1"/>
-          </p:cNvGraphicFramePr>
-          <p:nvPr>
-            <p:extLst>
-              <p:ext uri="{D42A27DB-BD31-4B8C-83A1-F6EECF244321}">
-                <p14:modId xmlns:p14="http://schemas.microsoft.com/office/powerpoint/2010/main" val="1579011935"/>
-              </p:ext>
-            </p:extLst>
-          </p:nvPr>
-        </p:nvGraphicFramePr>
-        <p:xfrm>
-          <a:off x="548640" y="1188720"/>
-          <a:ext cx="11094415" cy="914400"/>
-        </p:xfrm>
-        <a:graphic>
-          <a:graphicData uri="http://schemas.openxmlformats.org/drawingml/2006/table">
-            <a:tbl>
-              <a:tblPr/>
-              <a:tblGrid>
-                <a:gridCol w="2377440"/>
-                <a:gridCol w="8714232"/>
-              </a:tblGrid>
-              <a:tr h="0">
-                <a:tc>
-                  <a:txBody>
-                    <a:bodyPr/>
-                    <a:lstStyle/>
-                    <a:p>
-                      <a:pPr algn="l" indent="0" marL="0">
-                        <a:lnSpc>
-                          <a:spcPct val="110000"/>
-                        </a:lnSpc>
-                        <a:buNone/>
-                      </a:pPr>
-                      <a:r>
-                        <a:rPr lang="en-US" sz="1100" b="1" dirty="0">
-                          <a:solidFill>
-                            <a:srgbClr val="FFFFFF"/>
-                          </a:solidFill>
-                          <a:latin typeface="Malgun Gothic" pitchFamily="34" charset="0"/>
-                          <a:ea typeface="Malgun Gothic" pitchFamily="34" charset="-122"/>
-                          <a:cs typeface="Malgun Gothic" pitchFamily="34" charset="-120"/>
-                        </a:rPr>
-                        <a:t>용어</a:t>
-                      </a:r>
-                      <a:endParaRPr lang="en-US" sz="1100" dirty="0">
-                        <a:latin typeface="Malgun Gothic" charset="0"/>
-                        <a:ea typeface="Malgun Gothic" charset="0"/>
-                        <a:cs typeface="Malgun Gothic" charset="0"/>
-                      </a:endParaRPr>
-                    </a:p>
-                  </a:txBody>
-                  <a:tcPr marL="101600" marR="101600" marT="76200" marB="76200" anchor="ctr">
-                    <a:lnL w="6350" cap="flat" cmpd="sng" algn="ctr">
-                      <a:solidFill>
-                        <a:srgbClr val="D5DBE3"/>
-                      </a:solidFill>
-                      <a:prstDash val="solid"/>
-                      <a:round/>
-                      <a:headEnd type="none" w="med" len="med"/>
-                      <a:tailEnd type="none" w="med" len="med"/>
-                    </a:lnL>
-                    <a:lnR w="6350" cap="flat" cmpd="sng" algn="ctr">
-                      <a:solidFill>
-                        <a:srgbClr val="D5DBE3"/>
-                      </a:solidFill>
-                      <a:prstDash val="solid"/>
-                      <a:round/>
-                      <a:headEnd type="none" w="med" len="med"/>
-                      <a:tailEnd type="none" w="med" len="med"/>
-                    </a:lnR>
-                    <a:lnT w="6350" cap="flat" cmpd="sng" algn="ctr">
-                      <a:solidFill>
-                        <a:srgbClr val="D5DBE3"/>
-                      </a:solidFill>
-                      <a:prstDash val="solid"/>
-                      <a:round/>
-                      <a:headEnd type="none" w="med" len="med"/>
-                      <a:tailEnd type="none" w="med" len="med"/>
-                    </a:lnT>
-                    <a:lnB w="6350" cap="flat" cmpd="sng" algn="ctr">
-                      <a:solidFill>
-                        <a:srgbClr val="D5DBE3"/>
-                      </a:solidFill>
-                      <a:prstDash val="solid"/>
-                      <a:round/>
-                      <a:headEnd type="none" w="med" len="med"/>
-                      <a:tailEnd type="none" w="med" len="med"/>
-                    </a:lnB>
-                    <a:solidFill>
-                      <a:srgbClr val="1B2A41"/>
-                    </a:solidFill>
-                  </a:tcPr>
-                </a:tc>
-                <a:tc>
-                  <a:txBody>
-                    <a:bodyPr/>
-                    <a:lstStyle/>
-                    <a:p>
-                      <a:pPr algn="l" indent="0" marL="0">
-                        <a:lnSpc>
-                          <a:spcPct val="110000"/>
-                        </a:lnSpc>
-                        <a:buNone/>
-                      </a:pPr>
-                      <a:r>
-                        <a:rPr lang="en-US" sz="1100" b="1" dirty="0">
-                          <a:solidFill>
-                            <a:srgbClr val="FFFFFF"/>
-                          </a:solidFill>
-                          <a:latin typeface="Malgun Gothic" pitchFamily="34" charset="0"/>
-                          <a:ea typeface="Malgun Gothic" pitchFamily="34" charset="-122"/>
-                          <a:cs typeface="Malgun Gothic" pitchFamily="34" charset="-120"/>
-                        </a:rPr>
-                        <a:t>설명</a:t>
-                      </a:r>
-                      <a:endParaRPr lang="en-US" sz="1100" dirty="0">
-                        <a:latin typeface="Malgun Gothic" charset="0"/>
-                        <a:ea typeface="Malgun Gothic" charset="0"/>
-                        <a:cs typeface="Malgun Gothic" charset="0"/>
-                      </a:endParaRPr>
-                    </a:p>
-                  </a:txBody>
-                  <a:tcPr marL="101600" marR="101600" marT="76200" marB="76200" anchor="ctr">
-                    <a:lnL w="6350" cap="flat" cmpd="sng" algn="ctr">
-                      <a:solidFill>
-                        <a:srgbClr val="D5DBE3"/>
-                      </a:solidFill>
-                      <a:prstDash val="solid"/>
-                      <a:round/>
-                      <a:headEnd type="none" w="med" len="med"/>
-                      <a:tailEnd type="none" w="med" len="med"/>
-                    </a:lnL>
-                    <a:lnR w="6350" cap="flat" cmpd="sng" algn="ctr">
-                      <a:solidFill>
-                        <a:srgbClr val="D5DBE3"/>
-                      </a:solidFill>
-                      <a:prstDash val="solid"/>
-                      <a:round/>
-                      <a:headEnd type="none" w="med" len="med"/>
-                      <a:tailEnd type="none" w="med" len="med"/>
-                    </a:lnR>
-                    <a:lnT w="6350" cap="flat" cmpd="sng" algn="ctr">
-                      <a:solidFill>
-                        <a:srgbClr val="D5DBE3"/>
-                      </a:solidFill>
-                      <a:prstDash val="solid"/>
-                      <a:round/>
-                      <a:headEnd type="none" w="med" len="med"/>
-                      <a:tailEnd type="none" w="med" len="med"/>
-                    </a:lnT>
-                    <a:lnB w="6350" cap="flat" cmpd="sng" algn="ctr">
-                      <a:solidFill>
-                        <a:srgbClr val="D5DBE3"/>
-                      </a:solidFill>
-                      <a:prstDash val="solid"/>
-                      <a:round/>
-                      <a:headEnd type="none" w="med" len="med"/>
-                      <a:tailEnd type="none" w="med" len="med"/>
-                    </a:lnB>
-                    <a:solidFill>
-                      <a:srgbClr val="1B2A41"/>
-                    </a:solidFill>
-                  </a:tcPr>
-                </a:tc>
-              </a:tr>
-              <a:tr h="0">
-                <a:tc>
-                  <a:txBody>
-                    <a:bodyPr/>
-                    <a:lstStyle/>
-                    <a:p>
-                      <a:pPr algn="l" indent="0" marL="0">
-                        <a:lnSpc>
-                          <a:spcPct val="110000"/>
-                        </a:lnSpc>
-                        <a:buNone/>
-                      </a:pPr>
-                      <a:r>
-                        <a:rPr lang="en-US" sz="1100" b="1" dirty="0">
-                          <a:solidFill>
-                            <a:srgbClr val="24313F"/>
-                          </a:solidFill>
-                          <a:latin typeface="Malgun Gothic" pitchFamily="34" charset="0"/>
-                          <a:ea typeface="Malgun Gothic" pitchFamily="34" charset="-122"/>
-                          <a:cs typeface="Malgun Gothic" pitchFamily="34" charset="-120"/>
-                        </a:rPr>
-                        <a:t>CFG (Classifier-Free Guidance)</a:t>
-                      </a:r>
-                      <a:endParaRPr lang="en-US" sz="1100" dirty="0">
-                        <a:latin typeface="Malgun Gothic" charset="0"/>
-                        <a:ea typeface="Malgun Gothic" charset="0"/>
-                        <a:cs typeface="Malgun Gothic" charset="0"/>
-                      </a:endParaRPr>
-                    </a:p>
-                  </a:txBody>
-                  <a:tcPr marL="101600" marR="101600" marT="76200" marB="76200" anchor="ctr">
-                    <a:lnL w="6350" cap="flat" cmpd="sng" algn="ctr">
-                      <a:solidFill>
-                        <a:srgbClr val="D5DBE3"/>
-                      </a:solidFill>
-                      <a:prstDash val="solid"/>
-                      <a:round/>
-                      <a:headEnd type="none" w="med" len="med"/>
-                      <a:tailEnd type="none" w="med" len="med"/>
-                    </a:lnL>
-                    <a:lnR w="6350" cap="flat" cmpd="sng" algn="ctr">
-                      <a:solidFill>
-                        <a:srgbClr val="D5DBE3"/>
-                      </a:solidFill>
-                      <a:prstDash val="solid"/>
-                      <a:round/>
-                      <a:headEnd type="none" w="med" len="med"/>
-                      <a:tailEnd type="none" w="med" len="med"/>
-                    </a:lnR>
-                    <a:lnT w="6350" cap="flat" cmpd="sng" algn="ctr">
-                      <a:solidFill>
-                        <a:srgbClr val="D5DBE3"/>
-                      </a:solidFill>
-                      <a:prstDash val="solid"/>
-                      <a:round/>
-                      <a:headEnd type="none" w="med" len="med"/>
-                      <a:tailEnd type="none" w="med" len="med"/>
-                    </a:lnT>
-                    <a:lnB w="6350" cap="flat" cmpd="sng" algn="ctr">
-                      <a:solidFill>
-                        <a:srgbClr val="D5DBE3"/>
-                      </a:solidFill>
-                      <a:prstDash val="solid"/>
-                      <a:round/>
-                      <a:headEnd type="none" w="med" len="med"/>
-                      <a:tailEnd type="none" w="med" len="med"/>
-                    </a:lnB>
-                    <a:solidFill>
-                      <a:srgbClr val="FFFFFF"/>
-                    </a:solidFill>
-                  </a:tcPr>
-                </a:tc>
-                <a:tc>
-                  <a:txBody>
-                    <a:bodyPr/>
-                    <a:lstStyle/>
-                    <a:p>
-                      <a:pPr algn="l" indent="0" marL="0">
-                        <a:lnSpc>
-                          <a:spcPct val="110000"/>
-                        </a:lnSpc>
-                        <a:buNone/>
-                      </a:pPr>
-                      <a:r>
-                        <a:rPr lang="en-US" sz="1100" dirty="0">
-                          <a:solidFill>
-                            <a:srgbClr val="24313F"/>
-                          </a:solidFill>
-                          <a:latin typeface="Malgun Gothic" pitchFamily="34" charset="0"/>
-                          <a:ea typeface="Malgun Gothic" pitchFamily="34" charset="-122"/>
-                          <a:cs typeface="Malgun Gothic" pitchFamily="34" charset="-120"/>
-                        </a:rPr>
-                        <a:t>자연어 지시를 얼마나 강하게 따를지 정하는 가중치. 지시 있음/없음 두 예측을 섞어 계산하며 값이 클수록 지시를 우선한다. 1.0이 기본, 데모는 1.5. 커질수록 계산량과 VRAM이 늘어난다.</a:t>
-                      </a:r>
-                      <a:endParaRPr lang="en-US" sz="1100" dirty="0">
-                        <a:latin typeface="Malgun Gothic" charset="0"/>
-                        <a:ea typeface="Malgun Gothic" charset="0"/>
-                        <a:cs typeface="Malgun Gothic" charset="0"/>
-                      </a:endParaRPr>
-                    </a:p>
-                  </a:txBody>
-                  <a:tcPr marL="101600" marR="101600" marT="76200" marB="76200" anchor="ctr">
-                    <a:lnL w="6350" cap="flat" cmpd="sng" algn="ctr">
-                      <a:solidFill>
-                        <a:srgbClr val="D5DBE3"/>
-                      </a:solidFill>
-                      <a:prstDash val="solid"/>
-                      <a:round/>
-                      <a:headEnd type="none" w="med" len="med"/>
-                      <a:tailEnd type="none" w="med" len="med"/>
-                    </a:lnL>
-                    <a:lnR w="6350" cap="flat" cmpd="sng" algn="ctr">
-                      <a:solidFill>
-                        <a:srgbClr val="D5DBE3"/>
-                      </a:solidFill>
-                      <a:prstDash val="solid"/>
-                      <a:round/>
-                      <a:headEnd type="none" w="med" len="med"/>
-                      <a:tailEnd type="none" w="med" len="med"/>
-                    </a:lnR>
-                    <a:lnT w="6350" cap="flat" cmpd="sng" algn="ctr">
-                      <a:solidFill>
-                        <a:srgbClr val="D5DBE3"/>
-                      </a:solidFill>
-                      <a:prstDash val="solid"/>
-                      <a:round/>
-                      <a:headEnd type="none" w="med" len="med"/>
-                      <a:tailEnd type="none" w="med" len="med"/>
-                    </a:lnT>
-                    <a:lnB w="6350" cap="flat" cmpd="sng" algn="ctr">
-                      <a:solidFill>
-                        <a:srgbClr val="D5DBE3"/>
-                      </a:solidFill>
-                      <a:prstDash val="solid"/>
-                      <a:round/>
-                      <a:headEnd type="none" w="med" len="med"/>
-                      <a:tailEnd type="none" w="med" len="med"/>
-                    </a:lnB>
-                    <a:solidFill>
-                      <a:srgbClr val="FFFFFF"/>
-                    </a:solidFill>
-                  </a:tcPr>
-                </a:tc>
-              </a:tr>
-              <a:tr h="0">
-                <a:tc>
-                  <a:txBody>
-                    <a:bodyPr/>
-                    <a:lstStyle/>
-                    <a:p>
-                      <a:pPr algn="l" indent="0" marL="0">
-                        <a:lnSpc>
-                          <a:spcPct val="110000"/>
-                        </a:lnSpc>
-                        <a:buNone/>
-                      </a:pPr>
-                      <a:r>
-                        <a:rPr lang="en-US" sz="1100" b="1" dirty="0">
-                          <a:solidFill>
-                            <a:srgbClr val="24313F"/>
-                          </a:solidFill>
-                          <a:latin typeface="Malgun Gothic" pitchFamily="34" charset="0"/>
-                          <a:ea typeface="Malgun Gothic" pitchFamily="34" charset="-122"/>
-                          <a:cs typeface="Malgun Gothic" pitchFamily="34" charset="-120"/>
-                        </a:rPr>
-                        <a:t>VQA (Visual Question Answering)</a:t>
-                      </a:r>
-                      <a:endParaRPr lang="en-US" sz="1100" dirty="0">
-                        <a:latin typeface="Malgun Gothic" charset="0"/>
-                        <a:ea typeface="Malgun Gothic" charset="0"/>
-                        <a:cs typeface="Malgun Gothic" charset="0"/>
-                      </a:endParaRPr>
-                    </a:p>
-                  </a:txBody>
-                  <a:tcPr marL="101600" marR="101600" marT="76200" marB="76200" anchor="ctr">
-                    <a:lnL w="6350" cap="flat" cmpd="sng" algn="ctr">
-                      <a:solidFill>
-                        <a:srgbClr val="D5DBE3"/>
-                      </a:solidFill>
-                      <a:prstDash val="solid"/>
-                      <a:round/>
-                      <a:headEnd type="none" w="med" len="med"/>
-                      <a:tailEnd type="none" w="med" len="med"/>
-                    </a:lnL>
-                    <a:lnR w="6350" cap="flat" cmpd="sng" algn="ctr">
-                      <a:solidFill>
-                        <a:srgbClr val="D5DBE3"/>
-                      </a:solidFill>
-                      <a:prstDash val="solid"/>
-                      <a:round/>
-                      <a:headEnd type="none" w="med" len="med"/>
-                      <a:tailEnd type="none" w="med" len="med"/>
-                    </a:lnR>
-                    <a:lnT w="6350" cap="flat" cmpd="sng" algn="ctr">
-                      <a:solidFill>
-                        <a:srgbClr val="D5DBE3"/>
-                      </a:solidFill>
-                      <a:prstDash val="solid"/>
-                      <a:round/>
-                      <a:headEnd type="none" w="med" len="med"/>
-                      <a:tailEnd type="none" w="med" len="med"/>
-                    </a:lnT>
-                    <a:lnB w="6350" cap="flat" cmpd="sng" algn="ctr">
-                      <a:solidFill>
-                        <a:srgbClr val="D5DBE3"/>
-                      </a:solidFill>
-                      <a:prstDash val="solid"/>
-                      <a:round/>
-                      <a:headEnd type="none" w="med" len="med"/>
-                      <a:tailEnd type="none" w="med" len="med"/>
-                    </a:lnB>
-                    <a:solidFill>
-                      <a:srgbClr val="F3F5F8"/>
-                    </a:solidFill>
-                  </a:tcPr>
-                </a:tc>
-                <a:tc>
-                  <a:txBody>
-                    <a:bodyPr/>
-                    <a:lstStyle/>
-                    <a:p>
-                      <a:pPr algn="l" indent="0" marL="0">
-                        <a:lnSpc>
-                          <a:spcPct val="110000"/>
-                        </a:lnSpc>
-                        <a:buNone/>
-                      </a:pPr>
-                      <a:r>
-                        <a:rPr lang="en-US" sz="1100" dirty="0">
-                          <a:solidFill>
-                            <a:srgbClr val="24313F"/>
-                          </a:solidFill>
-                          <a:latin typeface="Malgun Gothic" pitchFamily="34" charset="0"/>
-                          <a:ea typeface="Malgun Gothic" pitchFamily="34" charset="-122"/>
-                          <a:cs typeface="Malgun Gothic" pitchFamily="34" charset="-120"/>
-                        </a:rPr>
-                        <a:t>카메라 영상에 대해 자연어로 질문하면 모델이 텍스트로 답하는 모드. 궤적을 내지 않으므로 차량은 정지한 상태에서 질문하고 답을 확인한다.</a:t>
-                      </a:r>
-                      <a:endParaRPr lang="en-US" sz="1100" dirty="0">
-                        <a:latin typeface="Malgun Gothic" charset="0"/>
-                        <a:ea typeface="Malgun Gothic" charset="0"/>
-                        <a:cs typeface="Malgun Gothic" charset="0"/>
-                      </a:endParaRPr>
-                    </a:p>
-                  </a:txBody>
-                  <a:tcPr marL="101600" marR="101600" marT="76200" marB="76200" anchor="ctr">
-                    <a:lnL w="6350" cap="flat" cmpd="sng" algn="ctr">
-                      <a:solidFill>
-                        <a:srgbClr val="D5DBE3"/>
-                      </a:solidFill>
-                      <a:prstDash val="solid"/>
-                      <a:round/>
-                      <a:headEnd type="none" w="med" len="med"/>
-                      <a:tailEnd type="none" w="med" len="med"/>
-                    </a:lnL>
-                    <a:lnR w="6350" cap="flat" cmpd="sng" algn="ctr">
-                      <a:solidFill>
-                        <a:srgbClr val="D5DBE3"/>
-                      </a:solidFill>
-                      <a:prstDash val="solid"/>
-                      <a:round/>
-                      <a:headEnd type="none" w="med" len="med"/>
-                      <a:tailEnd type="none" w="med" len="med"/>
-                    </a:lnR>
-                    <a:lnT w="6350" cap="flat" cmpd="sng" algn="ctr">
-                      <a:solidFill>
-                        <a:srgbClr val="D5DBE3"/>
-                      </a:solidFill>
-                      <a:prstDash val="solid"/>
-                      <a:round/>
-                      <a:headEnd type="none" w="med" len="med"/>
-                      <a:tailEnd type="none" w="med" len="med"/>
-                    </a:lnT>
-                    <a:lnB w="6350" cap="flat" cmpd="sng" algn="ctr">
-                      <a:solidFill>
-                        <a:srgbClr val="D5DBE3"/>
-                      </a:solidFill>
-                      <a:prstDash val="solid"/>
-                      <a:round/>
-                      <a:headEnd type="none" w="med" len="med"/>
-                      <a:tailEnd type="none" w="med" len="med"/>
-                    </a:lnB>
-                    <a:solidFill>
-                      <a:srgbClr val="F3F5F8"/>
-                    </a:solidFill>
-                  </a:tcPr>
-                </a:tc>
-              </a:tr>
-              <a:tr h="0">
-                <a:tc>
-                  <a:txBody>
-                    <a:bodyPr/>
-                    <a:lstStyle/>
-                    <a:p>
-                      <a:pPr algn="l" indent="0" marL="0">
-                        <a:lnSpc>
-                          <a:spcPct val="110000"/>
-                        </a:lnSpc>
-                        <a:buNone/>
-                      </a:pPr>
-                      <a:r>
-                        <a:rPr lang="en-US" sz="1100" b="1" dirty="0">
-                          <a:solidFill>
-                            <a:srgbClr val="24313F"/>
-                          </a:solidFill>
-                          <a:latin typeface="Malgun Gothic" pitchFamily="34" charset="0"/>
-                          <a:ea typeface="Malgun Gothic" pitchFamily="34" charset="-122"/>
-                          <a:cs typeface="Malgun Gothic" pitchFamily="34" charset="-120"/>
-                        </a:rPr>
-                        <a:t>open-loop</a:t>
-                      </a:r>
-                      <a:endParaRPr lang="en-US" sz="1100" dirty="0">
-                        <a:latin typeface="Malgun Gothic" charset="0"/>
-                        <a:ea typeface="Malgun Gothic" charset="0"/>
-                        <a:cs typeface="Malgun Gothic" charset="0"/>
-                      </a:endParaRPr>
-                    </a:p>
-                  </a:txBody>
-                  <a:tcPr marL="101600" marR="101600" marT="76200" marB="76200" anchor="ctr">
-                    <a:lnL w="6350" cap="flat" cmpd="sng" algn="ctr">
-                      <a:solidFill>
-                        <a:srgbClr val="D5DBE3"/>
-                      </a:solidFill>
-                      <a:prstDash val="solid"/>
-                      <a:round/>
-                      <a:headEnd type="none" w="med" len="med"/>
-                      <a:tailEnd type="none" w="med" len="med"/>
-                    </a:lnL>
-                    <a:lnR w="6350" cap="flat" cmpd="sng" algn="ctr">
-                      <a:solidFill>
-                        <a:srgbClr val="D5DBE3"/>
-                      </a:solidFill>
-                      <a:prstDash val="solid"/>
-                      <a:round/>
-                      <a:headEnd type="none" w="med" len="med"/>
-                      <a:tailEnd type="none" w="med" len="med"/>
-                    </a:lnR>
-                    <a:lnT w="6350" cap="flat" cmpd="sng" algn="ctr">
-                      <a:solidFill>
-                        <a:srgbClr val="D5DBE3"/>
-                      </a:solidFill>
-                      <a:prstDash val="solid"/>
-                      <a:round/>
-                      <a:headEnd type="none" w="med" len="med"/>
-                      <a:tailEnd type="none" w="med" len="med"/>
-                    </a:lnT>
-                    <a:lnB w="6350" cap="flat" cmpd="sng" algn="ctr">
-                      <a:solidFill>
-                        <a:srgbClr val="D5DBE3"/>
-                      </a:solidFill>
-                      <a:prstDash val="solid"/>
-                      <a:round/>
-                      <a:headEnd type="none" w="med" len="med"/>
-                      <a:tailEnd type="none" w="med" len="med"/>
-                    </a:lnB>
-                    <a:solidFill>
-                      <a:srgbClr val="FFFFFF"/>
-                    </a:solidFill>
-                  </a:tcPr>
-                </a:tc>
-                <a:tc>
-                  <a:txBody>
-                    <a:bodyPr/>
-                    <a:lstStyle/>
-                    <a:p>
-                      <a:pPr algn="l" indent="0" marL="0">
-                        <a:lnSpc>
-                          <a:spcPct val="110000"/>
-                        </a:lnSpc>
-                        <a:buNone/>
-                      </a:pPr>
-                      <a:r>
-                        <a:rPr lang="en-US" sz="1100" dirty="0">
-                          <a:solidFill>
-                            <a:srgbClr val="24313F"/>
-                          </a:solidFill>
-                          <a:latin typeface="Malgun Gothic" pitchFamily="34" charset="0"/>
-                          <a:ea typeface="Malgun Gothic" pitchFamily="34" charset="-122"/>
-                          <a:cs typeface="Malgun Gothic" pitchFamily="34" charset="-120"/>
-                        </a:rPr>
-                        <a:t>녹화된 주행 데이터를 재생하며 모델의 예측만 얻는다. 예측이 차량에 영향을 주지 않아 모델 단독 평가와 두 경로(로컬·원격)의 결과 비교에 쓴다.</a:t>
-                      </a:r>
-                      <a:endParaRPr lang="en-US" sz="1100" dirty="0">
-                        <a:latin typeface="Malgun Gothic" charset="0"/>
-                        <a:ea typeface="Malgun Gothic" charset="0"/>
-                        <a:cs typeface="Malgun Gothic" charset="0"/>
-                      </a:endParaRPr>
-                    </a:p>
-                  </a:txBody>
-                  <a:tcPr marL="101600" marR="101600" marT="76200" marB="76200" anchor="ctr">
-                    <a:lnL w="6350" cap="flat" cmpd="sng" algn="ctr">
-                      <a:solidFill>
-                        <a:srgbClr val="D5DBE3"/>
-                      </a:solidFill>
-                      <a:prstDash val="solid"/>
-                      <a:round/>
-                      <a:headEnd type="none" w="med" len="med"/>
-                      <a:tailEnd type="none" w="med" len="med"/>
-                    </a:lnL>
-                    <a:lnR w="6350" cap="flat" cmpd="sng" algn="ctr">
-                      <a:solidFill>
-                        <a:srgbClr val="D5DBE3"/>
-                      </a:solidFill>
-                      <a:prstDash val="solid"/>
-                      <a:round/>
-                      <a:headEnd type="none" w="med" len="med"/>
-                      <a:tailEnd type="none" w="med" len="med"/>
-                    </a:lnR>
-                    <a:lnT w="6350" cap="flat" cmpd="sng" algn="ctr">
-                      <a:solidFill>
-                        <a:srgbClr val="D5DBE3"/>
-                      </a:solidFill>
-                      <a:prstDash val="solid"/>
-                      <a:round/>
-                      <a:headEnd type="none" w="med" len="med"/>
-                      <a:tailEnd type="none" w="med" len="med"/>
-                    </a:lnT>
-                    <a:lnB w="6350" cap="flat" cmpd="sng" algn="ctr">
-                      <a:solidFill>
-                        <a:srgbClr val="D5DBE3"/>
-                      </a:solidFill>
-                      <a:prstDash val="solid"/>
-                      <a:round/>
-                      <a:headEnd type="none" w="med" len="med"/>
-                      <a:tailEnd type="none" w="med" len="med"/>
-                    </a:lnB>
-                    <a:solidFill>
-                      <a:srgbClr val="FFFFFF"/>
-                    </a:solidFill>
-                  </a:tcPr>
-                </a:tc>
-              </a:tr>
-              <a:tr h="0">
-                <a:tc>
-                  <a:txBody>
-                    <a:bodyPr/>
-                    <a:lstStyle/>
-                    <a:p>
-                      <a:pPr algn="l" indent="0" marL="0">
-                        <a:lnSpc>
-                          <a:spcPct val="110000"/>
-                        </a:lnSpc>
-                        <a:buNone/>
-                      </a:pPr>
-                      <a:r>
-                        <a:rPr lang="en-US" sz="1100" b="1" dirty="0">
-                          <a:solidFill>
-                            <a:srgbClr val="24313F"/>
-                          </a:solidFill>
-                          <a:latin typeface="Malgun Gothic" pitchFamily="34" charset="0"/>
-                          <a:ea typeface="Malgun Gothic" pitchFamily="34" charset="-122"/>
-                          <a:cs typeface="Malgun Gothic" pitchFamily="34" charset="-120"/>
-                        </a:rPr>
-                        <a:t>closed-loop</a:t>
-                      </a:r>
-                      <a:endParaRPr lang="en-US" sz="1100" dirty="0">
-                        <a:latin typeface="Malgun Gothic" charset="0"/>
-                        <a:ea typeface="Malgun Gothic" charset="0"/>
-                        <a:cs typeface="Malgun Gothic" charset="0"/>
-                      </a:endParaRPr>
-                    </a:p>
-                  </a:txBody>
-                  <a:tcPr marL="101600" marR="101600" marT="76200" marB="76200" anchor="ctr">
-                    <a:lnL w="6350" cap="flat" cmpd="sng" algn="ctr">
-                      <a:solidFill>
-                        <a:srgbClr val="D5DBE3"/>
-                      </a:solidFill>
-                      <a:prstDash val="solid"/>
-                      <a:round/>
-                      <a:headEnd type="none" w="med" len="med"/>
-                      <a:tailEnd type="none" w="med" len="med"/>
-                    </a:lnL>
-                    <a:lnR w="6350" cap="flat" cmpd="sng" algn="ctr">
-                      <a:solidFill>
-                        <a:srgbClr val="D5DBE3"/>
-                      </a:solidFill>
-                      <a:prstDash val="solid"/>
-                      <a:round/>
-                      <a:headEnd type="none" w="med" len="med"/>
-                      <a:tailEnd type="none" w="med" len="med"/>
-                    </a:lnR>
-                    <a:lnT w="6350" cap="flat" cmpd="sng" algn="ctr">
-                      <a:solidFill>
-                        <a:srgbClr val="D5DBE3"/>
-                      </a:solidFill>
-                      <a:prstDash val="solid"/>
-                      <a:round/>
-                      <a:headEnd type="none" w="med" len="med"/>
-                      <a:tailEnd type="none" w="med" len="med"/>
-                    </a:lnT>
-                    <a:lnB w="6350" cap="flat" cmpd="sng" algn="ctr">
-                      <a:solidFill>
-                        <a:srgbClr val="D5DBE3"/>
-                      </a:solidFill>
-                      <a:prstDash val="solid"/>
-                      <a:round/>
-                      <a:headEnd type="none" w="med" len="med"/>
-                      <a:tailEnd type="none" w="med" len="med"/>
-                    </a:lnB>
-                    <a:solidFill>
-                      <a:srgbClr val="F3F5F8"/>
-                    </a:solidFill>
-                  </a:tcPr>
-                </a:tc>
-                <a:tc>
-                  <a:txBody>
-                    <a:bodyPr/>
-                    <a:lstStyle/>
-                    <a:p>
-                      <a:pPr algn="l" indent="0" marL="0">
-                        <a:lnSpc>
-                          <a:spcPct val="110000"/>
-                        </a:lnSpc>
-                        <a:buNone/>
-                      </a:pPr>
-                      <a:r>
-                        <a:rPr lang="en-US" sz="1100" dirty="0">
-                          <a:solidFill>
-                            <a:srgbClr val="24313F"/>
-                          </a:solidFill>
-                          <a:latin typeface="Malgun Gothic" pitchFamily="34" charset="0"/>
-                          <a:ea typeface="Malgun Gothic" pitchFamily="34" charset="-122"/>
-                          <a:cs typeface="Malgun Gothic" pitchFamily="34" charset="-120"/>
-                        </a:rPr>
-                        <a:t>모델이 낸 궤적을 PID 제어기가 실제 조향·가감속에 적용하고, 그 결과 장면이 다음 입력이 된다. 동기 모드는 추론 중 세계를 멈추고, 비동기(--async) 모드는 세계가 계속 진행된다.</a:t>
-                      </a:r>
-                      <a:endParaRPr lang="en-US" sz="1100" dirty="0">
-                        <a:latin typeface="Malgun Gothic" charset="0"/>
-                        <a:ea typeface="Malgun Gothic" charset="0"/>
-                        <a:cs typeface="Malgun Gothic" charset="0"/>
-                      </a:endParaRPr>
-                    </a:p>
-                  </a:txBody>
-                  <a:tcPr marL="101600" marR="101600" marT="76200" marB="76200" anchor="ctr">
-                    <a:lnL w="6350" cap="flat" cmpd="sng" algn="ctr">
-                      <a:solidFill>
-                        <a:srgbClr val="D5DBE3"/>
-                      </a:solidFill>
-                      <a:prstDash val="solid"/>
-                      <a:round/>
-                      <a:headEnd type="none" w="med" len="med"/>
-                      <a:tailEnd type="none" w="med" len="med"/>
-                    </a:lnL>
-                    <a:lnR w="6350" cap="flat" cmpd="sng" algn="ctr">
-                      <a:solidFill>
-                        <a:srgbClr val="D5DBE3"/>
-                      </a:solidFill>
-                      <a:prstDash val="solid"/>
-                      <a:round/>
-                      <a:headEnd type="none" w="med" len="med"/>
-                      <a:tailEnd type="none" w="med" len="med"/>
-                    </a:lnR>
-                    <a:lnT w="6350" cap="flat" cmpd="sng" algn="ctr">
-                      <a:solidFill>
-                        <a:srgbClr val="D5DBE3"/>
-                      </a:solidFill>
-                      <a:prstDash val="solid"/>
-                      <a:round/>
-                      <a:headEnd type="none" w="med" len="med"/>
-                      <a:tailEnd type="none" w="med" len="med"/>
-                    </a:lnT>
-                    <a:lnB w="6350" cap="flat" cmpd="sng" algn="ctr">
-                      <a:solidFill>
-                        <a:srgbClr val="D5DBE3"/>
-                      </a:solidFill>
-                      <a:prstDash val="solid"/>
-                      <a:round/>
-                      <a:headEnd type="none" w="med" len="med"/>
-                      <a:tailEnd type="none" w="med" len="med"/>
-                    </a:lnB>
-                    <a:solidFill>
-                      <a:srgbClr val="F3F5F8"/>
-                    </a:solidFill>
-                  </a:tcPr>
-                </a:tc>
-              </a:tr>
-              <a:tr h="0">
-                <a:tc>
-                  <a:txBody>
-                    <a:bodyPr/>
-                    <a:lstStyle/>
-                    <a:p>
-                      <a:pPr algn="l" indent="0" marL="0">
-                        <a:lnSpc>
-                          <a:spcPct val="110000"/>
-                        </a:lnSpc>
-                        <a:buNone/>
-                      </a:pPr>
-                      <a:r>
-                        <a:rPr lang="en-US" sz="1100" b="1" dirty="0">
-                          <a:solidFill>
-                            <a:srgbClr val="24313F"/>
-                          </a:solidFill>
-                          <a:latin typeface="Malgun Gothic" pitchFamily="34" charset="0"/>
-                          <a:ea typeface="Malgun Gothic" pitchFamily="34" charset="-122"/>
-                          <a:cs typeface="Malgun Gothic" pitchFamily="34" charset="-120"/>
-                        </a:rPr>
-                        <a:t>ADE / FDE</a:t>
-                      </a:r>
-                      <a:endParaRPr lang="en-US" sz="1100" dirty="0">
-                        <a:latin typeface="Malgun Gothic" charset="0"/>
-                        <a:ea typeface="Malgun Gothic" charset="0"/>
-                        <a:cs typeface="Malgun Gothic" charset="0"/>
-                      </a:endParaRPr>
-                    </a:p>
-                  </a:txBody>
-                  <a:tcPr marL="101600" marR="101600" marT="76200" marB="76200" anchor="ctr">
-                    <a:lnL w="6350" cap="flat" cmpd="sng" algn="ctr">
-                      <a:solidFill>
-                        <a:srgbClr val="D5DBE3"/>
-                      </a:solidFill>
-                      <a:prstDash val="solid"/>
-                      <a:round/>
-                      <a:headEnd type="none" w="med" len="med"/>
-                      <a:tailEnd type="none" w="med" len="med"/>
-                    </a:lnL>
-                    <a:lnR w="6350" cap="flat" cmpd="sng" algn="ctr">
-                      <a:solidFill>
-                        <a:srgbClr val="D5DBE3"/>
-                      </a:solidFill>
-                      <a:prstDash val="solid"/>
-                      <a:round/>
-                      <a:headEnd type="none" w="med" len="med"/>
-                      <a:tailEnd type="none" w="med" len="med"/>
-                    </a:lnR>
-                    <a:lnT w="6350" cap="flat" cmpd="sng" algn="ctr">
-                      <a:solidFill>
-                        <a:srgbClr val="D5DBE3"/>
-                      </a:solidFill>
-                      <a:prstDash val="solid"/>
-                      <a:round/>
-                      <a:headEnd type="none" w="med" len="med"/>
-                      <a:tailEnd type="none" w="med" len="med"/>
-                    </a:lnT>
-                    <a:lnB w="6350" cap="flat" cmpd="sng" algn="ctr">
-                      <a:solidFill>
-                        <a:srgbClr val="D5DBE3"/>
-                      </a:solidFill>
-                      <a:prstDash val="solid"/>
-                      <a:round/>
-                      <a:headEnd type="none" w="med" len="med"/>
-                      <a:tailEnd type="none" w="med" len="med"/>
-                    </a:lnB>
-                    <a:solidFill>
-                      <a:srgbClr val="FFFFFF"/>
-                    </a:solidFill>
-                  </a:tcPr>
-                </a:tc>
-                <a:tc>
-                  <a:txBody>
-                    <a:bodyPr/>
-                    <a:lstStyle/>
-                    <a:p>
-                      <a:pPr algn="l" indent="0" marL="0">
-                        <a:lnSpc>
-                          <a:spcPct val="110000"/>
-                        </a:lnSpc>
-                        <a:buNone/>
-                      </a:pPr>
-                      <a:r>
-                        <a:rPr lang="en-US" sz="1100" dirty="0">
-                          <a:solidFill>
-                            <a:srgbClr val="24313F"/>
-                          </a:solidFill>
-                          <a:latin typeface="Malgun Gothic" pitchFamily="34" charset="0"/>
-                          <a:ea typeface="Malgun Gothic" pitchFamily="34" charset="-122"/>
-                          <a:cs typeface="Malgun Gothic" pitchFamily="34" charset="-120"/>
-                        </a:rPr>
-                        <a:t>예측 궤적과 실제 궤적의 평균 거리 오차(Average Displacement Error)와 마지막 점의 오차(Final Displacement Error), 단위 m. 여러 샘플 중 가장 좋은 값을 고르면 minADE.</a:t>
-                      </a:r>
-                      <a:endParaRPr lang="en-US" sz="1100" dirty="0">
-                        <a:latin typeface="Malgun Gothic" charset="0"/>
-                        <a:ea typeface="Malgun Gothic" charset="0"/>
-                        <a:cs typeface="Malgun Gothic" charset="0"/>
-                      </a:endParaRPr>
-                    </a:p>
-                  </a:txBody>
-                  <a:tcPr marL="101600" marR="101600" marT="76200" marB="76200" anchor="ctr">
-                    <a:lnL w="6350" cap="flat" cmpd="sng" algn="ctr">
-                      <a:solidFill>
-                        <a:srgbClr val="D5DBE3"/>
-                      </a:solidFill>
-                      <a:prstDash val="solid"/>
-                      <a:round/>
-                      <a:headEnd type="none" w="med" len="med"/>
-                      <a:tailEnd type="none" w="med" len="med"/>
-                    </a:lnL>
-                    <a:lnR w="6350" cap="flat" cmpd="sng" algn="ctr">
-                      <a:solidFill>
-                        <a:srgbClr val="D5DBE3"/>
-                      </a:solidFill>
-                      <a:prstDash val="solid"/>
-                      <a:round/>
-                      <a:headEnd type="none" w="med" len="med"/>
-                      <a:tailEnd type="none" w="med" len="med"/>
-                    </a:lnR>
-                    <a:lnT w="6350" cap="flat" cmpd="sng" algn="ctr">
-                      <a:solidFill>
-                        <a:srgbClr val="D5DBE3"/>
-                      </a:solidFill>
-                      <a:prstDash val="solid"/>
-                      <a:round/>
-                      <a:headEnd type="none" w="med" len="med"/>
-                      <a:tailEnd type="none" w="med" len="med"/>
-                    </a:lnT>
-                    <a:lnB w="6350" cap="flat" cmpd="sng" algn="ctr">
-                      <a:solidFill>
-                        <a:srgbClr val="D5DBE3"/>
-                      </a:solidFill>
-                      <a:prstDash val="solid"/>
-                      <a:round/>
-                      <a:headEnd type="none" w="med" len="med"/>
-                      <a:tailEnd type="none" w="med" len="med"/>
-                    </a:lnB>
-                    <a:solidFill>
-                      <a:srgbClr val="FFFFFF"/>
-                    </a:solidFill>
-                  </a:tcPr>
-                </a:tc>
-              </a:tr>
-              <a:tr h="0">
-                <a:tc>
-                  <a:txBody>
-                    <a:bodyPr/>
-                    <a:lstStyle/>
-                    <a:p>
-                      <a:pPr algn="l" indent="0" marL="0">
-                        <a:lnSpc>
-                          <a:spcPct val="110000"/>
-                        </a:lnSpc>
-                        <a:buNone/>
-                      </a:pPr>
-                      <a:r>
-                        <a:rPr lang="en-US" sz="1100" b="1" dirty="0">
-                          <a:solidFill>
-                            <a:srgbClr val="24313F"/>
-                          </a:solidFill>
-                          <a:latin typeface="Malgun Gothic" pitchFamily="34" charset="0"/>
-                          <a:ea typeface="Malgun Gothic" pitchFamily="34" charset="-122"/>
-                          <a:cs typeface="Malgun Gothic" pitchFamily="34" charset="-120"/>
-                        </a:rPr>
-                        <a:t>4-bit NF4 양자화</a:t>
-                      </a:r>
-                      <a:endParaRPr lang="en-US" sz="1100" dirty="0">
-                        <a:latin typeface="Malgun Gothic" charset="0"/>
-                        <a:ea typeface="Malgun Gothic" charset="0"/>
-                        <a:cs typeface="Malgun Gothic" charset="0"/>
-                      </a:endParaRPr>
-                    </a:p>
-                  </a:txBody>
-                  <a:tcPr marL="101600" marR="101600" marT="76200" marB="76200" anchor="ctr">
-                    <a:lnL w="6350" cap="flat" cmpd="sng" algn="ctr">
-                      <a:solidFill>
-                        <a:srgbClr val="D5DBE3"/>
-                      </a:solidFill>
-                      <a:prstDash val="solid"/>
-                      <a:round/>
-                      <a:headEnd type="none" w="med" len="med"/>
-                      <a:tailEnd type="none" w="med" len="med"/>
-                    </a:lnL>
-                    <a:lnR w="6350" cap="flat" cmpd="sng" algn="ctr">
-                      <a:solidFill>
-                        <a:srgbClr val="D5DBE3"/>
-                      </a:solidFill>
-                      <a:prstDash val="solid"/>
-                      <a:round/>
-                      <a:headEnd type="none" w="med" len="med"/>
-                      <a:tailEnd type="none" w="med" len="med"/>
-                    </a:lnR>
-                    <a:lnT w="6350" cap="flat" cmpd="sng" algn="ctr">
-                      <a:solidFill>
-                        <a:srgbClr val="D5DBE3"/>
-                      </a:solidFill>
-                      <a:prstDash val="solid"/>
-                      <a:round/>
-                      <a:headEnd type="none" w="med" len="med"/>
-                      <a:tailEnd type="none" w="med" len="med"/>
-                    </a:lnT>
-                    <a:lnB w="6350" cap="flat" cmpd="sng" algn="ctr">
-                      <a:solidFill>
-                        <a:srgbClr val="D5DBE3"/>
-                      </a:solidFill>
-                      <a:prstDash val="solid"/>
-                      <a:round/>
-                      <a:headEnd type="none" w="med" len="med"/>
-                      <a:tailEnd type="none" w="med" len="med"/>
-                    </a:lnB>
-                    <a:solidFill>
-                      <a:srgbClr val="F3F5F8"/>
-                    </a:solidFill>
-                  </a:tcPr>
-                </a:tc>
-                <a:tc>
-                  <a:txBody>
-                    <a:bodyPr/>
-                    <a:lstStyle/>
-                    <a:p>
-                      <a:pPr algn="l" indent="0" marL="0">
-                        <a:lnSpc>
-                          <a:spcPct val="110000"/>
-                        </a:lnSpc>
-                        <a:buNone/>
-                      </a:pPr>
-                      <a:r>
-                        <a:rPr lang="en-US" sz="1100" dirty="0">
-                          <a:solidFill>
-                            <a:srgbClr val="24313F"/>
-                          </a:solidFill>
-                          <a:latin typeface="Malgun Gothic" pitchFamily="34" charset="0"/>
-                          <a:ea typeface="Malgun Gothic" pitchFamily="34" charset="-122"/>
-                          <a:cs typeface="Malgun Gothic" pitchFamily="34" charset="-120"/>
-                        </a:rPr>
-                        <a:t>모델 가중치를 4비트 NormalFloat 형식으로 저장해 VRAM을 약 1/4로 줄이는 방법(bitsandbytes). 정밀도가 조금 떨어질 수 있다. 24 GB GPU 한 대에서 모델과 CARLA를 함께 돌릴 때 필요했다.</a:t>
-                      </a:r>
-                      <a:endParaRPr lang="en-US" sz="1100" dirty="0">
-                        <a:latin typeface="Malgun Gothic" charset="0"/>
-                        <a:ea typeface="Malgun Gothic" charset="0"/>
-                        <a:cs typeface="Malgun Gothic" charset="0"/>
-                      </a:endParaRPr>
-                    </a:p>
-                  </a:txBody>
-                  <a:tcPr marL="101600" marR="101600" marT="76200" marB="76200" anchor="ctr">
-                    <a:lnL w="6350" cap="flat" cmpd="sng" algn="ctr">
-                      <a:solidFill>
-                        <a:srgbClr val="D5DBE3"/>
-                      </a:solidFill>
-                      <a:prstDash val="solid"/>
-                      <a:round/>
-                      <a:headEnd type="none" w="med" len="med"/>
-                      <a:tailEnd type="none" w="med" len="med"/>
-                    </a:lnL>
-                    <a:lnR w="6350" cap="flat" cmpd="sng" algn="ctr">
-                      <a:solidFill>
-                        <a:srgbClr val="D5DBE3"/>
-                      </a:solidFill>
-                      <a:prstDash val="solid"/>
-                      <a:round/>
-                      <a:headEnd type="none" w="med" len="med"/>
-                      <a:tailEnd type="none" w="med" len="med"/>
-                    </a:lnR>
-                    <a:lnT w="6350" cap="flat" cmpd="sng" algn="ctr">
-                      <a:solidFill>
-                        <a:srgbClr val="D5DBE3"/>
-                      </a:solidFill>
-                      <a:prstDash val="solid"/>
-                      <a:round/>
-                      <a:headEnd type="none" w="med" len="med"/>
-                      <a:tailEnd type="none" w="med" len="med"/>
-                    </a:lnT>
-                    <a:lnB w="6350" cap="flat" cmpd="sng" algn="ctr">
-                      <a:solidFill>
-                        <a:srgbClr val="D5DBE3"/>
-                      </a:solidFill>
-                      <a:prstDash val="solid"/>
-                      <a:round/>
-                      <a:headEnd type="none" w="med" len="med"/>
-                      <a:tailEnd type="none" w="med" len="med"/>
-                    </a:lnB>
-                    <a:solidFill>
-                      <a:srgbClr val="F3F5F8"/>
-                    </a:solidFill>
-                  </a:tcPr>
-                </a:tc>
-              </a:tr>
-              <a:tr h="0">
-                <a:tc>
-                  <a:txBody>
-                    <a:bodyPr/>
-                    <a:lstStyle/>
-                    <a:p>
-                      <a:pPr algn="l" indent="0" marL="0">
-                        <a:lnSpc>
-                          <a:spcPct val="110000"/>
-                        </a:lnSpc>
-                        <a:buNone/>
-                      </a:pPr>
-                      <a:r>
-                        <a:rPr lang="en-US" sz="1100" b="1" dirty="0">
-                          <a:solidFill>
-                            <a:srgbClr val="24313F"/>
-                          </a:solidFill>
-                          <a:latin typeface="Malgun Gothic" pitchFamily="34" charset="0"/>
-                          <a:ea typeface="Malgun Gothic" pitchFamily="34" charset="-122"/>
-                          <a:cs typeface="Malgun Gothic" pitchFamily="34" charset="-120"/>
-                        </a:rPr>
-                        <a:t>OOM-free 모드</a:t>
-                      </a:r>
-                      <a:endParaRPr lang="en-US" sz="1100" dirty="0">
-                        <a:latin typeface="Malgun Gothic" charset="0"/>
-                        <a:ea typeface="Malgun Gothic" charset="0"/>
-                        <a:cs typeface="Malgun Gothic" charset="0"/>
-                      </a:endParaRPr>
-                    </a:p>
-                  </a:txBody>
-                  <a:tcPr marL="101600" marR="101600" marT="76200" marB="76200" anchor="ctr">
-                    <a:lnL w="6350" cap="flat" cmpd="sng" algn="ctr">
-                      <a:solidFill>
-                        <a:srgbClr val="D5DBE3"/>
-                      </a:solidFill>
-                      <a:prstDash val="solid"/>
-                      <a:round/>
-                      <a:headEnd type="none" w="med" len="med"/>
-                      <a:tailEnd type="none" w="med" len="med"/>
-                    </a:lnL>
-                    <a:lnR w="6350" cap="flat" cmpd="sng" algn="ctr">
-                      <a:solidFill>
-                        <a:srgbClr val="D5DBE3"/>
-                      </a:solidFill>
-                      <a:prstDash val="solid"/>
-                      <a:round/>
-                      <a:headEnd type="none" w="med" len="med"/>
-                      <a:tailEnd type="none" w="med" len="med"/>
-                    </a:lnR>
-                    <a:lnT w="6350" cap="flat" cmpd="sng" algn="ctr">
-                      <a:solidFill>
-                        <a:srgbClr val="D5DBE3"/>
-                      </a:solidFill>
-                      <a:prstDash val="solid"/>
-                      <a:round/>
-                      <a:headEnd type="none" w="med" len="med"/>
-                      <a:tailEnd type="none" w="med" len="med"/>
-                    </a:lnT>
-                    <a:lnB w="6350" cap="flat" cmpd="sng" algn="ctr">
-                      <a:solidFill>
-                        <a:srgbClr val="D5DBE3"/>
-                      </a:solidFill>
-                      <a:prstDash val="solid"/>
-                      <a:round/>
-                      <a:headEnd type="none" w="med" len="med"/>
-                      <a:tailEnd type="none" w="med" len="med"/>
-                    </a:lnB>
-                    <a:solidFill>
-                      <a:srgbClr val="FFFFFF"/>
-                    </a:solidFill>
-                  </a:tcPr>
-                </a:tc>
-                <a:tc>
-                  <a:txBody>
-                    <a:bodyPr/>
-                    <a:lstStyle/>
-                    <a:p>
-                      <a:pPr algn="l" indent="0" marL="0">
-                        <a:lnSpc>
-                          <a:spcPct val="110000"/>
-                        </a:lnSpc>
-                        <a:buNone/>
-                      </a:pPr>
-                      <a:r>
-                        <a:rPr lang="en-US" sz="1100" dirty="0">
-                          <a:solidFill>
-                            <a:srgbClr val="24313F"/>
-                          </a:solidFill>
-                          <a:latin typeface="Malgun Gothic" pitchFamily="34" charset="0"/>
-                          <a:ea typeface="Malgun Gothic" pitchFamily="34" charset="-122"/>
-                          <a:cs typeface="Malgun Gothic" pitchFamily="34" charset="-120"/>
-                        </a:rPr>
-                        <a:t>모델 레이어를 CPU 메모리에 두고 필요한 것만 GPU로 옮겨 가며 실행해 VRAM 부족(Out Of Memory)을 피하는 방식. 느리지만 작은 GPU에서도 돈다. Alpamayo 1.5 전용.</a:t>
-                      </a:r>
-                      <a:endParaRPr lang="en-US" sz="1100" dirty="0">
-                        <a:latin typeface="Malgun Gothic" charset="0"/>
-                        <a:ea typeface="Malgun Gothic" charset="0"/>
-                        <a:cs typeface="Malgun Gothic" charset="0"/>
-                      </a:endParaRPr>
-                    </a:p>
-                  </a:txBody>
-                  <a:tcPr marL="101600" marR="101600" marT="76200" marB="76200" anchor="ctr">
-                    <a:lnL w="6350" cap="flat" cmpd="sng" algn="ctr">
-                      <a:solidFill>
-                        <a:srgbClr val="D5DBE3"/>
-                      </a:solidFill>
-                      <a:prstDash val="solid"/>
-                      <a:round/>
-                      <a:headEnd type="none" w="med" len="med"/>
-                      <a:tailEnd type="none" w="med" len="med"/>
-                    </a:lnL>
-                    <a:lnR w="6350" cap="flat" cmpd="sng" algn="ctr">
-                      <a:solidFill>
-                        <a:srgbClr val="D5DBE3"/>
-                      </a:solidFill>
-                      <a:prstDash val="solid"/>
-                      <a:round/>
-                      <a:headEnd type="none" w="med" len="med"/>
-                      <a:tailEnd type="none" w="med" len="med"/>
-                    </a:lnR>
-                    <a:lnT w="6350" cap="flat" cmpd="sng" algn="ctr">
-                      <a:solidFill>
-                        <a:srgbClr val="D5DBE3"/>
-                      </a:solidFill>
-                      <a:prstDash val="solid"/>
-                      <a:round/>
-                      <a:headEnd type="none" w="med" len="med"/>
-                      <a:tailEnd type="none" w="med" len="med"/>
-                    </a:lnT>
-                    <a:lnB w="6350" cap="flat" cmpd="sng" algn="ctr">
-                      <a:solidFill>
-                        <a:srgbClr val="D5DBE3"/>
-                      </a:solidFill>
-                      <a:prstDash val="solid"/>
-                      <a:round/>
-                      <a:headEnd type="none" w="med" len="med"/>
-                      <a:tailEnd type="none" w="med" len="med"/>
-                    </a:lnB>
-                    <a:solidFill>
-                      <a:srgbClr val="FFFFFF"/>
-                    </a:solidFill>
-                  </a:tcPr>
-                </a:tc>
-              </a:tr>
-              <a:tr h="0">
-                <a:tc>
-                  <a:txBody>
-                    <a:bodyPr/>
-                    <a:lstStyle/>
-                    <a:p>
-                      <a:pPr algn="l" indent="0" marL="0">
-                        <a:lnSpc>
-                          <a:spcPct val="110000"/>
-                        </a:lnSpc>
-                        <a:buNone/>
-                      </a:pPr>
-                      <a:r>
-                        <a:rPr lang="en-US" sz="1100" b="1" dirty="0">
-                          <a:solidFill>
-                            <a:srgbClr val="24313F"/>
-                          </a:solidFill>
-                          <a:latin typeface="Malgun Gothic" pitchFamily="34" charset="0"/>
-                          <a:ea typeface="Malgun Gothic" pitchFamily="34" charset="-122"/>
-                          <a:cs typeface="Malgun Gothic" pitchFamily="34" charset="-120"/>
-                        </a:rPr>
-                        <a:t>gRPC</a:t>
-                      </a:r>
-                      <a:endParaRPr lang="en-US" sz="1100" dirty="0">
-                        <a:latin typeface="Malgun Gothic" charset="0"/>
-                        <a:ea typeface="Malgun Gothic" charset="0"/>
-                        <a:cs typeface="Malgun Gothic" charset="0"/>
-                      </a:endParaRPr>
-                    </a:p>
-                  </a:txBody>
-                  <a:tcPr marL="101600" marR="101600" marT="76200" marB="76200" anchor="ctr">
-                    <a:lnL w="6350" cap="flat" cmpd="sng" algn="ctr">
-                      <a:solidFill>
-                        <a:srgbClr val="D5DBE3"/>
-                      </a:solidFill>
-                      <a:prstDash val="solid"/>
-                      <a:round/>
-                      <a:headEnd type="none" w="med" len="med"/>
-                      <a:tailEnd type="none" w="med" len="med"/>
-                    </a:lnL>
-                    <a:lnR w="6350" cap="flat" cmpd="sng" algn="ctr">
-                      <a:solidFill>
-                        <a:srgbClr val="D5DBE3"/>
-                      </a:solidFill>
-                      <a:prstDash val="solid"/>
-                      <a:round/>
-                      <a:headEnd type="none" w="med" len="med"/>
-                      <a:tailEnd type="none" w="med" len="med"/>
-                    </a:lnR>
-                    <a:lnT w="6350" cap="flat" cmpd="sng" algn="ctr">
-                      <a:solidFill>
-                        <a:srgbClr val="D5DBE3"/>
-                      </a:solidFill>
-                      <a:prstDash val="solid"/>
-                      <a:round/>
-                      <a:headEnd type="none" w="med" len="med"/>
-                      <a:tailEnd type="none" w="med" len="med"/>
-                    </a:lnT>
-                    <a:lnB w="6350" cap="flat" cmpd="sng" algn="ctr">
-                      <a:solidFill>
-                        <a:srgbClr val="D5DBE3"/>
-                      </a:solidFill>
-                      <a:prstDash val="solid"/>
-                      <a:round/>
-                      <a:headEnd type="none" w="med" len="med"/>
-                      <a:tailEnd type="none" w="med" len="med"/>
-                    </a:lnB>
-                    <a:solidFill>
-                      <a:srgbClr val="F3F5F8"/>
-                    </a:solidFill>
-                  </a:tcPr>
-                </a:tc>
-                <a:tc>
-                  <a:txBody>
-                    <a:bodyPr/>
-                    <a:lstStyle/>
-                    <a:p>
-                      <a:pPr algn="l" indent="0" marL="0">
-                        <a:lnSpc>
-                          <a:spcPct val="110000"/>
-                        </a:lnSpc>
-                        <a:buNone/>
-                      </a:pPr>
-                      <a:r>
-                        <a:rPr lang="en-US" sz="1100" dirty="0">
-                          <a:solidFill>
-                            <a:srgbClr val="24313F"/>
-                          </a:solidFill>
-                          <a:latin typeface="Malgun Gothic" pitchFamily="34" charset="0"/>
-                          <a:ea typeface="Malgun Gothic" pitchFamily="34" charset="-122"/>
-                          <a:cs typeface="Malgun Gothic" pitchFamily="34" charset="-120"/>
-                        </a:rPr>
-                        <a:t>HTTP/2와 Protocol Buffers 위에서 동작하는 원격 호출 프레임워크. 메시지 형식을 .proto 파일로 고정해 두 호스트가 같은 계약을 쓰고, 시작 시 버전·설정 불일치를 바로 잡아낸다.</a:t>
-                      </a:r>
-                      <a:endParaRPr lang="en-US" sz="1100" dirty="0">
-                        <a:latin typeface="Malgun Gothic" charset="0"/>
-                        <a:ea typeface="Malgun Gothic" charset="0"/>
-                        <a:cs typeface="Malgun Gothic" charset="0"/>
-                      </a:endParaRPr>
-                    </a:p>
-                  </a:txBody>
-                  <a:tcPr marL="101600" marR="101600" marT="76200" marB="76200" anchor="ctr">
-                    <a:lnL w="6350" cap="flat" cmpd="sng" algn="ctr">
-                      <a:solidFill>
-                        <a:srgbClr val="D5DBE3"/>
-                      </a:solidFill>
-                      <a:prstDash val="solid"/>
-                      <a:round/>
-                      <a:headEnd type="none" w="med" len="med"/>
-                      <a:tailEnd type="none" w="med" len="med"/>
-                    </a:lnL>
-                    <a:lnR w="6350" cap="flat" cmpd="sng" algn="ctr">
-                      <a:solidFill>
-                        <a:srgbClr val="D5DBE3"/>
-                      </a:solidFill>
-                      <a:prstDash val="solid"/>
-                      <a:round/>
-                      <a:headEnd type="none" w="med" len="med"/>
-                      <a:tailEnd type="none" w="med" len="med"/>
-                    </a:lnR>
-                    <a:lnT w="6350" cap="flat" cmpd="sng" algn="ctr">
-                      <a:solidFill>
-                        <a:srgbClr val="D5DBE3"/>
-                      </a:solidFill>
-                      <a:prstDash val="solid"/>
-                      <a:round/>
-                      <a:headEnd type="none" w="med" len="med"/>
-                      <a:tailEnd type="none" w="med" len="med"/>
-                    </a:lnT>
-                    <a:lnB w="6350" cap="flat" cmpd="sng" algn="ctr">
-                      <a:solidFill>
-                        <a:srgbClr val="D5DBE3"/>
-                      </a:solidFill>
-                      <a:prstDash val="solid"/>
-                      <a:round/>
-                      <a:headEnd type="none" w="med" len="med"/>
-                      <a:tailEnd type="none" w="med" len="med"/>
-                    </a:lnB>
-                    <a:solidFill>
-                      <a:srgbClr val="F3F5F8"/>
-                    </a:solidFill>
-                  </a:tcPr>
-                </a:tc>
-              </a:tr>
-            </a:tbl>
-          </a:graphicData>
-        </a:graphic>
-      </p:graphicFrame>
+      <p:sp>
+        <p:nvSpPr>
+          <p:cNvPr id="5" name="Text 3"/>
+          <p:cNvSpPr txBox="1"/>
+          <p:nvPr/>
+        </p:nvSpPr>
+        <p:spPr>
+          <a:xfrm>
+            <a:off x="548640" y="1307592"/>
+            <a:ext cx="2377440" cy="475488"/>
+          </a:xfrm>
+          <a:prstGeom prst="rect">
+            <a:avLst/>
+          </a:prstGeom>
+          <a:noFill/>
+          <a:ln/>
+        </p:spPr>
+        <p:txBody>
+          <a:bodyPr wrap="square" lIns="0" tIns="0" rIns="0" bIns="0" rtlCol="0" anchor="t"/>
+          <a:lstStyle/>
+          <a:p>
+            <a:pPr indent="0" marL="0">
+              <a:buNone/>
+            </a:pPr>
+            <a:r>
+              <a:rPr lang="en-US" sz="1250" b="1" dirty="0">
+                <a:solidFill>
+                  <a:srgbClr val="2A6FDB"/>
+                </a:solidFill>
+                <a:latin typeface="Malgun Gothic" pitchFamily="34" charset="0"/>
+                <a:ea typeface="Malgun Gothic" pitchFamily="34" charset="-122"/>
+                <a:cs typeface="Malgun Gothic" pitchFamily="34" charset="-120"/>
+              </a:rPr>
+              <a:t>CFG (Classifier-Free Guidance)</a:t>
+            </a:r>
+            <a:endParaRPr lang="en-US" sz="1250" dirty="0"/>
+          </a:p>
+        </p:txBody>
+      </p:sp>
+      <p:sp>
+        <p:nvSpPr>
+          <p:cNvPr id="6" name="Text 4"/>
+          <p:cNvSpPr txBox="1"/>
+          <p:nvPr/>
+        </p:nvSpPr>
+        <p:spPr>
+          <a:xfrm>
+            <a:off x="3108960" y="1307592"/>
+            <a:ext cx="8534095" cy="475488"/>
+          </a:xfrm>
+          <a:prstGeom prst="rect">
+            <a:avLst/>
+          </a:prstGeom>
+          <a:noFill/>
+          <a:ln/>
+        </p:spPr>
+        <p:txBody>
+          <a:bodyPr wrap="square" lIns="0" tIns="0" rIns="0" bIns="0" rtlCol="0" anchor="t"/>
+          <a:lstStyle/>
+          <a:p>
+            <a:pPr indent="0" marL="0">
+              <a:buNone/>
+            </a:pPr>
+            <a:r>
+              <a:rPr lang="en-US" sz="1100" dirty="0">
+                <a:solidFill>
+                  <a:srgbClr val="24313F"/>
+                </a:solidFill>
+                <a:latin typeface="Malgun Gothic" pitchFamily="34" charset="0"/>
+                <a:ea typeface="Malgun Gothic" pitchFamily="34" charset="-122"/>
+                <a:cs typeface="Malgun Gothic" pitchFamily="34" charset="-120"/>
+              </a:rPr>
+              <a:t>자연어 지시를 얼마나 강하게 따를지 정하는 가중치. 지시 있음/없음 두 예측을 섞어 계산하며 값이 클수록 지시를 우선한다. 1.0이 기본, 데모는 1.5. 커질수록 계산량과 VRAM이 늘어난다.</a:t>
+            </a:r>
+            <a:endParaRPr lang="en-US" sz="1100" dirty="0"/>
+          </a:p>
+        </p:txBody>
+      </p:sp>
+      <p:sp>
+        <p:nvSpPr>
+          <p:cNvPr id="7" name="Shape 5"/>
+          <p:cNvSpPr/>
+          <p:nvPr/>
+        </p:nvSpPr>
+        <p:spPr>
+          <a:xfrm>
+            <a:off x="548640" y="1856232"/>
+            <a:ext cx="11094415" cy="0"/>
+          </a:xfrm>
+          <a:prstGeom prst="line">
+            <a:avLst/>
+          </a:prstGeom>
+          <a:noFill/>
+          <a:ln w="9525">
+            <a:solidFill>
+              <a:srgbClr val="D5DBE3"/>
+            </a:solidFill>
+            <a:prstDash val="solid"/>
+          </a:ln>
+        </p:spPr>
+      </p:sp>
+      <p:sp>
+        <p:nvSpPr>
+          <p:cNvPr id="8" name="Text 6"/>
+          <p:cNvSpPr txBox="1"/>
+          <p:nvPr/>
+        </p:nvSpPr>
+        <p:spPr>
+          <a:xfrm>
+            <a:off x="548640" y="1929384"/>
+            <a:ext cx="2377440" cy="475488"/>
+          </a:xfrm>
+          <a:prstGeom prst="rect">
+            <a:avLst/>
+          </a:prstGeom>
+          <a:noFill/>
+          <a:ln/>
+        </p:spPr>
+        <p:txBody>
+          <a:bodyPr wrap="square" lIns="0" tIns="0" rIns="0" bIns="0" rtlCol="0" anchor="t"/>
+          <a:lstStyle/>
+          <a:p>
+            <a:pPr indent="0" marL="0">
+              <a:buNone/>
+            </a:pPr>
+            <a:r>
+              <a:rPr lang="en-US" sz="1250" b="1" dirty="0">
+                <a:solidFill>
+                  <a:srgbClr val="2A6FDB"/>
+                </a:solidFill>
+                <a:latin typeface="Malgun Gothic" pitchFamily="34" charset="0"/>
+                <a:ea typeface="Malgun Gothic" pitchFamily="34" charset="-122"/>
+                <a:cs typeface="Malgun Gothic" pitchFamily="34" charset="-120"/>
+              </a:rPr>
+              <a:t>VQA (Visual Question Answering)</a:t>
+            </a:r>
+            <a:endParaRPr lang="en-US" sz="1250" dirty="0"/>
+          </a:p>
+        </p:txBody>
+      </p:sp>
+      <p:sp>
+        <p:nvSpPr>
+          <p:cNvPr id="9" name="Text 7"/>
+          <p:cNvSpPr txBox="1"/>
+          <p:nvPr/>
+        </p:nvSpPr>
+        <p:spPr>
+          <a:xfrm>
+            <a:off x="3108960" y="1929384"/>
+            <a:ext cx="8534095" cy="475488"/>
+          </a:xfrm>
+          <a:prstGeom prst="rect">
+            <a:avLst/>
+          </a:prstGeom>
+          <a:noFill/>
+          <a:ln/>
+        </p:spPr>
+        <p:txBody>
+          <a:bodyPr wrap="square" lIns="0" tIns="0" rIns="0" bIns="0" rtlCol="0" anchor="t"/>
+          <a:lstStyle/>
+          <a:p>
+            <a:pPr indent="0" marL="0">
+              <a:buNone/>
+            </a:pPr>
+            <a:r>
+              <a:rPr lang="en-US" sz="1100" dirty="0">
+                <a:solidFill>
+                  <a:srgbClr val="24313F"/>
+                </a:solidFill>
+                <a:latin typeface="Malgun Gothic" pitchFamily="34" charset="0"/>
+                <a:ea typeface="Malgun Gothic" pitchFamily="34" charset="-122"/>
+                <a:cs typeface="Malgun Gothic" pitchFamily="34" charset="-120"/>
+              </a:rPr>
+              <a:t>카메라 영상에 대해 자연어로 질문하면 모델이 텍스트로 답하는 모드. 궤적을 내지 않으므로 차량은 정지한 상태에서 질문하고 답을 확인한다.</a:t>
+            </a:r>
+            <a:endParaRPr lang="en-US" sz="1100" dirty="0"/>
+          </a:p>
+        </p:txBody>
+      </p:sp>
+      <p:sp>
+        <p:nvSpPr>
+          <p:cNvPr id="10" name="Shape 8"/>
+          <p:cNvSpPr/>
+          <p:nvPr/>
+        </p:nvSpPr>
+        <p:spPr>
+          <a:xfrm>
+            <a:off x="548640" y="2478024"/>
+            <a:ext cx="11094415" cy="0"/>
+          </a:xfrm>
+          <a:prstGeom prst="line">
+            <a:avLst/>
+          </a:prstGeom>
+          <a:noFill/>
+          <a:ln w="9525">
+            <a:solidFill>
+              <a:srgbClr val="D5DBE3"/>
+            </a:solidFill>
+            <a:prstDash val="solid"/>
+          </a:ln>
+        </p:spPr>
+      </p:sp>
+      <p:sp>
+        <p:nvSpPr>
+          <p:cNvPr id="11" name="Text 9"/>
+          <p:cNvSpPr txBox="1"/>
+          <p:nvPr/>
+        </p:nvSpPr>
+        <p:spPr>
+          <a:xfrm>
+            <a:off x="548640" y="2551176"/>
+            <a:ext cx="2377440" cy="475488"/>
+          </a:xfrm>
+          <a:prstGeom prst="rect">
+            <a:avLst/>
+          </a:prstGeom>
+          <a:noFill/>
+          <a:ln/>
+        </p:spPr>
+        <p:txBody>
+          <a:bodyPr wrap="square" lIns="0" tIns="0" rIns="0" bIns="0" rtlCol="0" anchor="t"/>
+          <a:lstStyle/>
+          <a:p>
+            <a:pPr indent="0" marL="0">
+              <a:buNone/>
+            </a:pPr>
+            <a:r>
+              <a:rPr lang="en-US" sz="1250" b="1" dirty="0">
+                <a:solidFill>
+                  <a:srgbClr val="2A6FDB"/>
+                </a:solidFill>
+                <a:latin typeface="Malgun Gothic" pitchFamily="34" charset="0"/>
+                <a:ea typeface="Malgun Gothic" pitchFamily="34" charset="-122"/>
+                <a:cs typeface="Malgun Gothic" pitchFamily="34" charset="-120"/>
+              </a:rPr>
+              <a:t>open-loop</a:t>
+            </a:r>
+            <a:endParaRPr lang="en-US" sz="1250" dirty="0"/>
+          </a:p>
+        </p:txBody>
+      </p:sp>
+      <p:sp>
+        <p:nvSpPr>
+          <p:cNvPr id="12" name="Text 10"/>
+          <p:cNvSpPr txBox="1"/>
+          <p:nvPr/>
+        </p:nvSpPr>
+        <p:spPr>
+          <a:xfrm>
+            <a:off x="3108960" y="2551176"/>
+            <a:ext cx="8534095" cy="475488"/>
+          </a:xfrm>
+          <a:prstGeom prst="rect">
+            <a:avLst/>
+          </a:prstGeom>
+          <a:noFill/>
+          <a:ln/>
+        </p:spPr>
+        <p:txBody>
+          <a:bodyPr wrap="square" lIns="0" tIns="0" rIns="0" bIns="0" rtlCol="0" anchor="t"/>
+          <a:lstStyle/>
+          <a:p>
+            <a:pPr indent="0" marL="0">
+              <a:buNone/>
+            </a:pPr>
+            <a:r>
+              <a:rPr lang="en-US" sz="1100" dirty="0">
+                <a:solidFill>
+                  <a:srgbClr val="24313F"/>
+                </a:solidFill>
+                <a:latin typeface="Malgun Gothic" pitchFamily="34" charset="0"/>
+                <a:ea typeface="Malgun Gothic" pitchFamily="34" charset="-122"/>
+                <a:cs typeface="Malgun Gothic" pitchFamily="34" charset="-120"/>
+              </a:rPr>
+              <a:t>녹화된 주행 데이터를 재생하며 모델의 예측만 얻는다. 예측이 차량에 영향을 주지 않아 모델 단독 평가와 두 경로(로컬·원격)의 결과 비교에 쓴다.</a:t>
+            </a:r>
+            <a:endParaRPr lang="en-US" sz="1100" dirty="0"/>
+          </a:p>
+        </p:txBody>
+      </p:sp>
+      <p:sp>
+        <p:nvSpPr>
+          <p:cNvPr id="13" name="Shape 11"/>
+          <p:cNvSpPr/>
+          <p:nvPr/>
+        </p:nvSpPr>
+        <p:spPr>
+          <a:xfrm>
+            <a:off x="548640" y="3099816"/>
+            <a:ext cx="11094415" cy="0"/>
+          </a:xfrm>
+          <a:prstGeom prst="line">
+            <a:avLst/>
+          </a:prstGeom>
+          <a:noFill/>
+          <a:ln w="9525">
+            <a:solidFill>
+              <a:srgbClr val="D5DBE3"/>
+            </a:solidFill>
+            <a:prstDash val="solid"/>
+          </a:ln>
+        </p:spPr>
+      </p:sp>
+      <p:sp>
+        <p:nvSpPr>
+          <p:cNvPr id="14" name="Text 12"/>
+          <p:cNvSpPr txBox="1"/>
+          <p:nvPr/>
+        </p:nvSpPr>
+        <p:spPr>
+          <a:xfrm>
+            <a:off x="548640" y="3172968"/>
+            <a:ext cx="2377440" cy="475488"/>
+          </a:xfrm>
+          <a:prstGeom prst="rect">
+            <a:avLst/>
+          </a:prstGeom>
+          <a:noFill/>
+          <a:ln/>
+        </p:spPr>
+        <p:txBody>
+          <a:bodyPr wrap="square" lIns="0" tIns="0" rIns="0" bIns="0" rtlCol="0" anchor="t"/>
+          <a:lstStyle/>
+          <a:p>
+            <a:pPr indent="0" marL="0">
+              <a:buNone/>
+            </a:pPr>
+            <a:r>
+              <a:rPr lang="en-US" sz="1250" b="1" dirty="0">
+                <a:solidFill>
+                  <a:srgbClr val="2A6FDB"/>
+                </a:solidFill>
+                <a:latin typeface="Malgun Gothic" pitchFamily="34" charset="0"/>
+                <a:ea typeface="Malgun Gothic" pitchFamily="34" charset="-122"/>
+                <a:cs typeface="Malgun Gothic" pitchFamily="34" charset="-120"/>
+              </a:rPr>
+              <a:t>closed-loop</a:t>
+            </a:r>
+            <a:endParaRPr lang="en-US" sz="1250" dirty="0"/>
+          </a:p>
+        </p:txBody>
+      </p:sp>
+      <p:sp>
+        <p:nvSpPr>
+          <p:cNvPr id="15" name="Text 13"/>
+          <p:cNvSpPr txBox="1"/>
+          <p:nvPr/>
+        </p:nvSpPr>
+        <p:spPr>
+          <a:xfrm>
+            <a:off x="3108960" y="3172968"/>
+            <a:ext cx="8534095" cy="475488"/>
+          </a:xfrm>
+          <a:prstGeom prst="rect">
+            <a:avLst/>
+          </a:prstGeom>
+          <a:noFill/>
+          <a:ln/>
+        </p:spPr>
+        <p:txBody>
+          <a:bodyPr wrap="square" lIns="0" tIns="0" rIns="0" bIns="0" rtlCol="0" anchor="t"/>
+          <a:lstStyle/>
+          <a:p>
+            <a:pPr indent="0" marL="0">
+              <a:buNone/>
+            </a:pPr>
+            <a:r>
+              <a:rPr lang="en-US" sz="1100" dirty="0">
+                <a:solidFill>
+                  <a:srgbClr val="24313F"/>
+                </a:solidFill>
+                <a:latin typeface="Malgun Gothic" pitchFamily="34" charset="0"/>
+                <a:ea typeface="Malgun Gothic" pitchFamily="34" charset="-122"/>
+                <a:cs typeface="Malgun Gothic" pitchFamily="34" charset="-120"/>
+              </a:rPr>
+              <a:t>모델이 낸 궤적을 PID 제어기가 실제 조향·가감속에 적용하고, 그 결과 장면이 다음 입력이 된다. 동기 모드는 추론 중 세계를 멈추고, 비동기(--async) 모드는 세계가 계속 진행된다.</a:t>
+            </a:r>
+            <a:endParaRPr lang="en-US" sz="1100" dirty="0"/>
+          </a:p>
+        </p:txBody>
+      </p:sp>
+      <p:sp>
+        <p:nvSpPr>
+          <p:cNvPr id="16" name="Shape 14"/>
+          <p:cNvSpPr/>
+          <p:nvPr/>
+        </p:nvSpPr>
+        <p:spPr>
+          <a:xfrm>
+            <a:off x="548640" y="3721608"/>
+            <a:ext cx="11094415" cy="0"/>
+          </a:xfrm>
+          <a:prstGeom prst="line">
+            <a:avLst/>
+          </a:prstGeom>
+          <a:noFill/>
+          <a:ln w="9525">
+            <a:solidFill>
+              <a:srgbClr val="D5DBE3"/>
+            </a:solidFill>
+            <a:prstDash val="solid"/>
+          </a:ln>
+        </p:spPr>
+      </p:sp>
+      <p:sp>
+        <p:nvSpPr>
+          <p:cNvPr id="17" name="Text 15"/>
+          <p:cNvSpPr txBox="1"/>
+          <p:nvPr/>
+        </p:nvSpPr>
+        <p:spPr>
+          <a:xfrm>
+            <a:off x="548640" y="3794760"/>
+            <a:ext cx="2377440" cy="475488"/>
+          </a:xfrm>
+          <a:prstGeom prst="rect">
+            <a:avLst/>
+          </a:prstGeom>
+          <a:noFill/>
+          <a:ln/>
+        </p:spPr>
+        <p:txBody>
+          <a:bodyPr wrap="square" lIns="0" tIns="0" rIns="0" bIns="0" rtlCol="0" anchor="t"/>
+          <a:lstStyle/>
+          <a:p>
+            <a:pPr indent="0" marL="0">
+              <a:buNone/>
+            </a:pPr>
+            <a:r>
+              <a:rPr lang="en-US" sz="1250" b="1" dirty="0">
+                <a:solidFill>
+                  <a:srgbClr val="2A6FDB"/>
+                </a:solidFill>
+                <a:latin typeface="Malgun Gothic" pitchFamily="34" charset="0"/>
+                <a:ea typeface="Malgun Gothic" pitchFamily="34" charset="-122"/>
+                <a:cs typeface="Malgun Gothic" pitchFamily="34" charset="-120"/>
+              </a:rPr>
+              <a:t>ADE / FDE</a:t>
+            </a:r>
+            <a:endParaRPr lang="en-US" sz="1250" dirty="0"/>
+          </a:p>
+        </p:txBody>
+      </p:sp>
+      <p:sp>
+        <p:nvSpPr>
+          <p:cNvPr id="18" name="Text 16"/>
+          <p:cNvSpPr txBox="1"/>
+          <p:nvPr/>
+        </p:nvSpPr>
+        <p:spPr>
+          <a:xfrm>
+            <a:off x="3108960" y="3794760"/>
+            <a:ext cx="8534095" cy="475488"/>
+          </a:xfrm>
+          <a:prstGeom prst="rect">
+            <a:avLst/>
+          </a:prstGeom>
+          <a:noFill/>
+          <a:ln/>
+        </p:spPr>
+        <p:txBody>
+          <a:bodyPr wrap="square" lIns="0" tIns="0" rIns="0" bIns="0" rtlCol="0" anchor="t"/>
+          <a:lstStyle/>
+          <a:p>
+            <a:pPr indent="0" marL="0">
+              <a:buNone/>
+            </a:pPr>
+            <a:r>
+              <a:rPr lang="en-US" sz="1100" dirty="0">
+                <a:solidFill>
+                  <a:srgbClr val="24313F"/>
+                </a:solidFill>
+                <a:latin typeface="Malgun Gothic" pitchFamily="34" charset="0"/>
+                <a:ea typeface="Malgun Gothic" pitchFamily="34" charset="-122"/>
+                <a:cs typeface="Malgun Gothic" pitchFamily="34" charset="-120"/>
+              </a:rPr>
+              <a:t>예측 궤적과 실제 궤적의 평균 거리 오차(Average Displacement Error)와 마지막 점의 오차(Final Displacement Error), 단위 m. 여러 샘플 중 가장 좋은 값을 고르면 minADE.</a:t>
+            </a:r>
+            <a:endParaRPr lang="en-US" sz="1100" dirty="0"/>
+          </a:p>
+        </p:txBody>
+      </p:sp>
+      <p:sp>
+        <p:nvSpPr>
+          <p:cNvPr id="19" name="Shape 17"/>
+          <p:cNvSpPr/>
+          <p:nvPr/>
+        </p:nvSpPr>
+        <p:spPr>
+          <a:xfrm>
+            <a:off x="548640" y="4343400"/>
+            <a:ext cx="11094415" cy="0"/>
+          </a:xfrm>
+          <a:prstGeom prst="line">
+            <a:avLst/>
+          </a:prstGeom>
+          <a:noFill/>
+          <a:ln w="9525">
+            <a:solidFill>
+              <a:srgbClr val="D5DBE3"/>
+            </a:solidFill>
+            <a:prstDash val="solid"/>
+          </a:ln>
+        </p:spPr>
+      </p:sp>
+      <p:sp>
+        <p:nvSpPr>
+          <p:cNvPr id="20" name="Text 18"/>
+          <p:cNvSpPr txBox="1"/>
+          <p:nvPr/>
+        </p:nvSpPr>
+        <p:spPr>
+          <a:xfrm>
+            <a:off x="548640" y="4416552"/>
+            <a:ext cx="2377440" cy="475488"/>
+          </a:xfrm>
+          <a:prstGeom prst="rect">
+            <a:avLst/>
+          </a:prstGeom>
+          <a:noFill/>
+          <a:ln/>
+        </p:spPr>
+        <p:txBody>
+          <a:bodyPr wrap="square" lIns="0" tIns="0" rIns="0" bIns="0" rtlCol="0" anchor="t"/>
+          <a:lstStyle/>
+          <a:p>
+            <a:pPr indent="0" marL="0">
+              <a:buNone/>
+            </a:pPr>
+            <a:r>
+              <a:rPr lang="en-US" sz="1250" b="1" dirty="0">
+                <a:solidFill>
+                  <a:srgbClr val="2A6FDB"/>
+                </a:solidFill>
+                <a:latin typeface="Malgun Gothic" pitchFamily="34" charset="0"/>
+                <a:ea typeface="Malgun Gothic" pitchFamily="34" charset="-122"/>
+                <a:cs typeface="Malgun Gothic" pitchFamily="34" charset="-120"/>
+              </a:rPr>
+              <a:t>4-bit NF4 양자화</a:t>
+            </a:r>
+            <a:endParaRPr lang="en-US" sz="1250" dirty="0"/>
+          </a:p>
+        </p:txBody>
+      </p:sp>
+      <p:sp>
+        <p:nvSpPr>
+          <p:cNvPr id="21" name="Text 19"/>
+          <p:cNvSpPr txBox="1"/>
+          <p:nvPr/>
+        </p:nvSpPr>
+        <p:spPr>
+          <a:xfrm>
+            <a:off x="3108960" y="4416552"/>
+            <a:ext cx="8534095" cy="475488"/>
+          </a:xfrm>
+          <a:prstGeom prst="rect">
+            <a:avLst/>
+          </a:prstGeom>
+          <a:noFill/>
+          <a:ln/>
+        </p:spPr>
+        <p:txBody>
+          <a:bodyPr wrap="square" lIns="0" tIns="0" rIns="0" bIns="0" rtlCol="0" anchor="t"/>
+          <a:lstStyle/>
+          <a:p>
+            <a:pPr indent="0" marL="0">
+              <a:buNone/>
+            </a:pPr>
+            <a:r>
+              <a:rPr lang="en-US" sz="1100" dirty="0">
+                <a:solidFill>
+                  <a:srgbClr val="24313F"/>
+                </a:solidFill>
+                <a:latin typeface="Malgun Gothic" pitchFamily="34" charset="0"/>
+                <a:ea typeface="Malgun Gothic" pitchFamily="34" charset="-122"/>
+                <a:cs typeface="Malgun Gothic" pitchFamily="34" charset="-120"/>
+              </a:rPr>
+              <a:t>모델 가중치를 4비트 NormalFloat 형식으로 저장해 VRAM을 약 1/4로 줄이는 방법(bitsandbytes). 정밀도가 조금 떨어질 수 있다. 24 GB GPU 한 대에서 모델과 CARLA를 함께 돌릴 때 필요했다.</a:t>
+            </a:r>
+            <a:endParaRPr lang="en-US" sz="1100" dirty="0"/>
+          </a:p>
+        </p:txBody>
+      </p:sp>
+      <p:sp>
+        <p:nvSpPr>
+          <p:cNvPr id="22" name="Shape 20"/>
+          <p:cNvSpPr/>
+          <p:nvPr/>
+        </p:nvSpPr>
+        <p:spPr>
+          <a:xfrm>
+            <a:off x="548640" y="4965192"/>
+            <a:ext cx="11094415" cy="0"/>
+          </a:xfrm>
+          <a:prstGeom prst="line">
+            <a:avLst/>
+          </a:prstGeom>
+          <a:noFill/>
+          <a:ln w="9525">
+            <a:solidFill>
+              <a:srgbClr val="D5DBE3"/>
+            </a:solidFill>
+            <a:prstDash val="solid"/>
+          </a:ln>
+        </p:spPr>
+      </p:sp>
+      <p:sp>
+        <p:nvSpPr>
+          <p:cNvPr id="23" name="Text 21"/>
+          <p:cNvSpPr txBox="1"/>
+          <p:nvPr/>
+        </p:nvSpPr>
+        <p:spPr>
+          <a:xfrm>
+            <a:off x="548640" y="5038344"/>
+            <a:ext cx="2377440" cy="475488"/>
+          </a:xfrm>
+          <a:prstGeom prst="rect">
+            <a:avLst/>
+          </a:prstGeom>
+          <a:noFill/>
+          <a:ln/>
+        </p:spPr>
+        <p:txBody>
+          <a:bodyPr wrap="square" lIns="0" tIns="0" rIns="0" bIns="0" rtlCol="0" anchor="t"/>
+          <a:lstStyle/>
+          <a:p>
+            <a:pPr indent="0" marL="0">
+              <a:buNone/>
+            </a:pPr>
+            <a:r>
+              <a:rPr lang="en-US" sz="1250" b="1" dirty="0">
+                <a:solidFill>
+                  <a:srgbClr val="2A6FDB"/>
+                </a:solidFill>
+                <a:latin typeface="Malgun Gothic" pitchFamily="34" charset="0"/>
+                <a:ea typeface="Malgun Gothic" pitchFamily="34" charset="-122"/>
+                <a:cs typeface="Malgun Gothic" pitchFamily="34" charset="-120"/>
+              </a:rPr>
+              <a:t>OOM-free 모드</a:t>
+            </a:r>
+            <a:endParaRPr lang="en-US" sz="1250" dirty="0"/>
+          </a:p>
+        </p:txBody>
+      </p:sp>
+      <p:sp>
+        <p:nvSpPr>
+          <p:cNvPr id="24" name="Text 22"/>
+          <p:cNvSpPr txBox="1"/>
+          <p:nvPr/>
+        </p:nvSpPr>
+        <p:spPr>
+          <a:xfrm>
+            <a:off x="3108960" y="5038344"/>
+            <a:ext cx="8534095" cy="475488"/>
+          </a:xfrm>
+          <a:prstGeom prst="rect">
+            <a:avLst/>
+          </a:prstGeom>
+          <a:noFill/>
+          <a:ln/>
+        </p:spPr>
+        <p:txBody>
+          <a:bodyPr wrap="square" lIns="0" tIns="0" rIns="0" bIns="0" rtlCol="0" anchor="t"/>
+          <a:lstStyle/>
+          <a:p>
+            <a:pPr indent="0" marL="0">
+              <a:buNone/>
+            </a:pPr>
+            <a:r>
+              <a:rPr lang="en-US" sz="1100" dirty="0">
+                <a:solidFill>
+                  <a:srgbClr val="24313F"/>
+                </a:solidFill>
+                <a:latin typeface="Malgun Gothic" pitchFamily="34" charset="0"/>
+                <a:ea typeface="Malgun Gothic" pitchFamily="34" charset="-122"/>
+                <a:cs typeface="Malgun Gothic" pitchFamily="34" charset="-120"/>
+              </a:rPr>
+              <a:t>모델 레이어를 CPU 메모리에 두고 필요한 것만 GPU로 옮겨 가며 실행해 VRAM 부족(Out Of Memory)을 피하는 방식. 느리지만 작은 GPU에서도 돈다. Alpamayo 1.5 전용.</a:t>
+            </a:r>
+            <a:endParaRPr lang="en-US" sz="1100" dirty="0"/>
+          </a:p>
+        </p:txBody>
+      </p:sp>
+      <p:sp>
+        <p:nvSpPr>
+          <p:cNvPr id="25" name="Shape 23"/>
+          <p:cNvSpPr/>
+          <p:nvPr/>
+        </p:nvSpPr>
+        <p:spPr>
+          <a:xfrm>
+            <a:off x="548640" y="5586984"/>
+            <a:ext cx="11094415" cy="0"/>
+          </a:xfrm>
+          <a:prstGeom prst="line">
+            <a:avLst/>
+          </a:prstGeom>
+          <a:noFill/>
+          <a:ln w="9525">
+            <a:solidFill>
+              <a:srgbClr val="D5DBE3"/>
+            </a:solidFill>
+            <a:prstDash val="solid"/>
+          </a:ln>
+        </p:spPr>
+      </p:sp>
+      <p:sp>
+        <p:nvSpPr>
+          <p:cNvPr id="26" name="Text 24"/>
+          <p:cNvSpPr txBox="1"/>
+          <p:nvPr/>
+        </p:nvSpPr>
+        <p:spPr>
+          <a:xfrm>
+            <a:off x="548640" y="5660136"/>
+            <a:ext cx="2377440" cy="475488"/>
+          </a:xfrm>
+          <a:prstGeom prst="rect">
+            <a:avLst/>
+          </a:prstGeom>
+          <a:noFill/>
+          <a:ln/>
+        </p:spPr>
+        <p:txBody>
+          <a:bodyPr wrap="square" lIns="0" tIns="0" rIns="0" bIns="0" rtlCol="0" anchor="t"/>
+          <a:lstStyle/>
+          <a:p>
+            <a:pPr indent="0" marL="0">
+              <a:buNone/>
+            </a:pPr>
+            <a:r>
+              <a:rPr lang="en-US" sz="1250" b="1" dirty="0">
+                <a:solidFill>
+                  <a:srgbClr val="2A6FDB"/>
+                </a:solidFill>
+                <a:latin typeface="Malgun Gothic" pitchFamily="34" charset="0"/>
+                <a:ea typeface="Malgun Gothic" pitchFamily="34" charset="-122"/>
+                <a:cs typeface="Malgun Gothic" pitchFamily="34" charset="-120"/>
+              </a:rPr>
+              <a:t>gRPC</a:t>
+            </a:r>
+            <a:endParaRPr lang="en-US" sz="1250" dirty="0"/>
+          </a:p>
+        </p:txBody>
+      </p:sp>
+      <p:sp>
+        <p:nvSpPr>
+          <p:cNvPr id="27" name="Text 25"/>
+          <p:cNvSpPr txBox="1"/>
+          <p:nvPr/>
+        </p:nvSpPr>
+        <p:spPr>
+          <a:xfrm>
+            <a:off x="3108960" y="5660136"/>
+            <a:ext cx="8534095" cy="475488"/>
+          </a:xfrm>
+          <a:prstGeom prst="rect">
+            <a:avLst/>
+          </a:prstGeom>
+          <a:noFill/>
+          <a:ln/>
+        </p:spPr>
+        <p:txBody>
+          <a:bodyPr wrap="square" lIns="0" tIns="0" rIns="0" bIns="0" rtlCol="0" anchor="t"/>
+          <a:lstStyle/>
+          <a:p>
+            <a:pPr indent="0" marL="0">
+              <a:buNone/>
+            </a:pPr>
+            <a:r>
+              <a:rPr lang="en-US" sz="1100" dirty="0">
+                <a:solidFill>
+                  <a:srgbClr val="24313F"/>
+                </a:solidFill>
+                <a:latin typeface="Malgun Gothic" pitchFamily="34" charset="0"/>
+                <a:ea typeface="Malgun Gothic" pitchFamily="34" charset="-122"/>
+                <a:cs typeface="Malgun Gothic" pitchFamily="34" charset="-120"/>
+              </a:rPr>
+              <a:t>HTTP/2와 Protocol Buffers 위에서 동작하는 원격 호출 프레임워크. 메시지 형식을 .proto 파일로 고정해 두 호스트가 같은 계약을 쓰고, 시작 시 버전·설정 불일치를 바로 잡아낸다.</a:t>
+            </a:r>
+            <a:endParaRPr lang="en-US" sz="1100" dirty="0"/>
+          </a:p>
+        </p:txBody>
+      </p:sp>
+      <p:sp>
+        <p:nvSpPr>
+          <p:cNvPr id="28" name="Shape 26"/>
+          <p:cNvSpPr/>
+          <p:nvPr/>
+        </p:nvSpPr>
+        <p:spPr>
+          <a:xfrm>
+            <a:off x="548640" y="6208776"/>
+            <a:ext cx="11094415" cy="0"/>
+          </a:xfrm>
+          <a:prstGeom prst="line">
+            <a:avLst/>
+          </a:prstGeom>
+          <a:noFill/>
+          <a:ln w="9525">
+            <a:solidFill>
+              <a:srgbClr val="D5DBE3"/>
+            </a:solidFill>
+            <a:prstDash val="solid"/>
+          </a:ln>
+        </p:spPr>
+      </p:sp>
     </p:spTree>
   </p:cSld>
   <p:clrMapOvr>

--- a/docs/distributed/demo-overview-short.pptx
+++ b/docs/distributed/demo-overview-short.pptx
@@ -8921,7 +8921,7 @@
                 <a:ea typeface="Malgun Gothic" pitchFamily="34" charset="-122"/>
                 <a:cs typeface="Malgun Gothic" pitchFamily="34" charset="-120"/>
               </a:rPr>
-              <a:t>CARLA의 x86 요구와 Alpamayo의 대용량 VRAM 요구를 서로 다른 인스턴스로 나눠도 closed-loop가 성립한다</a:t>
+              <a:t>시뮬레이터와 추론 모델을 서로 다른 인스턴스에 두고 gRPC로 연결해도 closed-loop 테스트가 성립한다</a:t>
             </a:r>
             <a:endParaRPr lang="en-US" sz="1400" dirty="0"/>
           </a:p>
@@ -9013,7 +9013,7 @@
         </p:nvSpPr>
         <p:spPr>
           <a:xfrm>
-            <a:off x="548640" y="1371600"/>
+            <a:off x="548640" y="1463040"/>
             <a:ext cx="822960" cy="822960"/>
           </a:xfrm>
           <a:prstGeom prst="rect">
@@ -9052,8 +9052,8 @@
         </p:nvSpPr>
         <p:spPr>
           <a:xfrm>
-            <a:off x="1417320" y="1463040"/>
-            <a:ext cx="4404208" cy="384048"/>
+            <a:off x="1417320" y="1554480"/>
+            <a:ext cx="2585618" cy="384048"/>
           </a:xfrm>
           <a:prstGeom prst="rect">
             <a:avLst/>
@@ -9077,7 +9077,7 @@
                 <a:ea typeface="Malgun Gothic" pitchFamily="34" charset="-122"/>
                 <a:cs typeface="Malgun Gothic" pitchFamily="34" charset="-120"/>
               </a:rPr>
-              <a:t>요구사항 분리 입증</a:t>
+              <a:t>분리 환경 closed-loop 테스트 수행</a:t>
             </a:r>
             <a:endParaRPr lang="en-US" sz="1600" dirty="0"/>
           </a:p>
@@ -9091,8 +9091,8 @@
         </p:nvSpPr>
         <p:spPr>
           <a:xfrm>
-            <a:off x="1417320" y="1901952"/>
-            <a:ext cx="4404208" cy="1709928"/>
+            <a:off x="1417320" y="1993392"/>
+            <a:ext cx="2585618" cy="3767328"/>
           </a:xfrm>
           <a:prstGeom prst="rect">
             <a:avLst/>
@@ -9122,7 +9122,7 @@
                 <a:ea typeface="Malgun Gothic" pitchFamily="34" charset="-122"/>
                 <a:cs typeface="Malgun Gothic" pitchFamily="34" charset="-120"/>
               </a:rPr>
-              <a:t>근거: CARLA(UE4)는 x86 CPU가 필수이지만 GPU는 6 GB면 충분. Alpamayo는 VRAM 24 GB 이상이 필요하지만 CPU 아키텍처에는 무관</a:t>
+              <a:t>시뮬레이터(A)와 추론 서버(B)를 gRPC로 연결해, 모델이 낸 궤적으로 CARLA 차량이 실제로 주행하는 closed-loop를 확인했다</a:t>
             </a:r>
             <a:endParaRPr lang="en-US" sz="1250" dirty="0"/>
           </a:p>
@@ -9145,110 +9145,10 @@
                 <a:ea typeface="Malgun Gothic" pitchFamily="34" charset="-122"/>
                 <a:cs typeface="Malgun Gothic" pitchFamily="34" charset="-120"/>
               </a:rPr>
-              <a:t>효과: 같은 머신에 두던 제약(4-bit 양자화, OOM-free 대책, venv 3개)이 사라진다</a:t>
+              <a:t>navigation(CFG)과 VQA도 같은 요청/응답 경로로 동작한다</a:t>
             </a:r>
             <a:endParaRPr lang="en-US" sz="1250" dirty="0"/>
           </a:p>
-        </p:txBody>
-      </p:sp>
-      <p:sp>
-        <p:nvSpPr>
-          <p:cNvPr id="9" name="Text 7"/>
-          <p:cNvSpPr txBox="1"/>
-          <p:nvPr/>
-        </p:nvSpPr>
-        <p:spPr>
-          <a:xfrm>
-            <a:off x="6370168" y="1371600"/>
-            <a:ext cx="822960" cy="822960"/>
-          </a:xfrm>
-          <a:prstGeom prst="rect">
-            <a:avLst/>
-          </a:prstGeom>
-          <a:noFill/>
-          <a:ln/>
-        </p:spPr>
-        <p:txBody>
-          <a:bodyPr wrap="square" lIns="0" tIns="0" rIns="0" bIns="0" rtlCol="0" anchor="t"/>
-          <a:lstStyle/>
-          <a:p>
-            <a:pPr indent="0" marL="0">
-              <a:buNone/>
-            </a:pPr>
-            <a:r>
-              <a:rPr lang="en-US" sz="4400" b="1" dirty="0">
-                <a:solidFill>
-                  <a:srgbClr val="E0762B"/>
-                </a:solidFill>
-                <a:latin typeface="Malgun Gothic" pitchFamily="34" charset="0"/>
-                <a:ea typeface="Malgun Gothic" pitchFamily="34" charset="-122"/>
-                <a:cs typeface="Malgun Gothic" pitchFamily="34" charset="-120"/>
-              </a:rPr>
-              <a:t>2</a:t>
-            </a:r>
-            <a:endParaRPr lang="en-US" sz="4400" dirty="0"/>
-          </a:p>
-        </p:txBody>
-      </p:sp>
-      <p:sp>
-        <p:nvSpPr>
-          <p:cNvPr id="10" name="Text 8"/>
-          <p:cNvSpPr txBox="1"/>
-          <p:nvPr/>
-        </p:nvSpPr>
-        <p:spPr>
-          <a:xfrm>
-            <a:off x="7238848" y="1463040"/>
-            <a:ext cx="4404208" cy="384048"/>
-          </a:xfrm>
-          <a:prstGeom prst="rect">
-            <a:avLst/>
-          </a:prstGeom>
-          <a:noFill/>
-          <a:ln/>
-        </p:spPr>
-        <p:txBody>
-          <a:bodyPr wrap="square" lIns="0" tIns="0" rIns="0" bIns="0" rtlCol="0" anchor="ctr"/>
-          <a:lstStyle/>
-          <a:p>
-            <a:pPr indent="0" marL="0">
-              <a:buNone/>
-            </a:pPr>
-            <a:r>
-              <a:rPr lang="en-US" sz="1600" b="1" dirty="0">
-                <a:solidFill>
-                  <a:srgbClr val="1B2A41"/>
-                </a:solidFill>
-                <a:latin typeface="Malgun Gothic" pitchFamily="34" charset="0"/>
-                <a:ea typeface="Malgun Gothic" pitchFamily="34" charset="-122"/>
-                <a:cs typeface="Malgun Gothic" pitchFamily="34" charset="-120"/>
-              </a:rPr>
-              <a:t>인스턴스 선택 유연성</a:t>
-            </a:r>
-            <a:endParaRPr lang="en-US" sz="1600" dirty="0"/>
-          </a:p>
-        </p:txBody>
-      </p:sp>
-      <p:sp>
-        <p:nvSpPr>
-          <p:cNvPr id="11" name="Text 9"/>
-          <p:cNvSpPr txBox="1"/>
-          <p:nvPr/>
-        </p:nvSpPr>
-        <p:spPr>
-          <a:xfrm>
-            <a:off x="7238848" y="1901952"/>
-            <a:ext cx="4404208" cy="1709928"/>
-          </a:xfrm>
-          <a:prstGeom prst="rect">
-            <a:avLst/>
-          </a:prstGeom>
-          <a:noFill/>
-          <a:ln/>
-        </p:spPr>
-        <p:txBody>
-          <a:bodyPr wrap="square" lIns="0" tIns="0" rIns="0" bIns="0" rtlCol="0" anchor="t"/>
-          <a:lstStyle/>
           <a:p>
             <a:pPr indent="0" marL="0">
               <a:lnSpc>
@@ -9268,10 +9168,110 @@
                 <a:ea typeface="Malgun Gothic" pitchFamily="34" charset="-122"/>
                 <a:cs typeface="Malgun Gothic" pitchFamily="34" charset="-120"/>
               </a:rPr>
-              <a:t>근거: 추론 호스트는 x86/ARM과 무관하게 VRAM 기준으로만 고른다. 시뮬레이터 호스트는 그대로</a:t>
+              <a:t>루프·PID·UI 코드는 업스트림 그대로이고 어댑터만 원격으로 바뀌었다</a:t>
             </a:r>
             <a:endParaRPr lang="en-US" sz="1250" dirty="0"/>
           </a:p>
+        </p:txBody>
+      </p:sp>
+      <p:sp>
+        <p:nvSpPr>
+          <p:cNvPr id="9" name="Text 7"/>
+          <p:cNvSpPr txBox="1"/>
+          <p:nvPr/>
+        </p:nvSpPr>
+        <p:spPr>
+          <a:xfrm>
+            <a:off x="4368698" y="1463040"/>
+            <a:ext cx="822960" cy="822960"/>
+          </a:xfrm>
+          <a:prstGeom prst="rect">
+            <a:avLst/>
+          </a:prstGeom>
+          <a:noFill/>
+          <a:ln/>
+        </p:spPr>
+        <p:txBody>
+          <a:bodyPr wrap="square" lIns="0" tIns="0" rIns="0" bIns="0" rtlCol="0" anchor="t"/>
+          <a:lstStyle/>
+          <a:p>
+            <a:pPr indent="0" marL="0">
+              <a:buNone/>
+            </a:pPr>
+            <a:r>
+              <a:rPr lang="en-US" sz="4400" b="1" dirty="0">
+                <a:solidFill>
+                  <a:srgbClr val="E0762B"/>
+                </a:solidFill>
+                <a:latin typeface="Malgun Gothic" pitchFamily="34" charset="0"/>
+                <a:ea typeface="Malgun Gothic" pitchFamily="34" charset="-122"/>
+                <a:cs typeface="Malgun Gothic" pitchFamily="34" charset="-120"/>
+              </a:rPr>
+              <a:t>2</a:t>
+            </a:r>
+            <a:endParaRPr lang="en-US" sz="4400" dirty="0"/>
+          </a:p>
+        </p:txBody>
+      </p:sp>
+      <p:sp>
+        <p:nvSpPr>
+          <p:cNvPr id="10" name="Text 8"/>
+          <p:cNvSpPr txBox="1"/>
+          <p:nvPr/>
+        </p:nvSpPr>
+        <p:spPr>
+          <a:xfrm>
+            <a:off x="5237378" y="1554480"/>
+            <a:ext cx="2585618" cy="384048"/>
+          </a:xfrm>
+          <a:prstGeom prst="rect">
+            <a:avLst/>
+          </a:prstGeom>
+          <a:noFill/>
+          <a:ln/>
+        </p:spPr>
+        <p:txBody>
+          <a:bodyPr wrap="square" lIns="0" tIns="0" rIns="0" bIns="0" rtlCol="0" anchor="ctr"/>
+          <a:lstStyle/>
+          <a:p>
+            <a:pPr indent="0" marL="0">
+              <a:buNone/>
+            </a:pPr>
+            <a:r>
+              <a:rPr lang="en-US" sz="1600" b="1" dirty="0">
+                <a:solidFill>
+                  <a:srgbClr val="1B2A41"/>
+                </a:solidFill>
+                <a:latin typeface="Malgun Gothic" pitchFamily="34" charset="0"/>
+                <a:ea typeface="Malgun Gothic" pitchFamily="34" charset="-122"/>
+                <a:cs typeface="Malgun Gothic" pitchFamily="34" charset="-120"/>
+              </a:rPr>
+              <a:t>인스턴스 선택 유연성</a:t>
+            </a:r>
+            <a:endParaRPr lang="en-US" sz="1600" dirty="0"/>
+          </a:p>
+        </p:txBody>
+      </p:sp>
+      <p:sp>
+        <p:nvSpPr>
+          <p:cNvPr id="11" name="Text 9"/>
+          <p:cNvSpPr txBox="1"/>
+          <p:nvPr/>
+        </p:nvSpPr>
+        <p:spPr>
+          <a:xfrm>
+            <a:off x="5237378" y="1993392"/>
+            <a:ext cx="2585618" cy="3767328"/>
+          </a:xfrm>
+          <a:prstGeom prst="rect">
+            <a:avLst/>
+          </a:prstGeom>
+          <a:noFill/>
+          <a:ln/>
+        </p:spPr>
+        <p:txBody>
+          <a:bodyPr wrap="square" lIns="0" tIns="0" rIns="0" bIns="0" rtlCol="0" anchor="t"/>
+          <a:lstStyle/>
           <a:p>
             <a:pPr indent="0" marL="0">
               <a:lnSpc>
@@ -9291,110 +9291,10 @@
                 <a:ea typeface="Malgun Gothic" pitchFamily="34" charset="-122"/>
                 <a:cs typeface="Malgun Gothic" pitchFamily="34" charset="-120"/>
               </a:rPr>
-              <a:t>효과: ARM Graviton GPU 인스턴스 검토 가능. Alpamayo 2(7카메라)나 샘플 수·CFG를 늘릴 때 B만 교체</a:t>
+              <a:t>CARLA의 x86 요구와 Alpamayo의 VRAM 요구를 서로 다른 인스턴스로 따로 만족시키면 된다</a:t>
             </a:r>
             <a:endParaRPr lang="en-US" sz="1250" dirty="0"/>
           </a:p>
-        </p:txBody>
-      </p:sp>
-      <p:sp>
-        <p:nvSpPr>
-          <p:cNvPr id="12" name="Text 10"/>
-          <p:cNvSpPr txBox="1"/>
-          <p:nvPr/>
-        </p:nvSpPr>
-        <p:spPr>
-          <a:xfrm>
-            <a:off x="548640" y="3749040"/>
-            <a:ext cx="822960" cy="822960"/>
-          </a:xfrm>
-          <a:prstGeom prst="rect">
-            <a:avLst/>
-          </a:prstGeom>
-          <a:noFill/>
-          <a:ln/>
-        </p:spPr>
-        <p:txBody>
-          <a:bodyPr wrap="square" lIns="0" tIns="0" rIns="0" bIns="0" rtlCol="0" anchor="t"/>
-          <a:lstStyle/>
-          <a:p>
-            <a:pPr indent="0" marL="0">
-              <a:buNone/>
-            </a:pPr>
-            <a:r>
-              <a:rPr lang="en-US" sz="4400" b="1" dirty="0">
-                <a:solidFill>
-                  <a:srgbClr val="2E8B57"/>
-                </a:solidFill>
-                <a:latin typeface="Malgun Gothic" pitchFamily="34" charset="0"/>
-                <a:ea typeface="Malgun Gothic" pitchFamily="34" charset="-122"/>
-                <a:cs typeface="Malgun Gothic" pitchFamily="34" charset="-120"/>
-              </a:rPr>
-              <a:t>3</a:t>
-            </a:r>
-            <a:endParaRPr lang="en-US" sz="4400" dirty="0"/>
-          </a:p>
-        </p:txBody>
-      </p:sp>
-      <p:sp>
-        <p:nvSpPr>
-          <p:cNvPr id="13" name="Text 11"/>
-          <p:cNvSpPr txBox="1"/>
-          <p:nvPr/>
-        </p:nvSpPr>
-        <p:spPr>
-          <a:xfrm>
-            <a:off x="1417320" y="3840480"/>
-            <a:ext cx="4404208" cy="384048"/>
-          </a:xfrm>
-          <a:prstGeom prst="rect">
-            <a:avLst/>
-          </a:prstGeom>
-          <a:noFill/>
-          <a:ln/>
-        </p:spPr>
-        <p:txBody>
-          <a:bodyPr wrap="square" lIns="0" tIns="0" rIns="0" bIns="0" rtlCol="0" anchor="ctr"/>
-          <a:lstStyle/>
-          <a:p>
-            <a:pPr indent="0" marL="0">
-              <a:buNone/>
-            </a:pPr>
-            <a:r>
-              <a:rPr lang="en-US" sz="1600" b="1" dirty="0">
-                <a:solidFill>
-                  <a:srgbClr val="1B2A41"/>
-                </a:solidFill>
-                <a:latin typeface="Malgun Gothic" pitchFamily="34" charset="0"/>
-                <a:ea typeface="Malgun Gothic" pitchFamily="34" charset="-122"/>
-                <a:cs typeface="Malgun Gothic" pitchFamily="34" charset="-120"/>
-              </a:rPr>
-              <a:t>비용 최적화</a:t>
-            </a:r>
-            <a:endParaRPr lang="en-US" sz="1600" dirty="0"/>
-          </a:p>
-        </p:txBody>
-      </p:sp>
-      <p:sp>
-        <p:nvSpPr>
-          <p:cNvPr id="14" name="Text 12"/>
-          <p:cNvSpPr txBox="1"/>
-          <p:nvPr/>
-        </p:nvSpPr>
-        <p:spPr>
-          <a:xfrm>
-            <a:off x="1417320" y="4279392"/>
-            <a:ext cx="4404208" cy="1709928"/>
-          </a:xfrm>
-          <a:prstGeom prst="rect">
-            <a:avLst/>
-          </a:prstGeom>
-          <a:noFill/>
-          <a:ln/>
-        </p:spPr>
-        <p:txBody>
-          <a:bodyPr wrap="square" lIns="0" tIns="0" rIns="0" bIns="0" rtlCol="0" anchor="t"/>
-          <a:lstStyle/>
           <a:p>
             <a:pPr indent="0" marL="0">
               <a:lnSpc>
@@ -9414,7 +9314,7 @@
                 <a:ea typeface="Malgun Gothic" pitchFamily="34" charset="-122"/>
                 <a:cs typeface="Malgun Gothic" pitchFamily="34" charset="-120"/>
               </a:rPr>
-              <a:t>근거: CARLA와 모델을 함께 담을 단일 대형 GPU 인스턴스가 필요 없다. 필요 없는 쪽만 정지 가능</a:t>
+              <a:t>추론 호스트는 VRAM 기준으로만 고른다. ARM GPU 인스턴스도 후보가 된다</a:t>
             </a:r>
             <a:endParaRPr lang="en-US" sz="1250" dirty="0"/>
           </a:p>
@@ -9437,7 +9337,7 @@
                 <a:ea typeface="Malgun Gothic" pitchFamily="34" charset="-122"/>
                 <a:cs typeface="Malgun Gothic" pitchFamily="34" charset="-120"/>
               </a:rPr>
-              <a:t>효과: open-loop·노트북 실험 때는 A 정지, 데이터 수집 때는 B 정지. 요금 비교: [요금표 확인 후 기입]</a:t>
+              <a:t>모델을 키우거나(Alpamayo 2, 7카메라) 샘플 수·CFG를 늘릴 때 B만 교체하고 시뮬레이터 호스트는 그대로 둔다</a:t>
             </a:r>
             <a:endParaRPr lang="en-US" sz="1250" dirty="0"/>
           </a:p>
@@ -9445,13 +9345,13 @@
       </p:sp>
       <p:sp>
         <p:nvSpPr>
-          <p:cNvPr id="15" name="Text 13"/>
-          <p:cNvSpPr txBox="1"/>
-          <p:nvPr/>
-        </p:nvSpPr>
-        <p:spPr>
-          <a:xfrm>
-            <a:off x="6370168" y="3749040"/>
+          <p:cNvPr id="12" name="Text 10"/>
+          <p:cNvSpPr txBox="1"/>
+          <p:nvPr/>
+        </p:nvSpPr>
+        <p:spPr>
+          <a:xfrm>
+            <a:off x="8188757" y="1463040"/>
             <a:ext cx="822960" cy="822960"/>
           </a:xfrm>
           <a:prstGeom prst="rect">
@@ -9470,52 +9370,52 @@
             <a:r>
               <a:rPr lang="en-US" sz="4400" b="1" dirty="0">
                 <a:solidFill>
+                  <a:srgbClr val="2E8B57"/>
+                </a:solidFill>
+                <a:latin typeface="Malgun Gothic" pitchFamily="34" charset="0"/>
+                <a:ea typeface="Malgun Gothic" pitchFamily="34" charset="-122"/>
+                <a:cs typeface="Malgun Gothic" pitchFamily="34" charset="-120"/>
+              </a:rPr>
+              <a:t>3</a:t>
+            </a:r>
+            <a:endParaRPr lang="en-US" sz="4400" dirty="0"/>
+          </a:p>
+        </p:txBody>
+      </p:sp>
+      <p:sp>
+        <p:nvSpPr>
+          <p:cNvPr id="13" name="Text 11"/>
+          <p:cNvSpPr txBox="1"/>
+          <p:nvPr/>
+        </p:nvSpPr>
+        <p:spPr>
+          <a:xfrm>
+            <a:off x="9057437" y="1554480"/>
+            <a:ext cx="2585618" cy="384048"/>
+          </a:xfrm>
+          <a:prstGeom prst="rect">
+            <a:avLst/>
+          </a:prstGeom>
+          <a:noFill/>
+          <a:ln/>
+        </p:spPr>
+        <p:txBody>
+          <a:bodyPr wrap="square" lIns="0" tIns="0" rIns="0" bIns="0" rtlCol="0" anchor="ctr"/>
+          <a:lstStyle/>
+          <a:p>
+            <a:pPr indent="0" marL="0">
+              <a:buNone/>
+            </a:pPr>
+            <a:r>
+              <a:rPr lang="en-US" sz="1600" b="1" dirty="0">
+                <a:solidFill>
                   <a:srgbClr val="1B2A41"/>
                 </a:solidFill>
                 <a:latin typeface="Malgun Gothic" pitchFamily="34" charset="0"/>
                 <a:ea typeface="Malgun Gothic" pitchFamily="34" charset="-122"/>
                 <a:cs typeface="Malgun Gothic" pitchFamily="34" charset="-120"/>
               </a:rPr>
-              <a:t>4</a:t>
-            </a:r>
-            <a:endParaRPr lang="en-US" sz="4400" dirty="0"/>
-          </a:p>
-        </p:txBody>
-      </p:sp>
-      <p:sp>
-        <p:nvSpPr>
-          <p:cNvPr id="16" name="Text 14"/>
-          <p:cNvSpPr txBox="1"/>
-          <p:nvPr/>
-        </p:nvSpPr>
-        <p:spPr>
-          <a:xfrm>
-            <a:off x="7238848" y="3840480"/>
-            <a:ext cx="4404208" cy="384048"/>
-          </a:xfrm>
-          <a:prstGeom prst="rect">
-            <a:avLst/>
-          </a:prstGeom>
-          <a:noFill/>
-          <a:ln/>
-        </p:spPr>
-        <p:txBody>
-          <a:bodyPr wrap="square" lIns="0" tIns="0" rIns="0" bIns="0" rtlCol="0" anchor="ctr"/>
-          <a:lstStyle/>
-          <a:p>
-            <a:pPr indent="0" marL="0">
-              <a:buNone/>
-            </a:pPr>
-            <a:r>
-              <a:rPr lang="en-US" sz="1600" b="1" dirty="0">
-                <a:solidFill>
-                  <a:srgbClr val="1B2A41"/>
-                </a:solidFill>
-                <a:latin typeface="Malgun Gothic" pitchFamily="34" charset="0"/>
-                <a:ea typeface="Malgun Gothic" pitchFamily="34" charset="-122"/>
-                <a:cs typeface="Malgun Gothic" pitchFamily="34" charset="-120"/>
-              </a:rPr>
-              <a:t>운영·확장</a:t>
+              <a:t>비용 최적화</a:t>
             </a:r>
             <a:endParaRPr lang="en-US" sz="1600" dirty="0"/>
           </a:p>
@@ -9523,14 +9423,14 @@
       </p:sp>
       <p:sp>
         <p:nvSpPr>
-          <p:cNvPr id="17" name="Text 15"/>
-          <p:cNvSpPr txBox="1"/>
-          <p:nvPr/>
-        </p:nvSpPr>
-        <p:spPr>
-          <a:xfrm>
-            <a:off x="7238848" y="4279392"/>
-            <a:ext cx="4404208" cy="1709928"/>
+          <p:cNvPr id="14" name="Text 12"/>
+          <p:cNvSpPr txBox="1"/>
+          <p:nvPr/>
+        </p:nvSpPr>
+        <p:spPr>
+          <a:xfrm>
+            <a:off x="9057437" y="1993392"/>
+            <a:ext cx="2585618" cy="3767328"/>
           </a:xfrm>
           <a:prstGeom prst="rect">
             <a:avLst/>
@@ -9560,7 +9460,7 @@
                 <a:ea typeface="Malgun Gothic" pitchFamily="34" charset="-122"/>
                 <a:cs typeface="Malgun Gothic" pitchFamily="34" charset="-120"/>
               </a:rPr>
-              <a:t>근거: 모델을 한 번만 로드해 상주. 추론 인터페이스가 .proto 계약으로 고정</a:t>
+              <a:t>두 요구를 모두 만족하는 대형 단일 GPU 인스턴스가 필요 없다</a:t>
             </a:r>
             <a:endParaRPr lang="en-US" sz="1250" dirty="0"/>
           </a:p>
@@ -9583,7 +9483,30 @@
                 <a:ea typeface="Malgun Gothic" pitchFamily="34" charset="-122"/>
                 <a:cs typeface="Malgun Gothic" pitchFamily="34" charset="-120"/>
               </a:rPr>
-              <a:t>효과: 클라이언트·CARLA 재시작 시 모델 재로드 없음. 다른 모델·다른 시뮬레이터도 같은 방식으로 연결</a:t>
+              <a:t>필요 없는 쪽만 정지한다. open-loop·노트북 실험 때는 A, 데이터 수집 때는 B</a:t>
+            </a:r>
+            <a:endParaRPr lang="en-US" sz="1250" dirty="0"/>
+          </a:p>
+          <a:p>
+            <a:pPr indent="0" marL="0">
+              <a:lnSpc>
+                <a:spcPct val="115000"/>
+              </a:lnSpc>
+              <a:spcAft>
+                <a:spcPts val="800"/>
+              </a:spcAft>
+              <a:buNone/>
+            </a:pPr>
+            <a:r>
+              <a:rPr lang="en-US" sz="1250" dirty="0">
+                <a:solidFill>
+                  <a:srgbClr val="24313F"/>
+                </a:solidFill>
+                <a:latin typeface="Malgun Gothic" pitchFamily="34" charset="0"/>
+                <a:ea typeface="Malgun Gothic" pitchFamily="34" charset="-122"/>
+                <a:cs typeface="Malgun Gothic" pitchFamily="34" charset="-120"/>
+              </a:rPr>
+              <a:t>요금 비교: [요금표 확인 후 기입]</a:t>
             </a:r>
             <a:endParaRPr lang="en-US" sz="1250" dirty="0"/>
           </a:p>

--- a/docs/distributed/demo-overview-short.pptx
+++ b/docs/distributed/demo-overview-short.pptx
@@ -7767,7 +7767,7 @@
                 <a:ea typeface="Malgun Gothic" pitchFamily="34" charset="-122"/>
                 <a:cs typeface="Malgun Gothic" pitchFamily="34" charset="-120"/>
               </a:rPr>
-              <a:t>CARLA는 A, 모델은 B. 비동기 모드로 시뮬레이터는 10 Hz로 계속 돌고 약 1초마다 새 궤적으로 교체</a:t>
+              <a:t>CARLA는 A, 모델은 B. 동기 모드로 주행 품질을 보이고(추론 중 화면 멈춤은 정상), 비동기 모드로 실시간성과 궤적 나이를 보인다</a:t>
             </a:r>
             <a:endParaRPr lang="en-US" sz="1200" dirty="0"/>
           </a:p>
@@ -7982,7 +7982,7 @@
                 <a:ea typeface="Malgun Gothic" pitchFamily="34" charset="-122"/>
                 <a:cs typeface="Malgun Gothic" pitchFamily="34" charset="-120"/>
               </a:rPr>
-              <a:t>확인: 지시 후 궤적 변화, 가중치 1.0 vs 1.5 차이. B는 서버만 켜 둔 채 변화 없음</a:t>
+              <a:t>확인: 패널 Active nav 줄이 바뀌는지, 지시 후 궤적 변화, 가중치 1.0 vs 1.5 차이. 지시는 지울 때까지 유지되므로 회전 후 해제</a:t>
             </a:r>
             <a:endParaRPr lang="en-US" sz="1200" dirty="0"/>
           </a:p>
@@ -8424,7 +8424,7 @@
                 <a:ea typeface="Malgun Gothic" pitchFamily="34" charset="-122"/>
                 <a:cs typeface="Malgun Gothic" pitchFamily="34" charset="-120"/>
               </a:rPr>
-              <a:t>모델이 운전 (비동기, pygame 화면)</a:t>
+              <a:t>모델이 운전 (동기 → 비동기)</a:t>
             </a:r>
             <a:endParaRPr lang="en-US" sz="1000" dirty="0"/>
           </a:p>
